--- a/deliverables/Playo_BDM_Capstone_Team_Presentation.pptx
+++ b/deliverables/Playo_BDM_Capstone_Team_Presentation.pptx
@@ -2,31 +2,135 @@
 <file path=ppt/presentation.xml><?xml version="1.0" encoding="utf-8"?>
 <p:presentation xmlns:p="http://schemas.openxmlformats.org/presentationml/2006/main">
   <p:sldMasterIdLst>
-    <p:sldMasterId xmlns:r="http://schemas.openxmlformats.org/officeDocument/2006/relationships" id="2147483648" r:id="R5a9d2846675b4787"/>
+    <p:sldMasterId xmlns:r="http://schemas.openxmlformats.org/officeDocument/2006/relationships" id="2147483648" r:id="R707b0f78275f4673"/>
   </p:sldMasterIdLst>
   <p:notesMasterIdLst>
-    <p:notesMasterId xmlns:r="http://schemas.openxmlformats.org/officeDocument/2006/relationships" r:id="R45f7b091647d41c9"/>
+    <p:notesMasterId xmlns:r="http://schemas.openxmlformats.org/officeDocument/2006/relationships" r:id="R2d41959bd5144d22"/>
   </p:notesMasterIdLst>
   <p:sldIdLst>
-    <p:sldId xmlns:r="http://schemas.openxmlformats.org/officeDocument/2006/relationships" id="256" r:id="R7c92b7c5121e4e53"/>
-    <p:sldId xmlns:r="http://schemas.openxmlformats.org/officeDocument/2006/relationships" id="257" r:id="Ra6aca5cbc6334187"/>
-    <p:sldId xmlns:r="http://schemas.openxmlformats.org/officeDocument/2006/relationships" id="258" r:id="Re9410991768c42a3"/>
-    <p:sldId xmlns:r="http://schemas.openxmlformats.org/officeDocument/2006/relationships" id="259" r:id="Rb1a48b72ad364f34"/>
-    <p:sldId xmlns:r="http://schemas.openxmlformats.org/officeDocument/2006/relationships" id="260" r:id="R405579c24f0044d7"/>
-    <p:sldId xmlns:r="http://schemas.openxmlformats.org/officeDocument/2006/relationships" id="261" r:id="R19aef1ce116c4674"/>
-    <p:sldId xmlns:r="http://schemas.openxmlformats.org/officeDocument/2006/relationships" id="262" r:id="Rebc94d8d3915453d"/>
-    <p:sldId xmlns:r="http://schemas.openxmlformats.org/officeDocument/2006/relationships" id="263" r:id="R759249be916646d4"/>
-    <p:sldId xmlns:r="http://schemas.openxmlformats.org/officeDocument/2006/relationships" id="264" r:id="R891f1a20f3d44203"/>
-    <p:sldId xmlns:r="http://schemas.openxmlformats.org/officeDocument/2006/relationships" id="265" r:id="R20d057709e67427e"/>
-    <p:sldId xmlns:r="http://schemas.openxmlformats.org/officeDocument/2006/relationships" id="266" r:id="R527a879d118a46ad"/>
-    <p:sldId xmlns:r="http://schemas.openxmlformats.org/officeDocument/2006/relationships" id="267" r:id="R4bb46029c0934f7f"/>
-    <p:sldId xmlns:r="http://schemas.openxmlformats.org/officeDocument/2006/relationships" id="268" r:id="R0e850f9d57a648f3"/>
-    <p:sldId xmlns:r="http://schemas.openxmlformats.org/officeDocument/2006/relationships" id="269" r:id="R6f65270b3a074da4"/>
-    <p:sldId xmlns:r="http://schemas.openxmlformats.org/officeDocument/2006/relationships" id="270" r:id="R83a8110a3ffc48eb"/>
-    <p:sldId xmlns:r="http://schemas.openxmlformats.org/officeDocument/2006/relationships" id="271" r:id="R9e85f58676b04c7b"/>
+    <p:sldId xmlns:r="http://schemas.openxmlformats.org/officeDocument/2006/relationships" id="256" r:id="Rb2fb3d2b4e854cd1"/>
+    <p:sldId xmlns:r="http://schemas.openxmlformats.org/officeDocument/2006/relationships" id="257" r:id="Rac368eb8004a4db3"/>
+    <p:sldId xmlns:r="http://schemas.openxmlformats.org/officeDocument/2006/relationships" id="258" r:id="R30b78a33e8ec4ed2"/>
+    <p:sldId xmlns:r="http://schemas.openxmlformats.org/officeDocument/2006/relationships" id="259" r:id="Rff4a7dcfc4894905"/>
+    <p:sldId xmlns:r="http://schemas.openxmlformats.org/officeDocument/2006/relationships" id="260" r:id="R870d5e62a9884a3f"/>
+    <p:sldId xmlns:r="http://schemas.openxmlformats.org/officeDocument/2006/relationships" id="261" r:id="R598b767ddaf94e31"/>
+    <p:sldId xmlns:r="http://schemas.openxmlformats.org/officeDocument/2006/relationships" id="262" r:id="R6f959d810e6f447c"/>
+    <p:sldId xmlns:r="http://schemas.openxmlformats.org/officeDocument/2006/relationships" id="263" r:id="R826d02ce676b48b3"/>
+    <p:sldId xmlns:r="http://schemas.openxmlformats.org/officeDocument/2006/relationships" id="264" r:id="R80fbff0432924c41"/>
+    <p:sldId xmlns:r="http://schemas.openxmlformats.org/officeDocument/2006/relationships" id="265" r:id="R83957c963e4b4099"/>
+    <p:sldId xmlns:r="http://schemas.openxmlformats.org/officeDocument/2006/relationships" id="266" r:id="Rd566ad1a481a4090"/>
+    <p:sldId xmlns:r="http://schemas.openxmlformats.org/officeDocument/2006/relationships" id="267" r:id="R23b46fb485a34f74"/>
+    <p:sldId xmlns:r="http://schemas.openxmlformats.org/officeDocument/2006/relationships" id="268" r:id="R0f830472b26f417d"/>
+    <p:sldId xmlns:r="http://schemas.openxmlformats.org/officeDocument/2006/relationships" id="269" r:id="R423f67a5991d4a43"/>
+    <p:sldId xmlns:r="http://schemas.openxmlformats.org/officeDocument/2006/relationships" id="270" r:id="Rc4a4df62a2ff4aaf"/>
+    <p:sldId xmlns:r="http://schemas.openxmlformats.org/officeDocument/2006/relationships" id="271" r:id="Rd3bcc962eb2949d6"/>
   </p:sldIdLst>
   <p:sldSz cx="12192000" cy="6858000"/>
   <p:notesSz cx="6858000" cy="9144000"/>
+  <p:defaultTextStyle>
+    <a:defPPr xmlns:a="http://schemas.openxmlformats.org/drawingml/2006/main">
+      <a:buNone/>
+    </a:defPPr>
+    <a:lvl1pPr xmlns:a="http://schemas.openxmlformats.org/drawingml/2006/main" marL="0" algn="l" defTabSz="914400">
+      <a:buNone/>
+      <a:defRPr sz="1800" kern="1200">
+        <a:solidFill>
+          <a:schemeClr val="tx1"/>
+        </a:solidFill>
+        <a:latin typeface="+mn-lt"/>
+        <a:ea typeface="+mn-lt"/>
+        <a:cs typeface="+mn-lt"/>
+      </a:defRPr>
+    </a:lvl1pPr>
+    <a:lvl2pPr xmlns:a="http://schemas.openxmlformats.org/drawingml/2006/main" marL="457200" algn="l" defTabSz="914400">
+      <a:buNone/>
+      <a:defRPr sz="1800" kern="1200">
+        <a:solidFill>
+          <a:schemeClr val="tx1"/>
+        </a:solidFill>
+        <a:latin typeface="+mn-lt"/>
+        <a:ea typeface="+mn-lt"/>
+        <a:cs typeface="+mn-lt"/>
+      </a:defRPr>
+    </a:lvl2pPr>
+    <a:lvl3pPr xmlns:a="http://schemas.openxmlformats.org/drawingml/2006/main" marL="914400" algn="l" defTabSz="914400">
+      <a:buNone/>
+      <a:defRPr sz="1800" kern="1200">
+        <a:solidFill>
+          <a:schemeClr val="tx1"/>
+        </a:solidFill>
+        <a:latin typeface="+mn-lt"/>
+        <a:ea typeface="+mn-lt"/>
+        <a:cs typeface="+mn-lt"/>
+      </a:defRPr>
+    </a:lvl3pPr>
+    <a:lvl4pPr xmlns:a="http://schemas.openxmlformats.org/drawingml/2006/main" marL="1371600" algn="l" defTabSz="914400">
+      <a:buNone/>
+      <a:defRPr sz="1800" kern="1200">
+        <a:solidFill>
+          <a:schemeClr val="tx1"/>
+        </a:solidFill>
+        <a:latin typeface="+mn-lt"/>
+        <a:ea typeface="+mn-lt"/>
+        <a:cs typeface="+mn-lt"/>
+      </a:defRPr>
+    </a:lvl4pPr>
+    <a:lvl5pPr xmlns:a="http://schemas.openxmlformats.org/drawingml/2006/main" marL="1828800" algn="l" defTabSz="914400">
+      <a:buNone/>
+      <a:defRPr sz="1800" kern="1200">
+        <a:solidFill>
+          <a:schemeClr val="tx1"/>
+        </a:solidFill>
+        <a:latin typeface="+mn-lt"/>
+        <a:ea typeface="+mn-lt"/>
+        <a:cs typeface="+mn-lt"/>
+      </a:defRPr>
+    </a:lvl5pPr>
+    <a:lvl6pPr xmlns:a="http://schemas.openxmlformats.org/drawingml/2006/main" marL="2286000" algn="l" defTabSz="914400">
+      <a:buNone/>
+      <a:defRPr sz="1800" kern="1200">
+        <a:solidFill>
+          <a:schemeClr val="tx1"/>
+        </a:solidFill>
+        <a:latin typeface="+mn-lt"/>
+        <a:ea typeface="+mn-lt"/>
+        <a:cs typeface="+mn-lt"/>
+      </a:defRPr>
+    </a:lvl6pPr>
+    <a:lvl7pPr xmlns:a="http://schemas.openxmlformats.org/drawingml/2006/main" marL="2743200" algn="l" defTabSz="914400">
+      <a:buNone/>
+      <a:defRPr sz="1800" kern="1200">
+        <a:solidFill>
+          <a:schemeClr val="tx1"/>
+        </a:solidFill>
+        <a:latin typeface="+mn-lt"/>
+        <a:ea typeface="+mn-lt"/>
+        <a:cs typeface="+mn-lt"/>
+      </a:defRPr>
+    </a:lvl7pPr>
+    <a:lvl8pPr xmlns:a="http://schemas.openxmlformats.org/drawingml/2006/main" marL="3200400" algn="l" defTabSz="914400">
+      <a:buNone/>
+      <a:defRPr sz="1800" kern="1200">
+        <a:solidFill>
+          <a:schemeClr val="tx1"/>
+        </a:solidFill>
+        <a:latin typeface="+mn-lt"/>
+        <a:ea typeface="+mn-lt"/>
+        <a:cs typeface="+mn-lt"/>
+      </a:defRPr>
+    </a:lvl8pPr>
+    <a:lvl9pPr xmlns:a="http://schemas.openxmlformats.org/drawingml/2006/main" marL="3657600" algn="l" defTabSz="914400">
+      <a:buNone/>
+      <a:defRPr sz="1800" kern="1200">
+        <a:solidFill>
+          <a:schemeClr val="tx1"/>
+        </a:solidFill>
+        <a:latin typeface="+mn-lt"/>
+        <a:ea typeface="+mn-lt"/>
+        <a:cs typeface="+mn-lt"/>
+      </a:defRPr>
+    </a:lvl9pPr>
+  </p:defaultTextStyle>
 </p:presentation>
 </file>
 
@@ -456,9 +560,7 @@
           <a:bodyPr xmlns:a="http://schemas.openxmlformats.org/drawingml/2006/main"/>
           <a:lstStyle xmlns:a="http://schemas.openxmlformats.org/drawingml/2006/main"/>
           <a:p xmlns:a="http://schemas.openxmlformats.org/drawingml/2006/main">
-            <a:r>
-              <a:t>Open with the project purpose: turn a historical Playo-related venue export into a transparent, queryable, reproducible analytical system. Emphasize that this is an independent academic capstone, not an official Playo product.</a:t>
-            </a:r>
+            <a:endParaRPr/>
           </a:p>
         </p:txBody>
       </p:sp>
@@ -597,7 +699,7 @@
           <a:lstStyle xmlns:a="http://schemas.openxmlformats.org/drawingml/2006/main"/>
           <a:p xmlns:a="http://schemas.openxmlformats.org/drawingml/2006/main">
             <a:r>
-              <a:t>Demonstrate the dashboard in this order. The sidebar is intentionally task-based: start with context, inspect records, see geography, review SQL evidence and finish with the model explanation.</a:t>
+              <a:t>Demonstrate the current Venue Explorer source filters and the Activities &amp; Services directory. Approved community venues appear in both discovery surfaces; historical rating statistics remain historical.</a:t>
             </a:r>
           </a:p>
         </p:txBody>
@@ -667,7 +769,7 @@
           <a:lstStyle xmlns:a="http://schemas.openxmlformats.org/drawingml/2006/main"/>
           <a:p xmlns:a="http://schemas.openxmlformats.org/drawingml/2006/main">
             <a:r>
-              <a:t>The form requires no account, but it is not an open edit. Turnstile reduces automated spam, duplicate checks warn users, and PostgreSQL RLS exposes only approved rows on the community page.</a:t>
+              <a:t>The public form requires no account, but it is not an open edit. New rows begin pending. Once approved, they appear in Venue Explorer and activity counts while remaining outside historical KPIs, features and predictions.</a:t>
             </a:r>
           </a:p>
         </p:txBody>
@@ -947,7 +1049,7 @@
           <a:lstStyle xmlns:a="http://schemas.openxmlformats.org/drawingml/2006/main"/>
           <a:p xmlns:a="http://schemas.openxmlformats.org/drawingml/2006/main">
             <a:r>
-              <a:t>Close by restating the central contribution: a transparent, database-backed research system. Then follow the six-step live demo sequence shown on the right.</a:t>
+              <a:t>Close by restating the central contribution: a transparent, database-backed research system with moderated public discovery. Then follow the six-step live demo sequence shown on the right.</a:t>
             </a:r>
           </a:p>
         </p:txBody>
@@ -1016,9 +1118,7 @@
           <a:bodyPr xmlns:a="http://schemas.openxmlformats.org/drawingml/2006/main"/>
           <a:lstStyle xmlns:a="http://schemas.openxmlformats.org/drawingml/2006/main"/>
           <a:p xmlns:a="http://schemas.openxmlformats.org/drawingml/2006/main">
-            <a:r>
-              <a:t>Frame the work as a data-management project first and a dashboard second. The central question is whether the audience can trace a visible result back to the historical source and understand its limitations.</a:t>
-            </a:r>
+            <a:endParaRPr/>
           </a:p>
         </p:txBody>
       </p:sp>
@@ -1297,7 +1397,7 @@
           <a:lstStyle xmlns:a="http://schemas.openxmlformats.org/drawingml/2006/main"/>
           <a:p xmlns:a="http://schemas.openxmlformats.org/drawingml/2006/main">
             <a:r>
-              <a:t>Do not read every column. Point out the clusters: historical core tables, model lineage, workspace records and community moderation. The schema includes constraints and foreign keys so invalid states are rejected early.</a:t>
+              <a:t>Point out the colour-coded clusters and the foreign keys. The public schema now includes discovery views that expose approved community claims while keeping historical KPIs and model training isolated.</a:t>
             </a:r>
           </a:p>
         </p:txBody>
@@ -1575,7 +1675,7 @@
   </p:cSld>
   <p:clrMap bg1="lt1" tx1="dk1" bg2="lt2" tx2="dk2" accent1="accent1" accent2="accent2" accent3="accent3" accent4="accent4" accent5="accent5" accent6="accent6" hlink="hlink" folHlink="folHlink"/>
   <p:sldLayoutIdLst>
-    <p:sldLayoutId xmlns:r="http://schemas.openxmlformats.org/officeDocument/2006/relationships" id="2147483649" r:id="R33ce16bd36ea42c5"/>
+    <p:sldLayoutId xmlns:r="http://schemas.openxmlformats.org/officeDocument/2006/relationships" id="2147483649" r:id="R638c739edf3e44d8"/>
   </p:sldLayoutIdLst>
   <p:txStyles>
     <p:titleStyle>
@@ -2103,9 +2203,12 @@
 </file>
 
 <file path=ppt/slides/charts/chart1.xml><?xml version="1.0" encoding="utf-8"?>
-<c:chartSpace xmlns:c="http://schemas.openxmlformats.org/drawingml/2006/chart" xmlns:r="http://schemas.openxmlformats.org/officeDocument/2006/relationships">
+<c:chartSpace xmlns:c="http://schemas.openxmlformats.org/drawingml/2006/chart">
   <c:lang val="en-US"/>
+  <c:roundedCorners val="1"/>
+  <c:style val="2"/>
   <c:chart>
+    <c:autoTitleDeleted val="1"/>
     <c:plotArea>
       <c:barChart>
         <c:barDir val="bar"/>
@@ -2122,6 +2225,36 @@
               <a:srgbClr val="2D7A62"/>
             </a:solidFill>
           </c:spPr>
+          <c:invertIfNegative val="1"/>
+          <c:dLbls>
+            <c:spPr>
+              <a:noFill xmlns:a="http://schemas.openxmlformats.org/drawingml/2006/main"/>
+              <a:ln xmlns:a="http://schemas.openxmlformats.org/drawingml/2006/main">
+                <a:noFill/>
+              </a:ln>
+            </c:spPr>
+            <c:txPr>
+              <a:bodyPr xmlns:a="http://schemas.openxmlformats.org/drawingml/2006/main" anchorCtr="1"/>
+              <a:lstStyle xmlns:a="http://schemas.openxmlformats.org/drawingml/2006/main"/>
+              <a:p xmlns:a="http://schemas.openxmlformats.org/drawingml/2006/main">
+                <a:pPr>
+                  <a:defRPr>
+                    <a:latin typeface="Arial"/>
+                    <a:ea typeface="Arial"/>
+                    <a:cs typeface="Arial"/>
+                  </a:defRPr>
+                </a:pPr>
+              </a:p>
+            </c:txPr>
+            <c:dLblPos val="outEnd"/>
+            <c:showLegendKey val="0"/>
+            <c:showVal val="1"/>
+            <c:showCatName val="0"/>
+            <c:showSerName val="0"/>
+            <c:showPercent val="0"/>
+            <c:showBubbleSize val="0"/>
+            <c:showLeaderLines val="0"/>
+          </c:dLbls>
           <c:cat>
             <c:strRef>
               <c:f>'Chart Data'!$A$2:$A$5</c:f>
@@ -2165,19 +2298,6 @@
           </c:val>
         </c:ser>
         <c:dLbls>
-          <c:txPr>
-            <a:bodyPr xmlns:a="http://schemas.openxmlformats.org/drawingml/2006/main" anchorCtr="1"/>
-            <a:lstStyle xmlns:a="http://schemas.openxmlformats.org/drawingml/2006/main"/>
-            <a:p xmlns:a="http://schemas.openxmlformats.org/drawingml/2006/main">
-              <a:pPr>
-                <a:defRPr>
-                  <a:latin typeface="Arial"/>
-                  <a:ea typeface="Arial"/>
-                  <a:cs typeface="Arial"/>
-                </a:defRPr>
-              </a:pPr>
-            </a:p>
-          </c:txPr>
           <c:dLblPos val="outEnd"/>
           <c:showLegendKey val="0"/>
           <c:showVal val="1"/>
@@ -2185,8 +2305,8 @@
           <c:showSerName val="0"/>
           <c:showPercent val="0"/>
           <c:showBubbleSize val="0"/>
-          <c:showLeaderLines val="0"/>
         </c:dLbls>
+        <c:gapWidth val="150"/>
         <c:axId val="48650112"/>
         <c:axId val="48672768"/>
       </c:barChart>
@@ -2197,9 +2317,10 @@
         </c:scaling>
         <c:delete val="0"/>
         <c:axPos val="l"/>
-        <c:numFmt formatCode="General"/>
+        <c:numFmt formatCode="General" sourceLinked="1"/>
         <c:majorTickMark val="none"/>
         <c:minorTickMark val="none"/>
+        <c:tickLblPos val="nextTo"/>
         <c:spPr>
           <a:ln xmlns:a="http://schemas.openxmlformats.org/drawingml/2006/main" w="9525">
             <a:solidFill>
@@ -2225,6 +2346,10 @@
           </a:p>
         </c:txPr>
         <c:crossAx val="48672768"/>
+        <c:crosses val="autoZero"/>
+        <c:lblAlgn val="ctr"/>
+        <c:noMultiLvlLbl val="1"/>
+        <c:lblOffset val="100"/>
       </c:catAx>
       <c:valAx>
         <c:axId val="48672768"/>
@@ -2233,42 +2358,18 @@
         </c:scaling>
         <c:delete val="1"/>
         <c:axPos val="b"/>
-        <c:numFmt formatCode="General"/>
+        <c:numFmt formatCode="General" sourceLinked="1"/>
         <c:majorTickMark val="none"/>
         <c:minorTickMark val="none"/>
-        <c:spPr>
-          <a:ln xmlns:a="http://schemas.openxmlformats.org/drawingml/2006/main" w="9525">
-            <a:solidFill>
-              <a:srgbClr val="D4D4D4"/>
-            </a:solidFill>
-            <a:prstDash val="solid"/>
-          </a:ln>
-        </c:spPr>
-        <c:txPr>
-          <a:bodyPr xmlns:a="http://schemas.openxmlformats.org/drawingml/2006/main" anchorCtr="1"/>
-          <a:lstStyle xmlns:a="http://schemas.openxmlformats.org/drawingml/2006/main"/>
-          <a:p xmlns:a="http://schemas.openxmlformats.org/drawingml/2006/main">
-            <a:pPr>
-              <a:defRPr>
-                <a:solidFill>
-                  <a:srgbClr val="666666"/>
-                </a:solidFill>
-                <a:latin typeface="Arial"/>
-                <a:ea typeface="Arial"/>
-                <a:cs typeface="Arial"/>
-              </a:defRPr>
-            </a:pPr>
-          </a:p>
-        </c:txPr>
+        <c:tickLblPos val="nextTo"/>
         <c:crossAx val="48650112"/>
+        <c:crosses val="autoZero"/>
         <c:crossBetween val="between"/>
       </c:valAx>
     </c:plotArea>
     <c:plotVisOnly val="1"/>
+    <c:dispBlanksAs val="zero"/>
   </c:chart>
-  <c:externalData r:id="rIdChartSnapshot1">
-    <c:autoUpdate val="0"/>
-  </c:externalData>
 </c:chartSpace>
 </file>
 
@@ -2293,7 +2394,7 @@
       </p:grpSpPr>
       <p:sp>
         <p:nvSpPr>
-          <p:cNvPr id="11" name="">
+          <p:cNvPr id="11" name="Rectangle 10">
             <a:extLst xmlns:a="http://schemas.openxmlformats.org/drawingml/2006/main">
               <a:ext uri="{FF2B5EF4-FFF2-40B4-BE49-F238E27FC236}">
                 <a16:creationId xmlns:a16="http://schemas.microsoft.com/office/drawing/2014/main" id="{195A7026-58A6-4D17-BECA-B19ABD085F72}"/>
@@ -2323,7 +2424,7 @@
       </p:sp>
       <p:sp>
         <p:nvSpPr>
-          <p:cNvPr id="2" name="">
+          <p:cNvPr id="2" name="Oval 1">
             <a:extLst xmlns:a="http://schemas.openxmlformats.org/drawingml/2006/main">
               <a:ext uri="{FF2B5EF4-FFF2-40B4-BE49-F238E27FC236}">
                 <a16:creationId xmlns:a16="http://schemas.microsoft.com/office/drawing/2014/main" id="{5C91003A-DA2B-4E4A-8F8C-239364721F31}"/>
@@ -2353,7 +2454,7 @@
       </p:sp>
       <p:sp>
         <p:nvSpPr>
-          <p:cNvPr id="3" name="">
+          <p:cNvPr id="3" name="Oval 2">
             <a:extLst xmlns:a="http://schemas.openxmlformats.org/drawingml/2006/main">
               <a:ext uri="{FF2B5EF4-FFF2-40B4-BE49-F238E27FC236}">
                 <a16:creationId xmlns:a16="http://schemas.microsoft.com/office/drawing/2014/main" id="{04673E1F-6546-45F7-8D04-A58246CD1F4B}"/>
@@ -2383,7 +2484,7 @@
       </p:sp>
       <p:sp>
         <p:nvSpPr>
-          <p:cNvPr id="4" name="">
+          <p:cNvPr id="4" name="Rectangle 3">
             <a:extLst xmlns:a="http://schemas.openxmlformats.org/drawingml/2006/main">
               <a:ext uri="{FF2B5EF4-FFF2-40B4-BE49-F238E27FC236}">
                 <a16:creationId xmlns:a16="http://schemas.microsoft.com/office/drawing/2014/main" id="{08BDA1B6-38AF-4D56-B9EC-820C8CE6040B}"/>
@@ -2410,11 +2511,12 @@
         </p:spPr>
         <p:txBody>
           <a:bodyPr xmlns:a="http://schemas.openxmlformats.org/drawingml/2006/main">
-            <a:normAutofit fontScale="100000"/>
-          </a:bodyPr>
-          <a:lstStyle xmlns:a="http://schemas.openxmlformats.org/drawingml/2006/main"/>
-          <a:p xmlns:a="http://schemas.openxmlformats.org/drawingml/2006/main">
-            <a:pPr>
+            <a:normAutofit/>
+          </a:bodyPr>
+          <a:lstStyle xmlns:a="http://schemas.openxmlformats.org/drawingml/2006/main"/>
+          <a:p xmlns:a="http://schemas.openxmlformats.org/drawingml/2006/main">
+            <a:pPr>
+              <a:buNone/>
               <a:defRPr sz="1275" b="1">
                 <a:solidFill>
                   <a:srgbClr val="F5E7CB"/>
@@ -2440,7 +2542,7 @@
       </p:sp>
       <p:sp>
         <p:nvSpPr>
-          <p:cNvPr id="5" name="">
+          <p:cNvPr id="5" name="Rectangle 4">
             <a:extLst xmlns:a="http://schemas.openxmlformats.org/drawingml/2006/main">
               <a:ext uri="{FF2B5EF4-FFF2-40B4-BE49-F238E27FC236}">
                 <a16:creationId xmlns:a16="http://schemas.microsoft.com/office/drawing/2014/main" id="{D53C4299-6767-4BBE-95F4-CB2D89DD6993}"/>
@@ -2467,11 +2569,12 @@
         </p:spPr>
         <p:txBody>
           <a:bodyPr xmlns:a="http://schemas.openxmlformats.org/drawingml/2006/main">
-            <a:normAutofit fontScale="100000"/>
-          </a:bodyPr>
-          <a:lstStyle xmlns:a="http://schemas.openxmlformats.org/drawingml/2006/main"/>
-          <a:p xmlns:a="http://schemas.openxmlformats.org/drawingml/2006/main">
-            <a:pPr>
+            <a:normAutofit/>
+          </a:bodyPr>
+          <a:lstStyle xmlns:a="http://schemas.openxmlformats.org/drawingml/2006/main"/>
+          <a:p xmlns:a="http://schemas.openxmlformats.org/drawingml/2006/main">
+            <a:pPr>
+              <a:buNone/>
               <a:defRPr sz="1650" b="1">
                 <a:solidFill>
                   <a:srgbClr val="FFFFFF"/>
@@ -2497,7 +2600,7 @@
       </p:sp>
       <p:sp>
         <p:nvSpPr>
-          <p:cNvPr id="6" name="">
+          <p:cNvPr id="6" name="Rectangle 5">
             <a:extLst xmlns:a="http://schemas.openxmlformats.org/drawingml/2006/main">
               <a:ext uri="{FF2B5EF4-FFF2-40B4-BE49-F238E27FC236}">
                 <a16:creationId xmlns:a16="http://schemas.microsoft.com/office/drawing/2014/main" id="{83282B7B-E5B6-410F-9878-812C77C09B6D}"/>
@@ -2529,6 +2632,7 @@
           <a:lstStyle xmlns:a="http://schemas.openxmlformats.org/drawingml/2006/main"/>
           <a:p xmlns:a="http://schemas.openxmlformats.org/drawingml/2006/main">
             <a:pPr>
+              <a:buNone/>
               <a:defRPr sz="2250" b="1">
                 <a:solidFill>
                   <a:srgbClr val="FFFFFF"/>
@@ -2554,7 +2658,7 @@
       </p:sp>
       <p:sp>
         <p:nvSpPr>
-          <p:cNvPr id="7" name="">
+          <p:cNvPr id="7" name="Rectangle 6">
             <a:extLst xmlns:a="http://schemas.openxmlformats.org/drawingml/2006/main">
               <a:ext uri="{FF2B5EF4-FFF2-40B4-BE49-F238E27FC236}">
                 <a16:creationId xmlns:a16="http://schemas.microsoft.com/office/drawing/2014/main" id="{B98B9847-CA10-4CCA-B00D-FBA6C51AF6E0}"/>
@@ -2581,11 +2685,12 @@
         </p:spPr>
         <p:txBody>
           <a:bodyPr xmlns:a="http://schemas.openxmlformats.org/drawingml/2006/main">
-            <a:normAutofit fontScale="100000"/>
-          </a:bodyPr>
-          <a:lstStyle xmlns:a="http://schemas.openxmlformats.org/drawingml/2006/main"/>
-          <a:p xmlns:a="http://schemas.openxmlformats.org/drawingml/2006/main">
-            <a:pPr>
+            <a:normAutofit/>
+          </a:bodyPr>
+          <a:lstStyle xmlns:a="http://schemas.openxmlformats.org/drawingml/2006/main"/>
+          <a:p xmlns:a="http://schemas.openxmlformats.org/drawingml/2006/main">
+            <a:pPr>
+              <a:buNone/>
               <a:defRPr sz="1350" b="0">
                 <a:solidFill>
                   <a:srgbClr val="DDECE2"/>
@@ -2611,7 +2716,7 @@
       </p:sp>
       <p:sp>
         <p:nvSpPr>
-          <p:cNvPr id="8" name="">
+          <p:cNvPr id="8" name="Rectangle 7">
             <a:extLst xmlns:a="http://schemas.openxmlformats.org/drawingml/2006/main">
               <a:ext uri="{FF2B5EF4-FFF2-40B4-BE49-F238E27FC236}">
                 <a16:creationId xmlns:a16="http://schemas.microsoft.com/office/drawing/2014/main" id="{08B3F1D2-2BFF-4CBF-A0BF-602C3CB47BBD}"/>
@@ -2643,6 +2748,7 @@
           <a:lstStyle xmlns:a="http://schemas.openxmlformats.org/drawingml/2006/main"/>
           <a:p xmlns:a="http://schemas.openxmlformats.org/drawingml/2006/main">
             <a:pPr>
+              <a:buNone/>
               <a:defRPr sz="1125" b="1">
                 <a:solidFill>
                   <a:srgbClr val="F5E7CB"/>
@@ -2668,14 +2774,14 @@
       </p:sp>
       <p:pic>
         <p:nvPicPr>
-          <p:cNvPr id="19" name=""/>
+          <p:cNvPr id="21" name="Picture 18"/>
           <p:cNvPicPr>
             <a:picLocks xmlns:a="http://schemas.openxmlformats.org/drawingml/2006/main" noChangeAspect="1"/>
           </p:cNvPicPr>
           <p:nvPr/>
         </p:nvPicPr>
         <p:blipFill>
-          <a:blip xmlns:r="http://schemas.openxmlformats.org/officeDocument/2006/relationships" xmlns:a="http://schemas.openxmlformats.org/drawingml/2006/main" r:embed="Rc4d43375d06a44e0"/>
+          <a:blip xmlns:r="http://schemas.openxmlformats.org/officeDocument/2006/relationships" xmlns:a="http://schemas.openxmlformats.org/drawingml/2006/main" r:embed="R159834b970484376"/>
           <a:srcRect xmlns:a="http://schemas.openxmlformats.org/drawingml/2006/main" l="9213" t="0" r="9213" b="0"/>
           <a:stretch xmlns:a="http://schemas.openxmlformats.org/drawingml/2006/main">
             <a:fillRect l="0" t="0" r="0" b="0"/>
@@ -2695,7 +2801,7 @@
       </p:pic>
       <p:sp>
         <p:nvSpPr>
-          <p:cNvPr id="10" name="">
+          <p:cNvPr id="10" name="Rectangle 9">
             <a:extLst xmlns:a="http://schemas.openxmlformats.org/drawingml/2006/main">
               <a:ext uri="{FF2B5EF4-FFF2-40B4-BE49-F238E27FC236}">
                 <a16:creationId xmlns:a16="http://schemas.microsoft.com/office/drawing/2014/main" id="{55654564-8C1F-43B4-936E-6FE3B90708A0}"/>
@@ -2754,7 +2860,7 @@
       </p:grpSpPr>
       <p:sp>
         <p:nvSpPr>
-          <p:cNvPr id="14" name="">
+          <p:cNvPr id="14" name="Rectangle 13">
             <a:extLst xmlns:a="http://schemas.openxmlformats.org/drawingml/2006/main">
               <a:ext uri="{FF2B5EF4-FFF2-40B4-BE49-F238E27FC236}">
                 <a16:creationId xmlns:a16="http://schemas.microsoft.com/office/drawing/2014/main" id="{C9597D80-2DAB-4F1E-9BE1-FC34DF0E2163}"/>
@@ -2784,7 +2890,7 @@
       </p:sp>
       <p:sp>
         <p:nvSpPr>
-          <p:cNvPr id="2" name="">
+          <p:cNvPr id="2" name="Rectangle 1">
             <a:extLst xmlns:a="http://schemas.openxmlformats.org/drawingml/2006/main">
               <a:ext uri="{FF2B5EF4-FFF2-40B4-BE49-F238E27FC236}">
                 <a16:creationId xmlns:a16="http://schemas.microsoft.com/office/drawing/2014/main" id="{C95490CC-5E6E-4846-9562-45EE370355BC}"/>
@@ -2811,11 +2917,12 @@
         </p:spPr>
         <p:txBody>
           <a:bodyPr xmlns:a="http://schemas.openxmlformats.org/drawingml/2006/main">
-            <a:normAutofit fontScale="100000"/>
-          </a:bodyPr>
-          <a:lstStyle xmlns:a="http://schemas.openxmlformats.org/drawingml/2006/main"/>
-          <a:p xmlns:a="http://schemas.openxmlformats.org/drawingml/2006/main">
-            <a:pPr>
+            <a:normAutofit/>
+          </a:bodyPr>
+          <a:lstStyle xmlns:a="http://schemas.openxmlformats.org/drawingml/2006/main"/>
+          <a:p xmlns:a="http://schemas.openxmlformats.org/drawingml/2006/main">
+            <a:pPr>
+              <a:buNone/>
               <a:defRPr sz="1125" b="1">
                 <a:solidFill>
                   <a:srgbClr val="C64235"/>
@@ -2841,7 +2948,7 @@
       </p:sp>
       <p:sp>
         <p:nvSpPr>
-          <p:cNvPr id="3" name="">
+          <p:cNvPr id="3" name="Rectangle 2">
             <a:extLst xmlns:a="http://schemas.openxmlformats.org/drawingml/2006/main">
               <a:ext uri="{FF2B5EF4-FFF2-40B4-BE49-F238E27FC236}">
                 <a16:creationId xmlns:a16="http://schemas.microsoft.com/office/drawing/2014/main" id="{4A08D775-132B-438C-A540-D8FDF28433B4}"/>
@@ -2873,6 +2980,7 @@
           <a:lstStyle xmlns:a="http://schemas.openxmlformats.org/drawingml/2006/main"/>
           <a:p xmlns:a="http://schemas.openxmlformats.org/drawingml/2006/main">
             <a:pPr>
+              <a:buNone/>
               <a:defRPr sz="2700" b="1">
                 <a:solidFill>
                   <a:srgbClr val="173B31"/>
@@ -2898,7 +3006,7 @@
       </p:sp>
       <p:sp>
         <p:nvSpPr>
-          <p:cNvPr id="4" name="">
+          <p:cNvPr id="4" name="Rectangle 3">
             <a:extLst xmlns:a="http://schemas.openxmlformats.org/drawingml/2006/main">
               <a:ext uri="{FF2B5EF4-FFF2-40B4-BE49-F238E27FC236}">
                 <a16:creationId xmlns:a16="http://schemas.microsoft.com/office/drawing/2014/main" id="{00C2AB83-A5F9-4F62-9C4B-DF748FB07D1D}"/>
@@ -2925,11 +3033,12 @@
         </p:spPr>
         <p:txBody>
           <a:bodyPr xmlns:a="http://schemas.openxmlformats.org/drawingml/2006/main">
-            <a:normAutofit fontScale="100000"/>
-          </a:bodyPr>
-          <a:lstStyle xmlns:a="http://schemas.openxmlformats.org/drawingml/2006/main"/>
-          <a:p xmlns:a="http://schemas.openxmlformats.org/drawingml/2006/main">
-            <a:pPr>
+            <a:normAutofit/>
+          </a:bodyPr>
+          <a:lstStyle xmlns:a="http://schemas.openxmlformats.org/drawingml/2006/main"/>
+          <a:p xmlns:a="http://schemas.openxmlformats.org/drawingml/2006/main">
+            <a:pPr>
+              <a:buNone/>
               <a:defRPr sz="1275" b="0">
                 <a:solidFill>
                   <a:srgbClr val="66736D"/>
@@ -2955,7 +3064,7 @@
       </p:sp>
       <p:sp>
         <p:nvSpPr>
-          <p:cNvPr id="5" name="">
+          <p:cNvPr id="5" name="Rectangle 4">
             <a:extLst xmlns:a="http://schemas.openxmlformats.org/drawingml/2006/main">
               <a:ext uri="{FF2B5EF4-FFF2-40B4-BE49-F238E27FC236}">
                 <a16:creationId xmlns:a16="http://schemas.microsoft.com/office/drawing/2014/main" id="{833EF247-C86D-49B7-B64D-D151C16DFF6C}"/>
@@ -2987,6 +3096,7 @@
           <a:lstStyle xmlns:a="http://schemas.openxmlformats.org/drawingml/2006/main"/>
           <a:p xmlns:a="http://schemas.openxmlformats.org/drawingml/2006/main">
             <a:pPr>
+              <a:buNone/>
               <a:defRPr sz="975" b="1">
                 <a:solidFill>
                   <a:srgbClr val="66736D"/>
@@ -3012,13 +3122,13 @@
       </p:sp>
       <p:graphicFrame>
         <p:nvGraphicFramePr>
-          <p:cNvPr id="19" name=""/>
+          <p:cNvPr id="21" name="Table 18"/>
           <p:cNvGraphicFramePr/>
           <p:nvPr/>
         </p:nvGraphicFramePr>
         <p:xfrm>
           <a:off xmlns:a="http://schemas.openxmlformats.org/drawingml/2006/main" x="552450" y="2076450"/>
-          <a:ext xmlns:a="http://schemas.openxmlformats.org/drawingml/2006/main" cx="6915150" cy="2628900"/>
+          <a:ext xmlns:a="http://schemas.openxmlformats.org/drawingml/2006/main" cx="6915152" cy="2628900"/>
         </p:xfrm>
         <a:graphic xmlns:a="http://schemas.openxmlformats.org/drawingml/2006/main">
           <a:graphicData uri="http://schemas.openxmlformats.org/drawingml/2006/table">
@@ -3396,7 +3506,7 @@
       </p:graphicFrame>
       <p:sp>
         <p:nvSpPr>
-          <p:cNvPr id="7" name="">
+          <p:cNvPr id="7" name="Rectangle: Rounded Corners 6">
             <a:extLst xmlns:a="http://schemas.openxmlformats.org/drawingml/2006/main">
               <a:ext uri="{FF2B5EF4-FFF2-40B4-BE49-F238E27FC236}">
                 <a16:creationId xmlns:a16="http://schemas.microsoft.com/office/drawing/2014/main" id="{33F227CA-CA42-45A9-A2B5-8FDDAA455BCB}"/>
@@ -3428,7 +3538,7 @@
       </p:sp>
       <p:sp>
         <p:nvSpPr>
-          <p:cNvPr id="8" name="">
+          <p:cNvPr id="8" name="Rectangle 7">
             <a:extLst xmlns:a="http://schemas.openxmlformats.org/drawingml/2006/main">
               <a:ext uri="{FF2B5EF4-FFF2-40B4-BE49-F238E27FC236}">
                 <a16:creationId xmlns:a16="http://schemas.microsoft.com/office/drawing/2014/main" id="{9C42784D-2B8F-43CF-B019-8E1631DABFF4}"/>
@@ -3455,11 +3565,12 @@
         </p:spPr>
         <p:txBody>
           <a:bodyPr xmlns:a="http://schemas.openxmlformats.org/drawingml/2006/main">
-            <a:normAutofit fontScale="100000"/>
-          </a:bodyPr>
-          <a:lstStyle xmlns:a="http://schemas.openxmlformats.org/drawingml/2006/main"/>
-          <a:p xmlns:a="http://schemas.openxmlformats.org/drawingml/2006/main">
-            <a:pPr>
+            <a:normAutofit/>
+          </a:bodyPr>
+          <a:lstStyle xmlns:a="http://schemas.openxmlformats.org/drawingml/2006/main"/>
+          <a:p xmlns:a="http://schemas.openxmlformats.org/drawingml/2006/main">
+            <a:pPr>
+              <a:buNone/>
               <a:defRPr sz="1350" b="1">
                 <a:solidFill>
                   <a:srgbClr val="C64235"/>
@@ -3485,7 +3596,7 @@
       </p:sp>
       <p:sp>
         <p:nvSpPr>
-          <p:cNvPr id="9" name="">
+          <p:cNvPr id="9" name="Rectangle 8">
             <a:extLst xmlns:a="http://schemas.openxmlformats.org/drawingml/2006/main">
               <a:ext uri="{FF2B5EF4-FFF2-40B4-BE49-F238E27FC236}">
                 <a16:creationId xmlns:a16="http://schemas.microsoft.com/office/drawing/2014/main" id="{B2BC7A54-8ECC-43B1-A600-D62E9C62DB6C}"/>
@@ -3517,6 +3628,7 @@
           <a:lstStyle xmlns:a="http://schemas.openxmlformats.org/drawingml/2006/main"/>
           <a:p xmlns:a="http://schemas.openxmlformats.org/drawingml/2006/main">
             <a:pPr>
+              <a:buNone/>
               <a:defRPr sz="3450" b="1">
                 <a:solidFill>
                   <a:srgbClr val="173B31"/>
@@ -3542,7 +3654,7 @@
       </p:sp>
       <p:sp>
         <p:nvSpPr>
-          <p:cNvPr id="10" name="">
+          <p:cNvPr id="10" name="Rectangle 9">
             <a:extLst xmlns:a="http://schemas.openxmlformats.org/drawingml/2006/main">
               <a:ext uri="{FF2B5EF4-FFF2-40B4-BE49-F238E27FC236}">
                 <a16:creationId xmlns:a16="http://schemas.microsoft.com/office/drawing/2014/main" id="{D7D6CE67-98AB-4E96-9284-D1B39B90928F}"/>
@@ -3574,6 +3686,7 @@
           <a:lstStyle xmlns:a="http://schemas.openxmlformats.org/drawingml/2006/main"/>
           <a:p xmlns:a="http://schemas.openxmlformats.org/drawingml/2006/main">
             <a:pPr>
+              <a:buNone/>
               <a:defRPr sz="1350" b="0">
                 <a:solidFill>
                   <a:srgbClr val="66736D"/>
@@ -3599,7 +3712,7 @@
       </p:sp>
       <p:sp>
         <p:nvSpPr>
-          <p:cNvPr id="11" name="">
+          <p:cNvPr id="11" name="Rectangle 10">
             <a:extLst xmlns:a="http://schemas.openxmlformats.org/drawingml/2006/main">
               <a:ext uri="{FF2B5EF4-FFF2-40B4-BE49-F238E27FC236}">
                 <a16:creationId xmlns:a16="http://schemas.microsoft.com/office/drawing/2014/main" id="{BC7CE3B5-17AB-47F8-92C8-568E68B7DA99}"/>
@@ -3626,11 +3739,12 @@
         </p:spPr>
         <p:txBody>
           <a:bodyPr xmlns:a="http://schemas.openxmlformats.org/drawingml/2006/main">
-            <a:normAutofit fontScale="100000"/>
-          </a:bodyPr>
-          <a:lstStyle xmlns:a="http://schemas.openxmlformats.org/drawingml/2006/main"/>
-          <a:p xmlns:a="http://schemas.openxmlformats.org/drawingml/2006/main">
-            <a:pPr>
+            <a:normAutofit/>
+          </a:bodyPr>
+          <a:lstStyle xmlns:a="http://schemas.openxmlformats.org/drawingml/2006/main"/>
+          <a:p xmlns:a="http://schemas.openxmlformats.org/drawingml/2006/main">
+            <a:pPr>
+              <a:buNone/>
               <a:defRPr sz="1200" b="0">
                 <a:solidFill>
                   <a:srgbClr val="1D2B27"/>
@@ -3654,6 +3768,7 @@
           </a:p>
           <a:p xmlns:a="http://schemas.openxmlformats.org/drawingml/2006/main">
             <a:pPr>
+              <a:buNone/>
               <a:defRPr sz="1200" b="0">
                 <a:solidFill>
                   <a:srgbClr val="1D2B27"/>
@@ -3677,6 +3792,7 @@
           </a:p>
           <a:p xmlns:a="http://schemas.openxmlformats.org/drawingml/2006/main">
             <a:pPr>
+              <a:buNone/>
               <a:defRPr sz="1200" b="0">
                 <a:solidFill>
                   <a:srgbClr val="1D2B27"/>
@@ -3702,7 +3818,7 @@
       </p:sp>
       <p:sp>
         <p:nvSpPr>
-          <p:cNvPr id="12" name="">
+          <p:cNvPr id="12" name="Rectangle: Rounded Corners 11">
             <a:extLst xmlns:a="http://schemas.openxmlformats.org/drawingml/2006/main">
               <a:ext uri="{FF2B5EF4-FFF2-40B4-BE49-F238E27FC236}">
                 <a16:creationId xmlns:a16="http://schemas.microsoft.com/office/drawing/2014/main" id="{7307FE4E-B5FB-4C37-BF3C-6652E3B6E6F9}"/>
@@ -3734,7 +3850,7 @@
       </p:sp>
       <p:sp>
         <p:nvSpPr>
-          <p:cNvPr id="13" name="">
+          <p:cNvPr id="13" name="Rectangle 12">
             <a:extLst xmlns:a="http://schemas.openxmlformats.org/drawingml/2006/main">
               <a:ext uri="{FF2B5EF4-FFF2-40B4-BE49-F238E27FC236}">
                 <a16:creationId xmlns:a16="http://schemas.microsoft.com/office/drawing/2014/main" id="{98D290D3-711F-4B23-A03D-1B5674BF6567}"/>
@@ -3766,6 +3882,7 @@
           <a:lstStyle xmlns:a="http://schemas.openxmlformats.org/drawingml/2006/main"/>
           <a:p xmlns:a="http://schemas.openxmlformats.org/drawingml/2006/main">
             <a:pPr>
+              <a:buNone/>
               <a:defRPr sz="1575" b="1">
                 <a:solidFill>
                   <a:srgbClr val="FFFFFF"/>
@@ -3820,7 +3937,7 @@
       </p:grpSpPr>
       <p:sp>
         <p:nvSpPr>
-          <p:cNvPr id="18" name="">
+          <p:cNvPr id="18" name="Rectangle 17">
             <a:extLst xmlns:a="http://schemas.openxmlformats.org/drawingml/2006/main">
               <a:ext uri="{FF2B5EF4-FFF2-40B4-BE49-F238E27FC236}">
                 <a16:creationId xmlns:a16="http://schemas.microsoft.com/office/drawing/2014/main" id="{31BDB71B-261B-4BFF-9490-F6CE9478B29E}"/>
@@ -3850,7 +3967,7 @@
       </p:sp>
       <p:sp>
         <p:nvSpPr>
-          <p:cNvPr id="2" name="">
+          <p:cNvPr id="2" name="Rectangle 1">
             <a:extLst xmlns:a="http://schemas.openxmlformats.org/drawingml/2006/main">
               <a:ext uri="{FF2B5EF4-FFF2-40B4-BE49-F238E27FC236}">
                 <a16:creationId xmlns:a16="http://schemas.microsoft.com/office/drawing/2014/main" id="{8D363CDF-E5E5-40E5-8A94-DC623AB3AF46}"/>
@@ -3877,11 +3994,12 @@
         </p:spPr>
         <p:txBody>
           <a:bodyPr xmlns:a="http://schemas.openxmlformats.org/drawingml/2006/main">
-            <a:normAutofit fontScale="100000"/>
-          </a:bodyPr>
-          <a:lstStyle xmlns:a="http://schemas.openxmlformats.org/drawingml/2006/main"/>
-          <a:p xmlns:a="http://schemas.openxmlformats.org/drawingml/2006/main">
-            <a:pPr>
+            <a:normAutofit/>
+          </a:bodyPr>
+          <a:lstStyle xmlns:a="http://schemas.openxmlformats.org/drawingml/2006/main"/>
+          <a:p xmlns:a="http://schemas.openxmlformats.org/drawingml/2006/main">
+            <a:pPr>
+              <a:buNone/>
               <a:defRPr sz="1125" b="1">
                 <a:solidFill>
                   <a:srgbClr val="C64235"/>
@@ -3907,7 +4025,7 @@
       </p:sp>
       <p:sp>
         <p:nvSpPr>
-          <p:cNvPr id="3" name="">
+          <p:cNvPr id="3" name="Rectangle 2">
             <a:extLst xmlns:a="http://schemas.openxmlformats.org/drawingml/2006/main">
               <a:ext uri="{FF2B5EF4-FFF2-40B4-BE49-F238E27FC236}">
                 <a16:creationId xmlns:a16="http://schemas.microsoft.com/office/drawing/2014/main" id="{B68E2C5A-B498-436D-8C0D-6819C4E859DC}"/>
@@ -3939,6 +4057,7 @@
           <a:lstStyle xmlns:a="http://schemas.openxmlformats.org/drawingml/2006/main"/>
           <a:p xmlns:a="http://schemas.openxmlformats.org/drawingml/2006/main">
             <a:pPr>
+              <a:buNone/>
               <a:defRPr sz="2700" b="1">
                 <a:solidFill>
                   <a:srgbClr val="173B31"/>
@@ -3964,7 +4083,7 @@
       </p:sp>
       <p:sp>
         <p:nvSpPr>
-          <p:cNvPr id="4" name="">
+          <p:cNvPr id="4" name="Rectangle 3">
             <a:extLst xmlns:a="http://schemas.openxmlformats.org/drawingml/2006/main">
               <a:ext uri="{FF2B5EF4-FFF2-40B4-BE49-F238E27FC236}">
                 <a16:creationId xmlns:a16="http://schemas.microsoft.com/office/drawing/2014/main" id="{DCDEDA4B-4D25-4897-ABC6-774487FAFC7E}"/>
@@ -3996,6 +4115,7 @@
           <a:lstStyle xmlns:a="http://schemas.openxmlformats.org/drawingml/2006/main"/>
           <a:p xmlns:a="http://schemas.openxmlformats.org/drawingml/2006/main">
             <a:pPr>
+              <a:buNone/>
               <a:defRPr sz="1275" b="0">
                 <a:solidFill>
                   <a:srgbClr val="66736D"/>
@@ -4014,14 +4134,14 @@
                 <a:ea typeface="Arial"/>
                 <a:cs typeface="Arial"/>
               </a:rPr>
-              <a:t>Users can move from summary, to records, to geography, to model explanation.</a:t>
-            </a:r>
-          </a:p>
-        </p:txBody>
-      </p:sp>
-      <p:sp>
-        <p:nvSpPr>
-          <p:cNvPr id="5" name="">
+              <a:t>Users can move from summary to records, activity coverage, geography and model explanation.</a:t>
+            </a:r>
+          </a:p>
+        </p:txBody>
+      </p:sp>
+      <p:sp>
+        <p:nvSpPr>
+          <p:cNvPr id="5" name="Rectangle 4">
             <a:extLst xmlns:a="http://schemas.openxmlformats.org/drawingml/2006/main">
               <a:ext uri="{FF2B5EF4-FFF2-40B4-BE49-F238E27FC236}">
                 <a16:creationId xmlns:a16="http://schemas.microsoft.com/office/drawing/2014/main" id="{63FD79B1-07C4-42E1-AE95-F1E9C0D4F46E}"/>
@@ -4053,6 +4173,7 @@
           <a:lstStyle xmlns:a="http://schemas.openxmlformats.org/drawingml/2006/main"/>
           <a:p xmlns:a="http://schemas.openxmlformats.org/drawingml/2006/main">
             <a:pPr>
+              <a:buNone/>
               <a:defRPr sz="975" b="1">
                 <a:solidFill>
                   <a:srgbClr val="66736D"/>
@@ -4078,14 +4199,14 @@
       </p:sp>
       <p:pic>
         <p:nvPicPr>
-          <p:cNvPr id="23" name=""/>
+          <p:cNvPr id="28" name="Picture 22"/>
           <p:cNvPicPr>
             <a:picLocks xmlns:a="http://schemas.openxmlformats.org/drawingml/2006/main" noChangeAspect="1"/>
           </p:cNvPicPr>
           <p:nvPr/>
         </p:nvPicPr>
         <p:blipFill>
-          <a:blip xmlns:r="http://schemas.openxmlformats.org/officeDocument/2006/relationships" xmlns:a="http://schemas.openxmlformats.org/drawingml/2006/main" r:embed="R17179acd0154459d"/>
+          <a:blip xmlns:r="http://schemas.openxmlformats.org/officeDocument/2006/relationships" xmlns:a="http://schemas.openxmlformats.org/drawingml/2006/main" r:embed="R1dc6683ac37c44e4"/>
           <a:srcRect xmlns:a="http://schemas.openxmlformats.org/drawingml/2006/main" l="0" t="24525" r="0" b="24525"/>
           <a:stretch xmlns:a="http://schemas.openxmlformats.org/drawingml/2006/main">
             <a:fillRect l="0" t="0" r="0" b="0"/>
@@ -4105,7 +4226,7 @@
       </p:pic>
       <p:sp>
         <p:nvSpPr>
-          <p:cNvPr id="7" name="">
+          <p:cNvPr id="7" name="Rectangle 6">
             <a:extLst xmlns:a="http://schemas.openxmlformats.org/drawingml/2006/main">
               <a:ext uri="{FF2B5EF4-FFF2-40B4-BE49-F238E27FC236}">
                 <a16:creationId xmlns:a16="http://schemas.microsoft.com/office/drawing/2014/main" id="{31E01BC0-E74C-4B7E-8003-36816C78A651}"/>
@@ -4135,7 +4256,7 @@
       </p:sp>
       <p:sp>
         <p:nvSpPr>
-          <p:cNvPr id="8" name="">
+          <p:cNvPr id="8" name="Rectangle 7">
             <a:extLst xmlns:a="http://schemas.openxmlformats.org/drawingml/2006/main">
               <a:ext uri="{FF2B5EF4-FFF2-40B4-BE49-F238E27FC236}">
                 <a16:creationId xmlns:a16="http://schemas.microsoft.com/office/drawing/2014/main" id="{073BD27E-9EE6-4E71-908A-99B48BC596AB}"/>
@@ -4167,6 +4288,7 @@
           <a:lstStyle xmlns:a="http://schemas.openxmlformats.org/drawingml/2006/main"/>
           <a:p xmlns:a="http://schemas.openxmlformats.org/drawingml/2006/main">
             <a:pPr>
+              <a:buNone/>
               <a:defRPr sz="1050" b="1">
                 <a:solidFill>
                   <a:srgbClr val="FFFFFF"/>
@@ -4192,14 +4314,244 @@
       </p:sp>
       <p:pic>
         <p:nvPicPr>
-          <p:cNvPr id="26" name=""/>
+          <p:cNvPr id="31" name="Picture 25"/>
           <p:cNvPicPr>
             <a:picLocks xmlns:a="http://schemas.openxmlformats.org/drawingml/2006/main" noChangeAspect="1"/>
           </p:cNvPicPr>
           <p:nvPr/>
         </p:nvPicPr>
         <p:blipFill>
-          <a:blip xmlns:r="http://schemas.openxmlformats.org/officeDocument/2006/relationships" xmlns:a="http://schemas.openxmlformats.org/drawingml/2006/main" r:embed="Rf106e40f33f24dcf"/>
+          <a:blip xmlns:r="http://schemas.openxmlformats.org/officeDocument/2006/relationships" xmlns:a="http://schemas.openxmlformats.org/drawingml/2006/main" r:embed="R296ae790796e472c"/>
+          <a:srcRect xmlns:a="http://schemas.openxmlformats.org/drawingml/2006/main" l="0" t="0" r="0" b="0"/>
+          <a:stretch xmlns:a="http://schemas.openxmlformats.org/drawingml/2006/main">
+            <a:fillRect l="0" t="0" r="0" b="0"/>
+          </a:stretch>
+        </p:blipFill>
+        <p:spPr>
+          <a:xfrm xmlns:a="http://schemas.openxmlformats.org/drawingml/2006/main">
+            <a:off x="5810250" y="1943100"/>
+            <a:ext cx="4953000" cy="1733550"/>
+          </a:xfrm>
+          <a:prstGeom xmlns:a="http://schemas.openxmlformats.org/drawingml/2006/main" prst="roundRect">
+            <a:avLst>
+              <a:gd name="adj" fmla="val 6593"/>
+            </a:avLst>
+          </a:prstGeom>
+        </p:spPr>
+      </p:pic>
+      <p:sp>
+        <p:nvSpPr>
+          <p:cNvPr id="10" name="Rectangle 9">
+            <a:extLst xmlns:a="http://schemas.openxmlformats.org/drawingml/2006/main">
+              <a:ext uri="{FF2B5EF4-FFF2-40B4-BE49-F238E27FC236}">
+                <a16:creationId xmlns:a16="http://schemas.microsoft.com/office/drawing/2014/main" id="{7952F65D-5869-4282-B880-F44058D94C0D}"/>
+              </a:ext>
+            </a:extLst>
+          </p:cNvPr>
+          <p:cNvSpPr>
+            <a:spLocks xmlns:a="http://schemas.openxmlformats.org/drawingml/2006/main" noGrp="1"/>
+          </p:cNvSpPr>
+          <p:nvPr/>
+        </p:nvSpPr>
+        <p:spPr>
+          <a:xfrm xmlns:a="http://schemas.openxmlformats.org/drawingml/2006/main">
+            <a:off x="5810250" y="3343275"/>
+            <a:ext cx="4953000" cy="333375"/>
+          </a:xfrm>
+          <a:prstGeom xmlns:a="http://schemas.openxmlformats.org/drawingml/2006/main" prst="rect">
+            <a:avLst/>
+          </a:prstGeom>
+          <a:solidFill xmlns:a="http://schemas.openxmlformats.org/drawingml/2006/main">
+            <a:srgbClr val="173B31"/>
+          </a:solidFill>
+          <a:ln xmlns:a="http://schemas.openxmlformats.org/drawingml/2006/main" w="0">
+            <a:noFill/>
+          </a:ln>
+        </p:spPr>
+      </p:sp>
+      <p:sp>
+        <p:nvSpPr>
+          <p:cNvPr id="11" name="Rectangle 10">
+            <a:extLst xmlns:a="http://schemas.openxmlformats.org/drawingml/2006/main">
+              <a:ext uri="{FF2B5EF4-FFF2-40B4-BE49-F238E27FC236}">
+                <a16:creationId xmlns:a16="http://schemas.microsoft.com/office/drawing/2014/main" id="{9D917ACD-519E-4FD7-B402-18F89F706918}"/>
+              </a:ext>
+            </a:extLst>
+          </p:cNvPr>
+          <p:cNvSpPr>
+            <a:spLocks xmlns:a="http://schemas.openxmlformats.org/drawingml/2006/main" noGrp="1"/>
+          </p:cNvSpPr>
+          <p:nvPr/>
+        </p:nvSpPr>
+        <p:spPr>
+          <a:xfrm xmlns:a="http://schemas.openxmlformats.org/drawingml/2006/main">
+            <a:off x="5962650" y="3419475"/>
+            <a:ext cx="4572000" cy="190500"/>
+          </a:xfrm>
+          <a:prstGeom xmlns:a="http://schemas.openxmlformats.org/drawingml/2006/main" prst="rect">
+            <a:avLst/>
+          </a:prstGeom>
+          <a:noFill xmlns:a="http://schemas.openxmlformats.org/drawingml/2006/main"/>
+          <a:ln xmlns:a="http://schemas.openxmlformats.org/drawingml/2006/main" w="0">
+            <a:noFill/>
+          </a:ln>
+        </p:spPr>
+        <p:txBody>
+          <a:bodyPr xmlns:a="http://schemas.openxmlformats.org/drawingml/2006/main">
+            <a:normAutofit fontScale="61905"/>
+          </a:bodyPr>
+          <a:lstStyle xmlns:a="http://schemas.openxmlformats.org/drawingml/2006/main"/>
+          <a:p xmlns:a="http://schemas.openxmlformats.org/drawingml/2006/main">
+            <a:pPr>
+              <a:buNone/>
+              <a:defRPr sz="1050" b="1">
+                <a:solidFill>
+                  <a:srgbClr val="FFFFFF"/>
+                </a:solidFill>
+                <a:latin typeface="Arial"/>
+                <a:ea typeface="Arial"/>
+                <a:cs typeface="Arial"/>
+              </a:defRPr>
+            </a:pPr>
+            <a:r>
+              <a:rPr sz="1050" b="1">
+                <a:solidFill>
+                  <a:srgbClr val="FFFFFF"/>
+                </a:solidFill>
+                <a:latin typeface="Arial"/>
+                <a:ea typeface="Arial"/>
+                <a:cs typeface="Arial"/>
+              </a:rPr>
+              <a:t>2 · Venue explorer + source filters</a:t>
+            </a:r>
+          </a:p>
+        </p:txBody>
+      </p:sp>
+      <p:pic>
+        <p:nvPicPr>
+          <p:cNvPr id="34" name="Picture 28"/>
+          <p:cNvPicPr>
+            <a:picLocks xmlns:a="http://schemas.openxmlformats.org/drawingml/2006/main" noChangeAspect="1"/>
+          </p:cNvPicPr>
+          <p:nvPr/>
+        </p:nvPicPr>
+        <p:blipFill>
+          <a:blip xmlns:r="http://schemas.openxmlformats.org/officeDocument/2006/relationships" xmlns:a="http://schemas.openxmlformats.org/drawingml/2006/main" r:embed="Rcfb5b98576d248db"/>
+          <a:srcRect xmlns:a="http://schemas.openxmlformats.org/drawingml/2006/main" l="0" t="0" r="0" b="0"/>
+          <a:stretch xmlns:a="http://schemas.openxmlformats.org/drawingml/2006/main">
+            <a:fillRect l="0" t="0" r="0" b="0"/>
+          </a:stretch>
+        </p:blipFill>
+        <p:spPr>
+          <a:xfrm xmlns:a="http://schemas.openxmlformats.org/drawingml/2006/main">
+            <a:off x="552450" y="4171950"/>
+            <a:ext cx="4953000" cy="1733550"/>
+          </a:xfrm>
+          <a:prstGeom xmlns:a="http://schemas.openxmlformats.org/drawingml/2006/main" prst="roundRect">
+            <a:avLst>
+              <a:gd name="adj" fmla="val 6593"/>
+            </a:avLst>
+          </a:prstGeom>
+        </p:spPr>
+      </p:pic>
+      <p:sp>
+        <p:nvSpPr>
+          <p:cNvPr id="13" name="Rectangle 12">
+            <a:extLst xmlns:a="http://schemas.openxmlformats.org/drawingml/2006/main">
+              <a:ext uri="{FF2B5EF4-FFF2-40B4-BE49-F238E27FC236}">
+                <a16:creationId xmlns:a16="http://schemas.microsoft.com/office/drawing/2014/main" id="{E271AE3E-07AD-47A5-B6A7-743438912999}"/>
+              </a:ext>
+            </a:extLst>
+          </p:cNvPr>
+          <p:cNvSpPr>
+            <a:spLocks xmlns:a="http://schemas.openxmlformats.org/drawingml/2006/main" noGrp="1"/>
+          </p:cNvSpPr>
+          <p:nvPr/>
+        </p:nvSpPr>
+        <p:spPr>
+          <a:xfrm xmlns:a="http://schemas.openxmlformats.org/drawingml/2006/main">
+            <a:off x="552450" y="5572125"/>
+            <a:ext cx="4953000" cy="333375"/>
+          </a:xfrm>
+          <a:prstGeom xmlns:a="http://schemas.openxmlformats.org/drawingml/2006/main" prst="rect">
+            <a:avLst/>
+          </a:prstGeom>
+          <a:solidFill xmlns:a="http://schemas.openxmlformats.org/drawingml/2006/main">
+            <a:srgbClr val="173B31"/>
+          </a:solidFill>
+          <a:ln xmlns:a="http://schemas.openxmlformats.org/drawingml/2006/main" w="0">
+            <a:noFill/>
+          </a:ln>
+        </p:spPr>
+      </p:sp>
+      <p:sp>
+        <p:nvSpPr>
+          <p:cNvPr id="14" name="Rectangle 13">
+            <a:extLst xmlns:a="http://schemas.openxmlformats.org/drawingml/2006/main">
+              <a:ext uri="{FF2B5EF4-FFF2-40B4-BE49-F238E27FC236}">
+                <a16:creationId xmlns:a16="http://schemas.microsoft.com/office/drawing/2014/main" id="{7C82F080-260E-472A-A0FF-7B6B23E8A554}"/>
+              </a:ext>
+            </a:extLst>
+          </p:cNvPr>
+          <p:cNvSpPr>
+            <a:spLocks xmlns:a="http://schemas.openxmlformats.org/drawingml/2006/main" noGrp="1"/>
+          </p:cNvSpPr>
+          <p:nvPr/>
+        </p:nvSpPr>
+        <p:spPr>
+          <a:xfrm xmlns:a="http://schemas.openxmlformats.org/drawingml/2006/main">
+            <a:off x="704850" y="5648325"/>
+            <a:ext cx="4572000" cy="190500"/>
+          </a:xfrm>
+          <a:prstGeom xmlns:a="http://schemas.openxmlformats.org/drawingml/2006/main" prst="rect">
+            <a:avLst/>
+          </a:prstGeom>
+          <a:noFill xmlns:a="http://schemas.openxmlformats.org/drawingml/2006/main"/>
+          <a:ln xmlns:a="http://schemas.openxmlformats.org/drawingml/2006/main" w="0">
+            <a:noFill/>
+          </a:ln>
+        </p:spPr>
+        <p:txBody>
+          <a:bodyPr xmlns:a="http://schemas.openxmlformats.org/drawingml/2006/main">
+            <a:normAutofit fontScale="61905"/>
+          </a:bodyPr>
+          <a:lstStyle xmlns:a="http://schemas.openxmlformats.org/drawingml/2006/main"/>
+          <a:p xmlns:a="http://schemas.openxmlformats.org/drawingml/2006/main">
+            <a:pPr>
+              <a:buNone/>
+              <a:defRPr sz="1050" b="1">
+                <a:solidFill>
+                  <a:srgbClr val="FFFFFF"/>
+                </a:solidFill>
+                <a:latin typeface="Arial"/>
+                <a:ea typeface="Arial"/>
+                <a:cs typeface="Arial"/>
+              </a:defRPr>
+            </a:pPr>
+            <a:r>
+              <a:rPr sz="1050" b="1">
+                <a:solidFill>
+                  <a:srgbClr val="FFFFFF"/>
+                </a:solidFill>
+                <a:latin typeface="Arial"/>
+                <a:ea typeface="Arial"/>
+                <a:cs typeface="Arial"/>
+              </a:rPr>
+              <a:t>3 · Activities &amp; services</a:t>
+            </a:r>
+          </a:p>
+        </p:txBody>
+      </p:sp>
+      <p:pic>
+        <p:nvPicPr>
+          <p:cNvPr id="37" name="Picture 31"/>
+          <p:cNvPicPr>
+            <a:picLocks xmlns:a="http://schemas.openxmlformats.org/drawingml/2006/main" noChangeAspect="1"/>
+          </p:cNvPicPr>
+          <p:nvPr/>
+        </p:nvPicPr>
+        <p:blipFill>
+          <a:blip xmlns:r="http://schemas.openxmlformats.org/officeDocument/2006/relationships" xmlns:a="http://schemas.openxmlformats.org/drawingml/2006/main" r:embed="Ra72bf34b1cfc43c5"/>
           <a:srcRect xmlns:a="http://schemas.openxmlformats.org/drawingml/2006/main" l="0" t="24525" r="0" b="24525"/>
           <a:stretch xmlns:a="http://schemas.openxmlformats.org/drawingml/2006/main">
             <a:fillRect l="0" t="0" r="0" b="0"/>
@@ -4207,7 +4559,7 @@
         </p:blipFill>
         <p:spPr>
           <a:xfrm xmlns:a="http://schemas.openxmlformats.org/drawingml/2006/main">
-            <a:off x="5810250" y="1943100"/>
+            <a:off x="5810250" y="4171950"/>
             <a:ext cx="4953000" cy="1733550"/>
           </a:xfrm>
           <a:prstGeom xmlns:a="http://schemas.openxmlformats.org/drawingml/2006/main" prst="roundRect">
@@ -4219,21 +4571,21 @@
       </p:pic>
       <p:sp>
         <p:nvSpPr>
-          <p:cNvPr id="10" name="">
-            <a:extLst xmlns:a="http://schemas.openxmlformats.org/drawingml/2006/main">
-              <a:ext uri="{FF2B5EF4-FFF2-40B4-BE49-F238E27FC236}">
-                <a16:creationId xmlns:a16="http://schemas.microsoft.com/office/drawing/2014/main" id="{7952F65D-5869-4282-B880-F44058D94C0D}"/>
-              </a:ext>
-            </a:extLst>
-          </p:cNvPr>
-          <p:cNvSpPr>
-            <a:spLocks xmlns:a="http://schemas.openxmlformats.org/drawingml/2006/main" noGrp="1"/>
-          </p:cNvSpPr>
-          <p:nvPr/>
-        </p:nvSpPr>
-        <p:spPr>
-          <a:xfrm xmlns:a="http://schemas.openxmlformats.org/drawingml/2006/main">
-            <a:off x="5810250" y="3343275"/>
+          <p:cNvPr id="16" name="Rectangle 15">
+            <a:extLst xmlns:a="http://schemas.openxmlformats.org/drawingml/2006/main">
+              <a:ext uri="{FF2B5EF4-FFF2-40B4-BE49-F238E27FC236}">
+                <a16:creationId xmlns:a16="http://schemas.microsoft.com/office/drawing/2014/main" id="{C94DE788-6BD3-4303-BE8B-8437C4EBFCBA}"/>
+              </a:ext>
+            </a:extLst>
+          </p:cNvPr>
+          <p:cNvSpPr>
+            <a:spLocks xmlns:a="http://schemas.openxmlformats.org/drawingml/2006/main" noGrp="1"/>
+          </p:cNvSpPr>
+          <p:nvPr/>
+        </p:nvSpPr>
+        <p:spPr>
+          <a:xfrm xmlns:a="http://schemas.openxmlformats.org/drawingml/2006/main">
+            <a:off x="5810250" y="5572125"/>
             <a:ext cx="4953000" cy="333375"/>
           </a:xfrm>
           <a:prstGeom xmlns:a="http://schemas.openxmlformats.org/drawingml/2006/main" prst="rect">
@@ -4249,235 +4601,7 @@
       </p:sp>
       <p:sp>
         <p:nvSpPr>
-          <p:cNvPr id="11" name="">
-            <a:extLst xmlns:a="http://schemas.openxmlformats.org/drawingml/2006/main">
-              <a:ext uri="{FF2B5EF4-FFF2-40B4-BE49-F238E27FC236}">
-                <a16:creationId xmlns:a16="http://schemas.microsoft.com/office/drawing/2014/main" id="{9D917ACD-519E-4FD7-B402-18F89F706918}"/>
-              </a:ext>
-            </a:extLst>
-          </p:cNvPr>
-          <p:cNvSpPr>
-            <a:spLocks xmlns:a="http://schemas.openxmlformats.org/drawingml/2006/main" noGrp="1"/>
-          </p:cNvSpPr>
-          <p:nvPr/>
-        </p:nvSpPr>
-        <p:spPr>
-          <a:xfrm xmlns:a="http://schemas.openxmlformats.org/drawingml/2006/main">
-            <a:off x="5962650" y="3419475"/>
-            <a:ext cx="4572000" cy="190500"/>
-          </a:xfrm>
-          <a:prstGeom xmlns:a="http://schemas.openxmlformats.org/drawingml/2006/main" prst="rect">
-            <a:avLst/>
-          </a:prstGeom>
-          <a:noFill xmlns:a="http://schemas.openxmlformats.org/drawingml/2006/main"/>
-          <a:ln xmlns:a="http://schemas.openxmlformats.org/drawingml/2006/main" w="0">
-            <a:noFill/>
-          </a:ln>
-        </p:spPr>
-        <p:txBody>
-          <a:bodyPr xmlns:a="http://schemas.openxmlformats.org/drawingml/2006/main">
-            <a:normAutofit fontScale="61905"/>
-          </a:bodyPr>
-          <a:lstStyle xmlns:a="http://schemas.openxmlformats.org/drawingml/2006/main"/>
-          <a:p xmlns:a="http://schemas.openxmlformats.org/drawingml/2006/main">
-            <a:pPr>
-              <a:defRPr sz="1050" b="1">
-                <a:solidFill>
-                  <a:srgbClr val="FFFFFF"/>
-                </a:solidFill>
-                <a:latin typeface="Arial"/>
-                <a:ea typeface="Arial"/>
-                <a:cs typeface="Arial"/>
-              </a:defRPr>
-            </a:pPr>
-            <a:r>
-              <a:rPr sz="1050" b="1">
-                <a:solidFill>
-                  <a:srgbClr val="FFFFFF"/>
-                </a:solidFill>
-                <a:latin typeface="Arial"/>
-                <a:ea typeface="Arial"/>
-                <a:cs typeface="Arial"/>
-              </a:rPr>
-              <a:t>2 · Venue explorer</a:t>
-            </a:r>
-          </a:p>
-        </p:txBody>
-      </p:sp>
-      <p:pic>
-        <p:nvPicPr>
-          <p:cNvPr id="29" name=""/>
-          <p:cNvPicPr>
-            <a:picLocks xmlns:a="http://schemas.openxmlformats.org/drawingml/2006/main" noChangeAspect="1"/>
-          </p:cNvPicPr>
-          <p:nvPr/>
-        </p:nvPicPr>
-        <p:blipFill>
-          <a:blip xmlns:r="http://schemas.openxmlformats.org/officeDocument/2006/relationships" xmlns:a="http://schemas.openxmlformats.org/drawingml/2006/main" r:embed="R4526a0bd1e224bbc"/>
-          <a:srcRect xmlns:a="http://schemas.openxmlformats.org/drawingml/2006/main" l="0" t="24525" r="0" b="24525"/>
-          <a:stretch xmlns:a="http://schemas.openxmlformats.org/drawingml/2006/main">
-            <a:fillRect l="0" t="0" r="0" b="0"/>
-          </a:stretch>
-        </p:blipFill>
-        <p:spPr>
-          <a:xfrm xmlns:a="http://schemas.openxmlformats.org/drawingml/2006/main">
-            <a:off x="552450" y="4171950"/>
-            <a:ext cx="4953000" cy="1733550"/>
-          </a:xfrm>
-          <a:prstGeom xmlns:a="http://schemas.openxmlformats.org/drawingml/2006/main" prst="roundRect">
-            <a:avLst>
-              <a:gd name="adj" fmla="val 6593"/>
-            </a:avLst>
-          </a:prstGeom>
-        </p:spPr>
-      </p:pic>
-      <p:sp>
-        <p:nvSpPr>
-          <p:cNvPr id="13" name="">
-            <a:extLst xmlns:a="http://schemas.openxmlformats.org/drawingml/2006/main">
-              <a:ext uri="{FF2B5EF4-FFF2-40B4-BE49-F238E27FC236}">
-                <a16:creationId xmlns:a16="http://schemas.microsoft.com/office/drawing/2014/main" id="{E271AE3E-07AD-47A5-B6A7-743438912999}"/>
-              </a:ext>
-            </a:extLst>
-          </p:cNvPr>
-          <p:cNvSpPr>
-            <a:spLocks xmlns:a="http://schemas.openxmlformats.org/drawingml/2006/main" noGrp="1"/>
-          </p:cNvSpPr>
-          <p:nvPr/>
-        </p:nvSpPr>
-        <p:spPr>
-          <a:xfrm xmlns:a="http://schemas.openxmlformats.org/drawingml/2006/main">
-            <a:off x="552450" y="5572125"/>
-            <a:ext cx="4953000" cy="333375"/>
-          </a:xfrm>
-          <a:prstGeom xmlns:a="http://schemas.openxmlformats.org/drawingml/2006/main" prst="rect">
-            <a:avLst/>
-          </a:prstGeom>
-          <a:solidFill xmlns:a="http://schemas.openxmlformats.org/drawingml/2006/main">
-            <a:srgbClr val="173B31"/>
-          </a:solidFill>
-          <a:ln xmlns:a="http://schemas.openxmlformats.org/drawingml/2006/main" w="0">
-            <a:noFill/>
-          </a:ln>
-        </p:spPr>
-      </p:sp>
-      <p:sp>
-        <p:nvSpPr>
-          <p:cNvPr id="14" name="">
-            <a:extLst xmlns:a="http://schemas.openxmlformats.org/drawingml/2006/main">
-              <a:ext uri="{FF2B5EF4-FFF2-40B4-BE49-F238E27FC236}">
-                <a16:creationId xmlns:a16="http://schemas.microsoft.com/office/drawing/2014/main" id="{7C82F080-260E-472A-A0FF-7B6B23E8A554}"/>
-              </a:ext>
-            </a:extLst>
-          </p:cNvPr>
-          <p:cNvSpPr>
-            <a:spLocks xmlns:a="http://schemas.openxmlformats.org/drawingml/2006/main" noGrp="1"/>
-          </p:cNvSpPr>
-          <p:nvPr/>
-        </p:nvSpPr>
-        <p:spPr>
-          <a:xfrm xmlns:a="http://schemas.openxmlformats.org/drawingml/2006/main">
-            <a:off x="704850" y="5648325"/>
-            <a:ext cx="4572000" cy="190500"/>
-          </a:xfrm>
-          <a:prstGeom xmlns:a="http://schemas.openxmlformats.org/drawingml/2006/main" prst="rect">
-            <a:avLst/>
-          </a:prstGeom>
-          <a:noFill xmlns:a="http://schemas.openxmlformats.org/drawingml/2006/main"/>
-          <a:ln xmlns:a="http://schemas.openxmlformats.org/drawingml/2006/main" w="0">
-            <a:noFill/>
-          </a:ln>
-        </p:spPr>
-        <p:txBody>
-          <a:bodyPr xmlns:a="http://schemas.openxmlformats.org/drawingml/2006/main">
-            <a:normAutofit fontScale="61905"/>
-          </a:bodyPr>
-          <a:lstStyle xmlns:a="http://schemas.openxmlformats.org/drawingml/2006/main"/>
-          <a:p xmlns:a="http://schemas.openxmlformats.org/drawingml/2006/main">
-            <a:pPr>
-              <a:defRPr sz="1050" b="1">
-                <a:solidFill>
-                  <a:srgbClr val="FFFFFF"/>
-                </a:solidFill>
-                <a:latin typeface="Arial"/>
-                <a:ea typeface="Arial"/>
-                <a:cs typeface="Arial"/>
-              </a:defRPr>
-            </a:pPr>
-            <a:r>
-              <a:rPr sz="1050" b="1">
-                <a:solidFill>
-                  <a:srgbClr val="FFFFFF"/>
-                </a:solidFill>
-                <a:latin typeface="Arial"/>
-                <a:ea typeface="Arial"/>
-                <a:cs typeface="Arial"/>
-              </a:rPr>
-              <a:t>3 · Interactive map</a:t>
-            </a:r>
-          </a:p>
-        </p:txBody>
-      </p:sp>
-      <p:pic>
-        <p:nvPicPr>
-          <p:cNvPr id="32" name=""/>
-          <p:cNvPicPr>
-            <a:picLocks xmlns:a="http://schemas.openxmlformats.org/drawingml/2006/main" noChangeAspect="1"/>
-          </p:cNvPicPr>
-          <p:nvPr/>
-        </p:nvPicPr>
-        <p:blipFill>
-          <a:blip xmlns:r="http://schemas.openxmlformats.org/officeDocument/2006/relationships" xmlns:a="http://schemas.openxmlformats.org/drawingml/2006/main" r:embed="Ra624cbf18a6e4ed0"/>
-          <a:srcRect xmlns:a="http://schemas.openxmlformats.org/drawingml/2006/main" l="0" t="24525" r="0" b="24525"/>
-          <a:stretch xmlns:a="http://schemas.openxmlformats.org/drawingml/2006/main">
-            <a:fillRect l="0" t="0" r="0" b="0"/>
-          </a:stretch>
-        </p:blipFill>
-        <p:spPr>
-          <a:xfrm xmlns:a="http://schemas.openxmlformats.org/drawingml/2006/main">
-            <a:off x="5810250" y="4171950"/>
-            <a:ext cx="4953000" cy="1733550"/>
-          </a:xfrm>
-          <a:prstGeom xmlns:a="http://schemas.openxmlformats.org/drawingml/2006/main" prst="roundRect">
-            <a:avLst>
-              <a:gd name="adj" fmla="val 6593"/>
-            </a:avLst>
-          </a:prstGeom>
-        </p:spPr>
-      </p:pic>
-      <p:sp>
-        <p:nvSpPr>
-          <p:cNvPr id="16" name="">
-            <a:extLst xmlns:a="http://schemas.openxmlformats.org/drawingml/2006/main">
-              <a:ext uri="{FF2B5EF4-FFF2-40B4-BE49-F238E27FC236}">
-                <a16:creationId xmlns:a16="http://schemas.microsoft.com/office/drawing/2014/main" id="{C94DE788-6BD3-4303-BE8B-8437C4EBFCBA}"/>
-              </a:ext>
-            </a:extLst>
-          </p:cNvPr>
-          <p:cNvSpPr>
-            <a:spLocks xmlns:a="http://schemas.openxmlformats.org/drawingml/2006/main" noGrp="1"/>
-          </p:cNvSpPr>
-          <p:nvPr/>
-        </p:nvSpPr>
-        <p:spPr>
-          <a:xfrm xmlns:a="http://schemas.openxmlformats.org/drawingml/2006/main">
-            <a:off x="5810250" y="5572125"/>
-            <a:ext cx="4953000" cy="333375"/>
-          </a:xfrm>
-          <a:prstGeom xmlns:a="http://schemas.openxmlformats.org/drawingml/2006/main" prst="rect">
-            <a:avLst/>
-          </a:prstGeom>
-          <a:solidFill xmlns:a="http://schemas.openxmlformats.org/drawingml/2006/main">
-            <a:srgbClr val="173B31"/>
-          </a:solidFill>
-          <a:ln xmlns:a="http://schemas.openxmlformats.org/drawingml/2006/main" w="0">
-            <a:noFill/>
-          </a:ln>
-        </p:spPr>
-      </p:sp>
-      <p:sp>
-        <p:nvSpPr>
-          <p:cNvPr id="17" name="">
+          <p:cNvPr id="17" name="Rectangle 16">
             <a:extLst xmlns:a="http://schemas.openxmlformats.org/drawingml/2006/main">
               <a:ext uri="{FF2B5EF4-FFF2-40B4-BE49-F238E27FC236}">
                 <a16:creationId xmlns:a16="http://schemas.microsoft.com/office/drawing/2014/main" id="{C2DBC815-994F-45B1-B2C9-9816067C00EC}"/>
@@ -4509,6 +4633,7 @@
           <a:lstStyle xmlns:a="http://schemas.openxmlformats.org/drawingml/2006/main"/>
           <a:p xmlns:a="http://schemas.openxmlformats.org/drawingml/2006/main">
             <a:pPr>
+              <a:buNone/>
               <a:defRPr sz="1050" b="1">
                 <a:solidFill>
                   <a:srgbClr val="FFFFFF"/>
@@ -4563,7 +4688,7 @@
       </p:grpSpPr>
       <p:sp>
         <p:nvSpPr>
-          <p:cNvPr id="24" name="">
+          <p:cNvPr id="24" name="Rectangle 23">
             <a:extLst xmlns:a="http://schemas.openxmlformats.org/drawingml/2006/main">
               <a:ext uri="{FF2B5EF4-FFF2-40B4-BE49-F238E27FC236}">
                 <a16:creationId xmlns:a16="http://schemas.microsoft.com/office/drawing/2014/main" id="{9C80FFB5-6CB8-4623-936C-1D5DE9B994DF}"/>
@@ -4593,7 +4718,7 @@
       </p:sp>
       <p:sp>
         <p:nvSpPr>
-          <p:cNvPr id="2" name="">
+          <p:cNvPr id="2" name="Rectangle 1">
             <a:extLst xmlns:a="http://schemas.openxmlformats.org/drawingml/2006/main">
               <a:ext uri="{FF2B5EF4-FFF2-40B4-BE49-F238E27FC236}">
                 <a16:creationId xmlns:a16="http://schemas.microsoft.com/office/drawing/2014/main" id="{E06269B2-3512-4016-8EC8-ECD1AA7ED4CF}"/>
@@ -4620,11 +4745,12 @@
         </p:spPr>
         <p:txBody>
           <a:bodyPr xmlns:a="http://schemas.openxmlformats.org/drawingml/2006/main">
-            <a:normAutofit fontScale="100000"/>
-          </a:bodyPr>
-          <a:lstStyle xmlns:a="http://schemas.openxmlformats.org/drawingml/2006/main"/>
-          <a:p xmlns:a="http://schemas.openxmlformats.org/drawingml/2006/main">
-            <a:pPr>
+            <a:normAutofit/>
+          </a:bodyPr>
+          <a:lstStyle xmlns:a="http://schemas.openxmlformats.org/drawingml/2006/main"/>
+          <a:p xmlns:a="http://schemas.openxmlformats.org/drawingml/2006/main">
+            <a:pPr>
+              <a:buNone/>
               <a:defRPr sz="1125" b="1">
                 <a:solidFill>
                   <a:srgbClr val="C64235"/>
@@ -4650,7 +4776,7 @@
       </p:sp>
       <p:sp>
         <p:nvSpPr>
-          <p:cNvPr id="3" name="">
+          <p:cNvPr id="3" name="Rectangle 2">
             <a:extLst xmlns:a="http://schemas.openxmlformats.org/drawingml/2006/main">
               <a:ext uri="{FF2B5EF4-FFF2-40B4-BE49-F238E27FC236}">
                 <a16:creationId xmlns:a16="http://schemas.microsoft.com/office/drawing/2014/main" id="{DA77BE79-51AD-4D2A-A062-AD83D2A8F3FB}"/>
@@ -4677,11 +4803,12 @@
         </p:spPr>
         <p:txBody>
           <a:bodyPr xmlns:a="http://schemas.openxmlformats.org/drawingml/2006/main">
-            <a:normAutofit fontScale="100000"/>
-          </a:bodyPr>
-          <a:lstStyle xmlns:a="http://schemas.openxmlformats.org/drawingml/2006/main"/>
-          <a:p xmlns:a="http://schemas.openxmlformats.org/drawingml/2006/main">
-            <a:pPr>
+            <a:normAutofit/>
+          </a:bodyPr>
+          <a:lstStyle xmlns:a="http://schemas.openxmlformats.org/drawingml/2006/main"/>
+          <a:p xmlns:a="http://schemas.openxmlformats.org/drawingml/2006/main">
+            <a:pPr>
+              <a:buNone/>
               <a:defRPr sz="2700" b="1">
                 <a:solidFill>
                   <a:srgbClr val="173B31"/>
@@ -4707,7 +4834,7 @@
       </p:sp>
       <p:sp>
         <p:nvSpPr>
-          <p:cNvPr id="4" name="">
+          <p:cNvPr id="4" name="Rectangle 3">
             <a:extLst xmlns:a="http://schemas.openxmlformats.org/drawingml/2006/main">
               <a:ext uri="{FF2B5EF4-FFF2-40B4-BE49-F238E27FC236}">
                 <a16:creationId xmlns:a16="http://schemas.microsoft.com/office/drawing/2014/main" id="{DA685698-D8F5-4F43-8D2B-62A99D521C8E}"/>
@@ -4739,6 +4866,7 @@
           <a:lstStyle xmlns:a="http://schemas.openxmlformats.org/drawingml/2006/main"/>
           <a:p xmlns:a="http://schemas.openxmlformats.org/drawingml/2006/main">
             <a:pPr>
+              <a:buNone/>
               <a:defRPr sz="1275" b="0">
                 <a:solidFill>
                   <a:srgbClr val="66736D"/>
@@ -4757,14 +4885,14 @@
                 <a:ea typeface="Arial"/>
                 <a:cs typeface="Arial"/>
               </a:rPr>
-              <a:t>New venues are stored separately and start as pending.</a:t>
-            </a:r>
-          </a:p>
-        </p:txBody>
-      </p:sp>
-      <p:sp>
-        <p:nvSpPr>
-          <p:cNvPr id="5" name="">
+              <a:t>New venues start pending; approved claims become discoverable without entering historical analytics.</a:t>
+            </a:r>
+          </a:p>
+        </p:txBody>
+      </p:sp>
+      <p:sp>
+        <p:nvSpPr>
+          <p:cNvPr id="5" name="Rectangle 4">
             <a:extLst xmlns:a="http://schemas.openxmlformats.org/drawingml/2006/main">
               <a:ext uri="{FF2B5EF4-FFF2-40B4-BE49-F238E27FC236}">
                 <a16:creationId xmlns:a16="http://schemas.microsoft.com/office/drawing/2014/main" id="{EC3C8A1A-CAB7-4038-AD47-C80646B6934E}"/>
@@ -4796,6 +4924,7 @@
           <a:lstStyle xmlns:a="http://schemas.openxmlformats.org/drawingml/2006/main"/>
           <a:p xmlns:a="http://schemas.openxmlformats.org/drawingml/2006/main">
             <a:pPr>
+              <a:buNone/>
               <a:defRPr sz="975" b="1">
                 <a:solidFill>
                   <a:srgbClr val="66736D"/>
@@ -4821,7 +4950,7 @@
       </p:sp>
       <p:sp>
         <p:nvSpPr>
-          <p:cNvPr id="6" name="">
+          <p:cNvPr id="6" name="Rectangle 5">
             <a:extLst xmlns:a="http://schemas.openxmlformats.org/drawingml/2006/main">
               <a:ext uri="{FF2B5EF4-FFF2-40B4-BE49-F238E27FC236}">
                 <a16:creationId xmlns:a16="http://schemas.microsoft.com/office/drawing/2014/main" id="{33CDE4D3-7849-4EC8-ABD8-737056792963}"/>
@@ -4851,7 +4980,7 @@
       </p:sp>
       <p:sp>
         <p:nvSpPr>
-          <p:cNvPr id="7" name="">
+          <p:cNvPr id="7" name="Rectangle 6">
             <a:extLst xmlns:a="http://schemas.openxmlformats.org/drawingml/2006/main">
               <a:ext uri="{FF2B5EF4-FFF2-40B4-BE49-F238E27FC236}">
                 <a16:creationId xmlns:a16="http://schemas.microsoft.com/office/drawing/2014/main" id="{B4291428-2F55-4B74-AC6A-82A37A0902CD}"/>
@@ -4881,7 +5010,7 @@
       </p:sp>
       <p:sp>
         <p:nvSpPr>
-          <p:cNvPr id="8" name="">
+          <p:cNvPr id="8" name="Rectangle 7">
             <a:extLst xmlns:a="http://schemas.openxmlformats.org/drawingml/2006/main">
               <a:ext uri="{FF2B5EF4-FFF2-40B4-BE49-F238E27FC236}">
                 <a16:creationId xmlns:a16="http://schemas.microsoft.com/office/drawing/2014/main" id="{E41D632C-32BD-4681-ABDE-4F9CD51331FD}"/>
@@ -4911,7 +5040,7 @@
       </p:sp>
       <p:sp>
         <p:nvSpPr>
-          <p:cNvPr id="9" name="">
+          <p:cNvPr id="9" name="Rectangle: Rounded Corners 8">
             <a:extLst xmlns:a="http://schemas.openxmlformats.org/drawingml/2006/main">
               <a:ext uri="{FF2B5EF4-FFF2-40B4-BE49-F238E27FC236}">
                 <a16:creationId xmlns:a16="http://schemas.microsoft.com/office/drawing/2014/main" id="{86EA9DFA-EDA5-41E0-9BD2-37D5EE3BA621}"/>
@@ -4943,7 +5072,7 @@
       </p:sp>
       <p:sp>
         <p:nvSpPr>
-          <p:cNvPr id="10" name="">
+          <p:cNvPr id="10" name="Rectangle 9">
             <a:extLst xmlns:a="http://schemas.openxmlformats.org/drawingml/2006/main">
               <a:ext uri="{FF2B5EF4-FFF2-40B4-BE49-F238E27FC236}">
                 <a16:creationId xmlns:a16="http://schemas.microsoft.com/office/drawing/2014/main" id="{C5D69106-F7CB-4A68-B71B-FF0F902FFE8F}"/>
@@ -4975,6 +5104,7 @@
           <a:lstStyle xmlns:a="http://schemas.openxmlformats.org/drawingml/2006/main"/>
           <a:p xmlns:a="http://schemas.openxmlformats.org/drawingml/2006/main">
             <a:pPr>
+              <a:buNone/>
               <a:defRPr sz="1725" b="1">
                 <a:solidFill>
                   <a:srgbClr val="173B31"/>
@@ -5000,7 +5130,7 @@
       </p:sp>
       <p:sp>
         <p:nvSpPr>
-          <p:cNvPr id="11" name="">
+          <p:cNvPr id="11" name="Rectangle 10">
             <a:extLst xmlns:a="http://schemas.openxmlformats.org/drawingml/2006/main">
               <a:ext uri="{FF2B5EF4-FFF2-40B4-BE49-F238E27FC236}">
                 <a16:creationId xmlns:a16="http://schemas.microsoft.com/office/drawing/2014/main" id="{3DD7E89B-E4FE-443D-B405-D11F6BF7ECD0}"/>
@@ -5027,11 +5157,12 @@
         </p:spPr>
         <p:txBody>
           <a:bodyPr xmlns:a="http://schemas.openxmlformats.org/drawingml/2006/main">
-            <a:normAutofit fontScale="100000"/>
-          </a:bodyPr>
-          <a:lstStyle xmlns:a="http://schemas.openxmlformats.org/drawingml/2006/main"/>
-          <a:p xmlns:a="http://schemas.openxmlformats.org/drawingml/2006/main">
-            <a:pPr>
+            <a:normAutofit/>
+          </a:bodyPr>
+          <a:lstStyle xmlns:a="http://schemas.openxmlformats.org/drawingml/2006/main"/>
+          <a:p xmlns:a="http://schemas.openxmlformats.org/drawingml/2006/main">
+            <a:pPr>
+              <a:buNone/>
               <a:defRPr sz="1200" b="0">
                 <a:solidFill>
                   <a:srgbClr val="1D2B27"/>
@@ -5055,6 +5186,7 @@
           </a:p>
           <a:p xmlns:a="http://schemas.openxmlformats.org/drawingml/2006/main">
             <a:pPr>
+              <a:buNone/>
               <a:defRPr sz="1200" b="0">
                 <a:solidFill>
                   <a:srgbClr val="1D2B27"/>
@@ -5080,7 +5212,7 @@
       </p:sp>
       <p:sp>
         <p:nvSpPr>
-          <p:cNvPr id="12" name="">
+          <p:cNvPr id="12" name="Rectangle: Rounded Corners 11">
             <a:extLst xmlns:a="http://schemas.openxmlformats.org/drawingml/2006/main">
               <a:ext uri="{FF2B5EF4-FFF2-40B4-BE49-F238E27FC236}">
                 <a16:creationId xmlns:a16="http://schemas.microsoft.com/office/drawing/2014/main" id="{F7EF14FF-9AEE-4D30-944E-6C8527191D08}"/>
@@ -5112,7 +5244,7 @@
       </p:sp>
       <p:sp>
         <p:nvSpPr>
-          <p:cNvPr id="13" name="">
+          <p:cNvPr id="13" name="Rectangle 12">
             <a:extLst xmlns:a="http://schemas.openxmlformats.org/drawingml/2006/main">
               <a:ext uri="{FF2B5EF4-FFF2-40B4-BE49-F238E27FC236}">
                 <a16:creationId xmlns:a16="http://schemas.microsoft.com/office/drawing/2014/main" id="{AE9F18A0-29F4-4A3D-B897-794327CE37CE}"/>
@@ -5144,6 +5276,7 @@
           <a:lstStyle xmlns:a="http://schemas.openxmlformats.org/drawingml/2006/main"/>
           <a:p xmlns:a="http://schemas.openxmlformats.org/drawingml/2006/main">
             <a:pPr>
+              <a:buNone/>
               <a:defRPr sz="1725" b="1">
                 <a:solidFill>
                   <a:srgbClr val="173B31"/>
@@ -5169,7 +5302,7 @@
       </p:sp>
       <p:sp>
         <p:nvSpPr>
-          <p:cNvPr id="14" name="">
+          <p:cNvPr id="14" name="Rectangle 13">
             <a:extLst xmlns:a="http://schemas.openxmlformats.org/drawingml/2006/main">
               <a:ext uri="{FF2B5EF4-FFF2-40B4-BE49-F238E27FC236}">
                 <a16:creationId xmlns:a16="http://schemas.microsoft.com/office/drawing/2014/main" id="{A0637D12-DBD9-4855-A4CF-B99C38C56B55}"/>
@@ -5196,11 +5329,12 @@
         </p:spPr>
         <p:txBody>
           <a:bodyPr xmlns:a="http://schemas.openxmlformats.org/drawingml/2006/main">
-            <a:normAutofit fontScale="100000"/>
-          </a:bodyPr>
-          <a:lstStyle xmlns:a="http://schemas.openxmlformats.org/drawingml/2006/main"/>
-          <a:p xmlns:a="http://schemas.openxmlformats.org/drawingml/2006/main">
-            <a:pPr>
+            <a:normAutofit/>
+          </a:bodyPr>
+          <a:lstStyle xmlns:a="http://schemas.openxmlformats.org/drawingml/2006/main"/>
+          <a:p xmlns:a="http://schemas.openxmlformats.org/drawingml/2006/main">
+            <a:pPr>
+              <a:buNone/>
               <a:defRPr sz="1200" b="0">
                 <a:solidFill>
                   <a:srgbClr val="1D2B27"/>
@@ -5224,6 +5358,7 @@
           </a:p>
           <a:p xmlns:a="http://schemas.openxmlformats.org/drawingml/2006/main">
             <a:pPr>
+              <a:buNone/>
               <a:defRPr sz="1200" b="0">
                 <a:solidFill>
                   <a:srgbClr val="1D2B27"/>
@@ -5249,7 +5384,7 @@
       </p:sp>
       <p:sp>
         <p:nvSpPr>
-          <p:cNvPr id="15" name="">
+          <p:cNvPr id="15" name="Rectangle: Rounded Corners 14">
             <a:extLst xmlns:a="http://schemas.openxmlformats.org/drawingml/2006/main">
               <a:ext uri="{FF2B5EF4-FFF2-40B4-BE49-F238E27FC236}">
                 <a16:creationId xmlns:a16="http://schemas.microsoft.com/office/drawing/2014/main" id="{426995EE-9131-4468-BC27-6FFABA62366E}"/>
@@ -5281,7 +5416,7 @@
       </p:sp>
       <p:sp>
         <p:nvSpPr>
-          <p:cNvPr id="16" name="">
+          <p:cNvPr id="16" name="Rectangle 15">
             <a:extLst xmlns:a="http://schemas.openxmlformats.org/drawingml/2006/main">
               <a:ext uri="{FF2B5EF4-FFF2-40B4-BE49-F238E27FC236}">
                 <a16:creationId xmlns:a16="http://schemas.microsoft.com/office/drawing/2014/main" id="{9292D356-1DF9-4B20-A058-BBE2AC77E12C}"/>
@@ -5313,6 +5448,7 @@
           <a:lstStyle xmlns:a="http://schemas.openxmlformats.org/drawingml/2006/main"/>
           <a:p xmlns:a="http://schemas.openxmlformats.org/drawingml/2006/main">
             <a:pPr>
+              <a:buNone/>
               <a:defRPr sz="1725" b="1">
                 <a:solidFill>
                   <a:srgbClr val="173B31"/>
@@ -5338,7 +5474,7 @@
       </p:sp>
       <p:sp>
         <p:nvSpPr>
-          <p:cNvPr id="17" name="">
+          <p:cNvPr id="17" name="Rectangle 16">
             <a:extLst xmlns:a="http://schemas.openxmlformats.org/drawingml/2006/main">
               <a:ext uri="{FF2B5EF4-FFF2-40B4-BE49-F238E27FC236}">
                 <a16:creationId xmlns:a16="http://schemas.microsoft.com/office/drawing/2014/main" id="{233479A3-B736-45F3-BD9A-1052DD989C0E}"/>
@@ -5365,11 +5501,12 @@
         </p:spPr>
         <p:txBody>
           <a:bodyPr xmlns:a="http://schemas.openxmlformats.org/drawingml/2006/main">
-            <a:normAutofit fontScale="100000"/>
-          </a:bodyPr>
-          <a:lstStyle xmlns:a="http://schemas.openxmlformats.org/drawingml/2006/main"/>
-          <a:p xmlns:a="http://schemas.openxmlformats.org/drawingml/2006/main">
-            <a:pPr>
+            <a:normAutofit/>
+          </a:bodyPr>
+          <a:lstStyle xmlns:a="http://schemas.openxmlformats.org/drawingml/2006/main"/>
+          <a:p xmlns:a="http://schemas.openxmlformats.org/drawingml/2006/main">
+            <a:pPr>
+              <a:buNone/>
               <a:defRPr sz="1200" b="0">
                 <a:solidFill>
                   <a:srgbClr val="1D2B27"/>
@@ -5393,6 +5530,7 @@
           </a:p>
           <a:p xmlns:a="http://schemas.openxmlformats.org/drawingml/2006/main">
             <a:pPr>
+              <a:buNone/>
               <a:defRPr sz="1200" b="0">
                 <a:solidFill>
                   <a:srgbClr val="1D2B27"/>
@@ -5418,7 +5556,7 @@
       </p:sp>
       <p:sp>
         <p:nvSpPr>
-          <p:cNvPr id="18" name="">
+          <p:cNvPr id="18" name="Rectangle: Rounded Corners 17">
             <a:extLst xmlns:a="http://schemas.openxmlformats.org/drawingml/2006/main">
               <a:ext uri="{FF2B5EF4-FFF2-40B4-BE49-F238E27FC236}">
                 <a16:creationId xmlns:a16="http://schemas.microsoft.com/office/drawing/2014/main" id="{EEA1A1DA-9FB1-4037-8BCE-1BB83FBB37BF}"/>
@@ -5450,7 +5588,7 @@
       </p:sp>
       <p:sp>
         <p:nvSpPr>
-          <p:cNvPr id="19" name="">
+          <p:cNvPr id="19" name="Rectangle 18">
             <a:extLst xmlns:a="http://schemas.openxmlformats.org/drawingml/2006/main">
               <a:ext uri="{FF2B5EF4-FFF2-40B4-BE49-F238E27FC236}">
                 <a16:creationId xmlns:a16="http://schemas.microsoft.com/office/drawing/2014/main" id="{4E8E4D0E-BEDC-40FE-80E9-B0D23DFEFD44}"/>
@@ -5482,6 +5620,7 @@
           <a:lstStyle xmlns:a="http://schemas.openxmlformats.org/drawingml/2006/main"/>
           <a:p xmlns:a="http://schemas.openxmlformats.org/drawingml/2006/main">
             <a:pPr>
+              <a:buNone/>
               <a:defRPr sz="1725" b="1">
                 <a:solidFill>
                   <a:srgbClr val="173B31"/>
@@ -5507,7 +5646,7 @@
       </p:sp>
       <p:sp>
         <p:nvSpPr>
-          <p:cNvPr id="20" name="">
+          <p:cNvPr id="20" name="Rectangle 19">
             <a:extLst xmlns:a="http://schemas.openxmlformats.org/drawingml/2006/main">
               <a:ext uri="{FF2B5EF4-FFF2-40B4-BE49-F238E27FC236}">
                 <a16:creationId xmlns:a16="http://schemas.microsoft.com/office/drawing/2014/main" id="{139698C1-1BCB-4846-9732-4147A297B57C}"/>
@@ -5539,6 +5678,7 @@
           <a:lstStyle xmlns:a="http://schemas.openxmlformats.org/drawingml/2006/main"/>
           <a:p xmlns:a="http://schemas.openxmlformats.org/drawingml/2006/main">
             <a:pPr>
+              <a:buNone/>
               <a:defRPr sz="1200" b="0">
                 <a:solidFill>
                   <a:srgbClr val="1D2B27"/>
@@ -5557,11 +5697,12 @@
                 <a:ea typeface="Arial"/>
                 <a:cs typeface="Arial"/>
               </a:rPr>
-              <a:t>Approved rows</a:t>
-            </a:r>
-          </a:p>
-          <a:p xmlns:a="http://schemas.openxmlformats.org/drawingml/2006/main">
-            <a:pPr>
+              <a:t>Venue Explorer +</a:t>
+            </a:r>
+          </a:p>
+          <a:p xmlns:a="http://schemas.openxmlformats.org/drawingml/2006/main">
+            <a:pPr>
+              <a:buNone/>
               <a:defRPr sz="1200" b="0">
                 <a:solidFill>
                   <a:srgbClr val="1D2B27"/>
@@ -5580,21 +5721,21 @@
                 <a:ea typeface="Arial"/>
                 <a:cs typeface="Arial"/>
               </a:rPr>
-              <a:t>only via RLS</a:t>
+              <a:t>activity counts</a:t>
             </a:r>
           </a:p>
         </p:txBody>
       </p:sp>
       <p:pic>
         <p:nvPicPr>
-          <p:cNvPr id="44" name=""/>
+          <p:cNvPr id="47" name="Picture 43"/>
           <p:cNvPicPr>
             <a:picLocks xmlns:a="http://schemas.openxmlformats.org/drawingml/2006/main" noChangeAspect="1"/>
           </p:cNvPicPr>
           <p:nvPr/>
         </p:nvPicPr>
         <p:blipFill>
-          <a:blip xmlns:r="http://schemas.openxmlformats.org/officeDocument/2006/relationships" xmlns:a="http://schemas.openxmlformats.org/drawingml/2006/main" r:embed="R9d50b46894674e7f"/>
+          <a:blip xmlns:r="http://schemas.openxmlformats.org/officeDocument/2006/relationships" xmlns:a="http://schemas.openxmlformats.org/drawingml/2006/main" r:embed="R917d1c53427c4681"/>
           <a:srcRect xmlns:a="http://schemas.openxmlformats.org/drawingml/2006/main" l="0" t="24596" r="0" b="24596"/>
           <a:stretch xmlns:a="http://schemas.openxmlformats.org/drawingml/2006/main">
             <a:fillRect l="0" t="0" r="0" b="0"/>
@@ -5614,14 +5755,14 @@
       </p:pic>
       <p:pic>
         <p:nvPicPr>
-          <p:cNvPr id="45" name=""/>
+          <p:cNvPr id="48" name="Picture 44"/>
           <p:cNvPicPr>
             <a:picLocks xmlns:a="http://schemas.openxmlformats.org/drawingml/2006/main" noChangeAspect="1"/>
           </p:cNvPicPr>
           <p:nvPr/>
         </p:nvPicPr>
         <p:blipFill>
-          <a:blip xmlns:r="http://schemas.openxmlformats.org/officeDocument/2006/relationships" xmlns:a="http://schemas.openxmlformats.org/drawingml/2006/main" r:embed="Rdfda7a55ec2842a3"/>
+          <a:blip xmlns:r="http://schemas.openxmlformats.org/officeDocument/2006/relationships" xmlns:a="http://schemas.openxmlformats.org/drawingml/2006/main" r:embed="R11c73033c3724aa6"/>
           <a:srcRect xmlns:a="http://schemas.openxmlformats.org/drawingml/2006/main" l="0" t="24588" r="0" b="24588"/>
           <a:stretch xmlns:a="http://schemas.openxmlformats.org/drawingml/2006/main">
             <a:fillRect l="0" t="0" r="0" b="0"/>
@@ -5641,7 +5782,7 @@
       </p:pic>
       <p:sp>
         <p:nvSpPr>
-          <p:cNvPr id="23" name="">
+          <p:cNvPr id="23" name="Rectangle 22">
             <a:extLst xmlns:a="http://schemas.openxmlformats.org/drawingml/2006/main">
               <a:ext uri="{FF2B5EF4-FFF2-40B4-BE49-F238E27FC236}">
                 <a16:creationId xmlns:a16="http://schemas.microsoft.com/office/drawing/2014/main" id="{8A732931-E8E3-49B1-9677-DC48610D8DC9}"/>
@@ -5673,6 +5814,7 @@
           <a:lstStyle xmlns:a="http://schemas.openxmlformats.org/drawingml/2006/main"/>
           <a:p xmlns:a="http://schemas.openxmlformats.org/drawingml/2006/main">
             <a:pPr>
+              <a:buNone/>
               <a:defRPr sz="1275" b="1">
                 <a:solidFill>
                   <a:srgbClr val="C64235"/>
@@ -5727,7 +5869,7 @@
       </p:grpSpPr>
       <p:sp>
         <p:nvSpPr>
-          <p:cNvPr id="31" name="">
+          <p:cNvPr id="31" name="Rectangle 30">
             <a:extLst xmlns:a="http://schemas.openxmlformats.org/drawingml/2006/main">
               <a:ext uri="{FF2B5EF4-FFF2-40B4-BE49-F238E27FC236}">
                 <a16:creationId xmlns:a16="http://schemas.microsoft.com/office/drawing/2014/main" id="{40549B77-E0CC-4D29-93CD-CAA0A46CDD0C}"/>
@@ -5757,7 +5899,7 @@
       </p:sp>
       <p:sp>
         <p:nvSpPr>
-          <p:cNvPr id="2" name="">
+          <p:cNvPr id="2" name="Rectangle 1">
             <a:extLst xmlns:a="http://schemas.openxmlformats.org/drawingml/2006/main">
               <a:ext uri="{FF2B5EF4-FFF2-40B4-BE49-F238E27FC236}">
                 <a16:creationId xmlns:a16="http://schemas.microsoft.com/office/drawing/2014/main" id="{A227215E-31EC-4D47-BDE0-9527BAEBDF00}"/>
@@ -5784,11 +5926,12 @@
         </p:spPr>
         <p:txBody>
           <a:bodyPr xmlns:a="http://schemas.openxmlformats.org/drawingml/2006/main">
-            <a:normAutofit fontScale="100000"/>
-          </a:bodyPr>
-          <a:lstStyle xmlns:a="http://schemas.openxmlformats.org/drawingml/2006/main"/>
-          <a:p xmlns:a="http://schemas.openxmlformats.org/drawingml/2006/main">
-            <a:pPr>
+            <a:normAutofit/>
+          </a:bodyPr>
+          <a:lstStyle xmlns:a="http://schemas.openxmlformats.org/drawingml/2006/main"/>
+          <a:p xmlns:a="http://schemas.openxmlformats.org/drawingml/2006/main">
+            <a:pPr>
+              <a:buNone/>
               <a:defRPr sz="1125" b="1">
                 <a:solidFill>
                   <a:srgbClr val="C64235"/>
@@ -5814,7 +5957,7 @@
       </p:sp>
       <p:sp>
         <p:nvSpPr>
-          <p:cNvPr id="3" name="">
+          <p:cNvPr id="3" name="Rectangle 2">
             <a:extLst xmlns:a="http://schemas.openxmlformats.org/drawingml/2006/main">
               <a:ext uri="{FF2B5EF4-FFF2-40B4-BE49-F238E27FC236}">
                 <a16:creationId xmlns:a16="http://schemas.microsoft.com/office/drawing/2014/main" id="{44DED46C-E022-4677-9866-5AB62D2068FD}"/>
@@ -5841,11 +5984,12 @@
         </p:spPr>
         <p:txBody>
           <a:bodyPr xmlns:a="http://schemas.openxmlformats.org/drawingml/2006/main">
-            <a:normAutofit fontScale="100000"/>
-          </a:bodyPr>
-          <a:lstStyle xmlns:a="http://schemas.openxmlformats.org/drawingml/2006/main"/>
-          <a:p xmlns:a="http://schemas.openxmlformats.org/drawingml/2006/main">
-            <a:pPr>
+            <a:normAutofit/>
+          </a:bodyPr>
+          <a:lstStyle xmlns:a="http://schemas.openxmlformats.org/drawingml/2006/main"/>
+          <a:p xmlns:a="http://schemas.openxmlformats.org/drawingml/2006/main">
+            <a:pPr>
+              <a:buNone/>
               <a:defRPr sz="2700" b="1">
                 <a:solidFill>
                   <a:srgbClr val="173B31"/>
@@ -5871,7 +6015,7 @@
       </p:sp>
       <p:sp>
         <p:nvSpPr>
-          <p:cNvPr id="4" name="">
+          <p:cNvPr id="4" name="Rectangle 3">
             <a:extLst xmlns:a="http://schemas.openxmlformats.org/drawingml/2006/main">
               <a:ext uri="{FF2B5EF4-FFF2-40B4-BE49-F238E27FC236}">
                 <a16:creationId xmlns:a16="http://schemas.microsoft.com/office/drawing/2014/main" id="{A637C7F8-21F8-43CA-9AE3-D53264ABF26F}"/>
@@ -5898,11 +6042,12 @@
         </p:spPr>
         <p:txBody>
           <a:bodyPr xmlns:a="http://schemas.openxmlformats.org/drawingml/2006/main">
-            <a:normAutofit fontScale="100000"/>
-          </a:bodyPr>
-          <a:lstStyle xmlns:a="http://schemas.openxmlformats.org/drawingml/2006/main"/>
-          <a:p xmlns:a="http://schemas.openxmlformats.org/drawingml/2006/main">
-            <a:pPr>
+            <a:normAutofit/>
+          </a:bodyPr>
+          <a:lstStyle xmlns:a="http://schemas.openxmlformats.org/drawingml/2006/main"/>
+          <a:p xmlns:a="http://schemas.openxmlformats.org/drawingml/2006/main">
+            <a:pPr>
+              <a:buNone/>
               <a:defRPr sz="1275" b="0">
                 <a:solidFill>
                   <a:srgbClr val="66736D"/>
@@ -5928,7 +6073,7 @@
       </p:sp>
       <p:sp>
         <p:nvSpPr>
-          <p:cNvPr id="5" name="">
+          <p:cNvPr id="5" name="Rectangle 4">
             <a:extLst xmlns:a="http://schemas.openxmlformats.org/drawingml/2006/main">
               <a:ext uri="{FF2B5EF4-FFF2-40B4-BE49-F238E27FC236}">
                 <a16:creationId xmlns:a16="http://schemas.microsoft.com/office/drawing/2014/main" id="{0429AEBC-51B9-40FB-AD0F-6643EB922119}"/>
@@ -5960,6 +6105,7 @@
           <a:lstStyle xmlns:a="http://schemas.openxmlformats.org/drawingml/2006/main"/>
           <a:p xmlns:a="http://schemas.openxmlformats.org/drawingml/2006/main">
             <a:pPr>
+              <a:buNone/>
               <a:defRPr sz="975" b="1">
                 <a:solidFill>
                   <a:srgbClr val="66736D"/>
@@ -5985,7 +6131,7 @@
       </p:sp>
       <p:sp>
         <p:nvSpPr>
-          <p:cNvPr id="6" name="">
+          <p:cNvPr id="6" name="Rectangle 5">
             <a:extLst xmlns:a="http://schemas.openxmlformats.org/drawingml/2006/main">
               <a:ext uri="{FF2B5EF4-FFF2-40B4-BE49-F238E27FC236}">
                 <a16:creationId xmlns:a16="http://schemas.microsoft.com/office/drawing/2014/main" id="{4DD8EBCB-7EBD-4FB2-B690-433CC0EB70FD}"/>
@@ -6015,7 +6161,7 @@
       </p:sp>
       <p:sp>
         <p:nvSpPr>
-          <p:cNvPr id="7" name="">
+          <p:cNvPr id="7" name="Rectangle 6">
             <a:extLst xmlns:a="http://schemas.openxmlformats.org/drawingml/2006/main">
               <a:ext uri="{FF2B5EF4-FFF2-40B4-BE49-F238E27FC236}">
                 <a16:creationId xmlns:a16="http://schemas.microsoft.com/office/drawing/2014/main" id="{F7541FD1-FC6D-4C33-9B7A-B0B49EFCD492}"/>
@@ -6045,7 +6191,7 @@
       </p:sp>
       <p:sp>
         <p:nvSpPr>
-          <p:cNvPr id="8" name="">
+          <p:cNvPr id="8" name="Rectangle 7">
             <a:extLst xmlns:a="http://schemas.openxmlformats.org/drawingml/2006/main">
               <a:ext uri="{FF2B5EF4-FFF2-40B4-BE49-F238E27FC236}">
                 <a16:creationId xmlns:a16="http://schemas.microsoft.com/office/drawing/2014/main" id="{0AEA4754-6B83-49D7-9B25-9427580F67B7}"/>
@@ -6075,7 +6221,7 @@
       </p:sp>
       <p:sp>
         <p:nvSpPr>
-          <p:cNvPr id="9" name="">
+          <p:cNvPr id="9" name="Rectangle: Rounded Corners 8">
             <a:extLst xmlns:a="http://schemas.openxmlformats.org/drawingml/2006/main">
               <a:ext uri="{FF2B5EF4-FFF2-40B4-BE49-F238E27FC236}">
                 <a16:creationId xmlns:a16="http://schemas.microsoft.com/office/drawing/2014/main" id="{1A1733A3-4B5B-4F01-A9CD-72DA1F957976}"/>
@@ -6089,7 +6235,7 @@
         </p:nvSpPr>
         <p:spPr>
           <a:xfrm xmlns:a="http://schemas.openxmlformats.org/drawingml/2006/main">
-            <a:off x="666750" y="2324100"/>
+            <a:off x="685800" y="2343150"/>
             <a:ext cx="1809750" cy="1371600"/>
           </a:xfrm>
           <a:prstGeom xmlns:a="http://schemas.openxmlformats.org/drawingml/2006/main" prst="roundRect">
@@ -6107,7 +6253,7 @@
       </p:sp>
       <p:sp>
         <p:nvSpPr>
-          <p:cNvPr id="10" name="">
+          <p:cNvPr id="10" name="Rectangle 9">
             <a:extLst xmlns:a="http://schemas.openxmlformats.org/drawingml/2006/main">
               <a:ext uri="{FF2B5EF4-FFF2-40B4-BE49-F238E27FC236}">
                 <a16:creationId xmlns:a16="http://schemas.microsoft.com/office/drawing/2014/main" id="{B9E8D083-9D93-43DE-AA8D-F5D17DF1763B}"/>
@@ -6139,6 +6285,7 @@
           <a:lstStyle xmlns:a="http://schemas.openxmlformats.org/drawingml/2006/main"/>
           <a:p xmlns:a="http://schemas.openxmlformats.org/drawingml/2006/main">
             <a:pPr>
+              <a:buNone/>
               <a:defRPr sz="1725" b="1">
                 <a:solidFill>
                   <a:srgbClr val="FFFFFF"/>
@@ -6164,7 +6311,7 @@
       </p:sp>
       <p:sp>
         <p:nvSpPr>
-          <p:cNvPr id="11" name="">
+          <p:cNvPr id="11" name="Rectangle 10">
             <a:extLst xmlns:a="http://schemas.openxmlformats.org/drawingml/2006/main">
               <a:ext uri="{FF2B5EF4-FFF2-40B4-BE49-F238E27FC236}">
                 <a16:creationId xmlns:a16="http://schemas.microsoft.com/office/drawing/2014/main" id="{7D9A9AC3-EE3D-4ADB-82C4-659BCE64E95E}"/>
@@ -6191,11 +6338,12 @@
         </p:spPr>
         <p:txBody>
           <a:bodyPr xmlns:a="http://schemas.openxmlformats.org/drawingml/2006/main">
-            <a:normAutofit fontScale="100000"/>
-          </a:bodyPr>
-          <a:lstStyle xmlns:a="http://schemas.openxmlformats.org/drawingml/2006/main"/>
-          <a:p xmlns:a="http://schemas.openxmlformats.org/drawingml/2006/main">
-            <a:pPr>
+            <a:normAutofit/>
+          </a:bodyPr>
+          <a:lstStyle xmlns:a="http://schemas.openxmlformats.org/drawingml/2006/main"/>
+          <a:p xmlns:a="http://schemas.openxmlformats.org/drawingml/2006/main">
+            <a:pPr>
+              <a:buNone/>
               <a:defRPr sz="1200" b="0">
                 <a:solidFill>
                   <a:srgbClr val="FFFFFF"/>
@@ -6219,6 +6367,7 @@
           </a:p>
           <a:p xmlns:a="http://schemas.openxmlformats.org/drawingml/2006/main">
             <a:pPr>
+              <a:buNone/>
               <a:defRPr sz="1200" b="0">
                 <a:solidFill>
                   <a:srgbClr val="FFFFFF"/>
@@ -6244,7 +6393,7 @@
       </p:sp>
       <p:sp>
         <p:nvSpPr>
-          <p:cNvPr id="12" name="">
+          <p:cNvPr id="12" name="Rectangle: Rounded Corners 11">
             <a:extLst xmlns:a="http://schemas.openxmlformats.org/drawingml/2006/main">
               <a:ext uri="{FF2B5EF4-FFF2-40B4-BE49-F238E27FC236}">
                 <a16:creationId xmlns:a16="http://schemas.microsoft.com/office/drawing/2014/main" id="{F9264A52-29F4-473C-B6CE-1CBE904C43D9}"/>
@@ -6276,7 +6425,7 @@
       </p:sp>
       <p:sp>
         <p:nvSpPr>
-          <p:cNvPr id="13" name="">
+          <p:cNvPr id="13" name="Rectangle 12">
             <a:extLst xmlns:a="http://schemas.openxmlformats.org/drawingml/2006/main">
               <a:ext uri="{FF2B5EF4-FFF2-40B4-BE49-F238E27FC236}">
                 <a16:creationId xmlns:a16="http://schemas.microsoft.com/office/drawing/2014/main" id="{CB401F92-A76C-4361-A333-0F0E6FD066A1}"/>
@@ -6308,6 +6457,7 @@
           <a:lstStyle xmlns:a="http://schemas.openxmlformats.org/drawingml/2006/main"/>
           <a:p xmlns:a="http://schemas.openxmlformats.org/drawingml/2006/main">
             <a:pPr>
+              <a:buNone/>
               <a:defRPr sz="1725" b="1">
                 <a:solidFill>
                   <a:srgbClr val="173B31"/>
@@ -6333,7 +6483,7 @@
       </p:sp>
       <p:sp>
         <p:nvSpPr>
-          <p:cNvPr id="14" name="">
+          <p:cNvPr id="14" name="Rectangle 13">
             <a:extLst xmlns:a="http://schemas.openxmlformats.org/drawingml/2006/main">
               <a:ext uri="{FF2B5EF4-FFF2-40B4-BE49-F238E27FC236}">
                 <a16:creationId xmlns:a16="http://schemas.microsoft.com/office/drawing/2014/main" id="{A5631891-BED3-46D5-8019-0E2D06FAADDE}"/>
@@ -6360,11 +6510,12 @@
         </p:spPr>
         <p:txBody>
           <a:bodyPr xmlns:a="http://schemas.openxmlformats.org/drawingml/2006/main">
-            <a:normAutofit fontScale="100000"/>
-          </a:bodyPr>
-          <a:lstStyle xmlns:a="http://schemas.openxmlformats.org/drawingml/2006/main"/>
-          <a:p xmlns:a="http://schemas.openxmlformats.org/drawingml/2006/main">
-            <a:pPr>
+            <a:normAutofit/>
+          </a:bodyPr>
+          <a:lstStyle xmlns:a="http://schemas.openxmlformats.org/drawingml/2006/main"/>
+          <a:p xmlns:a="http://schemas.openxmlformats.org/drawingml/2006/main">
+            <a:pPr>
+              <a:buNone/>
               <a:defRPr sz="1200" b="0">
                 <a:solidFill>
                   <a:srgbClr val="173B31"/>
@@ -6388,6 +6539,7 @@
           </a:p>
           <a:p xmlns:a="http://schemas.openxmlformats.org/drawingml/2006/main">
             <a:pPr>
+              <a:buNone/>
               <a:defRPr sz="1200" b="0">
                 <a:solidFill>
                   <a:srgbClr val="173B31"/>
@@ -6413,7 +6565,7 @@
       </p:sp>
       <p:sp>
         <p:nvSpPr>
-          <p:cNvPr id="15" name="">
+          <p:cNvPr id="15" name="Rectangle: Rounded Corners 14">
             <a:extLst xmlns:a="http://schemas.openxmlformats.org/drawingml/2006/main">
               <a:ext uri="{FF2B5EF4-FFF2-40B4-BE49-F238E27FC236}">
                 <a16:creationId xmlns:a16="http://schemas.microsoft.com/office/drawing/2014/main" id="{C99DF8A3-7944-4108-A644-79647A6D6230}"/>
@@ -6445,7 +6597,7 @@
       </p:sp>
       <p:sp>
         <p:nvSpPr>
-          <p:cNvPr id="16" name="">
+          <p:cNvPr id="16" name="Rectangle 15">
             <a:extLst xmlns:a="http://schemas.openxmlformats.org/drawingml/2006/main">
               <a:ext uri="{FF2B5EF4-FFF2-40B4-BE49-F238E27FC236}">
                 <a16:creationId xmlns:a16="http://schemas.microsoft.com/office/drawing/2014/main" id="{34499373-5702-46A4-A787-285BE91D92DD}"/>
@@ -6477,6 +6629,7 @@
           <a:lstStyle xmlns:a="http://schemas.openxmlformats.org/drawingml/2006/main"/>
           <a:p xmlns:a="http://schemas.openxmlformats.org/drawingml/2006/main">
             <a:pPr>
+              <a:buNone/>
               <a:defRPr sz="1725" b="1">
                 <a:solidFill>
                   <a:srgbClr val="173B31"/>
@@ -6502,7 +6655,7 @@
       </p:sp>
       <p:sp>
         <p:nvSpPr>
-          <p:cNvPr id="17" name="">
+          <p:cNvPr id="17" name="Rectangle 16">
             <a:extLst xmlns:a="http://schemas.openxmlformats.org/drawingml/2006/main">
               <a:ext uri="{FF2B5EF4-FFF2-40B4-BE49-F238E27FC236}">
                 <a16:creationId xmlns:a16="http://schemas.microsoft.com/office/drawing/2014/main" id="{BB954A1A-693C-4C20-9DE1-4146A99122E2}"/>
@@ -6529,11 +6682,12 @@
         </p:spPr>
         <p:txBody>
           <a:bodyPr xmlns:a="http://schemas.openxmlformats.org/drawingml/2006/main">
-            <a:normAutofit fontScale="100000"/>
-          </a:bodyPr>
-          <a:lstStyle xmlns:a="http://schemas.openxmlformats.org/drawingml/2006/main"/>
-          <a:p xmlns:a="http://schemas.openxmlformats.org/drawingml/2006/main">
-            <a:pPr>
+            <a:normAutofit/>
+          </a:bodyPr>
+          <a:lstStyle xmlns:a="http://schemas.openxmlformats.org/drawingml/2006/main"/>
+          <a:p xmlns:a="http://schemas.openxmlformats.org/drawingml/2006/main">
+            <a:pPr>
+              <a:buNone/>
               <a:defRPr sz="1200" b="0">
                 <a:solidFill>
                   <a:srgbClr val="173B31"/>
@@ -6557,6 +6711,7 @@
           </a:p>
           <a:p xmlns:a="http://schemas.openxmlformats.org/drawingml/2006/main">
             <a:pPr>
+              <a:buNone/>
               <a:defRPr sz="1200" b="0">
                 <a:solidFill>
                   <a:srgbClr val="173B31"/>
@@ -6582,7 +6737,7 @@
       </p:sp>
       <p:sp>
         <p:nvSpPr>
-          <p:cNvPr id="18" name="">
+          <p:cNvPr id="18" name="Rectangle: Rounded Corners 17">
             <a:extLst xmlns:a="http://schemas.openxmlformats.org/drawingml/2006/main">
               <a:ext uri="{FF2B5EF4-FFF2-40B4-BE49-F238E27FC236}">
                 <a16:creationId xmlns:a16="http://schemas.microsoft.com/office/drawing/2014/main" id="{4F1E1FC0-BAB8-4C1A-A3C6-33E77CF9C711}"/>
@@ -6614,7 +6769,7 @@
       </p:sp>
       <p:sp>
         <p:nvSpPr>
-          <p:cNvPr id="19" name="">
+          <p:cNvPr id="19" name="Rectangle 18">
             <a:extLst xmlns:a="http://schemas.openxmlformats.org/drawingml/2006/main">
               <a:ext uri="{FF2B5EF4-FFF2-40B4-BE49-F238E27FC236}">
                 <a16:creationId xmlns:a16="http://schemas.microsoft.com/office/drawing/2014/main" id="{107E1CC4-1BC7-4052-8D5C-A347745F1D83}"/>
@@ -6646,6 +6801,7 @@
           <a:lstStyle xmlns:a="http://schemas.openxmlformats.org/drawingml/2006/main"/>
           <a:p xmlns:a="http://schemas.openxmlformats.org/drawingml/2006/main">
             <a:pPr>
+              <a:buNone/>
               <a:defRPr sz="1725" b="1">
                 <a:solidFill>
                   <a:srgbClr val="173B31"/>
@@ -6671,7 +6827,7 @@
       </p:sp>
       <p:sp>
         <p:nvSpPr>
-          <p:cNvPr id="20" name="">
+          <p:cNvPr id="20" name="Rectangle 19">
             <a:extLst xmlns:a="http://schemas.openxmlformats.org/drawingml/2006/main">
               <a:ext uri="{FF2B5EF4-FFF2-40B4-BE49-F238E27FC236}">
                 <a16:creationId xmlns:a16="http://schemas.microsoft.com/office/drawing/2014/main" id="{76EF1A67-E277-4EB2-9869-351A2298CE4A}"/>
@@ -6703,6 +6859,7 @@
           <a:lstStyle xmlns:a="http://schemas.openxmlformats.org/drawingml/2006/main"/>
           <a:p xmlns:a="http://schemas.openxmlformats.org/drawingml/2006/main">
             <a:pPr>
+              <a:buNone/>
               <a:defRPr sz="1200" b="0">
                 <a:solidFill>
                   <a:srgbClr val="173B31"/>
@@ -6726,6 +6883,7 @@
           </a:p>
           <a:p xmlns:a="http://schemas.openxmlformats.org/drawingml/2006/main">
             <a:pPr>
+              <a:buNone/>
               <a:defRPr sz="1200" b="0">
                 <a:solidFill>
                   <a:srgbClr val="173B31"/>
@@ -6751,7 +6909,7 @@
       </p:sp>
       <p:sp>
         <p:nvSpPr>
-          <p:cNvPr id="21" name="">
+          <p:cNvPr id="21" name="Rectangle 20">
             <a:extLst xmlns:a="http://schemas.openxmlformats.org/drawingml/2006/main">
               <a:ext uri="{FF2B5EF4-FFF2-40B4-BE49-F238E27FC236}">
                 <a16:creationId xmlns:a16="http://schemas.microsoft.com/office/drawing/2014/main" id="{E21763DA-57F9-4EA1-A730-192231A63F86}"/>
@@ -6783,6 +6941,7 @@
           <a:lstStyle xmlns:a="http://schemas.openxmlformats.org/drawingml/2006/main"/>
           <a:p xmlns:a="http://schemas.openxmlformats.org/drawingml/2006/main">
             <a:pPr>
+              <a:buNone/>
               <a:defRPr sz="1650" b="1">
                 <a:solidFill>
                   <a:srgbClr val="C64235"/>
@@ -6808,7 +6967,7 @@
       </p:sp>
       <p:sp>
         <p:nvSpPr>
-          <p:cNvPr id="22" name="">
+          <p:cNvPr id="22" name="Rectangle: Rounded Corners 21">
             <a:extLst xmlns:a="http://schemas.openxmlformats.org/drawingml/2006/main">
               <a:ext uri="{FF2B5EF4-FFF2-40B4-BE49-F238E27FC236}">
                 <a16:creationId xmlns:a16="http://schemas.microsoft.com/office/drawing/2014/main" id="{2C733E97-0ACA-426F-A1C9-066257200B7B}"/>
@@ -6840,7 +6999,7 @@
       </p:sp>
       <p:sp>
         <p:nvSpPr>
-          <p:cNvPr id="23" name="">
+          <p:cNvPr id="23" name="Rectangle 22">
             <a:extLst xmlns:a="http://schemas.openxmlformats.org/drawingml/2006/main">
               <a:ext uri="{FF2B5EF4-FFF2-40B4-BE49-F238E27FC236}">
                 <a16:creationId xmlns:a16="http://schemas.microsoft.com/office/drawing/2014/main" id="{67C28F32-D3B3-4427-949F-B4C14B082A07}"/>
@@ -6872,6 +7031,7 @@
           <a:lstStyle xmlns:a="http://schemas.openxmlformats.org/drawingml/2006/main"/>
           <a:p xmlns:a="http://schemas.openxmlformats.org/drawingml/2006/main">
             <a:pPr>
+              <a:buNone/>
               <a:defRPr sz="1125" b="1">
                 <a:solidFill>
                   <a:srgbClr val="173B31"/>
@@ -6897,7 +7057,7 @@
       </p:sp>
       <p:sp>
         <p:nvSpPr>
-          <p:cNvPr id="24" name="">
+          <p:cNvPr id="24" name="Rectangle: Rounded Corners 23">
             <a:extLst xmlns:a="http://schemas.openxmlformats.org/drawingml/2006/main">
               <a:ext uri="{FF2B5EF4-FFF2-40B4-BE49-F238E27FC236}">
                 <a16:creationId xmlns:a16="http://schemas.microsoft.com/office/drawing/2014/main" id="{DE7EFFFD-9462-4D06-8763-CABDD0C9BC8A}"/>
@@ -6929,7 +7089,7 @@
       </p:sp>
       <p:sp>
         <p:nvSpPr>
-          <p:cNvPr id="25" name="">
+          <p:cNvPr id="25" name="Rectangle 24">
             <a:extLst xmlns:a="http://schemas.openxmlformats.org/drawingml/2006/main">
               <a:ext uri="{FF2B5EF4-FFF2-40B4-BE49-F238E27FC236}">
                 <a16:creationId xmlns:a16="http://schemas.microsoft.com/office/drawing/2014/main" id="{E821A916-3C0E-4FB0-815D-184B9FC6FB0C}"/>
@@ -6961,6 +7121,7 @@
           <a:lstStyle xmlns:a="http://schemas.openxmlformats.org/drawingml/2006/main"/>
           <a:p xmlns:a="http://schemas.openxmlformats.org/drawingml/2006/main">
             <a:pPr>
+              <a:buNone/>
               <a:defRPr sz="1125" b="1">
                 <a:solidFill>
                   <a:srgbClr val="173B31"/>
@@ -6986,7 +7147,7 @@
       </p:sp>
       <p:sp>
         <p:nvSpPr>
-          <p:cNvPr id="26" name="">
+          <p:cNvPr id="26" name="Rectangle: Rounded Corners 25">
             <a:extLst xmlns:a="http://schemas.openxmlformats.org/drawingml/2006/main">
               <a:ext uri="{FF2B5EF4-FFF2-40B4-BE49-F238E27FC236}">
                 <a16:creationId xmlns:a16="http://schemas.microsoft.com/office/drawing/2014/main" id="{972AA3B0-5B6F-4357-AA3B-2DA25D856A99}"/>
@@ -7018,7 +7179,7 @@
       </p:sp>
       <p:sp>
         <p:nvSpPr>
-          <p:cNvPr id="27" name="">
+          <p:cNvPr id="27" name="Rectangle 26">
             <a:extLst xmlns:a="http://schemas.openxmlformats.org/drawingml/2006/main">
               <a:ext uri="{FF2B5EF4-FFF2-40B4-BE49-F238E27FC236}">
                 <a16:creationId xmlns:a16="http://schemas.microsoft.com/office/drawing/2014/main" id="{907C03F8-0AA9-4253-A7AE-3CD70EEE852D}"/>
@@ -7050,6 +7211,7 @@
           <a:lstStyle xmlns:a="http://schemas.openxmlformats.org/drawingml/2006/main"/>
           <a:p xmlns:a="http://schemas.openxmlformats.org/drawingml/2006/main">
             <a:pPr>
+              <a:buNone/>
               <a:defRPr sz="1125" b="1">
                 <a:solidFill>
                   <a:srgbClr val="173B31"/>
@@ -7075,7 +7237,7 @@
       </p:sp>
       <p:sp>
         <p:nvSpPr>
-          <p:cNvPr id="28" name="">
+          <p:cNvPr id="28" name="Rectangle: Rounded Corners 27">
             <a:extLst xmlns:a="http://schemas.openxmlformats.org/drawingml/2006/main">
               <a:ext uri="{FF2B5EF4-FFF2-40B4-BE49-F238E27FC236}">
                 <a16:creationId xmlns:a16="http://schemas.microsoft.com/office/drawing/2014/main" id="{A3EFE12C-51D1-4EDA-9111-B8C1181A62D7}"/>
@@ -7107,7 +7269,7 @@
       </p:sp>
       <p:sp>
         <p:nvSpPr>
-          <p:cNvPr id="29" name="">
+          <p:cNvPr id="29" name="Rectangle 28">
             <a:extLst xmlns:a="http://schemas.openxmlformats.org/drawingml/2006/main">
               <a:ext uri="{FF2B5EF4-FFF2-40B4-BE49-F238E27FC236}">
                 <a16:creationId xmlns:a16="http://schemas.microsoft.com/office/drawing/2014/main" id="{A8E1ACAF-AE5D-4090-89AF-325A5E9BA68A}"/>
@@ -7139,6 +7301,7 @@
           <a:lstStyle xmlns:a="http://schemas.openxmlformats.org/drawingml/2006/main"/>
           <a:p xmlns:a="http://schemas.openxmlformats.org/drawingml/2006/main">
             <a:pPr>
+              <a:buNone/>
               <a:defRPr sz="1125" b="1">
                 <a:solidFill>
                   <a:srgbClr val="173B31"/>
@@ -7157,14 +7320,14 @@
                 <a:ea typeface="Arial"/>
                 <a:cs typeface="Arial"/>
               </a:rPr>
-              <a:t>Automated test, build, deploy and health check</a:t>
-            </a:r>
-          </a:p>
-        </p:txBody>
-      </p:sp>
-      <p:sp>
-        <p:nvSpPr>
-          <p:cNvPr id="30" name="">
+              <a:t>Unit, browser, accessibility and CodeQL checks</a:t>
+            </a:r>
+          </a:p>
+        </p:txBody>
+      </p:sp>
+      <p:sp>
+        <p:nvSpPr>
+          <p:cNvPr id="30" name="Rectangle 29">
             <a:extLst xmlns:a="http://schemas.openxmlformats.org/drawingml/2006/main">
               <a:ext uri="{FF2B5EF4-FFF2-40B4-BE49-F238E27FC236}">
                 <a16:creationId xmlns:a16="http://schemas.microsoft.com/office/drawing/2014/main" id="{41375777-37FE-4536-8249-750CC613E5D4}"/>
@@ -7196,6 +7359,7 @@
           <a:lstStyle xmlns:a="http://schemas.openxmlformats.org/drawingml/2006/main"/>
           <a:p xmlns:a="http://schemas.openxmlformats.org/drawingml/2006/main">
             <a:pPr>
+              <a:buNone/>
               <a:defRPr sz="1275" b="1">
                 <a:solidFill>
                   <a:srgbClr val="173B31"/>
@@ -7250,7 +7414,7 @@
       </p:grpSpPr>
       <p:sp>
         <p:nvSpPr>
-          <p:cNvPr id="20" name="">
+          <p:cNvPr id="20" name="Rectangle 19">
             <a:extLst xmlns:a="http://schemas.openxmlformats.org/drawingml/2006/main">
               <a:ext uri="{FF2B5EF4-FFF2-40B4-BE49-F238E27FC236}">
                 <a16:creationId xmlns:a16="http://schemas.microsoft.com/office/drawing/2014/main" id="{72A9AF9E-68B1-47B7-AB87-E3AD4867AD6E}"/>
@@ -7280,7 +7444,7 @@
       </p:sp>
       <p:sp>
         <p:nvSpPr>
-          <p:cNvPr id="2" name="">
+          <p:cNvPr id="2" name="Rectangle 1">
             <a:extLst xmlns:a="http://schemas.openxmlformats.org/drawingml/2006/main">
               <a:ext uri="{FF2B5EF4-FFF2-40B4-BE49-F238E27FC236}">
                 <a16:creationId xmlns:a16="http://schemas.microsoft.com/office/drawing/2014/main" id="{CD0DE60C-034E-4092-93BA-122691C21DAE}"/>
@@ -7307,11 +7471,12 @@
         </p:spPr>
         <p:txBody>
           <a:bodyPr xmlns:a="http://schemas.openxmlformats.org/drawingml/2006/main">
-            <a:normAutofit fontScale="100000"/>
-          </a:bodyPr>
-          <a:lstStyle xmlns:a="http://schemas.openxmlformats.org/drawingml/2006/main"/>
-          <a:p xmlns:a="http://schemas.openxmlformats.org/drawingml/2006/main">
-            <a:pPr>
+            <a:normAutofit/>
+          </a:bodyPr>
+          <a:lstStyle xmlns:a="http://schemas.openxmlformats.org/drawingml/2006/main"/>
+          <a:p xmlns:a="http://schemas.openxmlformats.org/drawingml/2006/main">
+            <a:pPr>
+              <a:buNone/>
               <a:defRPr sz="1125" b="1">
                 <a:solidFill>
                   <a:srgbClr val="C64235"/>
@@ -7337,7 +7502,7 @@
       </p:sp>
       <p:sp>
         <p:nvSpPr>
-          <p:cNvPr id="3" name="">
+          <p:cNvPr id="3" name="Rectangle 2">
             <a:extLst xmlns:a="http://schemas.openxmlformats.org/drawingml/2006/main">
               <a:ext uri="{FF2B5EF4-FFF2-40B4-BE49-F238E27FC236}">
                 <a16:creationId xmlns:a16="http://schemas.microsoft.com/office/drawing/2014/main" id="{6BCA1F49-F211-4E4E-A69E-9D7D05A55992}"/>
@@ -7364,11 +7529,12 @@
         </p:spPr>
         <p:txBody>
           <a:bodyPr xmlns:a="http://schemas.openxmlformats.org/drawingml/2006/main">
-            <a:normAutofit fontScale="100000"/>
-          </a:bodyPr>
-          <a:lstStyle xmlns:a="http://schemas.openxmlformats.org/drawingml/2006/main"/>
-          <a:p xmlns:a="http://schemas.openxmlformats.org/drawingml/2006/main">
-            <a:pPr>
+            <a:normAutofit/>
+          </a:bodyPr>
+          <a:lstStyle xmlns:a="http://schemas.openxmlformats.org/drawingml/2006/main"/>
+          <a:p xmlns:a="http://schemas.openxmlformats.org/drawingml/2006/main">
+            <a:pPr>
+              <a:buNone/>
               <a:defRPr sz="2700" b="1">
                 <a:solidFill>
                   <a:srgbClr val="173B31"/>
@@ -7394,7 +7560,7 @@
       </p:sp>
       <p:sp>
         <p:nvSpPr>
-          <p:cNvPr id="4" name="">
+          <p:cNvPr id="4" name="Rectangle 3">
             <a:extLst xmlns:a="http://schemas.openxmlformats.org/drawingml/2006/main">
               <a:ext uri="{FF2B5EF4-FFF2-40B4-BE49-F238E27FC236}">
                 <a16:creationId xmlns:a16="http://schemas.microsoft.com/office/drawing/2014/main" id="{D115D109-73EE-40A8-9FD5-92FE8B692050}"/>
@@ -7421,11 +7587,12 @@
         </p:spPr>
         <p:txBody>
           <a:bodyPr xmlns:a="http://schemas.openxmlformats.org/drawingml/2006/main">
-            <a:normAutofit fontScale="100000"/>
-          </a:bodyPr>
-          <a:lstStyle xmlns:a="http://schemas.openxmlformats.org/drawingml/2006/main"/>
-          <a:p xmlns:a="http://schemas.openxmlformats.org/drawingml/2006/main">
-            <a:pPr>
+            <a:normAutofit/>
+          </a:bodyPr>
+          <a:lstStyle xmlns:a="http://schemas.openxmlformats.org/drawingml/2006/main"/>
+          <a:p xmlns:a="http://schemas.openxmlformats.org/drawingml/2006/main">
+            <a:pPr>
+              <a:buNone/>
               <a:defRPr sz="1275" b="0">
                 <a:solidFill>
                   <a:srgbClr val="66736D"/>
@@ -7451,7 +7618,7 @@
       </p:sp>
       <p:sp>
         <p:nvSpPr>
-          <p:cNvPr id="5" name="">
+          <p:cNvPr id="5" name="Rectangle 4">
             <a:extLst xmlns:a="http://schemas.openxmlformats.org/drawingml/2006/main">
               <a:ext uri="{FF2B5EF4-FFF2-40B4-BE49-F238E27FC236}">
                 <a16:creationId xmlns:a16="http://schemas.microsoft.com/office/drawing/2014/main" id="{5AECB989-1951-48B9-9805-D2C694650BAA}"/>
@@ -7483,6 +7650,7 @@
           <a:lstStyle xmlns:a="http://schemas.openxmlformats.org/drawingml/2006/main"/>
           <a:p xmlns:a="http://schemas.openxmlformats.org/drawingml/2006/main">
             <a:pPr>
+              <a:buNone/>
               <a:defRPr sz="975" b="1">
                 <a:solidFill>
                   <a:srgbClr val="66736D"/>
@@ -7508,7 +7676,7 @@
       </p:sp>
       <p:sp>
         <p:nvSpPr>
-          <p:cNvPr id="6" name="">
+          <p:cNvPr id="6" name="Rectangle: Rounded Corners 5">
             <a:extLst xmlns:a="http://schemas.openxmlformats.org/drawingml/2006/main">
               <a:ext uri="{FF2B5EF4-FFF2-40B4-BE49-F238E27FC236}">
                 <a16:creationId xmlns:a16="http://schemas.microsoft.com/office/drawing/2014/main" id="{A7727159-EBBB-45D1-9326-314155850C1E}"/>
@@ -7540,7 +7708,7 @@
       </p:sp>
       <p:sp>
         <p:nvSpPr>
-          <p:cNvPr id="7" name="">
+          <p:cNvPr id="7" name="Rectangle 6">
             <a:extLst xmlns:a="http://schemas.openxmlformats.org/drawingml/2006/main">
               <a:ext uri="{FF2B5EF4-FFF2-40B4-BE49-F238E27FC236}">
                 <a16:creationId xmlns:a16="http://schemas.microsoft.com/office/drawing/2014/main" id="{877339FE-2556-44C3-B1F4-2B2CEBEB5A13}"/>
@@ -7572,6 +7740,7 @@
           <a:lstStyle xmlns:a="http://schemas.openxmlformats.org/drawingml/2006/main"/>
           <a:p xmlns:a="http://schemas.openxmlformats.org/drawingml/2006/main">
             <a:pPr>
+              <a:buNone/>
               <a:defRPr sz="1425" b="1">
                 <a:solidFill>
                   <a:srgbClr val="C64235"/>
@@ -7597,7 +7766,7 @@
       </p:sp>
       <p:sp>
         <p:nvSpPr>
-          <p:cNvPr id="8" name="">
+          <p:cNvPr id="8" name="Rectangle 7">
             <a:extLst xmlns:a="http://schemas.openxmlformats.org/drawingml/2006/main">
               <a:ext uri="{FF2B5EF4-FFF2-40B4-BE49-F238E27FC236}">
                 <a16:creationId xmlns:a16="http://schemas.microsoft.com/office/drawing/2014/main" id="{35BEFF2F-4F20-49D8-A823-1FE55CD0CB0B}"/>
@@ -7624,11 +7793,12 @@
         </p:spPr>
         <p:txBody>
           <a:bodyPr xmlns:a="http://schemas.openxmlformats.org/drawingml/2006/main">
-            <a:normAutofit fontScale="100000"/>
-          </a:bodyPr>
-          <a:lstStyle xmlns:a="http://schemas.openxmlformats.org/drawingml/2006/main"/>
-          <a:p xmlns:a="http://schemas.openxmlformats.org/drawingml/2006/main">
-            <a:pPr>
+            <a:normAutofit/>
+          </a:bodyPr>
+          <a:lstStyle xmlns:a="http://schemas.openxmlformats.org/drawingml/2006/main"/>
+          <a:p xmlns:a="http://schemas.openxmlformats.org/drawingml/2006/main">
+            <a:pPr>
+              <a:buNone/>
               <a:defRPr sz="1800" b="1">
                 <a:solidFill>
                   <a:srgbClr val="173B31"/>
@@ -7654,7 +7824,7 @@
       </p:sp>
       <p:sp>
         <p:nvSpPr>
-          <p:cNvPr id="9" name="">
+          <p:cNvPr id="9" name="Rectangle: Rounded Corners 8">
             <a:extLst xmlns:a="http://schemas.openxmlformats.org/drawingml/2006/main">
               <a:ext uri="{FF2B5EF4-FFF2-40B4-BE49-F238E27FC236}">
                 <a16:creationId xmlns:a16="http://schemas.microsoft.com/office/drawing/2014/main" id="{3549BE44-03C1-46AC-92DC-ED167B074069}"/>
@@ -7686,7 +7856,7 @@
       </p:sp>
       <p:sp>
         <p:nvSpPr>
-          <p:cNvPr id="10" name="">
+          <p:cNvPr id="10" name="Rectangle 9">
             <a:extLst xmlns:a="http://schemas.openxmlformats.org/drawingml/2006/main">
               <a:ext uri="{FF2B5EF4-FFF2-40B4-BE49-F238E27FC236}">
                 <a16:creationId xmlns:a16="http://schemas.microsoft.com/office/drawing/2014/main" id="{10CAA520-76C4-40EC-855D-306FDBF9FD0D}"/>
@@ -7718,6 +7888,7 @@
           <a:lstStyle xmlns:a="http://schemas.openxmlformats.org/drawingml/2006/main"/>
           <a:p xmlns:a="http://schemas.openxmlformats.org/drawingml/2006/main">
             <a:pPr>
+              <a:buNone/>
               <a:defRPr sz="1425" b="1">
                 <a:solidFill>
                   <a:srgbClr val="D89029"/>
@@ -7743,7 +7914,7 @@
       </p:sp>
       <p:sp>
         <p:nvSpPr>
-          <p:cNvPr id="11" name="">
+          <p:cNvPr id="11" name="Rectangle 10">
             <a:extLst xmlns:a="http://schemas.openxmlformats.org/drawingml/2006/main">
               <a:ext uri="{FF2B5EF4-FFF2-40B4-BE49-F238E27FC236}">
                 <a16:creationId xmlns:a16="http://schemas.microsoft.com/office/drawing/2014/main" id="{B5A2C566-E850-4B65-AAE5-0A90F3A3D92A}"/>
@@ -7770,11 +7941,12 @@
         </p:spPr>
         <p:txBody>
           <a:bodyPr xmlns:a="http://schemas.openxmlformats.org/drawingml/2006/main">
-            <a:normAutofit fontScale="100000"/>
-          </a:bodyPr>
-          <a:lstStyle xmlns:a="http://schemas.openxmlformats.org/drawingml/2006/main"/>
-          <a:p xmlns:a="http://schemas.openxmlformats.org/drawingml/2006/main">
-            <a:pPr>
+            <a:normAutofit/>
+          </a:bodyPr>
+          <a:lstStyle xmlns:a="http://schemas.openxmlformats.org/drawingml/2006/main"/>
+          <a:p xmlns:a="http://schemas.openxmlformats.org/drawingml/2006/main">
+            <a:pPr>
+              <a:buNone/>
               <a:defRPr sz="1800" b="1">
                 <a:solidFill>
                   <a:srgbClr val="173B31"/>
@@ -7800,7 +7972,7 @@
       </p:sp>
       <p:sp>
         <p:nvSpPr>
-          <p:cNvPr id="12" name="">
+          <p:cNvPr id="12" name="Rectangle: Rounded Corners 11">
             <a:extLst xmlns:a="http://schemas.openxmlformats.org/drawingml/2006/main">
               <a:ext uri="{FF2B5EF4-FFF2-40B4-BE49-F238E27FC236}">
                 <a16:creationId xmlns:a16="http://schemas.microsoft.com/office/drawing/2014/main" id="{2AA7279C-A033-4F6F-8DAA-91E3952684E5}"/>
@@ -7832,7 +8004,7 @@
       </p:sp>
       <p:sp>
         <p:nvSpPr>
-          <p:cNvPr id="13" name="">
+          <p:cNvPr id="13" name="Rectangle 12">
             <a:extLst xmlns:a="http://schemas.openxmlformats.org/drawingml/2006/main">
               <a:ext uri="{FF2B5EF4-FFF2-40B4-BE49-F238E27FC236}">
                 <a16:creationId xmlns:a16="http://schemas.microsoft.com/office/drawing/2014/main" id="{398F8E0A-7ADC-4FDD-AA42-2E43A62016A2}"/>
@@ -7864,6 +8036,7 @@
           <a:lstStyle xmlns:a="http://schemas.openxmlformats.org/drawingml/2006/main"/>
           <a:p xmlns:a="http://schemas.openxmlformats.org/drawingml/2006/main">
             <a:pPr>
+              <a:buNone/>
               <a:defRPr sz="1425" b="1">
                 <a:solidFill>
                   <a:srgbClr val="2D7A62"/>
@@ -7889,7 +8062,7 @@
       </p:sp>
       <p:sp>
         <p:nvSpPr>
-          <p:cNvPr id="14" name="">
+          <p:cNvPr id="14" name="Rectangle 13">
             <a:extLst xmlns:a="http://schemas.openxmlformats.org/drawingml/2006/main">
               <a:ext uri="{FF2B5EF4-FFF2-40B4-BE49-F238E27FC236}">
                 <a16:creationId xmlns:a16="http://schemas.microsoft.com/office/drawing/2014/main" id="{9801A0CF-4E2E-4B76-8424-CD4910368A2F}"/>
@@ -7916,11 +8089,12 @@
         </p:spPr>
         <p:txBody>
           <a:bodyPr xmlns:a="http://schemas.openxmlformats.org/drawingml/2006/main">
-            <a:normAutofit fontScale="100000"/>
-          </a:bodyPr>
-          <a:lstStyle xmlns:a="http://schemas.openxmlformats.org/drawingml/2006/main"/>
-          <a:p xmlns:a="http://schemas.openxmlformats.org/drawingml/2006/main">
-            <a:pPr>
+            <a:normAutofit/>
+          </a:bodyPr>
+          <a:lstStyle xmlns:a="http://schemas.openxmlformats.org/drawingml/2006/main"/>
+          <a:p xmlns:a="http://schemas.openxmlformats.org/drawingml/2006/main">
+            <a:pPr>
+              <a:buNone/>
               <a:defRPr sz="1800" b="1">
                 <a:solidFill>
                   <a:srgbClr val="173B31"/>
@@ -7946,7 +8120,7 @@
       </p:sp>
       <p:sp>
         <p:nvSpPr>
-          <p:cNvPr id="15" name="">
+          <p:cNvPr id="15" name="Rectangle: Rounded Corners 14">
             <a:extLst xmlns:a="http://schemas.openxmlformats.org/drawingml/2006/main">
               <a:ext uri="{FF2B5EF4-FFF2-40B4-BE49-F238E27FC236}">
                 <a16:creationId xmlns:a16="http://schemas.microsoft.com/office/drawing/2014/main" id="{E49E9E47-F86D-4811-BF29-42F6868813E6}"/>
@@ -7978,7 +8152,7 @@
       </p:sp>
       <p:sp>
         <p:nvSpPr>
-          <p:cNvPr id="16" name="">
+          <p:cNvPr id="16" name="Rectangle 15">
             <a:extLst xmlns:a="http://schemas.openxmlformats.org/drawingml/2006/main">
               <a:ext uri="{FF2B5EF4-FFF2-40B4-BE49-F238E27FC236}">
                 <a16:creationId xmlns:a16="http://schemas.microsoft.com/office/drawing/2014/main" id="{A6E81D6C-D9B7-42BE-88A4-3050FE085E06}"/>
@@ -8010,6 +8184,7 @@
           <a:lstStyle xmlns:a="http://schemas.openxmlformats.org/drawingml/2006/main"/>
           <a:p xmlns:a="http://schemas.openxmlformats.org/drawingml/2006/main">
             <a:pPr>
+              <a:buNone/>
               <a:defRPr sz="1425" b="1">
                 <a:solidFill>
                   <a:srgbClr val="4E79A7"/>
@@ -8035,7 +8210,7 @@
       </p:sp>
       <p:sp>
         <p:nvSpPr>
-          <p:cNvPr id="17" name="">
+          <p:cNvPr id="17" name="Rectangle 16">
             <a:extLst xmlns:a="http://schemas.openxmlformats.org/drawingml/2006/main">
               <a:ext uri="{FF2B5EF4-FFF2-40B4-BE49-F238E27FC236}">
                 <a16:creationId xmlns:a16="http://schemas.microsoft.com/office/drawing/2014/main" id="{1C63E83E-5993-4269-BA9C-14C5B42A5456}"/>
@@ -8062,11 +8237,12 @@
         </p:spPr>
         <p:txBody>
           <a:bodyPr xmlns:a="http://schemas.openxmlformats.org/drawingml/2006/main">
-            <a:normAutofit fontScale="100000"/>
-          </a:bodyPr>
-          <a:lstStyle xmlns:a="http://schemas.openxmlformats.org/drawingml/2006/main"/>
-          <a:p xmlns:a="http://schemas.openxmlformats.org/drawingml/2006/main">
-            <a:pPr>
+            <a:normAutofit/>
+          </a:bodyPr>
+          <a:lstStyle xmlns:a="http://schemas.openxmlformats.org/drawingml/2006/main"/>
+          <a:p xmlns:a="http://schemas.openxmlformats.org/drawingml/2006/main">
+            <a:pPr>
+              <a:buNone/>
               <a:defRPr sz="1800" b="1">
                 <a:solidFill>
                   <a:srgbClr val="173B31"/>
@@ -8092,7 +8268,7 @@
       </p:sp>
       <p:sp>
         <p:nvSpPr>
-          <p:cNvPr id="18" name="">
+          <p:cNvPr id="18" name="Rectangle: Rounded Corners 17">
             <a:extLst xmlns:a="http://schemas.openxmlformats.org/drawingml/2006/main">
               <a:ext uri="{FF2B5EF4-FFF2-40B4-BE49-F238E27FC236}">
                 <a16:creationId xmlns:a16="http://schemas.microsoft.com/office/drawing/2014/main" id="{B349D799-86FA-4197-A147-1571D27C5049}"/>
@@ -8124,7 +8300,7 @@
       </p:sp>
       <p:sp>
         <p:nvSpPr>
-          <p:cNvPr id="19" name="">
+          <p:cNvPr id="19" name="Rectangle 18">
             <a:extLst xmlns:a="http://schemas.openxmlformats.org/drawingml/2006/main">
               <a:ext uri="{FF2B5EF4-FFF2-40B4-BE49-F238E27FC236}">
                 <a16:creationId xmlns:a16="http://schemas.microsoft.com/office/drawing/2014/main" id="{9066AB23-4DFD-44ED-93AB-09B3B7A2317D}"/>
@@ -8156,6 +8332,7 @@
           <a:lstStyle xmlns:a="http://schemas.openxmlformats.org/drawingml/2006/main"/>
           <a:p xmlns:a="http://schemas.openxmlformats.org/drawingml/2006/main">
             <a:pPr>
+              <a:buNone/>
               <a:defRPr sz="1200" b="1">
                 <a:solidFill>
                   <a:srgbClr val="1D2B27"/>
@@ -8210,7 +8387,7 @@
       </p:grpSpPr>
       <p:sp>
         <p:nvSpPr>
-          <p:cNvPr id="21" name="">
+          <p:cNvPr id="21" name="Rectangle 20">
             <a:extLst xmlns:a="http://schemas.openxmlformats.org/drawingml/2006/main">
               <a:ext uri="{FF2B5EF4-FFF2-40B4-BE49-F238E27FC236}">
                 <a16:creationId xmlns:a16="http://schemas.microsoft.com/office/drawing/2014/main" id="{46C1B5A2-57AC-4376-B135-019C60F96CE2}"/>
@@ -8240,7 +8417,7 @@
       </p:sp>
       <p:sp>
         <p:nvSpPr>
-          <p:cNvPr id="2" name="">
+          <p:cNvPr id="2" name="Rectangle 1">
             <a:extLst xmlns:a="http://schemas.openxmlformats.org/drawingml/2006/main">
               <a:ext uri="{FF2B5EF4-FFF2-40B4-BE49-F238E27FC236}">
                 <a16:creationId xmlns:a16="http://schemas.microsoft.com/office/drawing/2014/main" id="{28C54575-D9B2-434A-AC00-B53B838A19BF}"/>
@@ -8267,11 +8444,12 @@
         </p:spPr>
         <p:txBody>
           <a:bodyPr xmlns:a="http://schemas.openxmlformats.org/drawingml/2006/main">
-            <a:normAutofit fontScale="100000"/>
-          </a:bodyPr>
-          <a:lstStyle xmlns:a="http://schemas.openxmlformats.org/drawingml/2006/main"/>
-          <a:p xmlns:a="http://schemas.openxmlformats.org/drawingml/2006/main">
-            <a:pPr>
+            <a:normAutofit/>
+          </a:bodyPr>
+          <a:lstStyle xmlns:a="http://schemas.openxmlformats.org/drawingml/2006/main"/>
+          <a:p xmlns:a="http://schemas.openxmlformats.org/drawingml/2006/main">
+            <a:pPr>
+              <a:buNone/>
               <a:defRPr sz="1125" b="1">
                 <a:solidFill>
                   <a:srgbClr val="C64235"/>
@@ -8297,7 +8475,7 @@
       </p:sp>
       <p:sp>
         <p:nvSpPr>
-          <p:cNvPr id="3" name="">
+          <p:cNvPr id="3" name="Rectangle 2">
             <a:extLst xmlns:a="http://schemas.openxmlformats.org/drawingml/2006/main">
               <a:ext uri="{FF2B5EF4-FFF2-40B4-BE49-F238E27FC236}">
                 <a16:creationId xmlns:a16="http://schemas.microsoft.com/office/drawing/2014/main" id="{0D9BD369-C23C-46A1-B114-F9BEF239125D}"/>
@@ -8324,11 +8502,12 @@
         </p:spPr>
         <p:txBody>
           <a:bodyPr xmlns:a="http://schemas.openxmlformats.org/drawingml/2006/main">
-            <a:normAutofit fontScale="100000"/>
-          </a:bodyPr>
-          <a:lstStyle xmlns:a="http://schemas.openxmlformats.org/drawingml/2006/main"/>
-          <a:p xmlns:a="http://schemas.openxmlformats.org/drawingml/2006/main">
-            <a:pPr>
+            <a:normAutofit/>
+          </a:bodyPr>
+          <a:lstStyle xmlns:a="http://schemas.openxmlformats.org/drawingml/2006/main"/>
+          <a:p xmlns:a="http://schemas.openxmlformats.org/drawingml/2006/main">
+            <a:pPr>
+              <a:buNone/>
               <a:defRPr sz="2700" b="1">
                 <a:solidFill>
                   <a:srgbClr val="173B31"/>
@@ -8354,7 +8533,7 @@
       </p:sp>
       <p:sp>
         <p:nvSpPr>
-          <p:cNvPr id="4" name="">
+          <p:cNvPr id="4" name="Rectangle 3">
             <a:extLst xmlns:a="http://schemas.openxmlformats.org/drawingml/2006/main">
               <a:ext uri="{FF2B5EF4-FFF2-40B4-BE49-F238E27FC236}">
                 <a16:creationId xmlns:a16="http://schemas.microsoft.com/office/drawing/2014/main" id="{199CD67B-D72E-4ECD-8C7E-ED678E38A2FD}"/>
@@ -8381,11 +8560,12 @@
         </p:spPr>
         <p:txBody>
           <a:bodyPr xmlns:a="http://schemas.openxmlformats.org/drawingml/2006/main">
-            <a:normAutofit fontScale="100000"/>
-          </a:bodyPr>
-          <a:lstStyle xmlns:a="http://schemas.openxmlformats.org/drawingml/2006/main"/>
-          <a:p xmlns:a="http://schemas.openxmlformats.org/drawingml/2006/main">
-            <a:pPr>
+            <a:normAutofit/>
+          </a:bodyPr>
+          <a:lstStyle xmlns:a="http://schemas.openxmlformats.org/drawingml/2006/main"/>
+          <a:p xmlns:a="http://schemas.openxmlformats.org/drawingml/2006/main">
+            <a:pPr>
+              <a:buNone/>
               <a:defRPr sz="1275" b="0">
                 <a:solidFill>
                   <a:srgbClr val="66736D"/>
@@ -8411,7 +8591,7 @@
       </p:sp>
       <p:sp>
         <p:nvSpPr>
-          <p:cNvPr id="5" name="">
+          <p:cNvPr id="5" name="Rectangle 4">
             <a:extLst xmlns:a="http://schemas.openxmlformats.org/drawingml/2006/main">
               <a:ext uri="{FF2B5EF4-FFF2-40B4-BE49-F238E27FC236}">
                 <a16:creationId xmlns:a16="http://schemas.microsoft.com/office/drawing/2014/main" id="{D271E664-C8EA-4C03-B8D8-E075D4FAFB74}"/>
@@ -8443,6 +8623,7 @@
           <a:lstStyle xmlns:a="http://schemas.openxmlformats.org/drawingml/2006/main"/>
           <a:p xmlns:a="http://schemas.openxmlformats.org/drawingml/2006/main">
             <a:pPr>
+              <a:buNone/>
               <a:defRPr sz="975" b="1">
                 <a:solidFill>
                   <a:srgbClr val="66736D"/>
@@ -8468,7 +8649,7 @@
       </p:sp>
       <p:sp>
         <p:nvSpPr>
-          <p:cNvPr id="6" name="">
+          <p:cNvPr id="6" name="Rectangle: Rounded Corners 5">
             <a:extLst xmlns:a="http://schemas.openxmlformats.org/drawingml/2006/main">
               <a:ext uri="{FF2B5EF4-FFF2-40B4-BE49-F238E27FC236}">
                 <a16:creationId xmlns:a16="http://schemas.microsoft.com/office/drawing/2014/main" id="{CC6723F2-D09D-4D53-A948-9B3D40EE6D89}"/>
@@ -8500,7 +8681,7 @@
       </p:sp>
       <p:sp>
         <p:nvSpPr>
-          <p:cNvPr id="7" name="">
+          <p:cNvPr id="7" name="Rectangle 6">
             <a:extLst xmlns:a="http://schemas.openxmlformats.org/drawingml/2006/main">
               <a:ext uri="{FF2B5EF4-FFF2-40B4-BE49-F238E27FC236}">
                 <a16:creationId xmlns:a16="http://schemas.microsoft.com/office/drawing/2014/main" id="{D4DF76C5-BC3E-449C-91B3-64233C9D483D}"/>
@@ -8532,6 +8713,7 @@
           <a:lstStyle xmlns:a="http://schemas.openxmlformats.org/drawingml/2006/main"/>
           <a:p xmlns:a="http://schemas.openxmlformats.org/drawingml/2006/main">
             <a:pPr>
+              <a:buNone/>
               <a:defRPr sz="1500" b="1">
                 <a:solidFill>
                   <a:srgbClr val="C64235"/>
@@ -8557,7 +8739,7 @@
       </p:sp>
       <p:sp>
         <p:nvSpPr>
-          <p:cNvPr id="8" name="">
+          <p:cNvPr id="8" name="Rectangle 7">
             <a:extLst xmlns:a="http://schemas.openxmlformats.org/drawingml/2006/main">
               <a:ext uri="{FF2B5EF4-FFF2-40B4-BE49-F238E27FC236}">
                 <a16:creationId xmlns:a16="http://schemas.microsoft.com/office/drawing/2014/main" id="{6C6BA809-5D96-498B-8823-F30DE7E7EDE7}"/>
@@ -8584,11 +8766,12 @@
         </p:spPr>
         <p:txBody>
           <a:bodyPr xmlns:a="http://schemas.openxmlformats.org/drawingml/2006/main">
-            <a:normAutofit fontScale="100000"/>
-          </a:bodyPr>
-          <a:lstStyle xmlns:a="http://schemas.openxmlformats.org/drawingml/2006/main"/>
-          <a:p xmlns:a="http://schemas.openxmlformats.org/drawingml/2006/main">
-            <a:pPr>
+            <a:normAutofit/>
+          </a:bodyPr>
+          <a:lstStyle xmlns:a="http://schemas.openxmlformats.org/drawingml/2006/main"/>
+          <a:p xmlns:a="http://schemas.openxmlformats.org/drawingml/2006/main">
+            <a:pPr>
+              <a:buNone/>
               <a:defRPr sz="1200" b="0">
                 <a:solidFill>
                   <a:srgbClr val="1D2B27"/>
@@ -8614,7 +8797,7 @@
       </p:sp>
       <p:sp>
         <p:nvSpPr>
-          <p:cNvPr id="9" name="">
+          <p:cNvPr id="9" name="Rectangle: Rounded Corners 8">
             <a:extLst xmlns:a="http://schemas.openxmlformats.org/drawingml/2006/main">
               <a:ext uri="{FF2B5EF4-FFF2-40B4-BE49-F238E27FC236}">
                 <a16:creationId xmlns:a16="http://schemas.microsoft.com/office/drawing/2014/main" id="{BE5026C0-4CAC-489E-B93F-938CA384C481}"/>
@@ -8646,7 +8829,7 @@
       </p:sp>
       <p:sp>
         <p:nvSpPr>
-          <p:cNvPr id="10" name="">
+          <p:cNvPr id="10" name="Rectangle 9">
             <a:extLst xmlns:a="http://schemas.openxmlformats.org/drawingml/2006/main">
               <a:ext uri="{FF2B5EF4-FFF2-40B4-BE49-F238E27FC236}">
                 <a16:creationId xmlns:a16="http://schemas.microsoft.com/office/drawing/2014/main" id="{F1475FEB-7311-4846-B3FE-545CEFF9D2BE}"/>
@@ -8678,6 +8861,7 @@
           <a:lstStyle xmlns:a="http://schemas.openxmlformats.org/drawingml/2006/main"/>
           <a:p xmlns:a="http://schemas.openxmlformats.org/drawingml/2006/main">
             <a:pPr>
+              <a:buNone/>
               <a:defRPr sz="1500" b="1">
                 <a:solidFill>
                   <a:srgbClr val="C64235"/>
@@ -8703,7 +8887,7 @@
       </p:sp>
       <p:sp>
         <p:nvSpPr>
-          <p:cNvPr id="11" name="">
+          <p:cNvPr id="11" name="Rectangle 10">
             <a:extLst xmlns:a="http://schemas.openxmlformats.org/drawingml/2006/main">
               <a:ext uri="{FF2B5EF4-FFF2-40B4-BE49-F238E27FC236}">
                 <a16:creationId xmlns:a16="http://schemas.microsoft.com/office/drawing/2014/main" id="{845A88AE-1E1E-407D-BB7D-B726A9C0FF6B}"/>
@@ -8730,11 +8914,12 @@
         </p:spPr>
         <p:txBody>
           <a:bodyPr xmlns:a="http://schemas.openxmlformats.org/drawingml/2006/main">
-            <a:normAutofit fontScale="100000"/>
-          </a:bodyPr>
-          <a:lstStyle xmlns:a="http://schemas.openxmlformats.org/drawingml/2006/main"/>
-          <a:p xmlns:a="http://schemas.openxmlformats.org/drawingml/2006/main">
-            <a:pPr>
+            <a:normAutofit/>
+          </a:bodyPr>
+          <a:lstStyle xmlns:a="http://schemas.openxmlformats.org/drawingml/2006/main"/>
+          <a:p xmlns:a="http://schemas.openxmlformats.org/drawingml/2006/main">
+            <a:pPr>
+              <a:buNone/>
               <a:defRPr sz="1200" b="0">
                 <a:solidFill>
                   <a:srgbClr val="1D2B27"/>
@@ -8760,7 +8945,7 @@
       </p:sp>
       <p:sp>
         <p:nvSpPr>
-          <p:cNvPr id="12" name="">
+          <p:cNvPr id="12" name="Rectangle: Rounded Corners 11">
             <a:extLst xmlns:a="http://schemas.openxmlformats.org/drawingml/2006/main">
               <a:ext uri="{FF2B5EF4-FFF2-40B4-BE49-F238E27FC236}">
                 <a16:creationId xmlns:a16="http://schemas.microsoft.com/office/drawing/2014/main" id="{12668950-5221-4A63-80E6-168EE84B512A}"/>
@@ -8792,7 +8977,7 @@
       </p:sp>
       <p:sp>
         <p:nvSpPr>
-          <p:cNvPr id="13" name="">
+          <p:cNvPr id="13" name="Rectangle 12">
             <a:extLst xmlns:a="http://schemas.openxmlformats.org/drawingml/2006/main">
               <a:ext uri="{FF2B5EF4-FFF2-40B4-BE49-F238E27FC236}">
                 <a16:creationId xmlns:a16="http://schemas.microsoft.com/office/drawing/2014/main" id="{F8F26A69-59AE-436E-B7F1-A5D6F94DE99C}"/>
@@ -8824,6 +9009,7 @@
           <a:lstStyle xmlns:a="http://schemas.openxmlformats.org/drawingml/2006/main"/>
           <a:p xmlns:a="http://schemas.openxmlformats.org/drawingml/2006/main">
             <a:pPr>
+              <a:buNone/>
               <a:defRPr sz="1500" b="1">
                 <a:solidFill>
                   <a:srgbClr val="C64235"/>
@@ -8849,7 +9035,7 @@
       </p:sp>
       <p:sp>
         <p:nvSpPr>
-          <p:cNvPr id="14" name="">
+          <p:cNvPr id="14" name="Rectangle 13">
             <a:extLst xmlns:a="http://schemas.openxmlformats.org/drawingml/2006/main">
               <a:ext uri="{FF2B5EF4-FFF2-40B4-BE49-F238E27FC236}">
                 <a16:creationId xmlns:a16="http://schemas.microsoft.com/office/drawing/2014/main" id="{51269EA9-6ECF-4A46-87C0-E1387CD02866}"/>
@@ -8876,11 +9062,12 @@
         </p:spPr>
         <p:txBody>
           <a:bodyPr xmlns:a="http://schemas.openxmlformats.org/drawingml/2006/main">
-            <a:normAutofit fontScale="100000"/>
-          </a:bodyPr>
-          <a:lstStyle xmlns:a="http://schemas.openxmlformats.org/drawingml/2006/main"/>
-          <a:p xmlns:a="http://schemas.openxmlformats.org/drawingml/2006/main">
-            <a:pPr>
+            <a:normAutofit/>
+          </a:bodyPr>
+          <a:lstStyle xmlns:a="http://schemas.openxmlformats.org/drawingml/2006/main"/>
+          <a:p xmlns:a="http://schemas.openxmlformats.org/drawingml/2006/main">
+            <a:pPr>
+              <a:buNone/>
               <a:defRPr sz="1200" b="0">
                 <a:solidFill>
                   <a:srgbClr val="1D2B27"/>
@@ -8906,7 +9093,7 @@
       </p:sp>
       <p:sp>
         <p:nvSpPr>
-          <p:cNvPr id="15" name="">
+          <p:cNvPr id="15" name="Rectangle: Rounded Corners 14">
             <a:extLst xmlns:a="http://schemas.openxmlformats.org/drawingml/2006/main">
               <a:ext uri="{FF2B5EF4-FFF2-40B4-BE49-F238E27FC236}">
                 <a16:creationId xmlns:a16="http://schemas.microsoft.com/office/drawing/2014/main" id="{4B59C0C0-DCB9-4EE6-9A10-15215D370C9E}"/>
@@ -8938,7 +9125,7 @@
       </p:sp>
       <p:sp>
         <p:nvSpPr>
-          <p:cNvPr id="16" name="">
+          <p:cNvPr id="16" name="Rectangle 15">
             <a:extLst xmlns:a="http://schemas.openxmlformats.org/drawingml/2006/main">
               <a:ext uri="{FF2B5EF4-FFF2-40B4-BE49-F238E27FC236}">
                 <a16:creationId xmlns:a16="http://schemas.microsoft.com/office/drawing/2014/main" id="{99A6A368-3C18-44A0-92B9-4A7200C75B64}"/>
@@ -8970,6 +9157,7 @@
           <a:lstStyle xmlns:a="http://schemas.openxmlformats.org/drawingml/2006/main"/>
           <a:p xmlns:a="http://schemas.openxmlformats.org/drawingml/2006/main">
             <a:pPr>
+              <a:buNone/>
               <a:defRPr sz="1500" b="1">
                 <a:solidFill>
                   <a:srgbClr val="C64235"/>
@@ -8995,7 +9183,7 @@
       </p:sp>
       <p:sp>
         <p:nvSpPr>
-          <p:cNvPr id="17" name="">
+          <p:cNvPr id="17" name="Rectangle 16">
             <a:extLst xmlns:a="http://schemas.openxmlformats.org/drawingml/2006/main">
               <a:ext uri="{FF2B5EF4-FFF2-40B4-BE49-F238E27FC236}">
                 <a16:creationId xmlns:a16="http://schemas.microsoft.com/office/drawing/2014/main" id="{7EEF5C77-83C8-42F8-8403-181648B5BF24}"/>
@@ -9022,11 +9210,12 @@
         </p:spPr>
         <p:txBody>
           <a:bodyPr xmlns:a="http://schemas.openxmlformats.org/drawingml/2006/main">
-            <a:normAutofit fontScale="100000"/>
-          </a:bodyPr>
-          <a:lstStyle xmlns:a="http://schemas.openxmlformats.org/drawingml/2006/main"/>
-          <a:p xmlns:a="http://schemas.openxmlformats.org/drawingml/2006/main">
-            <a:pPr>
+            <a:normAutofit/>
+          </a:bodyPr>
+          <a:lstStyle xmlns:a="http://schemas.openxmlformats.org/drawingml/2006/main"/>
+          <a:p xmlns:a="http://schemas.openxmlformats.org/drawingml/2006/main">
+            <a:pPr>
+              <a:buNone/>
               <a:defRPr sz="1200" b="0">
                 <a:solidFill>
                   <a:srgbClr val="1D2B27"/>
@@ -9052,7 +9241,7 @@
       </p:sp>
       <p:sp>
         <p:nvSpPr>
-          <p:cNvPr id="18" name="">
+          <p:cNvPr id="18" name="Rectangle: Rounded Corners 17">
             <a:extLst xmlns:a="http://schemas.openxmlformats.org/drawingml/2006/main">
               <a:ext uri="{FF2B5EF4-FFF2-40B4-BE49-F238E27FC236}">
                 <a16:creationId xmlns:a16="http://schemas.microsoft.com/office/drawing/2014/main" id="{1DC3916E-B0B2-454D-A57A-F17FB5C0567B}"/>
@@ -9084,7 +9273,7 @@
       </p:sp>
       <p:sp>
         <p:nvSpPr>
-          <p:cNvPr id="19" name="">
+          <p:cNvPr id="19" name="Rectangle 18">
             <a:extLst xmlns:a="http://schemas.openxmlformats.org/drawingml/2006/main">
               <a:ext uri="{FF2B5EF4-FFF2-40B4-BE49-F238E27FC236}">
                 <a16:creationId xmlns:a16="http://schemas.microsoft.com/office/drawing/2014/main" id="{2773A01F-D3EA-4F11-B08E-85473B2545E7}"/>
@@ -9116,6 +9305,7 @@
           <a:lstStyle xmlns:a="http://schemas.openxmlformats.org/drawingml/2006/main"/>
           <a:p xmlns:a="http://schemas.openxmlformats.org/drawingml/2006/main">
             <a:pPr>
+              <a:buNone/>
               <a:defRPr sz="1500" b="1">
                 <a:solidFill>
                   <a:srgbClr val="FFFFFF"/>
@@ -9141,7 +9331,7 @@
       </p:sp>
       <p:sp>
         <p:nvSpPr>
-          <p:cNvPr id="20" name="">
+          <p:cNvPr id="20" name="Rectangle 19">
             <a:extLst xmlns:a="http://schemas.openxmlformats.org/drawingml/2006/main">
               <a:ext uri="{FF2B5EF4-FFF2-40B4-BE49-F238E27FC236}">
                 <a16:creationId xmlns:a16="http://schemas.microsoft.com/office/drawing/2014/main" id="{875C6957-AF84-455E-8B08-25C8BF84AF23}"/>
@@ -9168,11 +9358,12 @@
         </p:spPr>
         <p:txBody>
           <a:bodyPr xmlns:a="http://schemas.openxmlformats.org/drawingml/2006/main">
-            <a:normAutofit fontScale="100000"/>
-          </a:bodyPr>
-          <a:lstStyle xmlns:a="http://schemas.openxmlformats.org/drawingml/2006/main"/>
-          <a:p xmlns:a="http://schemas.openxmlformats.org/drawingml/2006/main">
-            <a:pPr>
+            <a:normAutofit/>
+          </a:bodyPr>
+          <a:lstStyle xmlns:a="http://schemas.openxmlformats.org/drawingml/2006/main"/>
+          <a:p xmlns:a="http://schemas.openxmlformats.org/drawingml/2006/main">
+            <a:pPr>
+              <a:buNone/>
               <a:defRPr sz="1200" b="0">
                 <a:solidFill>
                   <a:srgbClr val="DDECE2"/>
@@ -9227,7 +9418,7 @@
       </p:grpSpPr>
       <p:sp>
         <p:nvSpPr>
-          <p:cNvPr id="19" name="">
+          <p:cNvPr id="19" name="Rectangle 18">
             <a:extLst xmlns:a="http://schemas.openxmlformats.org/drawingml/2006/main">
               <a:ext uri="{FF2B5EF4-FFF2-40B4-BE49-F238E27FC236}">
                 <a16:creationId xmlns:a16="http://schemas.microsoft.com/office/drawing/2014/main" id="{643C10BE-C5D2-4D96-A477-CD2A083BEEE6}"/>
@@ -9254,11 +9445,12 @@
         </p:spPr>
         <p:txBody>
           <a:bodyPr xmlns:a="http://schemas.openxmlformats.org/drawingml/2006/main">
-            <a:normAutofit fontScale="100000"/>
-          </a:bodyPr>
-          <a:lstStyle xmlns:a="http://schemas.openxmlformats.org/drawingml/2006/main"/>
-          <a:p xmlns:a="http://schemas.openxmlformats.org/drawingml/2006/main">
-            <a:pPr>
+            <a:normAutofit/>
+          </a:bodyPr>
+          <a:lstStyle xmlns:a="http://schemas.openxmlformats.org/drawingml/2006/main"/>
+          <a:p xmlns:a="http://schemas.openxmlformats.org/drawingml/2006/main">
+            <a:pPr>
+              <a:buNone/>
               <a:defRPr sz="3150" b="1">
                 <a:solidFill>
                   <a:srgbClr val="FFFFFF"/>
@@ -9282,6 +9474,7 @@
           </a:p>
           <a:p xmlns:a="http://schemas.openxmlformats.org/drawingml/2006/main">
             <a:pPr>
+              <a:buNone/>
               <a:defRPr sz="3150" b="1">
                 <a:solidFill>
                   <a:srgbClr val="FFFFFF"/>
@@ -9307,7 +9500,7 @@
       </p:sp>
       <p:sp>
         <p:nvSpPr>
-          <p:cNvPr id="2" name="">
+          <p:cNvPr id="2" name="Rectangle 1">
             <a:extLst xmlns:a="http://schemas.openxmlformats.org/drawingml/2006/main">
               <a:ext uri="{FF2B5EF4-FFF2-40B4-BE49-F238E27FC236}">
                 <a16:creationId xmlns:a16="http://schemas.microsoft.com/office/drawing/2014/main" id="{589F4447-4581-48EA-AB54-35E78DF6A3AA}"/>
@@ -9334,11 +9527,12 @@
         </p:spPr>
         <p:txBody>
           <a:bodyPr xmlns:a="http://schemas.openxmlformats.org/drawingml/2006/main">
-            <a:normAutofit fontScale="100000"/>
-          </a:bodyPr>
-          <a:lstStyle xmlns:a="http://schemas.openxmlformats.org/drawingml/2006/main"/>
-          <a:p xmlns:a="http://schemas.openxmlformats.org/drawingml/2006/main">
-            <a:pPr>
+            <a:normAutofit/>
+          </a:bodyPr>
+          <a:lstStyle xmlns:a="http://schemas.openxmlformats.org/drawingml/2006/main"/>
+          <a:p xmlns:a="http://schemas.openxmlformats.org/drawingml/2006/main">
+            <a:pPr>
+              <a:buNone/>
               <a:defRPr sz="1275" b="1">
                 <a:solidFill>
                   <a:srgbClr val="D89029"/>
@@ -9364,7 +9558,7 @@
       </p:sp>
       <p:sp>
         <p:nvSpPr>
-          <p:cNvPr id="3" name="">
+          <p:cNvPr id="3" name="Oval 2">
             <a:extLst xmlns:a="http://schemas.openxmlformats.org/drawingml/2006/main">
               <a:ext uri="{FF2B5EF4-FFF2-40B4-BE49-F238E27FC236}">
                 <a16:creationId xmlns:a16="http://schemas.microsoft.com/office/drawing/2014/main" id="{72BB9142-E399-4901-8622-BEA8F25C5EC8}"/>
@@ -9394,7 +9588,7 @@
       </p:sp>
       <p:sp>
         <p:nvSpPr>
-          <p:cNvPr id="4" name="">
+          <p:cNvPr id="4" name="Rectangle 3">
             <a:extLst xmlns:a="http://schemas.openxmlformats.org/drawingml/2006/main">
               <a:ext uri="{FF2B5EF4-FFF2-40B4-BE49-F238E27FC236}">
                 <a16:creationId xmlns:a16="http://schemas.microsoft.com/office/drawing/2014/main" id="{24BA6B03-C21B-49C0-A664-08447774AC8A}"/>
@@ -9421,11 +9615,12 @@
         </p:spPr>
         <p:txBody>
           <a:bodyPr xmlns:a="http://schemas.openxmlformats.org/drawingml/2006/main">
-            <a:normAutofit fontScale="100000"/>
-          </a:bodyPr>
-          <a:lstStyle xmlns:a="http://schemas.openxmlformats.org/drawingml/2006/main"/>
-          <a:p xmlns:a="http://schemas.openxmlformats.org/drawingml/2006/main">
-            <a:pPr>
+            <a:normAutofit/>
+          </a:bodyPr>
+          <a:lstStyle xmlns:a="http://schemas.openxmlformats.org/drawingml/2006/main"/>
+          <a:p xmlns:a="http://schemas.openxmlformats.org/drawingml/2006/main">
+            <a:pPr>
+              <a:buNone/>
               <a:defRPr sz="1500" b="1">
                 <a:solidFill>
                   <a:srgbClr val="FFFFFF"/>
@@ -9451,7 +9646,7 @@
       </p:sp>
       <p:sp>
         <p:nvSpPr>
-          <p:cNvPr id="5" name="">
+          <p:cNvPr id="5" name="Oval 4">
             <a:extLst xmlns:a="http://schemas.openxmlformats.org/drawingml/2006/main">
               <a:ext uri="{FF2B5EF4-FFF2-40B4-BE49-F238E27FC236}">
                 <a16:creationId xmlns:a16="http://schemas.microsoft.com/office/drawing/2014/main" id="{E0591334-42B8-4D19-BA63-CEA9B7EDC55C}"/>
@@ -9481,7 +9676,7 @@
       </p:sp>
       <p:sp>
         <p:nvSpPr>
-          <p:cNvPr id="6" name="">
+          <p:cNvPr id="6" name="Rectangle 5">
             <a:extLst xmlns:a="http://schemas.openxmlformats.org/drawingml/2006/main">
               <a:ext uri="{FF2B5EF4-FFF2-40B4-BE49-F238E27FC236}">
                 <a16:creationId xmlns:a16="http://schemas.microsoft.com/office/drawing/2014/main" id="{BD8D1BFB-1E11-43A7-AA8B-1C809947F944}"/>
@@ -9508,11 +9703,12 @@
         </p:spPr>
         <p:txBody>
           <a:bodyPr xmlns:a="http://schemas.openxmlformats.org/drawingml/2006/main">
-            <a:normAutofit fontScale="100000"/>
-          </a:bodyPr>
-          <a:lstStyle xmlns:a="http://schemas.openxmlformats.org/drawingml/2006/main"/>
-          <a:p xmlns:a="http://schemas.openxmlformats.org/drawingml/2006/main">
-            <a:pPr>
+            <a:normAutofit/>
+          </a:bodyPr>
+          <a:lstStyle xmlns:a="http://schemas.openxmlformats.org/drawingml/2006/main"/>
+          <a:p xmlns:a="http://schemas.openxmlformats.org/drawingml/2006/main">
+            <a:pPr>
+              <a:buNone/>
               <a:defRPr sz="1500" b="0">
                 <a:solidFill>
                   <a:srgbClr val="FFFFFF"/>
@@ -9538,7 +9734,7 @@
       </p:sp>
       <p:sp>
         <p:nvSpPr>
-          <p:cNvPr id="7" name="">
+          <p:cNvPr id="7" name="Oval 6">
             <a:extLst xmlns:a="http://schemas.openxmlformats.org/drawingml/2006/main">
               <a:ext uri="{FF2B5EF4-FFF2-40B4-BE49-F238E27FC236}">
                 <a16:creationId xmlns:a16="http://schemas.microsoft.com/office/drawing/2014/main" id="{173FCBE7-F037-4FC9-A8AF-F218E000D2CE}"/>
@@ -9568,7 +9764,7 @@
       </p:sp>
       <p:sp>
         <p:nvSpPr>
-          <p:cNvPr id="8" name="">
+          <p:cNvPr id="8" name="Rectangle 7">
             <a:extLst xmlns:a="http://schemas.openxmlformats.org/drawingml/2006/main">
               <a:ext uri="{FF2B5EF4-FFF2-40B4-BE49-F238E27FC236}">
                 <a16:creationId xmlns:a16="http://schemas.microsoft.com/office/drawing/2014/main" id="{3DD5FAA8-94E1-4732-A30A-A9EA35213F3C}"/>
@@ -9595,11 +9791,12 @@
         </p:spPr>
         <p:txBody>
           <a:bodyPr xmlns:a="http://schemas.openxmlformats.org/drawingml/2006/main">
-            <a:normAutofit fontScale="100000"/>
-          </a:bodyPr>
-          <a:lstStyle xmlns:a="http://schemas.openxmlformats.org/drawingml/2006/main"/>
-          <a:p xmlns:a="http://schemas.openxmlformats.org/drawingml/2006/main">
-            <a:pPr>
+            <a:normAutofit/>
+          </a:bodyPr>
+          <a:lstStyle xmlns:a="http://schemas.openxmlformats.org/drawingml/2006/main"/>
+          <a:p xmlns:a="http://schemas.openxmlformats.org/drawingml/2006/main">
+            <a:pPr>
+              <a:buNone/>
               <a:defRPr sz="1500" b="0">
                 <a:solidFill>
                   <a:srgbClr val="FFFFFF"/>
@@ -9625,7 +9822,7 @@
       </p:sp>
       <p:sp>
         <p:nvSpPr>
-          <p:cNvPr id="9" name="">
+          <p:cNvPr id="9" name="Oval 8">
             <a:extLst xmlns:a="http://schemas.openxmlformats.org/drawingml/2006/main">
               <a:ext uri="{FF2B5EF4-FFF2-40B4-BE49-F238E27FC236}">
                 <a16:creationId xmlns:a16="http://schemas.microsoft.com/office/drawing/2014/main" id="{DAC721C8-7978-4279-8457-7E8691A7A80A}"/>
@@ -9655,7 +9852,7 @@
       </p:sp>
       <p:sp>
         <p:nvSpPr>
-          <p:cNvPr id="10" name="">
+          <p:cNvPr id="10" name="Rectangle 9">
             <a:extLst xmlns:a="http://schemas.openxmlformats.org/drawingml/2006/main">
               <a:ext uri="{FF2B5EF4-FFF2-40B4-BE49-F238E27FC236}">
                 <a16:creationId xmlns:a16="http://schemas.microsoft.com/office/drawing/2014/main" id="{869FCC03-2101-4EF3-B903-6A655154074C}"/>
@@ -9682,11 +9879,12 @@
         </p:spPr>
         <p:txBody>
           <a:bodyPr xmlns:a="http://schemas.openxmlformats.org/drawingml/2006/main">
-            <a:normAutofit fontScale="100000"/>
-          </a:bodyPr>
-          <a:lstStyle xmlns:a="http://schemas.openxmlformats.org/drawingml/2006/main"/>
-          <a:p xmlns:a="http://schemas.openxmlformats.org/drawingml/2006/main">
-            <a:pPr>
+            <a:normAutofit/>
+          </a:bodyPr>
+          <a:lstStyle xmlns:a="http://schemas.openxmlformats.org/drawingml/2006/main"/>
+          <a:p xmlns:a="http://schemas.openxmlformats.org/drawingml/2006/main">
+            <a:pPr>
+              <a:buNone/>
               <a:defRPr sz="1500" b="0">
                 <a:solidFill>
                   <a:srgbClr val="FFFFFF"/>
@@ -9712,7 +9910,7 @@
       </p:sp>
       <p:sp>
         <p:nvSpPr>
-          <p:cNvPr id="11" name="">
+          <p:cNvPr id="11" name="Oval 10">
             <a:extLst xmlns:a="http://schemas.openxmlformats.org/drawingml/2006/main">
               <a:ext uri="{FF2B5EF4-FFF2-40B4-BE49-F238E27FC236}">
                 <a16:creationId xmlns:a16="http://schemas.microsoft.com/office/drawing/2014/main" id="{58363BB7-F1F8-45F2-8674-AC366DD3C7AF}"/>
@@ -9742,7 +9940,7 @@
       </p:sp>
       <p:sp>
         <p:nvSpPr>
-          <p:cNvPr id="12" name="">
+          <p:cNvPr id="12" name="Rectangle 11">
             <a:extLst xmlns:a="http://schemas.openxmlformats.org/drawingml/2006/main">
               <a:ext uri="{FF2B5EF4-FFF2-40B4-BE49-F238E27FC236}">
                 <a16:creationId xmlns:a16="http://schemas.microsoft.com/office/drawing/2014/main" id="{39B83BBC-FFAC-49C6-AE2B-9B03B14DEB66}"/>
@@ -9774,6 +9972,7 @@
           <a:lstStyle xmlns:a="http://schemas.openxmlformats.org/drawingml/2006/main"/>
           <a:p xmlns:a="http://schemas.openxmlformats.org/drawingml/2006/main">
             <a:pPr>
+              <a:buNone/>
               <a:defRPr sz="1500" b="0">
                 <a:solidFill>
                   <a:srgbClr val="FFFFFF"/>
@@ -9792,14 +9991,14 @@
                 <a:ea typeface="Arial"/>
                 <a:cs typeface="Arial"/>
               </a:rPr>
-              <a:t>Moderated, separate community contribution flow</a:t>
-            </a:r>
-          </a:p>
-        </p:txBody>
-      </p:sp>
-      <p:sp>
-        <p:nvSpPr>
-          <p:cNvPr id="13" name="">
+              <a:t>Moderated community discovery with historical isolation</a:t>
+            </a:r>
+          </a:p>
+        </p:txBody>
+      </p:sp>
+      <p:sp>
+        <p:nvSpPr>
+          <p:cNvPr id="13" name="Rectangle: Rounded Corners 12">
             <a:extLst xmlns:a="http://schemas.openxmlformats.org/drawingml/2006/main">
               <a:ext uri="{FF2B5EF4-FFF2-40B4-BE49-F238E27FC236}">
                 <a16:creationId xmlns:a16="http://schemas.microsoft.com/office/drawing/2014/main" id="{80D1659C-9247-4DF3-9F2E-194A97843011}"/>
@@ -9831,7 +10030,7 @@
       </p:sp>
       <p:sp>
         <p:nvSpPr>
-          <p:cNvPr id="14" name="">
+          <p:cNvPr id="14" name="Rectangle 13">
             <a:extLst xmlns:a="http://schemas.openxmlformats.org/drawingml/2006/main">
               <a:ext uri="{FF2B5EF4-FFF2-40B4-BE49-F238E27FC236}">
                 <a16:creationId xmlns:a16="http://schemas.microsoft.com/office/drawing/2014/main" id="{5933E12E-D06A-4BDC-8519-2E50A446DDDF}"/>
@@ -9863,6 +10062,7 @@
           <a:lstStyle xmlns:a="http://schemas.openxmlformats.org/drawingml/2006/main"/>
           <a:p xmlns:a="http://schemas.openxmlformats.org/drawingml/2006/main">
             <a:pPr>
+              <a:buNone/>
               <a:defRPr sz="1725" b="1">
                 <a:solidFill>
                   <a:srgbClr val="173B31"/>
@@ -9888,7 +10088,7 @@
       </p:sp>
       <p:sp>
         <p:nvSpPr>
-          <p:cNvPr id="15" name="">
+          <p:cNvPr id="15" name="Rectangle 14">
             <a:extLst xmlns:a="http://schemas.openxmlformats.org/drawingml/2006/main">
               <a:ext uri="{FF2B5EF4-FFF2-40B4-BE49-F238E27FC236}">
                 <a16:creationId xmlns:a16="http://schemas.microsoft.com/office/drawing/2014/main" id="{5A9A297B-B25C-4999-A155-974DAA2DD8A4}"/>
@@ -9920,6 +10120,7 @@
           <a:lstStyle xmlns:a="http://schemas.openxmlformats.org/drawingml/2006/main"/>
           <a:p xmlns:a="http://schemas.openxmlformats.org/drawingml/2006/main">
             <a:pPr>
+              <a:buNone/>
               <a:defRPr sz="1650" b="0">
                 <a:solidFill>
                   <a:srgbClr val="1D2B27"/>
@@ -9943,6 +10144,7 @@
           </a:p>
           <a:p xmlns:a="http://schemas.openxmlformats.org/drawingml/2006/main">
             <a:pPr>
+              <a:buNone/>
               <a:defRPr sz="1650" b="0">
                 <a:solidFill>
                   <a:srgbClr val="1D2B27"/>
@@ -9966,6 +10168,7 @@
           </a:p>
           <a:p xmlns:a="http://schemas.openxmlformats.org/drawingml/2006/main">
             <a:pPr>
+              <a:buNone/>
               <a:defRPr sz="1650" b="0">
                 <a:solidFill>
                   <a:srgbClr val="1D2B27"/>
@@ -9984,11 +10187,12 @@
                 <a:ea typeface="Arial"/>
                 <a:cs typeface="Arial"/>
               </a:rPr>
-              <a:t>3  SQL analysis</a:t>
-            </a:r>
-          </a:p>
-          <a:p xmlns:a="http://schemas.openxmlformats.org/drawingml/2006/main">
-            <a:pPr>
+              <a:t>3  Activities &amp; services</a:t>
+            </a:r>
+          </a:p>
+          <a:p xmlns:a="http://schemas.openxmlformats.org/drawingml/2006/main">
+            <a:pPr>
+              <a:buNone/>
               <a:defRPr sz="1650" b="0">
                 <a:solidFill>
                   <a:srgbClr val="1D2B27"/>
@@ -10007,11 +10211,12 @@
                 <a:ea typeface="Arial"/>
                 <a:cs typeface="Arial"/>
               </a:rPr>
-              <a:t>4  ML explanation</a:t>
-            </a:r>
-          </a:p>
-          <a:p xmlns:a="http://schemas.openxmlformats.org/drawingml/2006/main">
-            <a:pPr>
+              <a:t>4  SQL analysis</a:t>
+            </a:r>
+          </a:p>
+          <a:p xmlns:a="http://schemas.openxmlformats.org/drawingml/2006/main">
+            <a:pPr>
+              <a:buNone/>
               <a:defRPr sz="1650" b="0">
                 <a:solidFill>
                   <a:srgbClr val="1D2B27"/>
@@ -10030,11 +10235,12 @@
                 <a:ea typeface="Arial"/>
                 <a:cs typeface="Arial"/>
               </a:rPr>
-              <a:t>5  Add a venue</a:t>
-            </a:r>
-          </a:p>
-          <a:p xmlns:a="http://schemas.openxmlformats.org/drawingml/2006/main">
-            <a:pPr>
+              <a:t>5  ML explanation</a:t>
+            </a:r>
+          </a:p>
+          <a:p xmlns:a="http://schemas.openxmlformats.org/drawingml/2006/main">
+            <a:pPr>
+              <a:buNone/>
               <a:defRPr sz="1650" b="0">
                 <a:solidFill>
                   <a:srgbClr val="1D2B27"/>
@@ -10053,14 +10259,14 @@
                 <a:ea typeface="Arial"/>
                 <a:cs typeface="Arial"/>
               </a:rPr>
-              <a:t>6  Community venues</a:t>
-            </a:r>
-          </a:p>
-        </p:txBody>
-      </p:sp>
-      <p:sp>
-        <p:nvSpPr>
-          <p:cNvPr id="16" name="">
+              <a:t>6  Add, approve &amp; find</a:t>
+            </a:r>
+          </a:p>
+        </p:txBody>
+      </p:sp>
+      <p:sp>
+        <p:nvSpPr>
+          <p:cNvPr id="16" name="Rectangle: Rounded Corners 15">
             <a:extLst xmlns:a="http://schemas.openxmlformats.org/drawingml/2006/main">
               <a:ext uri="{FF2B5EF4-FFF2-40B4-BE49-F238E27FC236}">
                 <a16:creationId xmlns:a16="http://schemas.microsoft.com/office/drawing/2014/main" id="{D097AE54-4002-4F5F-9842-4E00D1DCC101}"/>
@@ -10092,7 +10298,7 @@
       </p:sp>
       <p:sp>
         <p:nvSpPr>
-          <p:cNvPr id="17" name="">
+          <p:cNvPr id="17" name="Rectangle 16">
             <a:extLst xmlns:a="http://schemas.openxmlformats.org/drawingml/2006/main">
               <a:ext uri="{FF2B5EF4-FFF2-40B4-BE49-F238E27FC236}">
                 <a16:creationId xmlns:a16="http://schemas.microsoft.com/office/drawing/2014/main" id="{F5CB9FAE-B484-4ACE-A147-EB0A16B73314}"/>
@@ -10124,6 +10330,7 @@
           <a:lstStyle xmlns:a="http://schemas.openxmlformats.org/drawingml/2006/main"/>
           <a:p xmlns:a="http://schemas.openxmlformats.org/drawingml/2006/main">
             <a:pPr>
+              <a:buNone/>
               <a:defRPr sz="1125" b="1">
                 <a:solidFill>
                   <a:srgbClr val="FFFFFF"/>
@@ -10149,7 +10356,7 @@
       </p:sp>
       <p:sp>
         <p:nvSpPr>
-          <p:cNvPr id="18" name="">
+          <p:cNvPr id="18" name="Rectangle 17">
             <a:extLst xmlns:a="http://schemas.openxmlformats.org/drawingml/2006/main">
               <a:ext uri="{FF2B5EF4-FFF2-40B4-BE49-F238E27FC236}">
                 <a16:creationId xmlns:a16="http://schemas.microsoft.com/office/drawing/2014/main" id="{E3A56E1B-7059-4B36-B28F-A2B007BA970A}"/>
@@ -10181,6 +10388,7 @@
           <a:lstStyle xmlns:a="http://schemas.openxmlformats.org/drawingml/2006/main"/>
           <a:p xmlns:a="http://schemas.openxmlformats.org/drawingml/2006/main">
             <a:pPr>
+              <a:buNone/>
               <a:defRPr sz="1200" b="0">
                 <a:solidFill>
                   <a:srgbClr val="DDECE2"/>
@@ -10235,7 +10443,7 @@
       </p:grpSpPr>
       <p:sp>
         <p:nvSpPr>
-          <p:cNvPr id="15" name="">
+          <p:cNvPr id="15" name="Rectangle 14">
             <a:extLst xmlns:a="http://schemas.openxmlformats.org/drawingml/2006/main">
               <a:ext uri="{FF2B5EF4-FFF2-40B4-BE49-F238E27FC236}">
                 <a16:creationId xmlns:a16="http://schemas.microsoft.com/office/drawing/2014/main" id="{CCCD3DBB-31FD-4C5D-94C2-DF20AA225A5C}"/>
@@ -10265,7 +10473,7 @@
       </p:sp>
       <p:sp>
         <p:nvSpPr>
-          <p:cNvPr id="2" name="">
+          <p:cNvPr id="2" name="Rectangle 1">
             <a:extLst xmlns:a="http://schemas.openxmlformats.org/drawingml/2006/main">
               <a:ext uri="{FF2B5EF4-FFF2-40B4-BE49-F238E27FC236}">
                 <a16:creationId xmlns:a16="http://schemas.microsoft.com/office/drawing/2014/main" id="{B3461CFF-F3A0-41E8-8B7E-D2FB273E56F3}"/>
@@ -10292,11 +10500,12 @@
         </p:spPr>
         <p:txBody>
           <a:bodyPr xmlns:a="http://schemas.openxmlformats.org/drawingml/2006/main">
-            <a:normAutofit fontScale="100000"/>
-          </a:bodyPr>
-          <a:lstStyle xmlns:a="http://schemas.openxmlformats.org/drawingml/2006/main"/>
-          <a:p xmlns:a="http://schemas.openxmlformats.org/drawingml/2006/main">
-            <a:pPr>
+            <a:normAutofit/>
+          </a:bodyPr>
+          <a:lstStyle xmlns:a="http://schemas.openxmlformats.org/drawingml/2006/main"/>
+          <a:p xmlns:a="http://schemas.openxmlformats.org/drawingml/2006/main">
+            <a:pPr>
+              <a:buNone/>
               <a:defRPr sz="1125" b="1">
                 <a:solidFill>
                   <a:srgbClr val="C64235"/>
@@ -10322,7 +10531,7 @@
       </p:sp>
       <p:sp>
         <p:nvSpPr>
-          <p:cNvPr id="3" name="">
+          <p:cNvPr id="3" name="Rectangle 2">
             <a:extLst xmlns:a="http://schemas.openxmlformats.org/drawingml/2006/main">
               <a:ext uri="{FF2B5EF4-FFF2-40B4-BE49-F238E27FC236}">
                 <a16:creationId xmlns:a16="http://schemas.microsoft.com/office/drawing/2014/main" id="{A853D531-4EA4-46FB-A572-D13B025C6450}"/>
@@ -10349,11 +10558,12 @@
         </p:spPr>
         <p:txBody>
           <a:bodyPr xmlns:a="http://schemas.openxmlformats.org/drawingml/2006/main">
-            <a:normAutofit fontScale="100000"/>
-          </a:bodyPr>
-          <a:lstStyle xmlns:a="http://schemas.openxmlformats.org/drawingml/2006/main"/>
-          <a:p xmlns:a="http://schemas.openxmlformats.org/drawingml/2006/main">
-            <a:pPr>
+            <a:normAutofit/>
+          </a:bodyPr>
+          <a:lstStyle xmlns:a="http://schemas.openxmlformats.org/drawingml/2006/main"/>
+          <a:p xmlns:a="http://schemas.openxmlformats.org/drawingml/2006/main">
+            <a:pPr>
+              <a:buNone/>
               <a:defRPr sz="2700" b="1">
                 <a:solidFill>
                   <a:srgbClr val="173B31"/>
@@ -10379,7 +10589,7 @@
       </p:sp>
       <p:sp>
         <p:nvSpPr>
-          <p:cNvPr id="4" name="">
+          <p:cNvPr id="4" name="Rectangle 3">
             <a:extLst xmlns:a="http://schemas.openxmlformats.org/drawingml/2006/main">
               <a:ext uri="{FF2B5EF4-FFF2-40B4-BE49-F238E27FC236}">
                 <a16:creationId xmlns:a16="http://schemas.microsoft.com/office/drawing/2014/main" id="{C6CE66EF-32DC-4E9A-A3B8-52E5374A0D17}"/>
@@ -10406,11 +10616,12 @@
         </p:spPr>
         <p:txBody>
           <a:bodyPr xmlns:a="http://schemas.openxmlformats.org/drawingml/2006/main">
-            <a:normAutofit fontScale="100000"/>
-          </a:bodyPr>
-          <a:lstStyle xmlns:a="http://schemas.openxmlformats.org/drawingml/2006/main"/>
-          <a:p xmlns:a="http://schemas.openxmlformats.org/drawingml/2006/main">
-            <a:pPr>
+            <a:normAutofit/>
+          </a:bodyPr>
+          <a:lstStyle xmlns:a="http://schemas.openxmlformats.org/drawingml/2006/main"/>
+          <a:p xmlns:a="http://schemas.openxmlformats.org/drawingml/2006/main">
+            <a:pPr>
+              <a:buNone/>
               <a:defRPr sz="1275" b="0">
                 <a:solidFill>
                   <a:srgbClr val="66736D"/>
@@ -10436,7 +10647,7 @@
       </p:sp>
       <p:sp>
         <p:nvSpPr>
-          <p:cNvPr id="5" name="">
+          <p:cNvPr id="5" name="Rectangle 4">
             <a:extLst xmlns:a="http://schemas.openxmlformats.org/drawingml/2006/main">
               <a:ext uri="{FF2B5EF4-FFF2-40B4-BE49-F238E27FC236}">
                 <a16:creationId xmlns:a16="http://schemas.microsoft.com/office/drawing/2014/main" id="{04721F2D-4F36-442B-9E1E-02AED2007B3E}"/>
@@ -10468,6 +10679,7 @@
           <a:lstStyle xmlns:a="http://schemas.openxmlformats.org/drawingml/2006/main"/>
           <a:p xmlns:a="http://schemas.openxmlformats.org/drawingml/2006/main">
             <a:pPr>
+              <a:buNone/>
               <a:defRPr sz="975" b="1">
                 <a:solidFill>
                   <a:srgbClr val="66736D"/>
@@ -10493,7 +10705,7 @@
       </p:sp>
       <p:sp>
         <p:nvSpPr>
-          <p:cNvPr id="6" name="">
+          <p:cNvPr id="6" name="Rectangle 5">
             <a:extLst xmlns:a="http://schemas.openxmlformats.org/drawingml/2006/main">
               <a:ext uri="{FF2B5EF4-FFF2-40B4-BE49-F238E27FC236}">
                 <a16:creationId xmlns:a16="http://schemas.microsoft.com/office/drawing/2014/main" id="{9E831891-E8F5-4742-8D4C-CA3B54C1237E}"/>
@@ -10525,6 +10737,7 @@
           <a:lstStyle xmlns:a="http://schemas.openxmlformats.org/drawingml/2006/main"/>
           <a:p xmlns:a="http://schemas.openxmlformats.org/drawingml/2006/main">
             <a:pPr>
+              <a:buNone/>
               <a:defRPr sz="2250" b="1">
                 <a:solidFill>
                   <a:srgbClr val="C64235"/>
@@ -10550,7 +10763,7 @@
       </p:sp>
       <p:sp>
         <p:nvSpPr>
-          <p:cNvPr id="7" name="">
+          <p:cNvPr id="7" name="Rectangle 6">
             <a:extLst xmlns:a="http://schemas.openxmlformats.org/drawingml/2006/main">
               <a:ext uri="{FF2B5EF4-FFF2-40B4-BE49-F238E27FC236}">
                 <a16:creationId xmlns:a16="http://schemas.microsoft.com/office/drawing/2014/main" id="{EE7E67C1-EE91-44F2-85FF-86A64BC03D05}"/>
@@ -10582,6 +10795,7 @@
           <a:lstStyle xmlns:a="http://schemas.openxmlformats.org/drawingml/2006/main"/>
           <a:p xmlns:a="http://schemas.openxmlformats.org/drawingml/2006/main">
             <a:pPr>
+              <a:buNone/>
               <a:defRPr sz="1950" b="1">
                 <a:solidFill>
                   <a:srgbClr val="173B31"/>
@@ -10607,7 +10821,7 @@
       </p:sp>
       <p:sp>
         <p:nvSpPr>
-          <p:cNvPr id="8" name="">
+          <p:cNvPr id="8" name="Rectangle 7">
             <a:extLst xmlns:a="http://schemas.openxmlformats.org/drawingml/2006/main">
               <a:ext uri="{FF2B5EF4-FFF2-40B4-BE49-F238E27FC236}">
                 <a16:creationId xmlns:a16="http://schemas.microsoft.com/office/drawing/2014/main" id="{5BCAAB34-963E-45AC-839A-6B979F9C5306}"/>
@@ -10634,11 +10848,12 @@
         </p:spPr>
         <p:txBody>
           <a:bodyPr xmlns:a="http://schemas.openxmlformats.org/drawingml/2006/main">
-            <a:normAutofit fontScale="100000"/>
-          </a:bodyPr>
-          <a:lstStyle xmlns:a="http://schemas.openxmlformats.org/drawingml/2006/main"/>
-          <a:p xmlns:a="http://schemas.openxmlformats.org/drawingml/2006/main">
-            <a:pPr>
+            <a:normAutofit/>
+          </a:bodyPr>
+          <a:lstStyle xmlns:a="http://schemas.openxmlformats.org/drawingml/2006/main"/>
+          <a:p xmlns:a="http://schemas.openxmlformats.org/drawingml/2006/main">
+            <a:pPr>
+              <a:buNone/>
               <a:defRPr sz="1350" b="0">
                 <a:solidFill>
                   <a:srgbClr val="66736D"/>
@@ -10664,7 +10879,7 @@
       </p:sp>
       <p:sp>
         <p:nvSpPr>
-          <p:cNvPr id="9" name="">
+          <p:cNvPr id="9" name="Rectangle 8">
             <a:extLst xmlns:a="http://schemas.openxmlformats.org/drawingml/2006/main">
               <a:ext uri="{FF2B5EF4-FFF2-40B4-BE49-F238E27FC236}">
                 <a16:creationId xmlns:a16="http://schemas.microsoft.com/office/drawing/2014/main" id="{CD1E85C4-CBA1-4F0B-B49C-596D549446AF}"/>
@@ -10696,6 +10911,7 @@
           <a:lstStyle xmlns:a="http://schemas.openxmlformats.org/drawingml/2006/main"/>
           <a:p xmlns:a="http://schemas.openxmlformats.org/drawingml/2006/main">
             <a:pPr>
+              <a:buNone/>
               <a:defRPr sz="2250" b="1">
                 <a:solidFill>
                   <a:srgbClr val="2D7A62"/>
@@ -10721,7 +10937,7 @@
       </p:sp>
       <p:sp>
         <p:nvSpPr>
-          <p:cNvPr id="10" name="">
+          <p:cNvPr id="10" name="Rectangle 9">
             <a:extLst xmlns:a="http://schemas.openxmlformats.org/drawingml/2006/main">
               <a:ext uri="{FF2B5EF4-FFF2-40B4-BE49-F238E27FC236}">
                 <a16:creationId xmlns:a16="http://schemas.microsoft.com/office/drawing/2014/main" id="{3ACA40CC-B4D7-4F19-9F8A-A0CC4E296D0A}"/>
@@ -10753,6 +10969,7 @@
           <a:lstStyle xmlns:a="http://schemas.openxmlformats.org/drawingml/2006/main"/>
           <a:p xmlns:a="http://schemas.openxmlformats.org/drawingml/2006/main">
             <a:pPr>
+              <a:buNone/>
               <a:defRPr sz="1950" b="1">
                 <a:solidFill>
                   <a:srgbClr val="173B31"/>
@@ -10778,7 +10995,7 @@
       </p:sp>
       <p:sp>
         <p:nvSpPr>
-          <p:cNvPr id="11" name="">
+          <p:cNvPr id="11" name="Rectangle 10">
             <a:extLst xmlns:a="http://schemas.openxmlformats.org/drawingml/2006/main">
               <a:ext uri="{FF2B5EF4-FFF2-40B4-BE49-F238E27FC236}">
                 <a16:creationId xmlns:a16="http://schemas.microsoft.com/office/drawing/2014/main" id="{706F0605-D3AD-4A54-8B16-D94E7F9B8344}"/>
@@ -10805,11 +11022,12 @@
         </p:spPr>
         <p:txBody>
           <a:bodyPr xmlns:a="http://schemas.openxmlformats.org/drawingml/2006/main">
-            <a:normAutofit fontScale="100000"/>
-          </a:bodyPr>
-          <a:lstStyle xmlns:a="http://schemas.openxmlformats.org/drawingml/2006/main"/>
-          <a:p xmlns:a="http://schemas.openxmlformats.org/drawingml/2006/main">
-            <a:pPr>
+            <a:normAutofit/>
+          </a:bodyPr>
+          <a:lstStyle xmlns:a="http://schemas.openxmlformats.org/drawingml/2006/main"/>
+          <a:p xmlns:a="http://schemas.openxmlformats.org/drawingml/2006/main">
+            <a:pPr>
+              <a:buNone/>
               <a:defRPr sz="1350" b="0">
                 <a:solidFill>
                   <a:srgbClr val="66736D"/>
@@ -10835,7 +11053,7 @@
       </p:sp>
       <p:sp>
         <p:nvSpPr>
-          <p:cNvPr id="12" name="">
+          <p:cNvPr id="12" name="Rectangle 11">
             <a:extLst xmlns:a="http://schemas.openxmlformats.org/drawingml/2006/main">
               <a:ext uri="{FF2B5EF4-FFF2-40B4-BE49-F238E27FC236}">
                 <a16:creationId xmlns:a16="http://schemas.microsoft.com/office/drawing/2014/main" id="{21142D07-E46D-4205-BB2E-77BA3AE965B5}"/>
@@ -10865,7 +11083,7 @@
       </p:sp>
       <p:sp>
         <p:nvSpPr>
-          <p:cNvPr id="13" name="">
+          <p:cNvPr id="13" name="Rectangle 12">
             <a:extLst xmlns:a="http://schemas.openxmlformats.org/drawingml/2006/main">
               <a:ext uri="{FF2B5EF4-FFF2-40B4-BE49-F238E27FC236}">
                 <a16:creationId xmlns:a16="http://schemas.microsoft.com/office/drawing/2014/main" id="{31F2A254-337C-46CA-A75D-21BE816C1AF8}"/>
@@ -10892,11 +11110,12 @@
         </p:spPr>
         <p:txBody>
           <a:bodyPr xmlns:a="http://schemas.openxmlformats.org/drawingml/2006/main">
-            <a:normAutofit fontScale="100000"/>
-          </a:bodyPr>
-          <a:lstStyle xmlns:a="http://schemas.openxmlformats.org/drawingml/2006/main"/>
-          <a:p xmlns:a="http://schemas.openxmlformats.org/drawingml/2006/main">
-            <a:pPr>
+            <a:normAutofit/>
+          </a:bodyPr>
+          <a:lstStyle xmlns:a="http://schemas.openxmlformats.org/drawingml/2006/main"/>
+          <a:p xmlns:a="http://schemas.openxmlformats.org/drawingml/2006/main">
+            <a:pPr>
+              <a:buNone/>
               <a:defRPr sz="1200" b="1">
                 <a:solidFill>
                   <a:srgbClr val="C64235"/>
@@ -10922,7 +11141,7 @@
       </p:sp>
       <p:sp>
         <p:nvSpPr>
-          <p:cNvPr id="14" name="">
+          <p:cNvPr id="14" name="Rectangle 13">
             <a:extLst xmlns:a="http://schemas.openxmlformats.org/drawingml/2006/main">
               <a:ext uri="{FF2B5EF4-FFF2-40B4-BE49-F238E27FC236}">
                 <a16:creationId xmlns:a16="http://schemas.microsoft.com/office/drawing/2014/main" id="{29E4F4DA-AE75-40F2-A8D8-799FA4E10F72}"/>
@@ -10954,6 +11173,7 @@
           <a:lstStyle xmlns:a="http://schemas.openxmlformats.org/drawingml/2006/main"/>
           <a:p xmlns:a="http://schemas.openxmlformats.org/drawingml/2006/main">
             <a:pPr>
+              <a:buNone/>
               <a:defRPr sz="2250" b="1">
                 <a:solidFill>
                   <a:srgbClr val="173B31"/>
@@ -11008,7 +11228,7 @@
       </p:grpSpPr>
       <p:sp>
         <p:nvSpPr>
-          <p:cNvPr id="27" name="">
+          <p:cNvPr id="27" name="Rectangle 26">
             <a:extLst xmlns:a="http://schemas.openxmlformats.org/drawingml/2006/main">
               <a:ext uri="{FF2B5EF4-FFF2-40B4-BE49-F238E27FC236}">
                 <a16:creationId xmlns:a16="http://schemas.microsoft.com/office/drawing/2014/main" id="{0B9B1D17-5658-4F9F-8C72-363BE6BB6B9B}"/>
@@ -11038,7 +11258,7 @@
       </p:sp>
       <p:sp>
         <p:nvSpPr>
-          <p:cNvPr id="2" name="">
+          <p:cNvPr id="2" name="Rectangle 1">
             <a:extLst xmlns:a="http://schemas.openxmlformats.org/drawingml/2006/main">
               <a:ext uri="{FF2B5EF4-FFF2-40B4-BE49-F238E27FC236}">
                 <a16:creationId xmlns:a16="http://schemas.microsoft.com/office/drawing/2014/main" id="{752ABEAA-13C9-4CB1-AF6D-64FFEFE52EE3}"/>
@@ -11065,11 +11285,12 @@
         </p:spPr>
         <p:txBody>
           <a:bodyPr xmlns:a="http://schemas.openxmlformats.org/drawingml/2006/main">
-            <a:normAutofit fontScale="100000"/>
-          </a:bodyPr>
-          <a:lstStyle xmlns:a="http://schemas.openxmlformats.org/drawingml/2006/main"/>
-          <a:p xmlns:a="http://schemas.openxmlformats.org/drawingml/2006/main">
-            <a:pPr>
+            <a:normAutofit/>
+          </a:bodyPr>
+          <a:lstStyle xmlns:a="http://schemas.openxmlformats.org/drawingml/2006/main"/>
+          <a:p xmlns:a="http://schemas.openxmlformats.org/drawingml/2006/main">
+            <a:pPr>
+              <a:buNone/>
               <a:defRPr sz="1125" b="1">
                 <a:solidFill>
                   <a:srgbClr val="C64235"/>
@@ -11095,7 +11316,7 @@
       </p:sp>
       <p:sp>
         <p:nvSpPr>
-          <p:cNvPr id="3" name="">
+          <p:cNvPr id="3" name="Rectangle 2">
             <a:extLst xmlns:a="http://schemas.openxmlformats.org/drawingml/2006/main">
               <a:ext uri="{FF2B5EF4-FFF2-40B4-BE49-F238E27FC236}">
                 <a16:creationId xmlns:a16="http://schemas.microsoft.com/office/drawing/2014/main" id="{D51E34E6-D9D8-4CAE-967B-73E1951465A4}"/>
@@ -11122,11 +11343,12 @@
         </p:spPr>
         <p:txBody>
           <a:bodyPr xmlns:a="http://schemas.openxmlformats.org/drawingml/2006/main">
-            <a:normAutofit fontScale="100000"/>
-          </a:bodyPr>
-          <a:lstStyle xmlns:a="http://schemas.openxmlformats.org/drawingml/2006/main"/>
-          <a:p xmlns:a="http://schemas.openxmlformats.org/drawingml/2006/main">
-            <a:pPr>
+            <a:normAutofit/>
+          </a:bodyPr>
+          <a:lstStyle xmlns:a="http://schemas.openxmlformats.org/drawingml/2006/main"/>
+          <a:p xmlns:a="http://schemas.openxmlformats.org/drawingml/2006/main">
+            <a:pPr>
+              <a:buNone/>
               <a:defRPr sz="2700" b="1">
                 <a:solidFill>
                   <a:srgbClr val="173B31"/>
@@ -11152,7 +11374,7 @@
       </p:sp>
       <p:sp>
         <p:nvSpPr>
-          <p:cNvPr id="4" name="">
+          <p:cNvPr id="4" name="Rectangle 3">
             <a:extLst xmlns:a="http://schemas.openxmlformats.org/drawingml/2006/main">
               <a:ext uri="{FF2B5EF4-FFF2-40B4-BE49-F238E27FC236}">
                 <a16:creationId xmlns:a16="http://schemas.microsoft.com/office/drawing/2014/main" id="{A046E0BD-564D-4314-93CD-B57EF75AADD8}"/>
@@ -11179,11 +11401,12 @@
         </p:spPr>
         <p:txBody>
           <a:bodyPr xmlns:a="http://schemas.openxmlformats.org/drawingml/2006/main">
-            <a:normAutofit fontScale="100000"/>
-          </a:bodyPr>
-          <a:lstStyle xmlns:a="http://schemas.openxmlformats.org/drawingml/2006/main"/>
-          <a:p xmlns:a="http://schemas.openxmlformats.org/drawingml/2006/main">
-            <a:pPr>
+            <a:normAutofit/>
+          </a:bodyPr>
+          <a:lstStyle xmlns:a="http://schemas.openxmlformats.org/drawingml/2006/main"/>
+          <a:p xmlns:a="http://schemas.openxmlformats.org/drawingml/2006/main">
+            <a:pPr>
+              <a:buNone/>
               <a:defRPr sz="1275" b="0">
                 <a:solidFill>
                   <a:srgbClr val="66736D"/>
@@ -11209,7 +11432,7 @@
       </p:sp>
       <p:sp>
         <p:nvSpPr>
-          <p:cNvPr id="5" name="">
+          <p:cNvPr id="5" name="Rectangle 4">
             <a:extLst xmlns:a="http://schemas.openxmlformats.org/drawingml/2006/main">
               <a:ext uri="{FF2B5EF4-FFF2-40B4-BE49-F238E27FC236}">
                 <a16:creationId xmlns:a16="http://schemas.microsoft.com/office/drawing/2014/main" id="{1B5E4861-88DB-4643-9452-A47C3A50461F}"/>
@@ -11241,6 +11464,7 @@
           <a:lstStyle xmlns:a="http://schemas.openxmlformats.org/drawingml/2006/main"/>
           <a:p xmlns:a="http://schemas.openxmlformats.org/drawingml/2006/main">
             <a:pPr>
+              <a:buNone/>
               <a:defRPr sz="975" b="1">
                 <a:solidFill>
                   <a:srgbClr val="66736D"/>
@@ -11266,7 +11490,7 @@
       </p:sp>
       <p:sp>
         <p:nvSpPr>
-          <p:cNvPr id="6" name="">
+          <p:cNvPr id="6" name="Rectangle: Rounded Corners 5">
             <a:extLst xmlns:a="http://schemas.openxmlformats.org/drawingml/2006/main">
               <a:ext uri="{FF2B5EF4-FFF2-40B4-BE49-F238E27FC236}">
                 <a16:creationId xmlns:a16="http://schemas.microsoft.com/office/drawing/2014/main" id="{A650FE94-945A-4C44-A61A-10A81C84D394}"/>
@@ -11298,7 +11522,7 @@
       </p:sp>
       <p:sp>
         <p:nvSpPr>
-          <p:cNvPr id="7" name="">
+          <p:cNvPr id="7" name="Rectangle: Rounded Corners 6">
             <a:extLst xmlns:a="http://schemas.openxmlformats.org/drawingml/2006/main">
               <a:ext uri="{FF2B5EF4-FFF2-40B4-BE49-F238E27FC236}">
                 <a16:creationId xmlns:a16="http://schemas.microsoft.com/office/drawing/2014/main" id="{3F8E9A2D-ACD1-4298-8C16-CE4FBE1560FD}"/>
@@ -11330,7 +11554,7 @@
       </p:sp>
       <p:sp>
         <p:nvSpPr>
-          <p:cNvPr id="8" name="">
+          <p:cNvPr id="8" name="Rectangle 7">
             <a:extLst xmlns:a="http://schemas.openxmlformats.org/drawingml/2006/main">
               <a:ext uri="{FF2B5EF4-FFF2-40B4-BE49-F238E27FC236}">
                 <a16:creationId xmlns:a16="http://schemas.microsoft.com/office/drawing/2014/main" id="{E95B927D-30D3-46FD-B7B0-A583546E31C8}"/>
@@ -11362,6 +11586,7 @@
           <a:lstStyle xmlns:a="http://schemas.openxmlformats.org/drawingml/2006/main"/>
           <a:p xmlns:a="http://schemas.openxmlformats.org/drawingml/2006/main">
             <a:pPr>
+              <a:buNone/>
               <a:defRPr sz="3000" b="1">
                 <a:solidFill>
                   <a:srgbClr val="173B31"/>
@@ -11387,7 +11612,7 @@
       </p:sp>
       <p:sp>
         <p:nvSpPr>
-          <p:cNvPr id="9" name="">
+          <p:cNvPr id="9" name="Rectangle 8">
             <a:extLst xmlns:a="http://schemas.openxmlformats.org/drawingml/2006/main">
               <a:ext uri="{FF2B5EF4-FFF2-40B4-BE49-F238E27FC236}">
                 <a16:creationId xmlns:a16="http://schemas.microsoft.com/office/drawing/2014/main" id="{17BF1DEA-F1E3-4665-85E9-E0FD29D1459A}"/>
@@ -11414,11 +11639,12 @@
         </p:spPr>
         <p:txBody>
           <a:bodyPr xmlns:a="http://schemas.openxmlformats.org/drawingml/2006/main">
-            <a:normAutofit fontScale="100000"/>
-          </a:bodyPr>
-          <a:lstStyle xmlns:a="http://schemas.openxmlformats.org/drawingml/2006/main"/>
-          <a:p xmlns:a="http://schemas.openxmlformats.org/drawingml/2006/main">
-            <a:pPr>
+            <a:normAutofit/>
+          </a:bodyPr>
+          <a:lstStyle xmlns:a="http://schemas.openxmlformats.org/drawingml/2006/main"/>
+          <a:p xmlns:a="http://schemas.openxmlformats.org/drawingml/2006/main">
+            <a:pPr>
+              <a:buNone/>
               <a:defRPr sz="1200" b="0">
                 <a:solidFill>
                   <a:srgbClr val="66736D"/>
@@ -11444,7 +11670,7 @@
       </p:sp>
       <p:sp>
         <p:nvSpPr>
-          <p:cNvPr id="10" name="">
+          <p:cNvPr id="10" name="Rectangle: Rounded Corners 9">
             <a:extLst xmlns:a="http://schemas.openxmlformats.org/drawingml/2006/main">
               <a:ext uri="{FF2B5EF4-FFF2-40B4-BE49-F238E27FC236}">
                 <a16:creationId xmlns:a16="http://schemas.microsoft.com/office/drawing/2014/main" id="{24B8B18C-3C91-48BC-9286-0956C0DAC7FC}"/>
@@ -11476,7 +11702,7 @@
       </p:sp>
       <p:sp>
         <p:nvSpPr>
-          <p:cNvPr id="11" name="">
+          <p:cNvPr id="11" name="Rectangle: Rounded Corners 10">
             <a:extLst xmlns:a="http://schemas.openxmlformats.org/drawingml/2006/main">
               <a:ext uri="{FF2B5EF4-FFF2-40B4-BE49-F238E27FC236}">
                 <a16:creationId xmlns:a16="http://schemas.microsoft.com/office/drawing/2014/main" id="{9D1DF15B-9513-4352-B398-BFC45C67460D}"/>
@@ -11508,7 +11734,7 @@
       </p:sp>
       <p:sp>
         <p:nvSpPr>
-          <p:cNvPr id="12" name="">
+          <p:cNvPr id="12" name="Rectangle 11">
             <a:extLst xmlns:a="http://schemas.openxmlformats.org/drawingml/2006/main">
               <a:ext uri="{FF2B5EF4-FFF2-40B4-BE49-F238E27FC236}">
                 <a16:creationId xmlns:a16="http://schemas.microsoft.com/office/drawing/2014/main" id="{C03D4A56-615C-45E3-9456-8092CB115AE3}"/>
@@ -11540,6 +11766,7 @@
           <a:lstStyle xmlns:a="http://schemas.openxmlformats.org/drawingml/2006/main"/>
           <a:p xmlns:a="http://schemas.openxmlformats.org/drawingml/2006/main">
             <a:pPr>
+              <a:buNone/>
               <a:defRPr sz="3000" b="1">
                 <a:solidFill>
                   <a:srgbClr val="173B31"/>
@@ -11565,7 +11792,7 @@
       </p:sp>
       <p:sp>
         <p:nvSpPr>
-          <p:cNvPr id="13" name="">
+          <p:cNvPr id="13" name="Rectangle 12">
             <a:extLst xmlns:a="http://schemas.openxmlformats.org/drawingml/2006/main">
               <a:ext uri="{FF2B5EF4-FFF2-40B4-BE49-F238E27FC236}">
                 <a16:creationId xmlns:a16="http://schemas.microsoft.com/office/drawing/2014/main" id="{AFE49B50-AECD-4B70-BDBC-9C276795D757}"/>
@@ -11592,11 +11819,12 @@
         </p:spPr>
         <p:txBody>
           <a:bodyPr xmlns:a="http://schemas.openxmlformats.org/drawingml/2006/main">
-            <a:normAutofit fontScale="100000"/>
-          </a:bodyPr>
-          <a:lstStyle xmlns:a="http://schemas.openxmlformats.org/drawingml/2006/main"/>
-          <a:p xmlns:a="http://schemas.openxmlformats.org/drawingml/2006/main">
-            <a:pPr>
+            <a:normAutofit/>
+          </a:bodyPr>
+          <a:lstStyle xmlns:a="http://schemas.openxmlformats.org/drawingml/2006/main"/>
+          <a:p xmlns:a="http://schemas.openxmlformats.org/drawingml/2006/main">
+            <a:pPr>
+              <a:buNone/>
               <a:defRPr sz="1200" b="0">
                 <a:solidFill>
                   <a:srgbClr val="66736D"/>
@@ -11622,7 +11850,7 @@
       </p:sp>
       <p:sp>
         <p:nvSpPr>
-          <p:cNvPr id="14" name="">
+          <p:cNvPr id="14" name="Rectangle: Rounded Corners 13">
             <a:extLst xmlns:a="http://schemas.openxmlformats.org/drawingml/2006/main">
               <a:ext uri="{FF2B5EF4-FFF2-40B4-BE49-F238E27FC236}">
                 <a16:creationId xmlns:a16="http://schemas.microsoft.com/office/drawing/2014/main" id="{FB905217-DB07-4848-AD8F-D2B377BADBA9}"/>
@@ -11654,7 +11882,7 @@
       </p:sp>
       <p:sp>
         <p:nvSpPr>
-          <p:cNvPr id="15" name="">
+          <p:cNvPr id="15" name="Rectangle: Rounded Corners 14">
             <a:extLst xmlns:a="http://schemas.openxmlformats.org/drawingml/2006/main">
               <a:ext uri="{FF2B5EF4-FFF2-40B4-BE49-F238E27FC236}">
                 <a16:creationId xmlns:a16="http://schemas.microsoft.com/office/drawing/2014/main" id="{3406117E-7652-41AB-A293-E88DFCD2A1A3}"/>
@@ -11686,7 +11914,7 @@
       </p:sp>
       <p:sp>
         <p:nvSpPr>
-          <p:cNvPr id="16" name="">
+          <p:cNvPr id="16" name="Rectangle 15">
             <a:extLst xmlns:a="http://schemas.openxmlformats.org/drawingml/2006/main">
               <a:ext uri="{FF2B5EF4-FFF2-40B4-BE49-F238E27FC236}">
                 <a16:creationId xmlns:a16="http://schemas.microsoft.com/office/drawing/2014/main" id="{5C21DD1E-9737-4248-991D-E5141323106C}"/>
@@ -11718,6 +11946,7 @@
           <a:lstStyle xmlns:a="http://schemas.openxmlformats.org/drawingml/2006/main"/>
           <a:p xmlns:a="http://schemas.openxmlformats.org/drawingml/2006/main">
             <a:pPr>
+              <a:buNone/>
               <a:defRPr sz="3000" b="1">
                 <a:solidFill>
                   <a:srgbClr val="173B31"/>
@@ -11743,7 +11972,7 @@
       </p:sp>
       <p:sp>
         <p:nvSpPr>
-          <p:cNvPr id="17" name="">
+          <p:cNvPr id="17" name="Rectangle 16">
             <a:extLst xmlns:a="http://schemas.openxmlformats.org/drawingml/2006/main">
               <a:ext uri="{FF2B5EF4-FFF2-40B4-BE49-F238E27FC236}">
                 <a16:creationId xmlns:a16="http://schemas.microsoft.com/office/drawing/2014/main" id="{650F0706-DE78-4A2B-AA59-163BCEE49902}"/>
@@ -11770,11 +11999,12 @@
         </p:spPr>
         <p:txBody>
           <a:bodyPr xmlns:a="http://schemas.openxmlformats.org/drawingml/2006/main">
-            <a:normAutofit fontScale="100000"/>
-          </a:bodyPr>
-          <a:lstStyle xmlns:a="http://schemas.openxmlformats.org/drawingml/2006/main"/>
-          <a:p xmlns:a="http://schemas.openxmlformats.org/drawingml/2006/main">
-            <a:pPr>
+            <a:normAutofit/>
+          </a:bodyPr>
+          <a:lstStyle xmlns:a="http://schemas.openxmlformats.org/drawingml/2006/main"/>
+          <a:p xmlns:a="http://schemas.openxmlformats.org/drawingml/2006/main">
+            <a:pPr>
+              <a:buNone/>
               <a:defRPr sz="1200" b="0">
                 <a:solidFill>
                   <a:srgbClr val="66736D"/>
@@ -11800,7 +12030,7 @@
       </p:sp>
       <p:sp>
         <p:nvSpPr>
-          <p:cNvPr id="18" name="">
+          <p:cNvPr id="18" name="Rectangle: Rounded Corners 17">
             <a:extLst xmlns:a="http://schemas.openxmlformats.org/drawingml/2006/main">
               <a:ext uri="{FF2B5EF4-FFF2-40B4-BE49-F238E27FC236}">
                 <a16:creationId xmlns:a16="http://schemas.microsoft.com/office/drawing/2014/main" id="{6D8AC1EB-BBFF-451B-B5EB-E2D5A7358E80}"/>
@@ -11832,7 +12062,7 @@
       </p:sp>
       <p:sp>
         <p:nvSpPr>
-          <p:cNvPr id="19" name="">
+          <p:cNvPr id="19" name="Rectangle: Rounded Corners 18">
             <a:extLst xmlns:a="http://schemas.openxmlformats.org/drawingml/2006/main">
               <a:ext uri="{FF2B5EF4-FFF2-40B4-BE49-F238E27FC236}">
                 <a16:creationId xmlns:a16="http://schemas.microsoft.com/office/drawing/2014/main" id="{9C0D515C-87C2-4142-9DCA-AD20A1C2138F}"/>
@@ -11864,7 +12094,7 @@
       </p:sp>
       <p:sp>
         <p:nvSpPr>
-          <p:cNvPr id="20" name="">
+          <p:cNvPr id="20" name="Rectangle 19">
             <a:extLst xmlns:a="http://schemas.openxmlformats.org/drawingml/2006/main">
               <a:ext uri="{FF2B5EF4-FFF2-40B4-BE49-F238E27FC236}">
                 <a16:creationId xmlns:a16="http://schemas.microsoft.com/office/drawing/2014/main" id="{83D53ABF-4C32-40AB-BEC4-7009CF00ADBC}"/>
@@ -11896,6 +12126,7 @@
           <a:lstStyle xmlns:a="http://schemas.openxmlformats.org/drawingml/2006/main"/>
           <a:p xmlns:a="http://schemas.openxmlformats.org/drawingml/2006/main">
             <a:pPr>
+              <a:buNone/>
               <a:defRPr sz="3000" b="1">
                 <a:solidFill>
                   <a:srgbClr val="173B31"/>
@@ -11921,7 +12152,7 @@
       </p:sp>
       <p:sp>
         <p:nvSpPr>
-          <p:cNvPr id="21" name="">
+          <p:cNvPr id="21" name="Rectangle 20">
             <a:extLst xmlns:a="http://schemas.openxmlformats.org/drawingml/2006/main">
               <a:ext uri="{FF2B5EF4-FFF2-40B4-BE49-F238E27FC236}">
                 <a16:creationId xmlns:a16="http://schemas.microsoft.com/office/drawing/2014/main" id="{3B2446CF-74D9-4A64-A0C9-B0FB36A743D6}"/>
@@ -11948,11 +12179,12 @@
         </p:spPr>
         <p:txBody>
           <a:bodyPr xmlns:a="http://schemas.openxmlformats.org/drawingml/2006/main">
-            <a:normAutofit fontScale="100000"/>
-          </a:bodyPr>
-          <a:lstStyle xmlns:a="http://schemas.openxmlformats.org/drawingml/2006/main"/>
-          <a:p xmlns:a="http://schemas.openxmlformats.org/drawingml/2006/main">
-            <a:pPr>
+            <a:normAutofit/>
+          </a:bodyPr>
+          <a:lstStyle xmlns:a="http://schemas.openxmlformats.org/drawingml/2006/main"/>
+          <a:p xmlns:a="http://schemas.openxmlformats.org/drawingml/2006/main">
+            <a:pPr>
+              <a:buNone/>
               <a:defRPr sz="1200" b="0">
                 <a:solidFill>
                   <a:srgbClr val="66736D"/>
@@ -11978,7 +12210,7 @@
       </p:sp>
       <p:graphicFrame>
         <p:nvGraphicFramePr>
-          <p:cNvPr id="48" name="Chart"/>
+          <p:cNvPr id="50" name="Chart"/>
           <p:cNvGraphicFramePr/>
           <p:nvPr/>
         </p:nvGraphicFramePr>
@@ -11988,13 +12220,13 @@
         </p:xfrm>
         <a:graphic xmlns:a="http://schemas.openxmlformats.org/drawingml/2006/main">
           <a:graphicData uri="http://schemas.openxmlformats.org/drawingml/2006/chart">
-            <c:chart xmlns:r="http://schemas.openxmlformats.org/officeDocument/2006/relationships" xmlns:c="http://schemas.openxmlformats.org/drawingml/2006/chart" r:id="R89a24962094c406f"/>
+            <c:chart xmlns:r="http://schemas.openxmlformats.org/officeDocument/2006/relationships" xmlns:c="http://schemas.openxmlformats.org/drawingml/2006/chart" r:id="Rf0d7c5a247834125"/>
           </a:graphicData>
         </a:graphic>
       </p:graphicFrame>
       <p:sp>
         <p:nvSpPr>
-          <p:cNvPr id="23" name="">
+          <p:cNvPr id="23" name="Rectangle 22">
             <a:extLst xmlns:a="http://schemas.openxmlformats.org/drawingml/2006/main">
               <a:ext uri="{FF2B5EF4-FFF2-40B4-BE49-F238E27FC236}">
                 <a16:creationId xmlns:a16="http://schemas.microsoft.com/office/drawing/2014/main" id="{48D50B55-9096-4B3A-B719-DA5C482FFF14}"/>
@@ -12026,6 +12258,7 @@
           <a:lstStyle xmlns:a="http://schemas.openxmlformats.org/drawingml/2006/main"/>
           <a:p xmlns:a="http://schemas.openxmlformats.org/drawingml/2006/main">
             <a:pPr>
+              <a:buNone/>
               <a:defRPr sz="1275" b="1">
                 <a:solidFill>
                   <a:srgbClr val="173B31"/>
@@ -12051,7 +12284,7 @@
       </p:sp>
       <p:sp>
         <p:nvSpPr>
-          <p:cNvPr id="24" name="">
+          <p:cNvPr id="24" name="Rectangle: Rounded Corners 23">
             <a:extLst xmlns:a="http://schemas.openxmlformats.org/drawingml/2006/main">
               <a:ext uri="{FF2B5EF4-FFF2-40B4-BE49-F238E27FC236}">
                 <a16:creationId xmlns:a16="http://schemas.microsoft.com/office/drawing/2014/main" id="{75270765-8CC8-4BFD-9250-7B251C5D6B09}"/>
@@ -12083,7 +12316,7 @@
       </p:sp>
       <p:sp>
         <p:nvSpPr>
-          <p:cNvPr id="25" name="">
+          <p:cNvPr id="25" name="Rectangle 24">
             <a:extLst xmlns:a="http://schemas.openxmlformats.org/drawingml/2006/main">
               <a:ext uri="{FF2B5EF4-FFF2-40B4-BE49-F238E27FC236}">
                 <a16:creationId xmlns:a16="http://schemas.microsoft.com/office/drawing/2014/main" id="{1B772062-F732-4D4A-A66F-45FA9A1BF116}"/>
@@ -12115,6 +12348,7 @@
           <a:lstStyle xmlns:a="http://schemas.openxmlformats.org/drawingml/2006/main"/>
           <a:p xmlns:a="http://schemas.openxmlformats.org/drawingml/2006/main">
             <a:pPr>
+              <a:buNone/>
               <a:defRPr sz="1575" b="1">
                 <a:solidFill>
                   <a:srgbClr val="173B31"/>
@@ -12140,7 +12374,7 @@
       </p:sp>
       <p:sp>
         <p:nvSpPr>
-          <p:cNvPr id="26" name="">
+          <p:cNvPr id="26" name="Rectangle 25">
             <a:extLst xmlns:a="http://schemas.openxmlformats.org/drawingml/2006/main">
               <a:ext uri="{FF2B5EF4-FFF2-40B4-BE49-F238E27FC236}">
                 <a16:creationId xmlns:a16="http://schemas.microsoft.com/office/drawing/2014/main" id="{E3D8C728-937F-42C9-8783-F191566EAD2D}"/>
@@ -12167,11 +12401,12 @@
         </p:spPr>
         <p:txBody>
           <a:bodyPr xmlns:a="http://schemas.openxmlformats.org/drawingml/2006/main">
-            <a:normAutofit fontScale="100000"/>
-          </a:bodyPr>
-          <a:lstStyle xmlns:a="http://schemas.openxmlformats.org/drawingml/2006/main"/>
-          <a:p xmlns:a="http://schemas.openxmlformats.org/drawingml/2006/main">
-            <a:pPr>
+            <a:normAutofit/>
+          </a:bodyPr>
+          <a:lstStyle xmlns:a="http://schemas.openxmlformats.org/drawingml/2006/main"/>
+          <a:p xmlns:a="http://schemas.openxmlformats.org/drawingml/2006/main">
+            <a:pPr>
+              <a:buNone/>
               <a:defRPr sz="1275" b="0">
                 <a:solidFill>
                   <a:srgbClr val="1D2B27"/>
@@ -12226,7 +12461,7 @@
       </p:grpSpPr>
       <p:sp>
         <p:nvSpPr>
-          <p:cNvPr id="37" name="">
+          <p:cNvPr id="37" name="Rectangle 36">
             <a:extLst xmlns:a="http://schemas.openxmlformats.org/drawingml/2006/main">
               <a:ext uri="{FF2B5EF4-FFF2-40B4-BE49-F238E27FC236}">
                 <a16:creationId xmlns:a16="http://schemas.microsoft.com/office/drawing/2014/main" id="{623E2A1D-47B4-4B20-87EC-FF6F5D4BEA96}"/>
@@ -12256,7 +12491,7 @@
       </p:sp>
       <p:sp>
         <p:nvSpPr>
-          <p:cNvPr id="2" name="">
+          <p:cNvPr id="2" name="Rectangle 1">
             <a:extLst xmlns:a="http://schemas.openxmlformats.org/drawingml/2006/main">
               <a:ext uri="{FF2B5EF4-FFF2-40B4-BE49-F238E27FC236}">
                 <a16:creationId xmlns:a16="http://schemas.microsoft.com/office/drawing/2014/main" id="{32C7DC1D-2A60-4BFC-85AB-9041D91489AC}"/>
@@ -12283,11 +12518,12 @@
         </p:spPr>
         <p:txBody>
           <a:bodyPr xmlns:a="http://schemas.openxmlformats.org/drawingml/2006/main">
-            <a:normAutofit fontScale="100000"/>
-          </a:bodyPr>
-          <a:lstStyle xmlns:a="http://schemas.openxmlformats.org/drawingml/2006/main"/>
-          <a:p xmlns:a="http://schemas.openxmlformats.org/drawingml/2006/main">
-            <a:pPr>
+            <a:normAutofit/>
+          </a:bodyPr>
+          <a:lstStyle xmlns:a="http://schemas.openxmlformats.org/drawingml/2006/main"/>
+          <a:p xmlns:a="http://schemas.openxmlformats.org/drawingml/2006/main">
+            <a:pPr>
+              <a:buNone/>
               <a:defRPr sz="1125" b="1">
                 <a:solidFill>
                   <a:srgbClr val="C64235"/>
@@ -12313,7 +12549,7 @@
       </p:sp>
       <p:sp>
         <p:nvSpPr>
-          <p:cNvPr id="3" name="">
+          <p:cNvPr id="3" name="Rectangle 2">
             <a:extLst xmlns:a="http://schemas.openxmlformats.org/drawingml/2006/main">
               <a:ext uri="{FF2B5EF4-FFF2-40B4-BE49-F238E27FC236}">
                 <a16:creationId xmlns:a16="http://schemas.microsoft.com/office/drawing/2014/main" id="{3AD9264C-EE9F-4A9C-AFE2-1C3DC9696623}"/>
@@ -12345,6 +12581,7 @@
           <a:lstStyle xmlns:a="http://schemas.openxmlformats.org/drawingml/2006/main"/>
           <a:p xmlns:a="http://schemas.openxmlformats.org/drawingml/2006/main">
             <a:pPr>
+              <a:buNone/>
               <a:defRPr sz="2700" b="1">
                 <a:solidFill>
                   <a:srgbClr val="173B31"/>
@@ -12363,14 +12600,14 @@
                 <a:ea typeface="Arial"/>
                 <a:cs typeface="Arial"/>
               </a:rPr>
-              <a:t>One pipeline, four accountability boundaries.</a:t>
-            </a:r>
-          </a:p>
-        </p:txBody>
-      </p:sp>
-      <p:sp>
-        <p:nvSpPr>
-          <p:cNvPr id="4" name="">
+              <a:t>One pipeline, five accountability boundaries.</a:t>
+            </a:r>
+          </a:p>
+        </p:txBody>
+      </p:sp>
+      <p:sp>
+        <p:nvSpPr>
+          <p:cNvPr id="4" name="Rectangle 3">
             <a:extLst xmlns:a="http://schemas.openxmlformats.org/drawingml/2006/main">
               <a:ext uri="{FF2B5EF4-FFF2-40B4-BE49-F238E27FC236}">
                 <a16:creationId xmlns:a16="http://schemas.microsoft.com/office/drawing/2014/main" id="{85EDF7AE-84AE-4D8E-A483-8F25D7FFBE60}"/>
@@ -12397,11 +12634,12 @@
         </p:spPr>
         <p:txBody>
           <a:bodyPr xmlns:a="http://schemas.openxmlformats.org/drawingml/2006/main">
-            <a:normAutofit fontScale="100000"/>
-          </a:bodyPr>
-          <a:lstStyle xmlns:a="http://schemas.openxmlformats.org/drawingml/2006/main"/>
-          <a:p xmlns:a="http://schemas.openxmlformats.org/drawingml/2006/main">
-            <a:pPr>
+            <a:normAutofit/>
+          </a:bodyPr>
+          <a:lstStyle xmlns:a="http://schemas.openxmlformats.org/drawingml/2006/main"/>
+          <a:p xmlns:a="http://schemas.openxmlformats.org/drawingml/2006/main">
+            <a:pPr>
+              <a:buNone/>
               <a:defRPr sz="1275" b="0">
                 <a:solidFill>
                   <a:srgbClr val="66736D"/>
@@ -12427,7 +12665,7 @@
       </p:sp>
       <p:sp>
         <p:nvSpPr>
-          <p:cNvPr id="5" name="">
+          <p:cNvPr id="5" name="Rectangle 4">
             <a:extLst xmlns:a="http://schemas.openxmlformats.org/drawingml/2006/main">
               <a:ext uri="{FF2B5EF4-FFF2-40B4-BE49-F238E27FC236}">
                 <a16:creationId xmlns:a16="http://schemas.microsoft.com/office/drawing/2014/main" id="{4500C8C6-DE79-4837-BAFA-783D5DC4B5A1}"/>
@@ -12459,6 +12697,7 @@
           <a:lstStyle xmlns:a="http://schemas.openxmlformats.org/drawingml/2006/main"/>
           <a:p xmlns:a="http://schemas.openxmlformats.org/drawingml/2006/main">
             <a:pPr>
+              <a:buNone/>
               <a:defRPr sz="975" b="1">
                 <a:solidFill>
                   <a:srgbClr val="66736D"/>
@@ -12484,7 +12723,7 @@
       </p:sp>
       <p:sp>
         <p:nvSpPr>
-          <p:cNvPr id="6" name="">
+          <p:cNvPr id="6" name="Rectangle: Rounded Corners 5">
             <a:extLst xmlns:a="http://schemas.openxmlformats.org/drawingml/2006/main">
               <a:ext uri="{FF2B5EF4-FFF2-40B4-BE49-F238E27FC236}">
                 <a16:creationId xmlns:a16="http://schemas.microsoft.com/office/drawing/2014/main" id="{ECD928AB-9482-45D4-AF61-8B7BFAA65A66}"/>
@@ -12516,7 +12755,7 @@
       </p:sp>
       <p:sp>
         <p:nvSpPr>
-          <p:cNvPr id="7" name="">
+          <p:cNvPr id="7" name="Rectangle: Rounded Corners 6">
             <a:extLst xmlns:a="http://schemas.openxmlformats.org/drawingml/2006/main">
               <a:ext uri="{FF2B5EF4-FFF2-40B4-BE49-F238E27FC236}">
                 <a16:creationId xmlns:a16="http://schemas.microsoft.com/office/drawing/2014/main" id="{786CC8FA-AC84-44B9-A459-A40E0F2BF4A7}"/>
@@ -12548,7 +12787,7 @@
       </p:sp>
       <p:sp>
         <p:nvSpPr>
-          <p:cNvPr id="8" name="">
+          <p:cNvPr id="8" name="Rectangle: Rounded Corners 7">
             <a:extLst xmlns:a="http://schemas.openxmlformats.org/drawingml/2006/main">
               <a:ext uri="{FF2B5EF4-FFF2-40B4-BE49-F238E27FC236}">
                 <a16:creationId xmlns:a16="http://schemas.microsoft.com/office/drawing/2014/main" id="{D162AFB1-5D69-469E-A3D2-BFD7C294FAE8}"/>
@@ -12580,7 +12819,7 @@
       </p:sp>
       <p:sp>
         <p:nvSpPr>
-          <p:cNvPr id="9" name="">
+          <p:cNvPr id="9" name="Rectangle: Rounded Corners 8">
             <a:extLst xmlns:a="http://schemas.openxmlformats.org/drawingml/2006/main">
               <a:ext uri="{FF2B5EF4-FFF2-40B4-BE49-F238E27FC236}">
                 <a16:creationId xmlns:a16="http://schemas.microsoft.com/office/drawing/2014/main" id="{87C5E363-0CE0-4611-BC59-DCB4C775D906}"/>
@@ -12612,7 +12851,7 @@
       </p:sp>
       <p:sp>
         <p:nvSpPr>
-          <p:cNvPr id="10" name="">
+          <p:cNvPr id="10" name="Rectangle: Rounded Corners 9">
             <a:extLst xmlns:a="http://schemas.openxmlformats.org/drawingml/2006/main">
               <a:ext uri="{FF2B5EF4-FFF2-40B4-BE49-F238E27FC236}">
                 <a16:creationId xmlns:a16="http://schemas.microsoft.com/office/drawing/2014/main" id="{762AD61A-C316-4EB5-BB99-83874B67C31D}"/>
@@ -12644,7 +12883,7 @@
       </p:sp>
       <p:sp>
         <p:nvSpPr>
-          <p:cNvPr id="11" name="">
+          <p:cNvPr id="11" name="Rectangle 10">
             <a:extLst xmlns:a="http://schemas.openxmlformats.org/drawingml/2006/main">
               <a:ext uri="{FF2B5EF4-FFF2-40B4-BE49-F238E27FC236}">
                 <a16:creationId xmlns:a16="http://schemas.microsoft.com/office/drawing/2014/main" id="{C2E31F77-83C2-470D-9BB8-D3B7505E5D50}"/>
@@ -12676,6 +12915,7 @@
           <a:lstStyle xmlns:a="http://schemas.openxmlformats.org/drawingml/2006/main"/>
           <a:p xmlns:a="http://schemas.openxmlformats.org/drawingml/2006/main">
             <a:pPr>
+              <a:buNone/>
               <a:defRPr sz="1275" b="1">
                 <a:solidFill>
                   <a:srgbClr val="C64235"/>
@@ -12701,7 +12941,7 @@
       </p:sp>
       <p:sp>
         <p:nvSpPr>
-          <p:cNvPr id="12" name="">
+          <p:cNvPr id="12" name="Rectangle 11">
             <a:extLst xmlns:a="http://schemas.openxmlformats.org/drawingml/2006/main">
               <a:ext uri="{FF2B5EF4-FFF2-40B4-BE49-F238E27FC236}">
                 <a16:creationId xmlns:a16="http://schemas.microsoft.com/office/drawing/2014/main" id="{5B59D0C8-8F6A-4B6D-BBCB-78287F1D4E40}"/>
@@ -12733,6 +12973,7 @@
           <a:lstStyle xmlns:a="http://schemas.openxmlformats.org/drawingml/2006/main"/>
           <a:p xmlns:a="http://schemas.openxmlformats.org/drawingml/2006/main">
             <a:pPr>
+              <a:buNone/>
               <a:defRPr sz="1650" b="1">
                 <a:solidFill>
                   <a:srgbClr val="173B31"/>
@@ -12758,7 +12999,7 @@
       </p:sp>
       <p:sp>
         <p:nvSpPr>
-          <p:cNvPr id="13" name="">
+          <p:cNvPr id="13" name="Rectangle 12">
             <a:extLst xmlns:a="http://schemas.openxmlformats.org/drawingml/2006/main">
               <a:ext uri="{FF2B5EF4-FFF2-40B4-BE49-F238E27FC236}">
                 <a16:creationId xmlns:a16="http://schemas.microsoft.com/office/drawing/2014/main" id="{4A71C9BB-E4B0-4044-89AE-2FB04FDBC3B2}"/>
@@ -12790,6 +13031,7 @@
           <a:lstStyle xmlns:a="http://schemas.openxmlformats.org/drawingml/2006/main"/>
           <a:p xmlns:a="http://schemas.openxmlformats.org/drawingml/2006/main">
             <a:pPr>
+              <a:buNone/>
               <a:defRPr sz="1125" b="0">
                 <a:solidFill>
                   <a:srgbClr val="1D2B27"/>
@@ -12815,7 +13057,7 @@
       </p:sp>
       <p:sp>
         <p:nvSpPr>
-          <p:cNvPr id="14" name="">
+          <p:cNvPr id="14" name="Rectangle: Rounded Corners 13">
             <a:extLst xmlns:a="http://schemas.openxmlformats.org/drawingml/2006/main">
               <a:ext uri="{FF2B5EF4-FFF2-40B4-BE49-F238E27FC236}">
                 <a16:creationId xmlns:a16="http://schemas.microsoft.com/office/drawing/2014/main" id="{C418C8A6-00A9-4A0E-B53D-242D39E3D01C}"/>
@@ -12847,7 +13089,7 @@
       </p:sp>
       <p:sp>
         <p:nvSpPr>
-          <p:cNvPr id="15" name="">
+          <p:cNvPr id="15" name="Rectangle 14">
             <a:extLst xmlns:a="http://schemas.openxmlformats.org/drawingml/2006/main">
               <a:ext uri="{FF2B5EF4-FFF2-40B4-BE49-F238E27FC236}">
                 <a16:creationId xmlns:a16="http://schemas.microsoft.com/office/drawing/2014/main" id="{74F85B72-54D7-4422-8514-81C67BF7AB8B}"/>
@@ -12879,6 +13121,7 @@
           <a:lstStyle xmlns:a="http://schemas.openxmlformats.org/drawingml/2006/main"/>
           <a:p xmlns:a="http://schemas.openxmlformats.org/drawingml/2006/main">
             <a:pPr>
+              <a:buNone/>
               <a:defRPr sz="1275" b="1">
                 <a:solidFill>
                   <a:srgbClr val="C64235"/>
@@ -12904,7 +13147,7 @@
       </p:sp>
       <p:sp>
         <p:nvSpPr>
-          <p:cNvPr id="16" name="">
+          <p:cNvPr id="16" name="Rectangle 15">
             <a:extLst xmlns:a="http://schemas.openxmlformats.org/drawingml/2006/main">
               <a:ext uri="{FF2B5EF4-FFF2-40B4-BE49-F238E27FC236}">
                 <a16:creationId xmlns:a16="http://schemas.microsoft.com/office/drawing/2014/main" id="{AAE596BD-3A0B-4F36-B07E-1512138F3C89}"/>
@@ -12931,11 +13174,12 @@
         </p:spPr>
         <p:txBody>
           <a:bodyPr xmlns:a="http://schemas.openxmlformats.org/drawingml/2006/main">
-            <a:normAutofit fontScale="100000"/>
-          </a:bodyPr>
-          <a:lstStyle xmlns:a="http://schemas.openxmlformats.org/drawingml/2006/main"/>
-          <a:p xmlns:a="http://schemas.openxmlformats.org/drawingml/2006/main">
-            <a:pPr>
+            <a:normAutofit/>
+          </a:bodyPr>
+          <a:lstStyle xmlns:a="http://schemas.openxmlformats.org/drawingml/2006/main"/>
+          <a:p xmlns:a="http://schemas.openxmlformats.org/drawingml/2006/main">
+            <a:pPr>
+              <a:buNone/>
               <a:defRPr sz="1650" b="1">
                 <a:solidFill>
                   <a:srgbClr val="173B31"/>
@@ -12961,7 +13205,7 @@
       </p:sp>
       <p:sp>
         <p:nvSpPr>
-          <p:cNvPr id="17" name="">
+          <p:cNvPr id="17" name="Rectangle 16">
             <a:extLst xmlns:a="http://schemas.openxmlformats.org/drawingml/2006/main">
               <a:ext uri="{FF2B5EF4-FFF2-40B4-BE49-F238E27FC236}">
                 <a16:creationId xmlns:a16="http://schemas.microsoft.com/office/drawing/2014/main" id="{A93F42CF-087E-4E5E-989B-8C98C5EB2F98}"/>
@@ -12993,6 +13237,7 @@
           <a:lstStyle xmlns:a="http://schemas.openxmlformats.org/drawingml/2006/main"/>
           <a:p xmlns:a="http://schemas.openxmlformats.org/drawingml/2006/main">
             <a:pPr>
+              <a:buNone/>
               <a:defRPr sz="1125" b="0">
                 <a:solidFill>
                   <a:srgbClr val="1D2B27"/>
@@ -13018,7 +13263,7 @@
       </p:sp>
       <p:sp>
         <p:nvSpPr>
-          <p:cNvPr id="18" name="">
+          <p:cNvPr id="18" name="Rectangle: Rounded Corners 17">
             <a:extLst xmlns:a="http://schemas.openxmlformats.org/drawingml/2006/main">
               <a:ext uri="{FF2B5EF4-FFF2-40B4-BE49-F238E27FC236}">
                 <a16:creationId xmlns:a16="http://schemas.microsoft.com/office/drawing/2014/main" id="{EF81F6FA-BCA7-4653-A528-99E09C9D308F}"/>
@@ -13050,7 +13295,7 @@
       </p:sp>
       <p:sp>
         <p:nvSpPr>
-          <p:cNvPr id="19" name="">
+          <p:cNvPr id="19" name="Rectangle 18">
             <a:extLst xmlns:a="http://schemas.openxmlformats.org/drawingml/2006/main">
               <a:ext uri="{FF2B5EF4-FFF2-40B4-BE49-F238E27FC236}">
                 <a16:creationId xmlns:a16="http://schemas.microsoft.com/office/drawing/2014/main" id="{E25575E9-3B7C-4A75-B781-20A006492880}"/>
@@ -13082,6 +13327,7 @@
           <a:lstStyle xmlns:a="http://schemas.openxmlformats.org/drawingml/2006/main"/>
           <a:p xmlns:a="http://schemas.openxmlformats.org/drawingml/2006/main">
             <a:pPr>
+              <a:buNone/>
               <a:defRPr sz="1275" b="1">
                 <a:solidFill>
                   <a:srgbClr val="C64235"/>
@@ -13107,7 +13353,7 @@
       </p:sp>
       <p:sp>
         <p:nvSpPr>
-          <p:cNvPr id="20" name="">
+          <p:cNvPr id="20" name="Rectangle 19">
             <a:extLst xmlns:a="http://schemas.openxmlformats.org/drawingml/2006/main">
               <a:ext uri="{FF2B5EF4-FFF2-40B4-BE49-F238E27FC236}">
                 <a16:creationId xmlns:a16="http://schemas.microsoft.com/office/drawing/2014/main" id="{65797CBD-B601-4495-9B08-E905DFC724D3}"/>
@@ -13134,11 +13380,12 @@
         </p:spPr>
         <p:txBody>
           <a:bodyPr xmlns:a="http://schemas.openxmlformats.org/drawingml/2006/main">
-            <a:normAutofit fontScale="100000"/>
-          </a:bodyPr>
-          <a:lstStyle xmlns:a="http://schemas.openxmlformats.org/drawingml/2006/main"/>
-          <a:p xmlns:a="http://schemas.openxmlformats.org/drawingml/2006/main">
-            <a:pPr>
+            <a:normAutofit/>
+          </a:bodyPr>
+          <a:lstStyle xmlns:a="http://schemas.openxmlformats.org/drawingml/2006/main"/>
+          <a:p xmlns:a="http://schemas.openxmlformats.org/drawingml/2006/main">
+            <a:pPr>
+              <a:buNone/>
               <a:defRPr sz="1650" b="1">
                 <a:solidFill>
                   <a:srgbClr val="173B31"/>
@@ -13164,7 +13411,7 @@
       </p:sp>
       <p:sp>
         <p:nvSpPr>
-          <p:cNvPr id="21" name="">
+          <p:cNvPr id="21" name="Rectangle 20">
             <a:extLst xmlns:a="http://schemas.openxmlformats.org/drawingml/2006/main">
               <a:ext uri="{FF2B5EF4-FFF2-40B4-BE49-F238E27FC236}">
                 <a16:creationId xmlns:a16="http://schemas.microsoft.com/office/drawing/2014/main" id="{872B0F95-952D-473E-A416-D00C4CF33DDC}"/>
@@ -13196,6 +13443,7 @@
           <a:lstStyle xmlns:a="http://schemas.openxmlformats.org/drawingml/2006/main"/>
           <a:p xmlns:a="http://schemas.openxmlformats.org/drawingml/2006/main">
             <a:pPr>
+              <a:buNone/>
               <a:defRPr sz="1125" b="0">
                 <a:solidFill>
                   <a:srgbClr val="1D2B27"/>
@@ -13221,7 +13469,7 @@
       </p:sp>
       <p:sp>
         <p:nvSpPr>
-          <p:cNvPr id="22" name="">
+          <p:cNvPr id="22" name="Rectangle: Rounded Corners 21">
             <a:extLst xmlns:a="http://schemas.openxmlformats.org/drawingml/2006/main">
               <a:ext uri="{FF2B5EF4-FFF2-40B4-BE49-F238E27FC236}">
                 <a16:creationId xmlns:a16="http://schemas.microsoft.com/office/drawing/2014/main" id="{1790F27E-1D18-4B9D-84C4-A7F88CA6D9C7}"/>
@@ -13253,7 +13501,7 @@
       </p:sp>
       <p:sp>
         <p:nvSpPr>
-          <p:cNvPr id="23" name="">
+          <p:cNvPr id="23" name="Rectangle 22">
             <a:extLst xmlns:a="http://schemas.openxmlformats.org/drawingml/2006/main">
               <a:ext uri="{FF2B5EF4-FFF2-40B4-BE49-F238E27FC236}">
                 <a16:creationId xmlns:a16="http://schemas.microsoft.com/office/drawing/2014/main" id="{C7DFE6EF-F3C0-4D80-BD3F-93871CC48895}"/>
@@ -13285,6 +13533,7 @@
           <a:lstStyle xmlns:a="http://schemas.openxmlformats.org/drawingml/2006/main"/>
           <a:p xmlns:a="http://schemas.openxmlformats.org/drawingml/2006/main">
             <a:pPr>
+              <a:buNone/>
               <a:defRPr sz="1275" b="1">
                 <a:solidFill>
                   <a:srgbClr val="C64235"/>
@@ -13310,7 +13559,7 @@
       </p:sp>
       <p:sp>
         <p:nvSpPr>
-          <p:cNvPr id="24" name="">
+          <p:cNvPr id="24" name="Rectangle 23">
             <a:extLst xmlns:a="http://schemas.openxmlformats.org/drawingml/2006/main">
               <a:ext uri="{FF2B5EF4-FFF2-40B4-BE49-F238E27FC236}">
                 <a16:creationId xmlns:a16="http://schemas.microsoft.com/office/drawing/2014/main" id="{F64D4804-C670-4E33-BC39-631CFFE08AF1}"/>
@@ -13337,11 +13586,12 @@
         </p:spPr>
         <p:txBody>
           <a:bodyPr xmlns:a="http://schemas.openxmlformats.org/drawingml/2006/main">
-            <a:normAutofit fontScale="100000"/>
-          </a:bodyPr>
-          <a:lstStyle xmlns:a="http://schemas.openxmlformats.org/drawingml/2006/main"/>
-          <a:p xmlns:a="http://schemas.openxmlformats.org/drawingml/2006/main">
-            <a:pPr>
+            <a:normAutofit/>
+          </a:bodyPr>
+          <a:lstStyle xmlns:a="http://schemas.openxmlformats.org/drawingml/2006/main"/>
+          <a:p xmlns:a="http://schemas.openxmlformats.org/drawingml/2006/main">
+            <a:pPr>
+              <a:buNone/>
               <a:defRPr sz="1650" b="1">
                 <a:solidFill>
                   <a:srgbClr val="173B31"/>
@@ -13367,7 +13617,7 @@
       </p:sp>
       <p:sp>
         <p:nvSpPr>
-          <p:cNvPr id="25" name="">
+          <p:cNvPr id="25" name="Rectangle 24">
             <a:extLst xmlns:a="http://schemas.openxmlformats.org/drawingml/2006/main">
               <a:ext uri="{FF2B5EF4-FFF2-40B4-BE49-F238E27FC236}">
                 <a16:creationId xmlns:a16="http://schemas.microsoft.com/office/drawing/2014/main" id="{EB04A974-565E-49D3-8CD2-88E7A8CA86C3}"/>
@@ -13399,6 +13649,7 @@
           <a:lstStyle xmlns:a="http://schemas.openxmlformats.org/drawingml/2006/main"/>
           <a:p xmlns:a="http://schemas.openxmlformats.org/drawingml/2006/main">
             <a:pPr>
+              <a:buNone/>
               <a:defRPr sz="1125" b="0">
                 <a:solidFill>
                   <a:srgbClr val="1D2B27"/>
@@ -13424,7 +13675,7 @@
       </p:sp>
       <p:sp>
         <p:nvSpPr>
-          <p:cNvPr id="26" name="">
+          <p:cNvPr id="26" name="Rectangle: Rounded Corners 25">
             <a:extLst xmlns:a="http://schemas.openxmlformats.org/drawingml/2006/main">
               <a:ext uri="{FF2B5EF4-FFF2-40B4-BE49-F238E27FC236}">
                 <a16:creationId xmlns:a16="http://schemas.microsoft.com/office/drawing/2014/main" id="{AA5553B4-FD8B-419C-9737-9E245E3AEF59}"/>
@@ -13456,7 +13707,7 @@
       </p:sp>
       <p:sp>
         <p:nvSpPr>
-          <p:cNvPr id="27" name="">
+          <p:cNvPr id="27" name="Rectangle 26">
             <a:extLst xmlns:a="http://schemas.openxmlformats.org/drawingml/2006/main">
               <a:ext uri="{FF2B5EF4-FFF2-40B4-BE49-F238E27FC236}">
                 <a16:creationId xmlns:a16="http://schemas.microsoft.com/office/drawing/2014/main" id="{06185954-580C-4F75-B0E7-EE99EA9F6FAC}"/>
@@ -13488,6 +13739,7 @@
           <a:lstStyle xmlns:a="http://schemas.openxmlformats.org/drawingml/2006/main"/>
           <a:p xmlns:a="http://schemas.openxmlformats.org/drawingml/2006/main">
             <a:pPr>
+              <a:buNone/>
               <a:defRPr sz="1275" b="1">
                 <a:solidFill>
                   <a:srgbClr val="C64235"/>
@@ -13513,7 +13765,7 @@
       </p:sp>
       <p:sp>
         <p:nvSpPr>
-          <p:cNvPr id="28" name="">
+          <p:cNvPr id="28" name="Rectangle 27">
             <a:extLst xmlns:a="http://schemas.openxmlformats.org/drawingml/2006/main">
               <a:ext uri="{FF2B5EF4-FFF2-40B4-BE49-F238E27FC236}">
                 <a16:creationId xmlns:a16="http://schemas.microsoft.com/office/drawing/2014/main" id="{908C73A1-3385-45E8-93B2-C6A024AEAE86}"/>
@@ -13545,6 +13797,7 @@
           <a:lstStyle xmlns:a="http://schemas.openxmlformats.org/drawingml/2006/main"/>
           <a:p xmlns:a="http://schemas.openxmlformats.org/drawingml/2006/main">
             <a:pPr>
+              <a:buNone/>
               <a:defRPr sz="1650" b="1">
                 <a:solidFill>
                   <a:srgbClr val="173B31"/>
@@ -13570,7 +13823,7 @@
       </p:sp>
       <p:sp>
         <p:nvSpPr>
-          <p:cNvPr id="29" name="">
+          <p:cNvPr id="29" name="Rectangle 28">
             <a:extLst xmlns:a="http://schemas.openxmlformats.org/drawingml/2006/main">
               <a:ext uri="{FF2B5EF4-FFF2-40B4-BE49-F238E27FC236}">
                 <a16:creationId xmlns:a16="http://schemas.microsoft.com/office/drawing/2014/main" id="{18B7CF75-5793-4ACA-BD3D-17401DA1CAAD}"/>
@@ -13602,6 +13855,7 @@
           <a:lstStyle xmlns:a="http://schemas.openxmlformats.org/drawingml/2006/main"/>
           <a:p xmlns:a="http://schemas.openxmlformats.org/drawingml/2006/main">
             <a:pPr>
+              <a:buNone/>
               <a:defRPr sz="1125" b="0">
                 <a:solidFill>
                   <a:srgbClr val="1D2B27"/>
@@ -13627,7 +13881,7 @@
       </p:sp>
       <p:sp>
         <p:nvSpPr>
-          <p:cNvPr id="30" name="">
+          <p:cNvPr id="30" name="Rectangle 29">
             <a:extLst xmlns:a="http://schemas.openxmlformats.org/drawingml/2006/main">
               <a:ext uri="{FF2B5EF4-FFF2-40B4-BE49-F238E27FC236}">
                 <a16:creationId xmlns:a16="http://schemas.microsoft.com/office/drawing/2014/main" id="{BC00021C-8766-4DAC-A150-DF89D0ACD67E}"/>
@@ -13659,6 +13913,7 @@
           <a:lstStyle xmlns:a="http://schemas.openxmlformats.org/drawingml/2006/main"/>
           <a:p xmlns:a="http://schemas.openxmlformats.org/drawingml/2006/main">
             <a:pPr>
+              <a:buNone/>
               <a:defRPr sz="1050" b="1">
                 <a:solidFill>
                   <a:srgbClr val="C64235"/>
@@ -13684,7 +13939,7 @@
       </p:sp>
       <p:sp>
         <p:nvSpPr>
-          <p:cNvPr id="31" name="">
+          <p:cNvPr id="31" name="Rectangle 30">
             <a:extLst xmlns:a="http://schemas.openxmlformats.org/drawingml/2006/main">
               <a:ext uri="{FF2B5EF4-FFF2-40B4-BE49-F238E27FC236}">
                 <a16:creationId xmlns:a16="http://schemas.microsoft.com/office/drawing/2014/main" id="{12B0EFAB-79DD-4DA8-99F6-2BCA1798038A}"/>
@@ -13716,6 +13971,7 @@
           <a:lstStyle xmlns:a="http://schemas.openxmlformats.org/drawingml/2006/main"/>
           <a:p xmlns:a="http://schemas.openxmlformats.org/drawingml/2006/main">
             <a:pPr>
+              <a:buNone/>
               <a:defRPr sz="1050" b="1">
                 <a:solidFill>
                   <a:srgbClr val="D89029"/>
@@ -13741,7 +13997,7 @@
       </p:sp>
       <p:sp>
         <p:nvSpPr>
-          <p:cNvPr id="32" name="">
+          <p:cNvPr id="32" name="Rectangle 31">
             <a:extLst xmlns:a="http://schemas.openxmlformats.org/drawingml/2006/main">
               <a:ext uri="{FF2B5EF4-FFF2-40B4-BE49-F238E27FC236}">
                 <a16:creationId xmlns:a16="http://schemas.microsoft.com/office/drawing/2014/main" id="{695E75BB-8CDE-481F-9AEF-788C7CC6DB16}"/>
@@ -13773,6 +14029,7 @@
           <a:lstStyle xmlns:a="http://schemas.openxmlformats.org/drawingml/2006/main"/>
           <a:p xmlns:a="http://schemas.openxmlformats.org/drawingml/2006/main">
             <a:pPr>
+              <a:buNone/>
               <a:defRPr sz="1050" b="1">
                 <a:solidFill>
                   <a:srgbClr val="2D7A62"/>
@@ -13798,7 +14055,7 @@
       </p:sp>
       <p:sp>
         <p:nvSpPr>
-          <p:cNvPr id="33" name="">
+          <p:cNvPr id="33" name="Rectangle 32">
             <a:extLst xmlns:a="http://schemas.openxmlformats.org/drawingml/2006/main">
               <a:ext uri="{FF2B5EF4-FFF2-40B4-BE49-F238E27FC236}">
                 <a16:creationId xmlns:a16="http://schemas.microsoft.com/office/drawing/2014/main" id="{86F8C33F-7B3A-483E-BCE7-C0E7B7789DB8}"/>
@@ -13830,6 +14087,7 @@
           <a:lstStyle xmlns:a="http://schemas.openxmlformats.org/drawingml/2006/main"/>
           <a:p xmlns:a="http://schemas.openxmlformats.org/drawingml/2006/main">
             <a:pPr>
+              <a:buNone/>
               <a:defRPr sz="1050" b="1">
                 <a:solidFill>
                   <a:srgbClr val="4E79A7"/>
@@ -13855,7 +14113,7 @@
       </p:sp>
       <p:sp>
         <p:nvSpPr>
-          <p:cNvPr id="34" name="">
+          <p:cNvPr id="34" name="Rectangle 33">
             <a:extLst xmlns:a="http://schemas.openxmlformats.org/drawingml/2006/main">
               <a:ext uri="{FF2B5EF4-FFF2-40B4-BE49-F238E27FC236}">
                 <a16:creationId xmlns:a16="http://schemas.microsoft.com/office/drawing/2014/main" id="{8681FE76-EBD0-4DC0-BCC8-5009432D899C}"/>
@@ -13887,6 +14145,7 @@
           <a:lstStyle xmlns:a="http://schemas.openxmlformats.org/drawingml/2006/main"/>
           <a:p xmlns:a="http://schemas.openxmlformats.org/drawingml/2006/main">
             <a:pPr>
+              <a:buNone/>
               <a:defRPr sz="1050" b="1">
                 <a:solidFill>
                   <a:srgbClr val="C64235"/>
@@ -13912,7 +14171,7 @@
       </p:sp>
       <p:sp>
         <p:nvSpPr>
-          <p:cNvPr id="35" name="">
+          <p:cNvPr id="35" name="Rectangle: Rounded Corners 34">
             <a:extLst xmlns:a="http://schemas.openxmlformats.org/drawingml/2006/main">
               <a:ext uri="{FF2B5EF4-FFF2-40B4-BE49-F238E27FC236}">
                 <a16:creationId xmlns:a16="http://schemas.microsoft.com/office/drawing/2014/main" id="{2EC70B41-F741-4FE9-B796-E1E6BB1F7307}"/>
@@ -13944,7 +14203,7 @@
       </p:sp>
       <p:sp>
         <p:nvSpPr>
-          <p:cNvPr id="36" name="">
+          <p:cNvPr id="36" name="Rectangle 35">
             <a:extLst xmlns:a="http://schemas.openxmlformats.org/drawingml/2006/main">
               <a:ext uri="{FF2B5EF4-FFF2-40B4-BE49-F238E27FC236}">
                 <a16:creationId xmlns:a16="http://schemas.microsoft.com/office/drawing/2014/main" id="{5DC99D62-F898-4BE2-9FA7-49291D539A53}"/>
@@ -13976,6 +14235,7 @@
           <a:lstStyle xmlns:a="http://schemas.openxmlformats.org/drawingml/2006/main"/>
           <a:p xmlns:a="http://schemas.openxmlformats.org/drawingml/2006/main">
             <a:pPr>
+              <a:buNone/>
               <a:defRPr sz="1800" b="1">
                 <a:solidFill>
                   <a:srgbClr val="FFFFFF"/>
@@ -13994,7 +14254,7 @@
                 <a:ea typeface="Arial"/>
                 <a:cs typeface="Arial"/>
               </a:rPr>
-              <a:t>Historical KPIs and model results never mix with user-submitted venues.</a:t>
+              <a:t>Historical KPIs and ML stay isolated; approved submissions join public discovery.</a:t>
             </a:r>
           </a:p>
         </p:txBody>
@@ -14030,7 +14290,7 @@
       </p:grpSpPr>
       <p:sp>
         <p:nvSpPr>
-          <p:cNvPr id="36" name="">
+          <p:cNvPr id="36" name="Rectangle 35">
             <a:extLst xmlns:a="http://schemas.openxmlformats.org/drawingml/2006/main">
               <a:ext uri="{FF2B5EF4-FFF2-40B4-BE49-F238E27FC236}">
                 <a16:creationId xmlns:a16="http://schemas.microsoft.com/office/drawing/2014/main" id="{7D4592C0-2454-4393-B70E-F95196DE4D3B}"/>
@@ -14060,7 +14320,7 @@
       </p:sp>
       <p:sp>
         <p:nvSpPr>
-          <p:cNvPr id="2" name="">
+          <p:cNvPr id="2" name="Rectangle 1">
             <a:extLst xmlns:a="http://schemas.openxmlformats.org/drawingml/2006/main">
               <a:ext uri="{FF2B5EF4-FFF2-40B4-BE49-F238E27FC236}">
                 <a16:creationId xmlns:a16="http://schemas.microsoft.com/office/drawing/2014/main" id="{6B47B766-E78A-4D7A-9E7E-55786FA0F5DA}"/>
@@ -14087,11 +14347,12 @@
         </p:spPr>
         <p:txBody>
           <a:bodyPr xmlns:a="http://schemas.openxmlformats.org/drawingml/2006/main">
-            <a:normAutofit fontScale="100000"/>
-          </a:bodyPr>
-          <a:lstStyle xmlns:a="http://schemas.openxmlformats.org/drawingml/2006/main"/>
-          <a:p xmlns:a="http://schemas.openxmlformats.org/drawingml/2006/main">
-            <a:pPr>
+            <a:normAutofit/>
+          </a:bodyPr>
+          <a:lstStyle xmlns:a="http://schemas.openxmlformats.org/drawingml/2006/main"/>
+          <a:p xmlns:a="http://schemas.openxmlformats.org/drawingml/2006/main">
+            <a:pPr>
+              <a:buNone/>
               <a:defRPr sz="1125" b="1">
                 <a:solidFill>
                   <a:srgbClr val="C64235"/>
@@ -14117,7 +14378,7 @@
       </p:sp>
       <p:sp>
         <p:nvSpPr>
-          <p:cNvPr id="3" name="">
+          <p:cNvPr id="3" name="Rectangle 2">
             <a:extLst xmlns:a="http://schemas.openxmlformats.org/drawingml/2006/main">
               <a:ext uri="{FF2B5EF4-FFF2-40B4-BE49-F238E27FC236}">
                 <a16:creationId xmlns:a16="http://schemas.microsoft.com/office/drawing/2014/main" id="{3F2E3A4F-5A09-4649-A017-0A955AF83F75}"/>
@@ -14144,11 +14405,12 @@
         </p:spPr>
         <p:txBody>
           <a:bodyPr xmlns:a="http://schemas.openxmlformats.org/drawingml/2006/main">
-            <a:normAutofit fontScale="100000"/>
-          </a:bodyPr>
-          <a:lstStyle xmlns:a="http://schemas.openxmlformats.org/drawingml/2006/main"/>
-          <a:p xmlns:a="http://schemas.openxmlformats.org/drawingml/2006/main">
-            <a:pPr>
+            <a:normAutofit/>
+          </a:bodyPr>
+          <a:lstStyle xmlns:a="http://schemas.openxmlformats.org/drawingml/2006/main"/>
+          <a:p xmlns:a="http://schemas.openxmlformats.org/drawingml/2006/main">
+            <a:pPr>
+              <a:buNone/>
               <a:defRPr sz="2700" b="1">
                 <a:solidFill>
                   <a:srgbClr val="173B31"/>
@@ -14174,7 +14436,7 @@
       </p:sp>
       <p:sp>
         <p:nvSpPr>
-          <p:cNvPr id="4" name="">
+          <p:cNvPr id="4" name="Rectangle 3">
             <a:extLst xmlns:a="http://schemas.openxmlformats.org/drawingml/2006/main">
               <a:ext uri="{FF2B5EF4-FFF2-40B4-BE49-F238E27FC236}">
                 <a16:creationId xmlns:a16="http://schemas.microsoft.com/office/drawing/2014/main" id="{399F220A-70FD-4265-B6D8-F4CD35A7209B}"/>
@@ -14201,11 +14463,12 @@
         </p:spPr>
         <p:txBody>
           <a:bodyPr xmlns:a="http://schemas.openxmlformats.org/drawingml/2006/main">
-            <a:normAutofit fontScale="100000"/>
-          </a:bodyPr>
-          <a:lstStyle xmlns:a="http://schemas.openxmlformats.org/drawingml/2006/main"/>
-          <a:p xmlns:a="http://schemas.openxmlformats.org/drawingml/2006/main">
-            <a:pPr>
+            <a:normAutofit/>
+          </a:bodyPr>
+          <a:lstStyle xmlns:a="http://schemas.openxmlformats.org/drawingml/2006/main"/>
+          <a:p xmlns:a="http://schemas.openxmlformats.org/drawingml/2006/main">
+            <a:pPr>
+              <a:buNone/>
               <a:defRPr sz="1275" b="0">
                 <a:solidFill>
                   <a:srgbClr val="66736D"/>
@@ -14231,7 +14494,7 @@
       </p:sp>
       <p:sp>
         <p:nvSpPr>
-          <p:cNvPr id="5" name="">
+          <p:cNvPr id="5" name="Rectangle 4">
             <a:extLst xmlns:a="http://schemas.openxmlformats.org/drawingml/2006/main">
               <a:ext uri="{FF2B5EF4-FFF2-40B4-BE49-F238E27FC236}">
                 <a16:creationId xmlns:a16="http://schemas.microsoft.com/office/drawing/2014/main" id="{2E87DD71-43AC-4281-BEB6-37A21B7343A9}"/>
@@ -14263,6 +14526,7 @@
           <a:lstStyle xmlns:a="http://schemas.openxmlformats.org/drawingml/2006/main"/>
           <a:p xmlns:a="http://schemas.openxmlformats.org/drawingml/2006/main">
             <a:pPr>
+              <a:buNone/>
               <a:defRPr sz="975" b="1">
                 <a:solidFill>
                   <a:srgbClr val="66736D"/>
@@ -14288,7 +14552,7 @@
       </p:sp>
       <p:sp>
         <p:nvSpPr>
-          <p:cNvPr id="6" name="">
+          <p:cNvPr id="6" name="Rectangle 5">
             <a:extLst xmlns:a="http://schemas.openxmlformats.org/drawingml/2006/main">
               <a:ext uri="{FF2B5EF4-FFF2-40B4-BE49-F238E27FC236}">
                 <a16:creationId xmlns:a16="http://schemas.microsoft.com/office/drawing/2014/main" id="{9249A258-BCF5-4C49-BE25-1A52F33C1577}"/>
@@ -14318,7 +14582,7 @@
       </p:sp>
       <p:sp>
         <p:nvSpPr>
-          <p:cNvPr id="7" name="">
+          <p:cNvPr id="7" name="Rectangle 6">
             <a:extLst xmlns:a="http://schemas.openxmlformats.org/drawingml/2006/main">
               <a:ext uri="{FF2B5EF4-FFF2-40B4-BE49-F238E27FC236}">
                 <a16:creationId xmlns:a16="http://schemas.microsoft.com/office/drawing/2014/main" id="{CC0F45E2-C8CF-47A6-9176-43E8A09F8442}"/>
@@ -14348,7 +14612,7 @@
       </p:sp>
       <p:sp>
         <p:nvSpPr>
-          <p:cNvPr id="8" name="">
+          <p:cNvPr id="8" name="Rectangle 7">
             <a:extLst xmlns:a="http://schemas.openxmlformats.org/drawingml/2006/main">
               <a:ext uri="{FF2B5EF4-FFF2-40B4-BE49-F238E27FC236}">
                 <a16:creationId xmlns:a16="http://schemas.microsoft.com/office/drawing/2014/main" id="{3EC81685-F16B-45A2-8A18-9F8216129C7D}"/>
@@ -14378,7 +14642,7 @@
       </p:sp>
       <p:sp>
         <p:nvSpPr>
-          <p:cNvPr id="9" name="">
+          <p:cNvPr id="9" name="Rectangle 8">
             <a:extLst xmlns:a="http://schemas.openxmlformats.org/drawingml/2006/main">
               <a:ext uri="{FF2B5EF4-FFF2-40B4-BE49-F238E27FC236}">
                 <a16:creationId xmlns:a16="http://schemas.microsoft.com/office/drawing/2014/main" id="{21D1D77C-DB6F-4575-AC5B-16F9F7E8BE33}"/>
@@ -14408,7 +14672,7 @@
       </p:sp>
       <p:sp>
         <p:nvSpPr>
-          <p:cNvPr id="10" name="">
+          <p:cNvPr id="10" name="Rectangle 9">
             <a:extLst xmlns:a="http://schemas.openxmlformats.org/drawingml/2006/main">
               <a:ext uri="{FF2B5EF4-FFF2-40B4-BE49-F238E27FC236}">
                 <a16:creationId xmlns:a16="http://schemas.microsoft.com/office/drawing/2014/main" id="{CAD11D7D-F477-4C47-A248-77562F50DCB9}"/>
@@ -14438,7 +14702,7 @@
       </p:sp>
       <p:sp>
         <p:nvSpPr>
-          <p:cNvPr id="11" name="">
+          <p:cNvPr id="11" name="Rectangle 10">
             <a:extLst xmlns:a="http://schemas.openxmlformats.org/drawingml/2006/main">
               <a:ext uri="{FF2B5EF4-FFF2-40B4-BE49-F238E27FC236}">
                 <a16:creationId xmlns:a16="http://schemas.microsoft.com/office/drawing/2014/main" id="{9473CE42-3C37-4E45-8A40-D3BC0305078E}"/>
@@ -14468,7 +14732,7 @@
       </p:sp>
       <p:sp>
         <p:nvSpPr>
-          <p:cNvPr id="12" name="">
+          <p:cNvPr id="12" name="Rectangle: Rounded Corners 11">
             <a:extLst xmlns:a="http://schemas.openxmlformats.org/drawingml/2006/main">
               <a:ext uri="{FF2B5EF4-FFF2-40B4-BE49-F238E27FC236}">
                 <a16:creationId xmlns:a16="http://schemas.microsoft.com/office/drawing/2014/main" id="{51B004C3-09C4-41C9-8EFB-BD1A1F98970B}"/>
@@ -14500,7 +14764,7 @@
       </p:sp>
       <p:sp>
         <p:nvSpPr>
-          <p:cNvPr id="13" name="">
+          <p:cNvPr id="13" name="Rectangle 12">
             <a:extLst xmlns:a="http://schemas.openxmlformats.org/drawingml/2006/main">
               <a:ext uri="{FF2B5EF4-FFF2-40B4-BE49-F238E27FC236}">
                 <a16:creationId xmlns:a16="http://schemas.microsoft.com/office/drawing/2014/main" id="{A4D1441D-9655-48F4-9EEF-75B1D9B16063}"/>
@@ -14532,6 +14796,7 @@
           <a:lstStyle xmlns:a="http://schemas.openxmlformats.org/drawingml/2006/main"/>
           <a:p xmlns:a="http://schemas.openxmlformats.org/drawingml/2006/main">
             <a:pPr>
+              <a:buNone/>
               <a:defRPr sz="1425" b="1">
                 <a:solidFill>
                   <a:srgbClr val="173B31"/>
@@ -14557,7 +14822,7 @@
       </p:sp>
       <p:sp>
         <p:nvSpPr>
-          <p:cNvPr id="14" name="">
+          <p:cNvPr id="14" name="Rectangle 13">
             <a:extLst xmlns:a="http://schemas.openxmlformats.org/drawingml/2006/main">
               <a:ext uri="{FF2B5EF4-FFF2-40B4-BE49-F238E27FC236}">
                 <a16:creationId xmlns:a16="http://schemas.microsoft.com/office/drawing/2014/main" id="{38798195-BE75-4875-AD80-243577731620}"/>
@@ -14584,11 +14849,12 @@
         </p:spPr>
         <p:txBody>
           <a:bodyPr xmlns:a="http://schemas.openxmlformats.org/drawingml/2006/main">
-            <a:normAutofit fontScale="100000"/>
-          </a:bodyPr>
-          <a:lstStyle xmlns:a="http://schemas.openxmlformats.org/drawingml/2006/main"/>
-          <a:p xmlns:a="http://schemas.openxmlformats.org/drawingml/2006/main">
-            <a:pPr>
+            <a:normAutofit/>
+          </a:bodyPr>
+          <a:lstStyle xmlns:a="http://schemas.openxmlformats.org/drawingml/2006/main"/>
+          <a:p xmlns:a="http://schemas.openxmlformats.org/drawingml/2006/main">
+            <a:pPr>
+              <a:buNone/>
               <a:defRPr sz="1050" b="0">
                 <a:solidFill>
                   <a:srgbClr val="1D2B27"/>
@@ -14612,6 +14878,7 @@
           </a:p>
           <a:p xmlns:a="http://schemas.openxmlformats.org/drawingml/2006/main">
             <a:pPr>
+              <a:buNone/>
               <a:defRPr sz="1050" b="0">
                 <a:solidFill>
                   <a:srgbClr val="1D2B27"/>
@@ -14637,7 +14904,7 @@
       </p:sp>
       <p:sp>
         <p:nvSpPr>
-          <p:cNvPr id="15" name="">
+          <p:cNvPr id="15" name="Rectangle: Rounded Corners 14">
             <a:extLst xmlns:a="http://schemas.openxmlformats.org/drawingml/2006/main">
               <a:ext uri="{FF2B5EF4-FFF2-40B4-BE49-F238E27FC236}">
                 <a16:creationId xmlns:a16="http://schemas.microsoft.com/office/drawing/2014/main" id="{B721C968-57FA-4724-90E9-3CDE07C461D2}"/>
@@ -14669,7 +14936,7 @@
       </p:sp>
       <p:sp>
         <p:nvSpPr>
-          <p:cNvPr id="16" name="">
+          <p:cNvPr id="16" name="Rectangle 15">
             <a:extLst xmlns:a="http://schemas.openxmlformats.org/drawingml/2006/main">
               <a:ext uri="{FF2B5EF4-FFF2-40B4-BE49-F238E27FC236}">
                 <a16:creationId xmlns:a16="http://schemas.microsoft.com/office/drawing/2014/main" id="{B4DDD86E-CC49-4ACD-9631-EA754F5A87C9}"/>
@@ -14701,6 +14968,7 @@
           <a:lstStyle xmlns:a="http://schemas.openxmlformats.org/drawingml/2006/main"/>
           <a:p xmlns:a="http://schemas.openxmlformats.org/drawingml/2006/main">
             <a:pPr>
+              <a:buNone/>
               <a:defRPr sz="1425" b="1">
                 <a:solidFill>
                   <a:srgbClr val="173B31"/>
@@ -14726,7 +14994,7 @@
       </p:sp>
       <p:sp>
         <p:nvSpPr>
-          <p:cNvPr id="17" name="">
+          <p:cNvPr id="17" name="Rectangle 16">
             <a:extLst xmlns:a="http://schemas.openxmlformats.org/drawingml/2006/main">
               <a:ext uri="{FF2B5EF4-FFF2-40B4-BE49-F238E27FC236}">
                 <a16:creationId xmlns:a16="http://schemas.microsoft.com/office/drawing/2014/main" id="{C3810006-ACDD-44B5-BE01-C96FE58262CF}"/>
@@ -14753,11 +15021,12 @@
         </p:spPr>
         <p:txBody>
           <a:bodyPr xmlns:a="http://schemas.openxmlformats.org/drawingml/2006/main">
-            <a:normAutofit fontScale="100000"/>
-          </a:bodyPr>
-          <a:lstStyle xmlns:a="http://schemas.openxmlformats.org/drawingml/2006/main"/>
-          <a:p xmlns:a="http://schemas.openxmlformats.org/drawingml/2006/main">
-            <a:pPr>
+            <a:normAutofit/>
+          </a:bodyPr>
+          <a:lstStyle xmlns:a="http://schemas.openxmlformats.org/drawingml/2006/main"/>
+          <a:p xmlns:a="http://schemas.openxmlformats.org/drawingml/2006/main">
+            <a:pPr>
+              <a:buNone/>
               <a:defRPr sz="1050" b="0">
                 <a:solidFill>
                   <a:srgbClr val="1D2B27"/>
@@ -14781,6 +15050,7 @@
           </a:p>
           <a:p xmlns:a="http://schemas.openxmlformats.org/drawingml/2006/main">
             <a:pPr>
+              <a:buNone/>
               <a:defRPr sz="1050" b="0">
                 <a:solidFill>
                   <a:srgbClr val="1D2B27"/>
@@ -14806,7 +15076,7 @@
       </p:sp>
       <p:sp>
         <p:nvSpPr>
-          <p:cNvPr id="18" name="">
+          <p:cNvPr id="18" name="Rectangle: Rounded Corners 17">
             <a:extLst xmlns:a="http://schemas.openxmlformats.org/drawingml/2006/main">
               <a:ext uri="{FF2B5EF4-FFF2-40B4-BE49-F238E27FC236}">
                 <a16:creationId xmlns:a16="http://schemas.microsoft.com/office/drawing/2014/main" id="{4159AECA-1841-45A0-AF9A-EBDF5E738C6B}"/>
@@ -14838,7 +15108,7 @@
       </p:sp>
       <p:sp>
         <p:nvSpPr>
-          <p:cNvPr id="19" name="">
+          <p:cNvPr id="19" name="Rectangle 18">
             <a:extLst xmlns:a="http://schemas.openxmlformats.org/drawingml/2006/main">
               <a:ext uri="{FF2B5EF4-FFF2-40B4-BE49-F238E27FC236}">
                 <a16:creationId xmlns:a16="http://schemas.microsoft.com/office/drawing/2014/main" id="{72128514-C2EB-4130-80B1-42CD6C900900}"/>
@@ -14870,6 +15140,7 @@
           <a:lstStyle xmlns:a="http://schemas.openxmlformats.org/drawingml/2006/main"/>
           <a:p xmlns:a="http://schemas.openxmlformats.org/drawingml/2006/main">
             <a:pPr>
+              <a:buNone/>
               <a:defRPr sz="1425" b="1">
                 <a:solidFill>
                   <a:srgbClr val="173B31"/>
@@ -14895,7 +15166,7 @@
       </p:sp>
       <p:sp>
         <p:nvSpPr>
-          <p:cNvPr id="20" name="">
+          <p:cNvPr id="20" name="Rectangle 19">
             <a:extLst xmlns:a="http://schemas.openxmlformats.org/drawingml/2006/main">
               <a:ext uri="{FF2B5EF4-FFF2-40B4-BE49-F238E27FC236}">
                 <a16:creationId xmlns:a16="http://schemas.microsoft.com/office/drawing/2014/main" id="{C2EA1D59-62BB-45C5-AE1E-EB014F2DFBFE}"/>
@@ -14922,11 +15193,12 @@
         </p:spPr>
         <p:txBody>
           <a:bodyPr xmlns:a="http://schemas.openxmlformats.org/drawingml/2006/main">
-            <a:normAutofit fontScale="100000"/>
-          </a:bodyPr>
-          <a:lstStyle xmlns:a="http://schemas.openxmlformats.org/drawingml/2006/main"/>
-          <a:p xmlns:a="http://schemas.openxmlformats.org/drawingml/2006/main">
-            <a:pPr>
+            <a:normAutofit/>
+          </a:bodyPr>
+          <a:lstStyle xmlns:a="http://schemas.openxmlformats.org/drawingml/2006/main"/>
+          <a:p xmlns:a="http://schemas.openxmlformats.org/drawingml/2006/main">
+            <a:pPr>
+              <a:buNone/>
               <a:defRPr sz="1050" b="0">
                 <a:solidFill>
                   <a:srgbClr val="1D2B27"/>
@@ -14950,6 +15222,7 @@
           </a:p>
           <a:p xmlns:a="http://schemas.openxmlformats.org/drawingml/2006/main">
             <a:pPr>
+              <a:buNone/>
               <a:defRPr sz="1050" b="0">
                 <a:solidFill>
                   <a:srgbClr val="1D2B27"/>
@@ -14975,7 +15248,7 @@
       </p:sp>
       <p:sp>
         <p:nvSpPr>
-          <p:cNvPr id="21" name="">
+          <p:cNvPr id="21" name="Rectangle: Rounded Corners 20">
             <a:extLst xmlns:a="http://schemas.openxmlformats.org/drawingml/2006/main">
               <a:ext uri="{FF2B5EF4-FFF2-40B4-BE49-F238E27FC236}">
                 <a16:creationId xmlns:a16="http://schemas.microsoft.com/office/drawing/2014/main" id="{231F6154-84C9-4ABD-8DA4-BDE4CD56EA71}"/>
@@ -15007,7 +15280,7 @@
       </p:sp>
       <p:sp>
         <p:nvSpPr>
-          <p:cNvPr id="22" name="">
+          <p:cNvPr id="22" name="Rectangle 21">
             <a:extLst xmlns:a="http://schemas.openxmlformats.org/drawingml/2006/main">
               <a:ext uri="{FF2B5EF4-FFF2-40B4-BE49-F238E27FC236}">
                 <a16:creationId xmlns:a16="http://schemas.microsoft.com/office/drawing/2014/main" id="{E94E80F6-61F7-47E6-AF58-50CA2C7346FD}"/>
@@ -15039,6 +15312,7 @@
           <a:lstStyle xmlns:a="http://schemas.openxmlformats.org/drawingml/2006/main"/>
           <a:p xmlns:a="http://schemas.openxmlformats.org/drawingml/2006/main">
             <a:pPr>
+              <a:buNone/>
               <a:defRPr sz="1425" b="1">
                 <a:solidFill>
                   <a:srgbClr val="173B31"/>
@@ -15064,7 +15338,7 @@
       </p:sp>
       <p:sp>
         <p:nvSpPr>
-          <p:cNvPr id="23" name="">
+          <p:cNvPr id="23" name="Rectangle 22">
             <a:extLst xmlns:a="http://schemas.openxmlformats.org/drawingml/2006/main">
               <a:ext uri="{FF2B5EF4-FFF2-40B4-BE49-F238E27FC236}">
                 <a16:creationId xmlns:a16="http://schemas.microsoft.com/office/drawing/2014/main" id="{41BBA099-B0E1-4FDB-849D-272152DDE8A8}"/>
@@ -15091,11 +15365,12 @@
         </p:spPr>
         <p:txBody>
           <a:bodyPr xmlns:a="http://schemas.openxmlformats.org/drawingml/2006/main">
-            <a:normAutofit fontScale="100000"/>
-          </a:bodyPr>
-          <a:lstStyle xmlns:a="http://schemas.openxmlformats.org/drawingml/2006/main"/>
-          <a:p xmlns:a="http://schemas.openxmlformats.org/drawingml/2006/main">
-            <a:pPr>
+            <a:normAutofit/>
+          </a:bodyPr>
+          <a:lstStyle xmlns:a="http://schemas.openxmlformats.org/drawingml/2006/main"/>
+          <a:p xmlns:a="http://schemas.openxmlformats.org/drawingml/2006/main">
+            <a:pPr>
+              <a:buNone/>
               <a:defRPr sz="1050" b="0">
                 <a:solidFill>
                   <a:srgbClr val="1D2B27"/>
@@ -15119,6 +15394,7 @@
           </a:p>
           <a:p xmlns:a="http://schemas.openxmlformats.org/drawingml/2006/main">
             <a:pPr>
+              <a:buNone/>
               <a:defRPr sz="1050" b="0">
                 <a:solidFill>
                   <a:srgbClr val="1D2B27"/>
@@ -15144,7 +15420,7 @@
       </p:sp>
       <p:sp>
         <p:nvSpPr>
-          <p:cNvPr id="24" name="">
+          <p:cNvPr id="24" name="Rectangle: Rounded Corners 23">
             <a:extLst xmlns:a="http://schemas.openxmlformats.org/drawingml/2006/main">
               <a:ext uri="{FF2B5EF4-FFF2-40B4-BE49-F238E27FC236}">
                 <a16:creationId xmlns:a16="http://schemas.microsoft.com/office/drawing/2014/main" id="{EAC26F92-E25D-4B79-80E2-F23C3D1F7F7B}"/>
@@ -15176,7 +15452,7 @@
       </p:sp>
       <p:sp>
         <p:nvSpPr>
-          <p:cNvPr id="25" name="">
+          <p:cNvPr id="25" name="Rectangle 24">
             <a:extLst xmlns:a="http://schemas.openxmlformats.org/drawingml/2006/main">
               <a:ext uri="{FF2B5EF4-FFF2-40B4-BE49-F238E27FC236}">
                 <a16:creationId xmlns:a16="http://schemas.microsoft.com/office/drawing/2014/main" id="{8D1227C6-B66F-41DE-8CAC-049C6D10BA66}"/>
@@ -15208,6 +15484,7 @@
           <a:lstStyle xmlns:a="http://schemas.openxmlformats.org/drawingml/2006/main"/>
           <a:p xmlns:a="http://schemas.openxmlformats.org/drawingml/2006/main">
             <a:pPr>
+              <a:buNone/>
               <a:defRPr sz="1425" b="1">
                 <a:solidFill>
                   <a:srgbClr val="173B31"/>
@@ -15233,7 +15510,7 @@
       </p:sp>
       <p:sp>
         <p:nvSpPr>
-          <p:cNvPr id="26" name="">
+          <p:cNvPr id="26" name="Rectangle 25">
             <a:extLst xmlns:a="http://schemas.openxmlformats.org/drawingml/2006/main">
               <a:ext uri="{FF2B5EF4-FFF2-40B4-BE49-F238E27FC236}">
                 <a16:creationId xmlns:a16="http://schemas.microsoft.com/office/drawing/2014/main" id="{E45C2DC4-590E-4413-B829-9C4EFB210D63}"/>
@@ -15260,11 +15537,12 @@
         </p:spPr>
         <p:txBody>
           <a:bodyPr xmlns:a="http://schemas.openxmlformats.org/drawingml/2006/main">
-            <a:normAutofit fontScale="100000"/>
-          </a:bodyPr>
-          <a:lstStyle xmlns:a="http://schemas.openxmlformats.org/drawingml/2006/main"/>
-          <a:p xmlns:a="http://schemas.openxmlformats.org/drawingml/2006/main">
-            <a:pPr>
+            <a:normAutofit/>
+          </a:bodyPr>
+          <a:lstStyle xmlns:a="http://schemas.openxmlformats.org/drawingml/2006/main"/>
+          <a:p xmlns:a="http://schemas.openxmlformats.org/drawingml/2006/main">
+            <a:pPr>
+              <a:buNone/>
               <a:defRPr sz="1050" b="0">
                 <a:solidFill>
                   <a:srgbClr val="1D2B27"/>
@@ -15288,6 +15566,7 @@
           </a:p>
           <a:p xmlns:a="http://schemas.openxmlformats.org/drawingml/2006/main">
             <a:pPr>
+              <a:buNone/>
               <a:defRPr sz="1050" b="0">
                 <a:solidFill>
                   <a:srgbClr val="1D2B27"/>
@@ -15313,7 +15592,7 @@
       </p:sp>
       <p:sp>
         <p:nvSpPr>
-          <p:cNvPr id="27" name="">
+          <p:cNvPr id="27" name="Rectangle: Rounded Corners 26">
             <a:extLst xmlns:a="http://schemas.openxmlformats.org/drawingml/2006/main">
               <a:ext uri="{FF2B5EF4-FFF2-40B4-BE49-F238E27FC236}">
                 <a16:creationId xmlns:a16="http://schemas.microsoft.com/office/drawing/2014/main" id="{D780F09E-D75C-4BF9-A99B-AC79319CE7F8}"/>
@@ -15345,7 +15624,7 @@
       </p:sp>
       <p:sp>
         <p:nvSpPr>
-          <p:cNvPr id="28" name="">
+          <p:cNvPr id="28" name="Rectangle 27">
             <a:extLst xmlns:a="http://schemas.openxmlformats.org/drawingml/2006/main">
               <a:ext uri="{FF2B5EF4-FFF2-40B4-BE49-F238E27FC236}">
                 <a16:creationId xmlns:a16="http://schemas.microsoft.com/office/drawing/2014/main" id="{D21BEEFD-3755-4FC2-A332-C8C37F3C48A2}"/>
@@ -15377,6 +15656,7 @@
           <a:lstStyle xmlns:a="http://schemas.openxmlformats.org/drawingml/2006/main"/>
           <a:p xmlns:a="http://schemas.openxmlformats.org/drawingml/2006/main">
             <a:pPr>
+              <a:buNone/>
               <a:defRPr sz="1425" b="1">
                 <a:solidFill>
                   <a:srgbClr val="173B31"/>
@@ -15402,7 +15682,7 @@
       </p:sp>
       <p:sp>
         <p:nvSpPr>
-          <p:cNvPr id="29" name="">
+          <p:cNvPr id="29" name="Rectangle 28">
             <a:extLst xmlns:a="http://schemas.openxmlformats.org/drawingml/2006/main">
               <a:ext uri="{FF2B5EF4-FFF2-40B4-BE49-F238E27FC236}">
                 <a16:creationId xmlns:a16="http://schemas.microsoft.com/office/drawing/2014/main" id="{5691D948-BDE1-4225-97EF-D8E94EAAED71}"/>
@@ -15429,11 +15709,12 @@
         </p:spPr>
         <p:txBody>
           <a:bodyPr xmlns:a="http://schemas.openxmlformats.org/drawingml/2006/main">
-            <a:normAutofit fontScale="100000"/>
-          </a:bodyPr>
-          <a:lstStyle xmlns:a="http://schemas.openxmlformats.org/drawingml/2006/main"/>
-          <a:p xmlns:a="http://schemas.openxmlformats.org/drawingml/2006/main">
-            <a:pPr>
+            <a:normAutofit/>
+          </a:bodyPr>
+          <a:lstStyle xmlns:a="http://schemas.openxmlformats.org/drawingml/2006/main"/>
+          <a:p xmlns:a="http://schemas.openxmlformats.org/drawingml/2006/main">
+            <a:pPr>
+              <a:buNone/>
               <a:defRPr sz="1050" b="0">
                 <a:solidFill>
                   <a:srgbClr val="1D2B27"/>
@@ -15457,6 +15738,7 @@
           </a:p>
           <a:p xmlns:a="http://schemas.openxmlformats.org/drawingml/2006/main">
             <a:pPr>
+              <a:buNone/>
               <a:defRPr sz="1050" b="0">
                 <a:solidFill>
                   <a:srgbClr val="1D2B27"/>
@@ -15482,7 +15764,7 @@
       </p:sp>
       <p:sp>
         <p:nvSpPr>
-          <p:cNvPr id="30" name="">
+          <p:cNvPr id="30" name="Rectangle: Rounded Corners 29">
             <a:extLst xmlns:a="http://schemas.openxmlformats.org/drawingml/2006/main">
               <a:ext uri="{FF2B5EF4-FFF2-40B4-BE49-F238E27FC236}">
                 <a16:creationId xmlns:a16="http://schemas.microsoft.com/office/drawing/2014/main" id="{D8C0A1C9-AEA7-4247-8E63-1BE42A15C599}"/>
@@ -15514,7 +15796,7 @@
       </p:sp>
       <p:sp>
         <p:nvSpPr>
-          <p:cNvPr id="31" name="">
+          <p:cNvPr id="31" name="Rectangle 30">
             <a:extLst xmlns:a="http://schemas.openxmlformats.org/drawingml/2006/main">
               <a:ext uri="{FF2B5EF4-FFF2-40B4-BE49-F238E27FC236}">
                 <a16:creationId xmlns:a16="http://schemas.microsoft.com/office/drawing/2014/main" id="{619C54DF-3026-49D6-9E25-A64323AD9303}"/>
@@ -15546,6 +15828,7 @@
           <a:lstStyle xmlns:a="http://schemas.openxmlformats.org/drawingml/2006/main"/>
           <a:p xmlns:a="http://schemas.openxmlformats.org/drawingml/2006/main">
             <a:pPr>
+              <a:buNone/>
               <a:defRPr sz="1425" b="1">
                 <a:solidFill>
                   <a:srgbClr val="173B31"/>
@@ -15571,7 +15854,7 @@
       </p:sp>
       <p:sp>
         <p:nvSpPr>
-          <p:cNvPr id="32" name="">
+          <p:cNvPr id="32" name="Rectangle 31">
             <a:extLst xmlns:a="http://schemas.openxmlformats.org/drawingml/2006/main">
               <a:ext uri="{FF2B5EF4-FFF2-40B4-BE49-F238E27FC236}">
                 <a16:creationId xmlns:a16="http://schemas.microsoft.com/office/drawing/2014/main" id="{E020F862-BB7C-45C6-A40E-530633E5E3D5}"/>
@@ -15598,11 +15881,12 @@
         </p:spPr>
         <p:txBody>
           <a:bodyPr xmlns:a="http://schemas.openxmlformats.org/drawingml/2006/main">
-            <a:normAutofit fontScale="100000"/>
-          </a:bodyPr>
-          <a:lstStyle xmlns:a="http://schemas.openxmlformats.org/drawingml/2006/main"/>
-          <a:p xmlns:a="http://schemas.openxmlformats.org/drawingml/2006/main">
-            <a:pPr>
+            <a:normAutofit/>
+          </a:bodyPr>
+          <a:lstStyle xmlns:a="http://schemas.openxmlformats.org/drawingml/2006/main"/>
+          <a:p xmlns:a="http://schemas.openxmlformats.org/drawingml/2006/main">
+            <a:pPr>
+              <a:buNone/>
               <a:defRPr sz="1050" b="0">
                 <a:solidFill>
                   <a:srgbClr val="1D2B27"/>
@@ -15626,6 +15910,7 @@
           </a:p>
           <a:p xmlns:a="http://schemas.openxmlformats.org/drawingml/2006/main">
             <a:pPr>
+              <a:buNone/>
               <a:defRPr sz="1050" b="0">
                 <a:solidFill>
                   <a:srgbClr val="1D2B27"/>
@@ -15651,7 +15936,7 @@
       </p:sp>
       <p:sp>
         <p:nvSpPr>
-          <p:cNvPr id="33" name="">
+          <p:cNvPr id="33" name="Rectangle: Rounded Corners 32">
             <a:extLst xmlns:a="http://schemas.openxmlformats.org/drawingml/2006/main">
               <a:ext uri="{FF2B5EF4-FFF2-40B4-BE49-F238E27FC236}">
                 <a16:creationId xmlns:a16="http://schemas.microsoft.com/office/drawing/2014/main" id="{5E161487-4E81-45FE-A057-961B29B33A38}"/>
@@ -15683,7 +15968,7 @@
       </p:sp>
       <p:sp>
         <p:nvSpPr>
-          <p:cNvPr id="34" name="">
+          <p:cNvPr id="34" name="Rectangle 33">
             <a:extLst xmlns:a="http://schemas.openxmlformats.org/drawingml/2006/main">
               <a:ext uri="{FF2B5EF4-FFF2-40B4-BE49-F238E27FC236}">
                 <a16:creationId xmlns:a16="http://schemas.microsoft.com/office/drawing/2014/main" id="{0223B657-E79B-45C8-8FC3-C309A52C9736}"/>
@@ -15715,6 +16000,7 @@
           <a:lstStyle xmlns:a="http://schemas.openxmlformats.org/drawingml/2006/main"/>
           <a:p xmlns:a="http://schemas.openxmlformats.org/drawingml/2006/main">
             <a:pPr>
+              <a:buNone/>
               <a:defRPr sz="1125" b="1">
                 <a:solidFill>
                   <a:srgbClr val="FFFFFF"/>
@@ -15740,7 +16026,7 @@
       </p:sp>
       <p:sp>
         <p:nvSpPr>
-          <p:cNvPr id="35" name="">
+          <p:cNvPr id="35" name="Rectangle 34">
             <a:extLst xmlns:a="http://schemas.openxmlformats.org/drawingml/2006/main">
               <a:ext uri="{FF2B5EF4-FFF2-40B4-BE49-F238E27FC236}">
                 <a16:creationId xmlns:a16="http://schemas.microsoft.com/office/drawing/2014/main" id="{A6B0DB1C-9036-464C-A06C-4C409F324728}"/>
@@ -15767,11 +16053,12 @@
         </p:spPr>
         <p:txBody>
           <a:bodyPr xmlns:a="http://schemas.openxmlformats.org/drawingml/2006/main">
-            <a:normAutofit fontScale="100000"/>
-          </a:bodyPr>
-          <a:lstStyle xmlns:a="http://schemas.openxmlformats.org/drawingml/2006/main"/>
-          <a:p xmlns:a="http://schemas.openxmlformats.org/drawingml/2006/main">
-            <a:pPr>
+            <a:normAutofit/>
+          </a:bodyPr>
+          <a:lstStyle xmlns:a="http://schemas.openxmlformats.org/drawingml/2006/main"/>
+          <a:p xmlns:a="http://schemas.openxmlformats.org/drawingml/2006/main">
+            <a:pPr>
+              <a:buNone/>
               <a:defRPr sz="1200" b="1">
                 <a:solidFill>
                   <a:srgbClr val="66736D"/>
@@ -15826,7 +16113,7 @@
       </p:grpSpPr>
       <p:sp>
         <p:nvSpPr>
-          <p:cNvPr id="23" name="">
+          <p:cNvPr id="23" name="Rectangle 22">
             <a:extLst xmlns:a="http://schemas.openxmlformats.org/drawingml/2006/main">
               <a:ext uri="{FF2B5EF4-FFF2-40B4-BE49-F238E27FC236}">
                 <a16:creationId xmlns:a16="http://schemas.microsoft.com/office/drawing/2014/main" id="{7C2D439A-B576-47ED-8C53-3934AE1D373D}"/>
@@ -15856,7 +16143,7 @@
       </p:sp>
       <p:sp>
         <p:nvSpPr>
-          <p:cNvPr id="2" name="">
+          <p:cNvPr id="2" name="Rectangle 1">
             <a:extLst xmlns:a="http://schemas.openxmlformats.org/drawingml/2006/main">
               <a:ext uri="{FF2B5EF4-FFF2-40B4-BE49-F238E27FC236}">
                 <a16:creationId xmlns:a16="http://schemas.microsoft.com/office/drawing/2014/main" id="{6445523F-7668-4E32-9BA6-BC52BE8DAE0B}"/>
@@ -15883,11 +16170,12 @@
         </p:spPr>
         <p:txBody>
           <a:bodyPr xmlns:a="http://schemas.openxmlformats.org/drawingml/2006/main">
-            <a:normAutofit fontScale="100000"/>
-          </a:bodyPr>
-          <a:lstStyle xmlns:a="http://schemas.openxmlformats.org/drawingml/2006/main"/>
-          <a:p xmlns:a="http://schemas.openxmlformats.org/drawingml/2006/main">
-            <a:pPr>
+            <a:normAutofit/>
+          </a:bodyPr>
+          <a:lstStyle xmlns:a="http://schemas.openxmlformats.org/drawingml/2006/main"/>
+          <a:p xmlns:a="http://schemas.openxmlformats.org/drawingml/2006/main">
+            <a:pPr>
+              <a:buNone/>
               <a:defRPr sz="1125" b="1">
                 <a:solidFill>
                   <a:srgbClr val="C64235"/>
@@ -15913,7 +16201,7 @@
       </p:sp>
       <p:sp>
         <p:nvSpPr>
-          <p:cNvPr id="3" name="">
+          <p:cNvPr id="3" name="Rectangle 2">
             <a:extLst xmlns:a="http://schemas.openxmlformats.org/drawingml/2006/main">
               <a:ext uri="{FF2B5EF4-FFF2-40B4-BE49-F238E27FC236}">
                 <a16:creationId xmlns:a16="http://schemas.microsoft.com/office/drawing/2014/main" id="{D6F34097-86F1-4BF2-B01B-465639A70A51}"/>
@@ -15945,6 +16233,7 @@
           <a:lstStyle xmlns:a="http://schemas.openxmlformats.org/drawingml/2006/main"/>
           <a:p xmlns:a="http://schemas.openxmlformats.org/drawingml/2006/main">
             <a:pPr>
+              <a:buNone/>
               <a:defRPr sz="2700" b="1">
                 <a:solidFill>
                   <a:srgbClr val="173B31"/>
@@ -15963,14 +16252,14 @@
                 <a:ea typeface="Arial"/>
                 <a:cs typeface="Arial"/>
               </a:rPr>
-              <a:t>Full ER evidence from the implemented Supabase schema.</a:t>
-            </a:r>
-          </a:p>
-        </p:txBody>
-      </p:sp>
-      <p:sp>
-        <p:nvSpPr>
-          <p:cNvPr id="4" name="">
+              <a:t>Implemented Supabase schema and relationships.</a:t>
+            </a:r>
+          </a:p>
+        </p:txBody>
+      </p:sp>
+      <p:sp>
+        <p:nvSpPr>
+          <p:cNvPr id="4" name="Rectangle 3">
             <a:extLst xmlns:a="http://schemas.openxmlformats.org/drawingml/2006/main">
               <a:ext uri="{FF2B5EF4-FFF2-40B4-BE49-F238E27FC236}">
                 <a16:creationId xmlns:a16="http://schemas.microsoft.com/office/drawing/2014/main" id="{05BE2400-ACE2-40FA-ACB7-2EA522226DBB}"/>
@@ -16002,6 +16291,7 @@
           <a:lstStyle xmlns:a="http://schemas.openxmlformats.org/drawingml/2006/main"/>
           <a:p xmlns:a="http://schemas.openxmlformats.org/drawingml/2006/main">
             <a:pPr>
+              <a:buNone/>
               <a:defRPr sz="1275" b="0">
                 <a:solidFill>
                   <a:srgbClr val="66736D"/>
@@ -16020,14 +16310,14 @@
                 <a:ea typeface="Arial"/>
                 <a:cs typeface="Arial"/>
               </a:rPr>
-              <a:t>The supplied diagram is included as implementation evidence; the simplified model is better for explanation.</a:t>
-            </a:r>
-          </a:p>
-        </p:txBody>
-      </p:sp>
-      <p:sp>
-        <p:nvSpPr>
-          <p:cNvPr id="5" name="">
+              <a:t>Twelve public tables preserve historical evidence, model lineage, team work and moderated community data.</a:t>
+            </a:r>
+          </a:p>
+        </p:txBody>
+      </p:sp>
+      <p:sp>
+        <p:nvSpPr>
+          <p:cNvPr id="5" name="Rectangle 4">
             <a:extLst xmlns:a="http://schemas.openxmlformats.org/drawingml/2006/main">
               <a:ext uri="{FF2B5EF4-FFF2-40B4-BE49-F238E27FC236}">
                 <a16:creationId xmlns:a16="http://schemas.microsoft.com/office/drawing/2014/main" id="{2A77B5DA-466B-4AC0-A0C4-0F09F1F87CE2}"/>
@@ -16059,6 +16349,7 @@
           <a:lstStyle xmlns:a="http://schemas.openxmlformats.org/drawingml/2006/main"/>
           <a:p xmlns:a="http://schemas.openxmlformats.org/drawingml/2006/main">
             <a:pPr>
+              <a:buNone/>
               <a:defRPr sz="975" b="1">
                 <a:solidFill>
                   <a:srgbClr val="66736D"/>
@@ -16084,7 +16375,7 @@
       </p:sp>
       <p:sp>
         <p:nvSpPr>
-          <p:cNvPr id="6" name="">
+          <p:cNvPr id="6" name="Rectangle: Rounded Corners 5">
             <a:extLst xmlns:a="http://schemas.openxmlformats.org/drawingml/2006/main">
               <a:ext uri="{FF2B5EF4-FFF2-40B4-BE49-F238E27FC236}">
                 <a16:creationId xmlns:a16="http://schemas.microsoft.com/office/drawing/2014/main" id="{CDC11E57-5AE5-46C1-A572-00C0F8325783}"/>
@@ -16118,20 +16409,21 @@
       </p:sp>
       <p:pic>
         <p:nvPicPr>
-          <p:cNvPr id="29" name=""/>
+          <p:cNvPr id="31" name="Picture 28"/>
           <p:cNvPicPr>
             <a:picLocks xmlns:a="http://schemas.openxmlformats.org/drawingml/2006/main" noChangeAspect="1"/>
           </p:cNvPicPr>
           <p:nvPr/>
         </p:nvPicPr>
         <p:blipFill>
-          <a:blip xmlns:r="http://schemas.openxmlformats.org/officeDocument/2006/relationships" xmlns:a="http://schemas.openxmlformats.org/drawingml/2006/main" r:embed="Rb770e862bd72416d"/>
+          <a:blip xmlns:r="http://schemas.openxmlformats.org/officeDocument/2006/relationships" xmlns:a="http://schemas.openxmlformats.org/drawingml/2006/main" r:embed="R97e63b5e56d744d4"/>
+          <a:srcRect xmlns:a="http://schemas.openxmlformats.org/drawingml/2006/main" l="0" t="0" r="0" b="0"/>
           <a:stretch xmlns:a="http://schemas.openxmlformats.org/drawingml/2006/main"/>
         </p:blipFill>
         <p:spPr>
           <a:xfrm xmlns:a="http://schemas.openxmlformats.org/drawingml/2006/main">
-            <a:off x="1375628" y="2000250"/>
-            <a:ext cx="4525844" cy="4038600"/>
+            <a:off x="647700" y="1952625"/>
+            <a:ext cx="5981700" cy="4114800"/>
           </a:xfrm>
           <a:prstGeom xmlns:a="http://schemas.openxmlformats.org/drawingml/2006/main" prst="rect">
             <a:avLst/>
@@ -16140,7 +16432,7 @@
       </p:pic>
       <p:sp>
         <p:nvSpPr>
-          <p:cNvPr id="8" name="">
+          <p:cNvPr id="8" name="Rectangle 7">
             <a:extLst xmlns:a="http://schemas.openxmlformats.org/drawingml/2006/main">
               <a:ext uri="{FF2B5EF4-FFF2-40B4-BE49-F238E27FC236}">
                 <a16:creationId xmlns:a16="http://schemas.microsoft.com/office/drawing/2014/main" id="{863A965B-443F-40A2-91B0-D867379076D7}"/>
@@ -16172,6 +16464,7 @@
           <a:lstStyle xmlns:a="http://schemas.openxmlformats.org/drawingml/2006/main"/>
           <a:p xmlns:a="http://schemas.openxmlformats.org/drawingml/2006/main">
             <a:pPr>
+              <a:buNone/>
               <a:defRPr sz="1725" b="1">
                 <a:solidFill>
                   <a:srgbClr val="173B31"/>
@@ -16190,14 +16483,14 @@
                 <a:ea typeface="Arial"/>
                 <a:cs typeface="Arial"/>
               </a:rPr>
-              <a:t>How to read the full diagram</a:t>
-            </a:r>
-          </a:p>
-        </p:txBody>
-      </p:sp>
-      <p:sp>
-        <p:nvSpPr>
-          <p:cNvPr id="9" name="">
+              <a:t>How to read the schema</a:t>
+            </a:r>
+          </a:p>
+        </p:txBody>
+      </p:sp>
+      <p:sp>
+        <p:nvSpPr>
+          <p:cNvPr id="9" name="Oval 8">
             <a:extLst xmlns:a="http://schemas.openxmlformats.org/drawingml/2006/main">
               <a:ext uri="{FF2B5EF4-FFF2-40B4-BE49-F238E27FC236}">
                 <a16:creationId xmlns:a16="http://schemas.microsoft.com/office/drawing/2014/main" id="{26B9459F-7AFC-4D9C-8889-9620FA373592}"/>
@@ -16227,7 +16520,7 @@
       </p:sp>
       <p:sp>
         <p:nvSpPr>
-          <p:cNvPr id="10" name="">
+          <p:cNvPr id="10" name="Rectangle 9">
             <a:extLst xmlns:a="http://schemas.openxmlformats.org/drawingml/2006/main">
               <a:ext uri="{FF2B5EF4-FFF2-40B4-BE49-F238E27FC236}">
                 <a16:creationId xmlns:a16="http://schemas.microsoft.com/office/drawing/2014/main" id="{E9965010-AFB7-4840-9D31-09A40FBDB6C1}"/>
@@ -16259,6 +16552,7 @@
           <a:lstStyle xmlns:a="http://schemas.openxmlformats.org/drawingml/2006/main"/>
           <a:p xmlns:a="http://schemas.openxmlformats.org/drawingml/2006/main">
             <a:pPr>
+              <a:buNone/>
               <a:defRPr sz="1350" b="1">
                 <a:solidFill>
                   <a:srgbClr val="173B31"/>
@@ -16284,7 +16578,7 @@
       </p:sp>
       <p:sp>
         <p:nvSpPr>
-          <p:cNvPr id="11" name="">
+          <p:cNvPr id="11" name="Rectangle 10">
             <a:extLst xmlns:a="http://schemas.openxmlformats.org/drawingml/2006/main">
               <a:ext uri="{FF2B5EF4-FFF2-40B4-BE49-F238E27FC236}">
                 <a16:creationId xmlns:a16="http://schemas.microsoft.com/office/drawing/2014/main" id="{1BF24AD5-757F-495E-879B-AEB81AF4D79E}"/>
@@ -16311,11 +16605,12 @@
         </p:spPr>
         <p:txBody>
           <a:bodyPr xmlns:a="http://schemas.openxmlformats.org/drawingml/2006/main">
-            <a:normAutofit fontScale="100000"/>
-          </a:bodyPr>
-          <a:lstStyle xmlns:a="http://schemas.openxmlformats.org/drawingml/2006/main"/>
-          <a:p xmlns:a="http://schemas.openxmlformats.org/drawingml/2006/main">
-            <a:pPr>
+            <a:normAutofit/>
+          </a:bodyPr>
+          <a:lstStyle xmlns:a="http://schemas.openxmlformats.org/drawingml/2006/main"/>
+          <a:p xmlns:a="http://schemas.openxmlformats.org/drawingml/2006/main">
+            <a:pPr>
+              <a:buNone/>
               <a:defRPr sz="1125" b="0">
                 <a:solidFill>
                   <a:srgbClr val="66736D"/>
@@ -16341,7 +16636,7 @@
       </p:sp>
       <p:sp>
         <p:nvSpPr>
-          <p:cNvPr id="12" name="">
+          <p:cNvPr id="12" name="Oval 11">
             <a:extLst xmlns:a="http://schemas.openxmlformats.org/drawingml/2006/main">
               <a:ext uri="{FF2B5EF4-FFF2-40B4-BE49-F238E27FC236}">
                 <a16:creationId xmlns:a16="http://schemas.microsoft.com/office/drawing/2014/main" id="{AA27BCB9-1D15-41AC-915F-03E499961140}"/>
@@ -16371,7 +16666,7 @@
       </p:sp>
       <p:sp>
         <p:nvSpPr>
-          <p:cNvPr id="13" name="">
+          <p:cNvPr id="13" name="Rectangle 12">
             <a:extLst xmlns:a="http://schemas.openxmlformats.org/drawingml/2006/main">
               <a:ext uri="{FF2B5EF4-FFF2-40B4-BE49-F238E27FC236}">
                 <a16:creationId xmlns:a16="http://schemas.microsoft.com/office/drawing/2014/main" id="{4697B05D-7737-4495-A32D-FD934184F4BC}"/>
@@ -16403,6 +16698,7 @@
           <a:lstStyle xmlns:a="http://schemas.openxmlformats.org/drawingml/2006/main"/>
           <a:p xmlns:a="http://schemas.openxmlformats.org/drawingml/2006/main">
             <a:pPr>
+              <a:buNone/>
               <a:defRPr sz="1350" b="1">
                 <a:solidFill>
                   <a:srgbClr val="173B31"/>
@@ -16428,7 +16724,7 @@
       </p:sp>
       <p:sp>
         <p:nvSpPr>
-          <p:cNvPr id="14" name="">
+          <p:cNvPr id="14" name="Rectangle 13">
             <a:extLst xmlns:a="http://schemas.openxmlformats.org/drawingml/2006/main">
               <a:ext uri="{FF2B5EF4-FFF2-40B4-BE49-F238E27FC236}">
                 <a16:creationId xmlns:a16="http://schemas.microsoft.com/office/drawing/2014/main" id="{63823C43-1D83-4AC3-9916-8596011A2980}"/>
@@ -16455,11 +16751,12 @@
         </p:spPr>
         <p:txBody>
           <a:bodyPr xmlns:a="http://schemas.openxmlformats.org/drawingml/2006/main">
-            <a:normAutofit fontScale="100000"/>
-          </a:bodyPr>
-          <a:lstStyle xmlns:a="http://schemas.openxmlformats.org/drawingml/2006/main"/>
-          <a:p xmlns:a="http://schemas.openxmlformats.org/drawingml/2006/main">
-            <a:pPr>
+            <a:normAutofit/>
+          </a:bodyPr>
+          <a:lstStyle xmlns:a="http://schemas.openxmlformats.org/drawingml/2006/main"/>
+          <a:p xmlns:a="http://schemas.openxmlformats.org/drawingml/2006/main">
+            <a:pPr>
+              <a:buNone/>
               <a:defRPr sz="1125" b="0">
                 <a:solidFill>
                   <a:srgbClr val="66736D"/>
@@ -16485,7 +16782,7 @@
       </p:sp>
       <p:sp>
         <p:nvSpPr>
-          <p:cNvPr id="15" name="">
+          <p:cNvPr id="15" name="Oval 14">
             <a:extLst xmlns:a="http://schemas.openxmlformats.org/drawingml/2006/main">
               <a:ext uri="{FF2B5EF4-FFF2-40B4-BE49-F238E27FC236}">
                 <a16:creationId xmlns:a16="http://schemas.microsoft.com/office/drawing/2014/main" id="{22C87332-B027-472F-8EBE-F7AE0ABC3AD1}"/>
@@ -16515,7 +16812,7 @@
       </p:sp>
       <p:sp>
         <p:nvSpPr>
-          <p:cNvPr id="16" name="">
+          <p:cNvPr id="16" name="Rectangle 15">
             <a:extLst xmlns:a="http://schemas.openxmlformats.org/drawingml/2006/main">
               <a:ext uri="{FF2B5EF4-FFF2-40B4-BE49-F238E27FC236}">
                 <a16:creationId xmlns:a16="http://schemas.microsoft.com/office/drawing/2014/main" id="{FB1467EA-EB9F-4E88-BEFA-83941ED6207F}"/>
@@ -16547,6 +16844,7 @@
           <a:lstStyle xmlns:a="http://schemas.openxmlformats.org/drawingml/2006/main"/>
           <a:p xmlns:a="http://schemas.openxmlformats.org/drawingml/2006/main">
             <a:pPr>
+              <a:buNone/>
               <a:defRPr sz="1350" b="1">
                 <a:solidFill>
                   <a:srgbClr val="173B31"/>
@@ -16572,7 +16870,7 @@
       </p:sp>
       <p:sp>
         <p:nvSpPr>
-          <p:cNvPr id="17" name="">
+          <p:cNvPr id="17" name="Rectangle 16">
             <a:extLst xmlns:a="http://schemas.openxmlformats.org/drawingml/2006/main">
               <a:ext uri="{FF2B5EF4-FFF2-40B4-BE49-F238E27FC236}">
                 <a16:creationId xmlns:a16="http://schemas.microsoft.com/office/drawing/2014/main" id="{AF269286-841A-4C8F-8E9E-5F80171A10DE}"/>
@@ -16599,11 +16897,12 @@
         </p:spPr>
         <p:txBody>
           <a:bodyPr xmlns:a="http://schemas.openxmlformats.org/drawingml/2006/main">
-            <a:normAutofit fontScale="100000"/>
-          </a:bodyPr>
-          <a:lstStyle xmlns:a="http://schemas.openxmlformats.org/drawingml/2006/main"/>
-          <a:p xmlns:a="http://schemas.openxmlformats.org/drawingml/2006/main">
-            <a:pPr>
+            <a:normAutofit/>
+          </a:bodyPr>
+          <a:lstStyle xmlns:a="http://schemas.openxmlformats.org/drawingml/2006/main"/>
+          <a:p xmlns:a="http://schemas.openxmlformats.org/drawingml/2006/main">
+            <a:pPr>
+              <a:buNone/>
               <a:defRPr sz="1125" b="0">
                 <a:solidFill>
                   <a:srgbClr val="66736D"/>
@@ -16629,7 +16928,7 @@
       </p:sp>
       <p:sp>
         <p:nvSpPr>
-          <p:cNvPr id="18" name="">
+          <p:cNvPr id="18" name="Oval 17">
             <a:extLst xmlns:a="http://schemas.openxmlformats.org/drawingml/2006/main">
               <a:ext uri="{FF2B5EF4-FFF2-40B4-BE49-F238E27FC236}">
                 <a16:creationId xmlns:a16="http://schemas.microsoft.com/office/drawing/2014/main" id="{676BE828-13C6-4EED-821A-EAEB9F65516F}"/>
@@ -16659,7 +16958,7 @@
       </p:sp>
       <p:sp>
         <p:nvSpPr>
-          <p:cNvPr id="19" name="">
+          <p:cNvPr id="19" name="Rectangle 18">
             <a:extLst xmlns:a="http://schemas.openxmlformats.org/drawingml/2006/main">
               <a:ext uri="{FF2B5EF4-FFF2-40B4-BE49-F238E27FC236}">
                 <a16:creationId xmlns:a16="http://schemas.microsoft.com/office/drawing/2014/main" id="{0F43AFA2-1EFC-4E1B-9770-BBC8EC66187A}"/>
@@ -16691,6 +16990,7 @@
           <a:lstStyle xmlns:a="http://schemas.openxmlformats.org/drawingml/2006/main"/>
           <a:p xmlns:a="http://schemas.openxmlformats.org/drawingml/2006/main">
             <a:pPr>
+              <a:buNone/>
               <a:defRPr sz="1350" b="1">
                 <a:solidFill>
                   <a:srgbClr val="173B31"/>
@@ -16716,7 +17016,7 @@
       </p:sp>
       <p:sp>
         <p:nvSpPr>
-          <p:cNvPr id="20" name="">
+          <p:cNvPr id="20" name="Rectangle 19">
             <a:extLst xmlns:a="http://schemas.openxmlformats.org/drawingml/2006/main">
               <a:ext uri="{FF2B5EF4-FFF2-40B4-BE49-F238E27FC236}">
                 <a16:creationId xmlns:a16="http://schemas.microsoft.com/office/drawing/2014/main" id="{87E8351D-30E6-4877-87CE-F7CFD94A9D72}"/>
@@ -16743,11 +17043,12 @@
         </p:spPr>
         <p:txBody>
           <a:bodyPr xmlns:a="http://schemas.openxmlformats.org/drawingml/2006/main">
-            <a:normAutofit fontScale="100000"/>
-          </a:bodyPr>
-          <a:lstStyle xmlns:a="http://schemas.openxmlformats.org/drawingml/2006/main"/>
-          <a:p xmlns:a="http://schemas.openxmlformats.org/drawingml/2006/main">
-            <a:pPr>
+            <a:normAutofit/>
+          </a:bodyPr>
+          <a:lstStyle xmlns:a="http://schemas.openxmlformats.org/drawingml/2006/main"/>
+          <a:p xmlns:a="http://schemas.openxmlformats.org/drawingml/2006/main">
+            <a:pPr>
+              <a:buNone/>
               <a:defRPr sz="1125" b="0">
                 <a:solidFill>
                   <a:srgbClr val="66736D"/>
@@ -16773,7 +17074,7 @@
       </p:sp>
       <p:sp>
         <p:nvSpPr>
-          <p:cNvPr id="21" name="">
+          <p:cNvPr id="21" name="Rectangle: Rounded Corners 20">
             <a:extLst xmlns:a="http://schemas.openxmlformats.org/drawingml/2006/main">
               <a:ext uri="{FF2B5EF4-FFF2-40B4-BE49-F238E27FC236}">
                 <a16:creationId xmlns:a16="http://schemas.microsoft.com/office/drawing/2014/main" id="{F1CA5B2E-325F-4134-9224-E660A177D503}"/>
@@ -16805,7 +17106,7 @@
       </p:sp>
       <p:sp>
         <p:nvSpPr>
-          <p:cNvPr id="22" name="">
+          <p:cNvPr id="22" name="Rectangle 21">
             <a:extLst xmlns:a="http://schemas.openxmlformats.org/drawingml/2006/main">
               <a:ext uri="{FF2B5EF4-FFF2-40B4-BE49-F238E27FC236}">
                 <a16:creationId xmlns:a16="http://schemas.microsoft.com/office/drawing/2014/main" id="{B956F966-B256-47FB-87FA-0D3E6CD7800A}"/>
@@ -16832,11 +17133,12 @@
         </p:spPr>
         <p:txBody>
           <a:bodyPr xmlns:a="http://schemas.openxmlformats.org/drawingml/2006/main">
-            <a:normAutofit fontScale="80000"/>
-          </a:bodyPr>
-          <a:lstStyle xmlns:a="http://schemas.openxmlformats.org/drawingml/2006/main"/>
-          <a:p xmlns:a="http://schemas.openxmlformats.org/drawingml/2006/main">
-            <a:pPr>
+            <a:normAutofit fontScale="78957"/>
+          </a:bodyPr>
+          <a:lstStyle xmlns:a="http://schemas.openxmlformats.org/drawingml/2006/main"/>
+          <a:p xmlns:a="http://schemas.openxmlformats.org/drawingml/2006/main">
+            <a:pPr>
+              <a:buNone/>
               <a:defRPr sz="1125" b="1">
                 <a:solidFill>
                   <a:srgbClr val="FFFFFF"/>
@@ -16855,7 +17157,7 @@
                 <a:ea typeface="Arial"/>
                 <a:cs typeface="Arial"/>
               </a:rPr>
-              <a:t>Constraints enforce valid states before analysis.</a:t>
+              <a:t>Approved claims join discovery views, never historical ML.</a:t>
             </a:r>
           </a:p>
         </p:txBody>
@@ -16891,7 +17193,7 @@
       </p:grpSpPr>
       <p:sp>
         <p:nvSpPr>
-          <p:cNvPr id="32" name="">
+          <p:cNvPr id="32" name="Rectangle 31">
             <a:extLst xmlns:a="http://schemas.openxmlformats.org/drawingml/2006/main">
               <a:ext uri="{FF2B5EF4-FFF2-40B4-BE49-F238E27FC236}">
                 <a16:creationId xmlns:a16="http://schemas.microsoft.com/office/drawing/2014/main" id="{876409EB-DB91-4A28-91C8-05C92D46E0A5}"/>
@@ -16921,7 +17223,7 @@
       </p:sp>
       <p:sp>
         <p:nvSpPr>
-          <p:cNvPr id="2" name="">
+          <p:cNvPr id="2" name="Rectangle 1">
             <a:extLst xmlns:a="http://schemas.openxmlformats.org/drawingml/2006/main">
               <a:ext uri="{FF2B5EF4-FFF2-40B4-BE49-F238E27FC236}">
                 <a16:creationId xmlns:a16="http://schemas.microsoft.com/office/drawing/2014/main" id="{A42203D6-8A14-4BFD-93A6-62657E2225EB}"/>
@@ -16948,11 +17250,12 @@
         </p:spPr>
         <p:txBody>
           <a:bodyPr xmlns:a="http://schemas.openxmlformats.org/drawingml/2006/main">
-            <a:normAutofit fontScale="100000"/>
-          </a:bodyPr>
-          <a:lstStyle xmlns:a="http://schemas.openxmlformats.org/drawingml/2006/main"/>
-          <a:p xmlns:a="http://schemas.openxmlformats.org/drawingml/2006/main">
-            <a:pPr>
+            <a:normAutofit/>
+          </a:bodyPr>
+          <a:lstStyle xmlns:a="http://schemas.openxmlformats.org/drawingml/2006/main"/>
+          <a:p xmlns:a="http://schemas.openxmlformats.org/drawingml/2006/main">
+            <a:pPr>
+              <a:buNone/>
               <a:defRPr sz="1125" b="1">
                 <a:solidFill>
                   <a:srgbClr val="C64235"/>
@@ -16978,7 +17281,7 @@
       </p:sp>
       <p:sp>
         <p:nvSpPr>
-          <p:cNvPr id="3" name="">
+          <p:cNvPr id="3" name="Rectangle 2">
             <a:extLst xmlns:a="http://schemas.openxmlformats.org/drawingml/2006/main">
               <a:ext uri="{FF2B5EF4-FFF2-40B4-BE49-F238E27FC236}">
                 <a16:creationId xmlns:a16="http://schemas.microsoft.com/office/drawing/2014/main" id="{FF0B6609-AF36-4152-BA45-9BD352A8A454}"/>
@@ -17005,11 +17308,12 @@
         </p:spPr>
         <p:txBody>
           <a:bodyPr xmlns:a="http://schemas.openxmlformats.org/drawingml/2006/main">
-            <a:normAutofit fontScale="100000"/>
-          </a:bodyPr>
-          <a:lstStyle xmlns:a="http://schemas.openxmlformats.org/drawingml/2006/main"/>
-          <a:p xmlns:a="http://schemas.openxmlformats.org/drawingml/2006/main">
-            <a:pPr>
+            <a:normAutofit/>
+          </a:bodyPr>
+          <a:lstStyle xmlns:a="http://schemas.openxmlformats.org/drawingml/2006/main"/>
+          <a:p xmlns:a="http://schemas.openxmlformats.org/drawingml/2006/main">
+            <a:pPr>
+              <a:buNone/>
               <a:defRPr sz="2700" b="1">
                 <a:solidFill>
                   <a:srgbClr val="173B31"/>
@@ -17035,7 +17339,7 @@
       </p:sp>
       <p:sp>
         <p:nvSpPr>
-          <p:cNvPr id="4" name="">
+          <p:cNvPr id="4" name="Rectangle 3">
             <a:extLst xmlns:a="http://schemas.openxmlformats.org/drawingml/2006/main">
               <a:ext uri="{FF2B5EF4-FFF2-40B4-BE49-F238E27FC236}">
                 <a16:creationId xmlns:a16="http://schemas.microsoft.com/office/drawing/2014/main" id="{F8319ADE-9EC2-40E6-912E-A9CCF4C9B93B}"/>
@@ -17062,11 +17366,12 @@
         </p:spPr>
         <p:txBody>
           <a:bodyPr xmlns:a="http://schemas.openxmlformats.org/drawingml/2006/main">
-            <a:normAutofit fontScale="100000"/>
-          </a:bodyPr>
-          <a:lstStyle xmlns:a="http://schemas.openxmlformats.org/drawingml/2006/main"/>
-          <a:p xmlns:a="http://schemas.openxmlformats.org/drawingml/2006/main">
-            <a:pPr>
+            <a:normAutofit/>
+          </a:bodyPr>
+          <a:lstStyle xmlns:a="http://schemas.openxmlformats.org/drawingml/2006/main"/>
+          <a:p xmlns:a="http://schemas.openxmlformats.org/drawingml/2006/main">
+            <a:pPr>
+              <a:buNone/>
               <a:defRPr sz="1275" b="0">
                 <a:solidFill>
                   <a:srgbClr val="66736D"/>
@@ -17092,7 +17397,7 @@
       </p:sp>
       <p:sp>
         <p:nvSpPr>
-          <p:cNvPr id="5" name="">
+          <p:cNvPr id="5" name="Rectangle 4">
             <a:extLst xmlns:a="http://schemas.openxmlformats.org/drawingml/2006/main">
               <a:ext uri="{FF2B5EF4-FFF2-40B4-BE49-F238E27FC236}">
                 <a16:creationId xmlns:a16="http://schemas.microsoft.com/office/drawing/2014/main" id="{36864AEB-6D91-42C4-B4F4-949D69F672E5}"/>
@@ -17124,6 +17429,7 @@
           <a:lstStyle xmlns:a="http://schemas.openxmlformats.org/drawingml/2006/main"/>
           <a:p xmlns:a="http://schemas.openxmlformats.org/drawingml/2006/main">
             <a:pPr>
+              <a:buNone/>
               <a:defRPr sz="975" b="1">
                 <a:solidFill>
                   <a:srgbClr val="66736D"/>
@@ -17149,7 +17455,7 @@
       </p:sp>
       <p:sp>
         <p:nvSpPr>
-          <p:cNvPr id="6" name="">
+          <p:cNvPr id="6" name="Oval 5">
             <a:extLst xmlns:a="http://schemas.openxmlformats.org/drawingml/2006/main">
               <a:ext uri="{FF2B5EF4-FFF2-40B4-BE49-F238E27FC236}">
                 <a16:creationId xmlns:a16="http://schemas.microsoft.com/office/drawing/2014/main" id="{A97D0B5A-0749-496D-8A07-DD9E3557EA27}"/>
@@ -17179,7 +17485,7 @@
       </p:sp>
       <p:sp>
         <p:nvSpPr>
-          <p:cNvPr id="7" name="">
+          <p:cNvPr id="7" name="Rectangle 6">
             <a:extLst xmlns:a="http://schemas.openxmlformats.org/drawingml/2006/main">
               <a:ext uri="{FF2B5EF4-FFF2-40B4-BE49-F238E27FC236}">
                 <a16:creationId xmlns:a16="http://schemas.microsoft.com/office/drawing/2014/main" id="{964BA8A7-B28A-48B7-8689-954A2F5C7B48}"/>
@@ -17206,11 +17512,12 @@
         </p:spPr>
         <p:txBody>
           <a:bodyPr xmlns:a="http://schemas.openxmlformats.org/drawingml/2006/main">
-            <a:normAutofit fontScale="100000"/>
-          </a:bodyPr>
-          <a:lstStyle xmlns:a="http://schemas.openxmlformats.org/drawingml/2006/main"/>
-          <a:p xmlns:a="http://schemas.openxmlformats.org/drawingml/2006/main">
-            <a:pPr>
+            <a:normAutofit/>
+          </a:bodyPr>
+          <a:lstStyle xmlns:a="http://schemas.openxmlformats.org/drawingml/2006/main"/>
+          <a:p xmlns:a="http://schemas.openxmlformats.org/drawingml/2006/main">
+            <a:pPr>
+              <a:buNone/>
               <a:defRPr sz="975" b="1">
                 <a:solidFill>
                   <a:srgbClr val="FFFFFF"/>
@@ -17236,7 +17543,7 @@
       </p:sp>
       <p:sp>
         <p:nvSpPr>
-          <p:cNvPr id="8" name="">
+          <p:cNvPr id="8" name="Rectangle: Rounded Corners 7">
             <a:extLst xmlns:a="http://schemas.openxmlformats.org/drawingml/2006/main">
               <a:ext uri="{FF2B5EF4-FFF2-40B4-BE49-F238E27FC236}">
                 <a16:creationId xmlns:a16="http://schemas.microsoft.com/office/drawing/2014/main" id="{FBB969E9-DDC9-4011-85B7-23CF54F3C8B2}"/>
@@ -17268,7 +17575,7 @@
       </p:sp>
       <p:sp>
         <p:nvSpPr>
-          <p:cNvPr id="9" name="">
+          <p:cNvPr id="9" name="Rectangle 8">
             <a:extLst xmlns:a="http://schemas.openxmlformats.org/drawingml/2006/main">
               <a:ext uri="{FF2B5EF4-FFF2-40B4-BE49-F238E27FC236}">
                 <a16:creationId xmlns:a16="http://schemas.microsoft.com/office/drawing/2014/main" id="{6D64D859-9EA7-4F1E-884F-2763DB7A61EA}"/>
@@ -17300,6 +17607,7 @@
           <a:lstStyle xmlns:a="http://schemas.openxmlformats.org/drawingml/2006/main"/>
           <a:p xmlns:a="http://schemas.openxmlformats.org/drawingml/2006/main">
             <a:pPr>
+              <a:buNone/>
               <a:defRPr sz="1575" b="1">
                 <a:solidFill>
                   <a:srgbClr val="173B31"/>
@@ -17325,7 +17633,7 @@
       </p:sp>
       <p:sp>
         <p:nvSpPr>
-          <p:cNvPr id="10" name="">
+          <p:cNvPr id="10" name="Rectangle 9">
             <a:extLst xmlns:a="http://schemas.openxmlformats.org/drawingml/2006/main">
               <a:ext uri="{FF2B5EF4-FFF2-40B4-BE49-F238E27FC236}">
                 <a16:creationId xmlns:a16="http://schemas.microsoft.com/office/drawing/2014/main" id="{B9F97D4C-6315-4D4E-8E3D-B5766EF3FB90}"/>
@@ -17352,11 +17660,12 @@
         </p:spPr>
         <p:txBody>
           <a:bodyPr xmlns:a="http://schemas.openxmlformats.org/drawingml/2006/main">
-            <a:normAutofit fontScale="100000"/>
-          </a:bodyPr>
-          <a:lstStyle xmlns:a="http://schemas.openxmlformats.org/drawingml/2006/main"/>
-          <a:p xmlns:a="http://schemas.openxmlformats.org/drawingml/2006/main">
-            <a:pPr>
+            <a:normAutofit/>
+          </a:bodyPr>
+          <a:lstStyle xmlns:a="http://schemas.openxmlformats.org/drawingml/2006/main"/>
+          <a:p xmlns:a="http://schemas.openxmlformats.org/drawingml/2006/main">
+            <a:pPr>
+              <a:buNone/>
               <a:defRPr sz="1275" b="0">
                 <a:solidFill>
                   <a:srgbClr val="1D2B27"/>
@@ -17382,7 +17691,7 @@
       </p:sp>
       <p:sp>
         <p:nvSpPr>
-          <p:cNvPr id="11" name="">
+          <p:cNvPr id="11" name="Oval 10">
             <a:extLst xmlns:a="http://schemas.openxmlformats.org/drawingml/2006/main">
               <a:ext uri="{FF2B5EF4-FFF2-40B4-BE49-F238E27FC236}">
                 <a16:creationId xmlns:a16="http://schemas.microsoft.com/office/drawing/2014/main" id="{31CE504F-EF62-4A2E-93D0-61527F6AC876}"/>
@@ -17412,7 +17721,7 @@
       </p:sp>
       <p:sp>
         <p:nvSpPr>
-          <p:cNvPr id="12" name="">
+          <p:cNvPr id="12" name="Rectangle 11">
             <a:extLst xmlns:a="http://schemas.openxmlformats.org/drawingml/2006/main">
               <a:ext uri="{FF2B5EF4-FFF2-40B4-BE49-F238E27FC236}">
                 <a16:creationId xmlns:a16="http://schemas.microsoft.com/office/drawing/2014/main" id="{827183BE-03C0-40E7-ACED-889D71DEF531}"/>
@@ -17439,11 +17748,12 @@
         </p:spPr>
         <p:txBody>
           <a:bodyPr xmlns:a="http://schemas.openxmlformats.org/drawingml/2006/main">
-            <a:normAutofit fontScale="100000"/>
-          </a:bodyPr>
-          <a:lstStyle xmlns:a="http://schemas.openxmlformats.org/drawingml/2006/main"/>
-          <a:p xmlns:a="http://schemas.openxmlformats.org/drawingml/2006/main">
-            <a:pPr>
+            <a:normAutofit/>
+          </a:bodyPr>
+          <a:lstStyle xmlns:a="http://schemas.openxmlformats.org/drawingml/2006/main"/>
+          <a:p xmlns:a="http://schemas.openxmlformats.org/drawingml/2006/main">
+            <a:pPr>
+              <a:buNone/>
               <a:defRPr sz="975" b="1">
                 <a:solidFill>
                   <a:srgbClr val="FFFFFF"/>
@@ -17469,7 +17779,7 @@
       </p:sp>
       <p:sp>
         <p:nvSpPr>
-          <p:cNvPr id="13" name="">
+          <p:cNvPr id="13" name="Rectangle: Rounded Corners 12">
             <a:extLst xmlns:a="http://schemas.openxmlformats.org/drawingml/2006/main">
               <a:ext uri="{FF2B5EF4-FFF2-40B4-BE49-F238E27FC236}">
                 <a16:creationId xmlns:a16="http://schemas.microsoft.com/office/drawing/2014/main" id="{0839990B-F56A-438F-98B0-026CE3518A85}"/>
@@ -17501,7 +17811,7 @@
       </p:sp>
       <p:sp>
         <p:nvSpPr>
-          <p:cNvPr id="14" name="">
+          <p:cNvPr id="14" name="Rectangle 13">
             <a:extLst xmlns:a="http://schemas.openxmlformats.org/drawingml/2006/main">
               <a:ext uri="{FF2B5EF4-FFF2-40B4-BE49-F238E27FC236}">
                 <a16:creationId xmlns:a16="http://schemas.microsoft.com/office/drawing/2014/main" id="{769AD427-661F-457D-B01E-065747AECD9E}"/>
@@ -17533,6 +17843,7 @@
           <a:lstStyle xmlns:a="http://schemas.openxmlformats.org/drawingml/2006/main"/>
           <a:p xmlns:a="http://schemas.openxmlformats.org/drawingml/2006/main">
             <a:pPr>
+              <a:buNone/>
               <a:defRPr sz="1575" b="1">
                 <a:solidFill>
                   <a:srgbClr val="173B31"/>
@@ -17558,7 +17869,7 @@
       </p:sp>
       <p:sp>
         <p:nvSpPr>
-          <p:cNvPr id="15" name="">
+          <p:cNvPr id="15" name="Rectangle 14">
             <a:extLst xmlns:a="http://schemas.openxmlformats.org/drawingml/2006/main">
               <a:ext uri="{FF2B5EF4-FFF2-40B4-BE49-F238E27FC236}">
                 <a16:creationId xmlns:a16="http://schemas.microsoft.com/office/drawing/2014/main" id="{2B4B12D5-6859-4630-B1AF-30C0AD9E475B}"/>
@@ -17585,11 +17896,12 @@
         </p:spPr>
         <p:txBody>
           <a:bodyPr xmlns:a="http://schemas.openxmlformats.org/drawingml/2006/main">
-            <a:normAutofit fontScale="100000"/>
-          </a:bodyPr>
-          <a:lstStyle xmlns:a="http://schemas.openxmlformats.org/drawingml/2006/main"/>
-          <a:p xmlns:a="http://schemas.openxmlformats.org/drawingml/2006/main">
-            <a:pPr>
+            <a:normAutofit/>
+          </a:bodyPr>
+          <a:lstStyle xmlns:a="http://schemas.openxmlformats.org/drawingml/2006/main"/>
+          <a:p xmlns:a="http://schemas.openxmlformats.org/drawingml/2006/main">
+            <a:pPr>
+              <a:buNone/>
               <a:defRPr sz="1275" b="0">
                 <a:solidFill>
                   <a:srgbClr val="1D2B27"/>
@@ -17615,7 +17927,7 @@
       </p:sp>
       <p:sp>
         <p:nvSpPr>
-          <p:cNvPr id="16" name="">
+          <p:cNvPr id="16" name="Oval 15">
             <a:extLst xmlns:a="http://schemas.openxmlformats.org/drawingml/2006/main">
               <a:ext uri="{FF2B5EF4-FFF2-40B4-BE49-F238E27FC236}">
                 <a16:creationId xmlns:a16="http://schemas.microsoft.com/office/drawing/2014/main" id="{18D6A4E1-2F11-4935-B591-3EF01F7E5B4A}"/>
@@ -17645,7 +17957,7 @@
       </p:sp>
       <p:sp>
         <p:nvSpPr>
-          <p:cNvPr id="17" name="">
+          <p:cNvPr id="17" name="Rectangle 16">
             <a:extLst xmlns:a="http://schemas.openxmlformats.org/drawingml/2006/main">
               <a:ext uri="{FF2B5EF4-FFF2-40B4-BE49-F238E27FC236}">
                 <a16:creationId xmlns:a16="http://schemas.microsoft.com/office/drawing/2014/main" id="{E58D1BED-9E8C-4737-B6F2-1AF970AD5C96}"/>
@@ -17672,11 +17984,12 @@
         </p:spPr>
         <p:txBody>
           <a:bodyPr xmlns:a="http://schemas.openxmlformats.org/drawingml/2006/main">
-            <a:normAutofit fontScale="100000"/>
-          </a:bodyPr>
-          <a:lstStyle xmlns:a="http://schemas.openxmlformats.org/drawingml/2006/main"/>
-          <a:p xmlns:a="http://schemas.openxmlformats.org/drawingml/2006/main">
-            <a:pPr>
+            <a:normAutofit/>
+          </a:bodyPr>
+          <a:lstStyle xmlns:a="http://schemas.openxmlformats.org/drawingml/2006/main"/>
+          <a:p xmlns:a="http://schemas.openxmlformats.org/drawingml/2006/main">
+            <a:pPr>
+              <a:buNone/>
               <a:defRPr sz="975" b="1">
                 <a:solidFill>
                   <a:srgbClr val="FFFFFF"/>
@@ -17702,7 +18015,7 @@
       </p:sp>
       <p:sp>
         <p:nvSpPr>
-          <p:cNvPr id="18" name="">
+          <p:cNvPr id="18" name="Rectangle: Rounded Corners 17">
             <a:extLst xmlns:a="http://schemas.openxmlformats.org/drawingml/2006/main">
               <a:ext uri="{FF2B5EF4-FFF2-40B4-BE49-F238E27FC236}">
                 <a16:creationId xmlns:a16="http://schemas.microsoft.com/office/drawing/2014/main" id="{B72E99ED-1DB5-4EEC-8478-533FFA3FBE56}"/>
@@ -17734,7 +18047,7 @@
       </p:sp>
       <p:sp>
         <p:nvSpPr>
-          <p:cNvPr id="19" name="">
+          <p:cNvPr id="19" name="Rectangle 18">
             <a:extLst xmlns:a="http://schemas.openxmlformats.org/drawingml/2006/main">
               <a:ext uri="{FF2B5EF4-FFF2-40B4-BE49-F238E27FC236}">
                 <a16:creationId xmlns:a16="http://schemas.microsoft.com/office/drawing/2014/main" id="{905BFE58-6955-4C99-B96A-ADD673731F87}"/>
@@ -17766,6 +18079,7 @@
           <a:lstStyle xmlns:a="http://schemas.openxmlformats.org/drawingml/2006/main"/>
           <a:p xmlns:a="http://schemas.openxmlformats.org/drawingml/2006/main">
             <a:pPr>
+              <a:buNone/>
               <a:defRPr sz="1575" b="1">
                 <a:solidFill>
                   <a:srgbClr val="173B31"/>
@@ -17791,7 +18105,7 @@
       </p:sp>
       <p:sp>
         <p:nvSpPr>
-          <p:cNvPr id="20" name="">
+          <p:cNvPr id="20" name="Rectangle 19">
             <a:extLst xmlns:a="http://schemas.openxmlformats.org/drawingml/2006/main">
               <a:ext uri="{FF2B5EF4-FFF2-40B4-BE49-F238E27FC236}">
                 <a16:creationId xmlns:a16="http://schemas.microsoft.com/office/drawing/2014/main" id="{235E4A87-0A38-48F2-BD75-A1400F37A1AF}"/>
@@ -17818,11 +18132,12 @@
         </p:spPr>
         <p:txBody>
           <a:bodyPr xmlns:a="http://schemas.openxmlformats.org/drawingml/2006/main">
-            <a:normAutofit fontScale="100000"/>
-          </a:bodyPr>
-          <a:lstStyle xmlns:a="http://schemas.openxmlformats.org/drawingml/2006/main"/>
-          <a:p xmlns:a="http://schemas.openxmlformats.org/drawingml/2006/main">
-            <a:pPr>
+            <a:normAutofit/>
+          </a:bodyPr>
+          <a:lstStyle xmlns:a="http://schemas.openxmlformats.org/drawingml/2006/main"/>
+          <a:p xmlns:a="http://schemas.openxmlformats.org/drawingml/2006/main">
+            <a:pPr>
+              <a:buNone/>
               <a:defRPr sz="1275" b="0">
                 <a:solidFill>
                   <a:srgbClr val="1D2B27"/>
@@ -17848,7 +18163,7 @@
       </p:sp>
       <p:sp>
         <p:nvSpPr>
-          <p:cNvPr id="21" name="">
+          <p:cNvPr id="21" name="Oval 20">
             <a:extLst xmlns:a="http://schemas.openxmlformats.org/drawingml/2006/main">
               <a:ext uri="{FF2B5EF4-FFF2-40B4-BE49-F238E27FC236}">
                 <a16:creationId xmlns:a16="http://schemas.microsoft.com/office/drawing/2014/main" id="{036C1C82-1A8A-4618-AD27-1AC1CE7E6989}"/>
@@ -17878,7 +18193,7 @@
       </p:sp>
       <p:sp>
         <p:nvSpPr>
-          <p:cNvPr id="22" name="">
+          <p:cNvPr id="22" name="Rectangle 21">
             <a:extLst xmlns:a="http://schemas.openxmlformats.org/drawingml/2006/main">
               <a:ext uri="{FF2B5EF4-FFF2-40B4-BE49-F238E27FC236}">
                 <a16:creationId xmlns:a16="http://schemas.microsoft.com/office/drawing/2014/main" id="{F47F3AFE-4F29-4E41-9E2B-6B3E85161E8D}"/>
@@ -17905,11 +18220,12 @@
         </p:spPr>
         <p:txBody>
           <a:bodyPr xmlns:a="http://schemas.openxmlformats.org/drawingml/2006/main">
-            <a:normAutofit fontScale="100000"/>
-          </a:bodyPr>
-          <a:lstStyle xmlns:a="http://schemas.openxmlformats.org/drawingml/2006/main"/>
-          <a:p xmlns:a="http://schemas.openxmlformats.org/drawingml/2006/main">
-            <a:pPr>
+            <a:normAutofit/>
+          </a:bodyPr>
+          <a:lstStyle xmlns:a="http://schemas.openxmlformats.org/drawingml/2006/main"/>
+          <a:p xmlns:a="http://schemas.openxmlformats.org/drawingml/2006/main">
+            <a:pPr>
+              <a:buNone/>
               <a:defRPr sz="975" b="1">
                 <a:solidFill>
                   <a:srgbClr val="FFFFFF"/>
@@ -17935,7 +18251,7 @@
       </p:sp>
       <p:sp>
         <p:nvSpPr>
-          <p:cNvPr id="23" name="">
+          <p:cNvPr id="23" name="Rectangle: Rounded Corners 22">
             <a:extLst xmlns:a="http://schemas.openxmlformats.org/drawingml/2006/main">
               <a:ext uri="{FF2B5EF4-FFF2-40B4-BE49-F238E27FC236}">
                 <a16:creationId xmlns:a16="http://schemas.microsoft.com/office/drawing/2014/main" id="{82958A69-65FE-4A26-A7DC-D56F49D27FB0}"/>
@@ -17967,7 +18283,7 @@
       </p:sp>
       <p:sp>
         <p:nvSpPr>
-          <p:cNvPr id="24" name="">
+          <p:cNvPr id="24" name="Rectangle 23">
             <a:extLst xmlns:a="http://schemas.openxmlformats.org/drawingml/2006/main">
               <a:ext uri="{FF2B5EF4-FFF2-40B4-BE49-F238E27FC236}">
                 <a16:creationId xmlns:a16="http://schemas.microsoft.com/office/drawing/2014/main" id="{FA40F1CF-6E4E-495B-B700-9568694CA721}"/>
@@ -17999,6 +18315,7 @@
           <a:lstStyle xmlns:a="http://schemas.openxmlformats.org/drawingml/2006/main"/>
           <a:p xmlns:a="http://schemas.openxmlformats.org/drawingml/2006/main">
             <a:pPr>
+              <a:buNone/>
               <a:defRPr sz="1575" b="1">
                 <a:solidFill>
                   <a:srgbClr val="173B31"/>
@@ -18024,7 +18341,7 @@
       </p:sp>
       <p:sp>
         <p:nvSpPr>
-          <p:cNvPr id="25" name="">
+          <p:cNvPr id="25" name="Rectangle 24">
             <a:extLst xmlns:a="http://schemas.openxmlformats.org/drawingml/2006/main">
               <a:ext uri="{FF2B5EF4-FFF2-40B4-BE49-F238E27FC236}">
                 <a16:creationId xmlns:a16="http://schemas.microsoft.com/office/drawing/2014/main" id="{1403AEE7-589B-4B8F-A2B3-52E8438599FE}"/>
@@ -18051,11 +18368,12 @@
         </p:spPr>
         <p:txBody>
           <a:bodyPr xmlns:a="http://schemas.openxmlformats.org/drawingml/2006/main">
-            <a:normAutofit fontScale="100000"/>
-          </a:bodyPr>
-          <a:lstStyle xmlns:a="http://schemas.openxmlformats.org/drawingml/2006/main"/>
-          <a:p xmlns:a="http://schemas.openxmlformats.org/drawingml/2006/main">
-            <a:pPr>
+            <a:normAutofit/>
+          </a:bodyPr>
+          <a:lstStyle xmlns:a="http://schemas.openxmlformats.org/drawingml/2006/main"/>
+          <a:p xmlns:a="http://schemas.openxmlformats.org/drawingml/2006/main">
+            <a:pPr>
+              <a:buNone/>
               <a:defRPr sz="1275" b="0">
                 <a:solidFill>
                   <a:srgbClr val="1D2B27"/>
@@ -18081,7 +18399,7 @@
       </p:sp>
       <p:sp>
         <p:nvSpPr>
-          <p:cNvPr id="26" name="">
+          <p:cNvPr id="26" name="Oval 25">
             <a:extLst xmlns:a="http://schemas.openxmlformats.org/drawingml/2006/main">
               <a:ext uri="{FF2B5EF4-FFF2-40B4-BE49-F238E27FC236}">
                 <a16:creationId xmlns:a16="http://schemas.microsoft.com/office/drawing/2014/main" id="{E5661865-4AE4-4235-9FC3-12325248F926}"/>
@@ -18111,7 +18429,7 @@
       </p:sp>
       <p:sp>
         <p:nvSpPr>
-          <p:cNvPr id="27" name="">
+          <p:cNvPr id="27" name="Rectangle 26">
             <a:extLst xmlns:a="http://schemas.openxmlformats.org/drawingml/2006/main">
               <a:ext uri="{FF2B5EF4-FFF2-40B4-BE49-F238E27FC236}">
                 <a16:creationId xmlns:a16="http://schemas.microsoft.com/office/drawing/2014/main" id="{097A3C02-F86A-4741-A25F-FF8099236F57}"/>
@@ -18138,11 +18456,12 @@
         </p:spPr>
         <p:txBody>
           <a:bodyPr xmlns:a="http://schemas.openxmlformats.org/drawingml/2006/main">
-            <a:normAutofit fontScale="100000"/>
-          </a:bodyPr>
-          <a:lstStyle xmlns:a="http://schemas.openxmlformats.org/drawingml/2006/main"/>
-          <a:p xmlns:a="http://schemas.openxmlformats.org/drawingml/2006/main">
-            <a:pPr>
+            <a:normAutofit/>
+          </a:bodyPr>
+          <a:lstStyle xmlns:a="http://schemas.openxmlformats.org/drawingml/2006/main"/>
+          <a:p xmlns:a="http://schemas.openxmlformats.org/drawingml/2006/main">
+            <a:pPr>
+              <a:buNone/>
               <a:defRPr sz="975" b="1">
                 <a:solidFill>
                   <a:srgbClr val="FFFFFF"/>
@@ -18168,7 +18487,7 @@
       </p:sp>
       <p:sp>
         <p:nvSpPr>
-          <p:cNvPr id="28" name="">
+          <p:cNvPr id="28" name="Rectangle: Rounded Corners 27">
             <a:extLst xmlns:a="http://schemas.openxmlformats.org/drawingml/2006/main">
               <a:ext uri="{FF2B5EF4-FFF2-40B4-BE49-F238E27FC236}">
                 <a16:creationId xmlns:a16="http://schemas.microsoft.com/office/drawing/2014/main" id="{07C7F7CC-EF5C-43B9-83C2-157893FB78CC}"/>
@@ -18200,7 +18519,7 @@
       </p:sp>
       <p:sp>
         <p:nvSpPr>
-          <p:cNvPr id="29" name="">
+          <p:cNvPr id="29" name="Rectangle 28">
             <a:extLst xmlns:a="http://schemas.openxmlformats.org/drawingml/2006/main">
               <a:ext uri="{FF2B5EF4-FFF2-40B4-BE49-F238E27FC236}">
                 <a16:creationId xmlns:a16="http://schemas.microsoft.com/office/drawing/2014/main" id="{5BC29F8D-9BED-46EE-A2CE-14DCE28EC41E}"/>
@@ -18232,6 +18551,7 @@
           <a:lstStyle xmlns:a="http://schemas.openxmlformats.org/drawingml/2006/main"/>
           <a:p xmlns:a="http://schemas.openxmlformats.org/drawingml/2006/main">
             <a:pPr>
+              <a:buNone/>
               <a:defRPr sz="1575" b="1">
                 <a:solidFill>
                   <a:srgbClr val="173B31"/>
@@ -18257,7 +18577,7 @@
       </p:sp>
       <p:sp>
         <p:nvSpPr>
-          <p:cNvPr id="30" name="">
+          <p:cNvPr id="30" name="Rectangle 29">
             <a:extLst xmlns:a="http://schemas.openxmlformats.org/drawingml/2006/main">
               <a:ext uri="{FF2B5EF4-FFF2-40B4-BE49-F238E27FC236}">
                 <a16:creationId xmlns:a16="http://schemas.microsoft.com/office/drawing/2014/main" id="{A181C085-7613-4622-8A63-0F4A70916BAC}"/>
@@ -18284,11 +18604,12 @@
         </p:spPr>
         <p:txBody>
           <a:bodyPr xmlns:a="http://schemas.openxmlformats.org/drawingml/2006/main">
-            <a:normAutofit fontScale="100000"/>
-          </a:bodyPr>
-          <a:lstStyle xmlns:a="http://schemas.openxmlformats.org/drawingml/2006/main"/>
-          <a:p xmlns:a="http://schemas.openxmlformats.org/drawingml/2006/main">
-            <a:pPr>
+            <a:normAutofit/>
+          </a:bodyPr>
+          <a:lstStyle xmlns:a="http://schemas.openxmlformats.org/drawingml/2006/main"/>
+          <a:p xmlns:a="http://schemas.openxmlformats.org/drawingml/2006/main">
+            <a:pPr>
+              <a:buNone/>
               <a:defRPr sz="1275" b="0">
                 <a:solidFill>
                   <a:srgbClr val="1D2B27"/>
@@ -18314,7 +18635,7 @@
       </p:sp>
       <p:sp>
         <p:nvSpPr>
-          <p:cNvPr id="31" name="">
+          <p:cNvPr id="31" name="Rectangle 30">
             <a:extLst xmlns:a="http://schemas.openxmlformats.org/drawingml/2006/main">
               <a:ext uri="{FF2B5EF4-FFF2-40B4-BE49-F238E27FC236}">
                 <a16:creationId xmlns:a16="http://schemas.microsoft.com/office/drawing/2014/main" id="{53F50B41-CDA3-4E8A-B744-76B03971C040}"/>
@@ -18341,11 +18662,12 @@
         </p:spPr>
         <p:txBody>
           <a:bodyPr xmlns:a="http://schemas.openxmlformats.org/drawingml/2006/main">
-            <a:normAutofit fontScale="100000"/>
-          </a:bodyPr>
-          <a:lstStyle xmlns:a="http://schemas.openxmlformats.org/drawingml/2006/main"/>
-          <a:p xmlns:a="http://schemas.openxmlformats.org/drawingml/2006/main">
-            <a:pPr>
+            <a:normAutofit/>
+          </a:bodyPr>
+          <a:lstStyle xmlns:a="http://schemas.openxmlformats.org/drawingml/2006/main"/>
+          <a:p xmlns:a="http://schemas.openxmlformats.org/drawingml/2006/main">
+            <a:pPr>
+              <a:buNone/>
               <a:defRPr sz="1350" b="1">
                 <a:solidFill>
                   <a:srgbClr val="C64235"/>
@@ -18400,7 +18722,7 @@
       </p:grpSpPr>
       <p:sp>
         <p:nvSpPr>
-          <p:cNvPr id="22" name="">
+          <p:cNvPr id="22" name="Rectangle 21">
             <a:extLst xmlns:a="http://schemas.openxmlformats.org/drawingml/2006/main">
               <a:ext uri="{FF2B5EF4-FFF2-40B4-BE49-F238E27FC236}">
                 <a16:creationId xmlns:a16="http://schemas.microsoft.com/office/drawing/2014/main" id="{AEC370F6-9DAE-42ED-AE61-215ED8FE8297}"/>
@@ -18430,7 +18752,7 @@
       </p:sp>
       <p:sp>
         <p:nvSpPr>
-          <p:cNvPr id="2" name="">
+          <p:cNvPr id="2" name="Rectangle 1">
             <a:extLst xmlns:a="http://schemas.openxmlformats.org/drawingml/2006/main">
               <a:ext uri="{FF2B5EF4-FFF2-40B4-BE49-F238E27FC236}">
                 <a16:creationId xmlns:a16="http://schemas.microsoft.com/office/drawing/2014/main" id="{0D8CA3C3-CD8E-4301-B1E7-936BFBC3A00A}"/>
@@ -18457,11 +18779,12 @@
         </p:spPr>
         <p:txBody>
           <a:bodyPr xmlns:a="http://schemas.openxmlformats.org/drawingml/2006/main">
-            <a:normAutofit fontScale="100000"/>
-          </a:bodyPr>
-          <a:lstStyle xmlns:a="http://schemas.openxmlformats.org/drawingml/2006/main"/>
-          <a:p xmlns:a="http://schemas.openxmlformats.org/drawingml/2006/main">
-            <a:pPr>
+            <a:normAutofit/>
+          </a:bodyPr>
+          <a:lstStyle xmlns:a="http://schemas.openxmlformats.org/drawingml/2006/main"/>
+          <a:p xmlns:a="http://schemas.openxmlformats.org/drawingml/2006/main">
+            <a:pPr>
+              <a:buNone/>
               <a:defRPr sz="1125" b="1">
                 <a:solidFill>
                   <a:srgbClr val="C64235"/>
@@ -18487,7 +18810,7 @@
       </p:sp>
       <p:sp>
         <p:nvSpPr>
-          <p:cNvPr id="3" name="">
+          <p:cNvPr id="3" name="Rectangle 2">
             <a:extLst xmlns:a="http://schemas.openxmlformats.org/drawingml/2006/main">
               <a:ext uri="{FF2B5EF4-FFF2-40B4-BE49-F238E27FC236}">
                 <a16:creationId xmlns:a16="http://schemas.microsoft.com/office/drawing/2014/main" id="{6A05F5CF-BF4D-4EE1-A001-55716D6727F4}"/>
@@ -18514,11 +18837,12 @@
         </p:spPr>
         <p:txBody>
           <a:bodyPr xmlns:a="http://schemas.openxmlformats.org/drawingml/2006/main">
-            <a:normAutofit fontScale="100000"/>
-          </a:bodyPr>
-          <a:lstStyle xmlns:a="http://schemas.openxmlformats.org/drawingml/2006/main"/>
-          <a:p xmlns:a="http://schemas.openxmlformats.org/drawingml/2006/main">
-            <a:pPr>
+            <a:normAutofit/>
+          </a:bodyPr>
+          <a:lstStyle xmlns:a="http://schemas.openxmlformats.org/drawingml/2006/main"/>
+          <a:p xmlns:a="http://schemas.openxmlformats.org/drawingml/2006/main">
+            <a:pPr>
+              <a:buNone/>
               <a:defRPr sz="2700" b="1">
                 <a:solidFill>
                   <a:srgbClr val="173B31"/>
@@ -18544,7 +18868,7 @@
       </p:sp>
       <p:sp>
         <p:nvSpPr>
-          <p:cNvPr id="4" name="">
+          <p:cNvPr id="4" name="Rectangle 3">
             <a:extLst xmlns:a="http://schemas.openxmlformats.org/drawingml/2006/main">
               <a:ext uri="{FF2B5EF4-FFF2-40B4-BE49-F238E27FC236}">
                 <a16:creationId xmlns:a16="http://schemas.microsoft.com/office/drawing/2014/main" id="{FA510544-85E7-4182-9394-4374056D67AB}"/>
@@ -18571,11 +18895,12 @@
         </p:spPr>
         <p:txBody>
           <a:bodyPr xmlns:a="http://schemas.openxmlformats.org/drawingml/2006/main">
-            <a:normAutofit fontScale="100000"/>
-          </a:bodyPr>
-          <a:lstStyle xmlns:a="http://schemas.openxmlformats.org/drawingml/2006/main"/>
-          <a:p xmlns:a="http://schemas.openxmlformats.org/drawingml/2006/main">
-            <a:pPr>
+            <a:normAutofit/>
+          </a:bodyPr>
+          <a:lstStyle xmlns:a="http://schemas.openxmlformats.org/drawingml/2006/main"/>
+          <a:p xmlns:a="http://schemas.openxmlformats.org/drawingml/2006/main">
+            <a:pPr>
+              <a:buNone/>
               <a:defRPr sz="1275" b="0">
                 <a:solidFill>
                   <a:srgbClr val="66736D"/>
@@ -18601,7 +18926,7 @@
       </p:sp>
       <p:sp>
         <p:nvSpPr>
-          <p:cNvPr id="5" name="">
+          <p:cNvPr id="5" name="Rectangle 4">
             <a:extLst xmlns:a="http://schemas.openxmlformats.org/drawingml/2006/main">
               <a:ext uri="{FF2B5EF4-FFF2-40B4-BE49-F238E27FC236}">
                 <a16:creationId xmlns:a16="http://schemas.microsoft.com/office/drawing/2014/main" id="{1C90081D-3B18-423B-AA69-B64E9B82007C}"/>
@@ -18633,6 +18958,7 @@
           <a:lstStyle xmlns:a="http://schemas.openxmlformats.org/drawingml/2006/main"/>
           <a:p xmlns:a="http://schemas.openxmlformats.org/drawingml/2006/main">
             <a:pPr>
+              <a:buNone/>
               <a:defRPr sz="975" b="1">
                 <a:solidFill>
                   <a:srgbClr val="66736D"/>
@@ -18658,14 +18984,14 @@
       </p:sp>
       <p:pic>
         <p:nvPicPr>
-          <p:cNvPr id="27" name=""/>
+          <p:cNvPr id="29" name="Picture 26"/>
           <p:cNvPicPr>
             <a:picLocks xmlns:a="http://schemas.openxmlformats.org/drawingml/2006/main" noChangeAspect="1"/>
           </p:cNvPicPr>
           <p:nvPr/>
         </p:nvPicPr>
         <p:blipFill>
-          <a:blip xmlns:r="http://schemas.openxmlformats.org/officeDocument/2006/relationships" xmlns:a="http://schemas.openxmlformats.org/drawingml/2006/main" r:embed="Rdd0cf413c7434103"/>
+          <a:blip xmlns:r="http://schemas.openxmlformats.org/officeDocument/2006/relationships" xmlns:a="http://schemas.openxmlformats.org/drawingml/2006/main" r:embed="R95ca054b64844033"/>
           <a:srcRect xmlns:a="http://schemas.openxmlformats.org/drawingml/2006/main" l="0" t="5288" r="0" b="5288"/>
           <a:stretch xmlns:a="http://schemas.openxmlformats.org/drawingml/2006/main">
             <a:fillRect l="0" t="0" r="0" b="0"/>
@@ -18685,7 +19011,7 @@
       </p:pic>
       <p:sp>
         <p:nvSpPr>
-          <p:cNvPr id="7" name="">
+          <p:cNvPr id="7" name="Rectangle 6">
             <a:extLst xmlns:a="http://schemas.openxmlformats.org/drawingml/2006/main">
               <a:ext uri="{FF2B5EF4-FFF2-40B4-BE49-F238E27FC236}">
                 <a16:creationId xmlns:a16="http://schemas.microsoft.com/office/drawing/2014/main" id="{BF495480-0FD0-4E72-967A-DDD53813050C}"/>
@@ -18717,6 +19043,7 @@
           <a:lstStyle xmlns:a="http://schemas.openxmlformats.org/drawingml/2006/main"/>
           <a:p xmlns:a="http://schemas.openxmlformats.org/drawingml/2006/main">
             <a:pPr>
+              <a:buNone/>
               <a:defRPr sz="1650" b="1">
                 <a:solidFill>
                   <a:srgbClr val="173B31"/>
@@ -18742,7 +19069,7 @@
       </p:sp>
       <p:sp>
         <p:nvSpPr>
-          <p:cNvPr id="8" name="">
+          <p:cNvPr id="8" name="Oval 7">
             <a:extLst xmlns:a="http://schemas.openxmlformats.org/drawingml/2006/main">
               <a:ext uri="{FF2B5EF4-FFF2-40B4-BE49-F238E27FC236}">
                 <a16:creationId xmlns:a16="http://schemas.microsoft.com/office/drawing/2014/main" id="{BD5BACAB-0BBB-4839-96E3-CB2A5C4A82D3}"/>
@@ -18772,7 +19099,7 @@
       </p:sp>
       <p:sp>
         <p:nvSpPr>
-          <p:cNvPr id="9" name="">
+          <p:cNvPr id="9" name="Rectangle 8">
             <a:extLst xmlns:a="http://schemas.openxmlformats.org/drawingml/2006/main">
               <a:ext uri="{FF2B5EF4-FFF2-40B4-BE49-F238E27FC236}">
                 <a16:creationId xmlns:a16="http://schemas.microsoft.com/office/drawing/2014/main" id="{1AB74FF0-8DAA-4B69-A656-FC5ADDA365B7}"/>
@@ -18804,6 +19131,7 @@
           <a:lstStyle xmlns:a="http://schemas.openxmlformats.org/drawingml/2006/main"/>
           <a:p xmlns:a="http://schemas.openxmlformats.org/drawingml/2006/main">
             <a:pPr>
+              <a:buNone/>
               <a:defRPr sz="825" b="1">
                 <a:solidFill>
                   <a:srgbClr val="FFFFFF"/>
@@ -18829,7 +19157,7 @@
       </p:sp>
       <p:sp>
         <p:nvSpPr>
-          <p:cNvPr id="10" name="">
+          <p:cNvPr id="10" name="Rectangle 9">
             <a:extLst xmlns:a="http://schemas.openxmlformats.org/drawingml/2006/main">
               <a:ext uri="{FF2B5EF4-FFF2-40B4-BE49-F238E27FC236}">
                 <a16:creationId xmlns:a16="http://schemas.microsoft.com/office/drawing/2014/main" id="{38E7AA06-EC42-44E5-94CD-7D8940F0B0F8}"/>
@@ -18856,11 +19184,12 @@
         </p:spPr>
         <p:txBody>
           <a:bodyPr xmlns:a="http://schemas.openxmlformats.org/drawingml/2006/main">
-            <a:normAutofit fontScale="100000"/>
-          </a:bodyPr>
-          <a:lstStyle xmlns:a="http://schemas.openxmlformats.org/drawingml/2006/main"/>
-          <a:p xmlns:a="http://schemas.openxmlformats.org/drawingml/2006/main">
-            <a:pPr>
+            <a:normAutofit/>
+          </a:bodyPr>
+          <a:lstStyle xmlns:a="http://schemas.openxmlformats.org/drawingml/2006/main"/>
+          <a:p xmlns:a="http://schemas.openxmlformats.org/drawingml/2006/main">
+            <a:pPr>
+              <a:buNone/>
               <a:defRPr sz="1275" b="1">
                 <a:solidFill>
                   <a:srgbClr val="1D2B27"/>
@@ -18886,7 +19215,7 @@
       </p:sp>
       <p:sp>
         <p:nvSpPr>
-          <p:cNvPr id="11" name="">
+          <p:cNvPr id="11" name="Oval 10">
             <a:extLst xmlns:a="http://schemas.openxmlformats.org/drawingml/2006/main">
               <a:ext uri="{FF2B5EF4-FFF2-40B4-BE49-F238E27FC236}">
                 <a16:creationId xmlns:a16="http://schemas.microsoft.com/office/drawing/2014/main" id="{4D833BB4-3B05-43BD-A8DC-01BBFF9DF89B}"/>
@@ -18916,7 +19245,7 @@
       </p:sp>
       <p:sp>
         <p:nvSpPr>
-          <p:cNvPr id="12" name="">
+          <p:cNvPr id="12" name="Rectangle 11">
             <a:extLst xmlns:a="http://schemas.openxmlformats.org/drawingml/2006/main">
               <a:ext uri="{FF2B5EF4-FFF2-40B4-BE49-F238E27FC236}">
                 <a16:creationId xmlns:a16="http://schemas.microsoft.com/office/drawing/2014/main" id="{7F1C9E3C-506A-4938-AA1C-17A0EF683121}"/>
@@ -18948,6 +19277,7 @@
           <a:lstStyle xmlns:a="http://schemas.openxmlformats.org/drawingml/2006/main"/>
           <a:p xmlns:a="http://schemas.openxmlformats.org/drawingml/2006/main">
             <a:pPr>
+              <a:buNone/>
               <a:defRPr sz="825" b="1">
                 <a:solidFill>
                   <a:srgbClr val="FFFFFF"/>
@@ -18973,7 +19303,7 @@
       </p:sp>
       <p:sp>
         <p:nvSpPr>
-          <p:cNvPr id="13" name="">
+          <p:cNvPr id="13" name="Rectangle 12">
             <a:extLst xmlns:a="http://schemas.openxmlformats.org/drawingml/2006/main">
               <a:ext uri="{FF2B5EF4-FFF2-40B4-BE49-F238E27FC236}">
                 <a16:creationId xmlns:a16="http://schemas.microsoft.com/office/drawing/2014/main" id="{7FF511EA-D5C6-4F92-8E90-9746619DCC59}"/>
@@ -19000,11 +19330,12 @@
         </p:spPr>
         <p:txBody>
           <a:bodyPr xmlns:a="http://schemas.openxmlformats.org/drawingml/2006/main">
-            <a:normAutofit fontScale="100000"/>
-          </a:bodyPr>
-          <a:lstStyle xmlns:a="http://schemas.openxmlformats.org/drawingml/2006/main"/>
-          <a:p xmlns:a="http://schemas.openxmlformats.org/drawingml/2006/main">
-            <a:pPr>
+            <a:normAutofit/>
+          </a:bodyPr>
+          <a:lstStyle xmlns:a="http://schemas.openxmlformats.org/drawingml/2006/main"/>
+          <a:p xmlns:a="http://schemas.openxmlformats.org/drawingml/2006/main">
+            <a:pPr>
+              <a:buNone/>
               <a:defRPr sz="1275" b="0">
                 <a:solidFill>
                   <a:srgbClr val="1D2B27"/>
@@ -19030,7 +19361,7 @@
       </p:sp>
       <p:sp>
         <p:nvSpPr>
-          <p:cNvPr id="14" name="">
+          <p:cNvPr id="14" name="Oval 13">
             <a:extLst xmlns:a="http://schemas.openxmlformats.org/drawingml/2006/main">
               <a:ext uri="{FF2B5EF4-FFF2-40B4-BE49-F238E27FC236}">
                 <a16:creationId xmlns:a16="http://schemas.microsoft.com/office/drawing/2014/main" id="{41595540-A547-4590-A2BB-88274DD2B851}"/>
@@ -19060,7 +19391,7 @@
       </p:sp>
       <p:sp>
         <p:nvSpPr>
-          <p:cNvPr id="15" name="">
+          <p:cNvPr id="15" name="Rectangle 14">
             <a:extLst xmlns:a="http://schemas.openxmlformats.org/drawingml/2006/main">
               <a:ext uri="{FF2B5EF4-FFF2-40B4-BE49-F238E27FC236}">
                 <a16:creationId xmlns:a16="http://schemas.microsoft.com/office/drawing/2014/main" id="{AF578B1A-F5C3-497D-8CB0-B7666731DBCB}"/>
@@ -19092,6 +19423,7 @@
           <a:lstStyle xmlns:a="http://schemas.openxmlformats.org/drawingml/2006/main"/>
           <a:p xmlns:a="http://schemas.openxmlformats.org/drawingml/2006/main">
             <a:pPr>
+              <a:buNone/>
               <a:defRPr sz="825" b="1">
                 <a:solidFill>
                   <a:srgbClr val="FFFFFF"/>
@@ -19117,7 +19449,7 @@
       </p:sp>
       <p:sp>
         <p:nvSpPr>
-          <p:cNvPr id="16" name="">
+          <p:cNvPr id="16" name="Rectangle 15">
             <a:extLst xmlns:a="http://schemas.openxmlformats.org/drawingml/2006/main">
               <a:ext uri="{FF2B5EF4-FFF2-40B4-BE49-F238E27FC236}">
                 <a16:creationId xmlns:a16="http://schemas.microsoft.com/office/drawing/2014/main" id="{6C0E5CC8-FDB7-469A-82F8-54C8B6F20037}"/>
@@ -19144,11 +19476,12 @@
         </p:spPr>
         <p:txBody>
           <a:bodyPr xmlns:a="http://schemas.openxmlformats.org/drawingml/2006/main">
-            <a:normAutofit fontScale="100000"/>
-          </a:bodyPr>
-          <a:lstStyle xmlns:a="http://schemas.openxmlformats.org/drawingml/2006/main"/>
-          <a:p xmlns:a="http://schemas.openxmlformats.org/drawingml/2006/main">
-            <a:pPr>
+            <a:normAutofit/>
+          </a:bodyPr>
+          <a:lstStyle xmlns:a="http://schemas.openxmlformats.org/drawingml/2006/main"/>
+          <a:p xmlns:a="http://schemas.openxmlformats.org/drawingml/2006/main">
+            <a:pPr>
+              <a:buNone/>
               <a:defRPr sz="1275" b="0">
                 <a:solidFill>
                   <a:srgbClr val="1D2B27"/>
@@ -19174,7 +19507,7 @@
       </p:sp>
       <p:sp>
         <p:nvSpPr>
-          <p:cNvPr id="17" name="">
+          <p:cNvPr id="17" name="Oval 16">
             <a:extLst xmlns:a="http://schemas.openxmlformats.org/drawingml/2006/main">
               <a:ext uri="{FF2B5EF4-FFF2-40B4-BE49-F238E27FC236}">
                 <a16:creationId xmlns:a16="http://schemas.microsoft.com/office/drawing/2014/main" id="{1DD10A35-CAF0-4F57-B32D-EC112ADCD7D3}"/>
@@ -19204,7 +19537,7 @@
       </p:sp>
       <p:sp>
         <p:nvSpPr>
-          <p:cNvPr id="18" name="">
+          <p:cNvPr id="18" name="Rectangle 17">
             <a:extLst xmlns:a="http://schemas.openxmlformats.org/drawingml/2006/main">
               <a:ext uri="{FF2B5EF4-FFF2-40B4-BE49-F238E27FC236}">
                 <a16:creationId xmlns:a16="http://schemas.microsoft.com/office/drawing/2014/main" id="{D8594CC8-B25C-4332-A68C-A474BF54B5B1}"/>
@@ -19236,6 +19569,7 @@
           <a:lstStyle xmlns:a="http://schemas.openxmlformats.org/drawingml/2006/main"/>
           <a:p xmlns:a="http://schemas.openxmlformats.org/drawingml/2006/main">
             <a:pPr>
+              <a:buNone/>
               <a:defRPr sz="825" b="1">
                 <a:solidFill>
                   <a:srgbClr val="FFFFFF"/>
@@ -19261,7 +19595,7 @@
       </p:sp>
       <p:sp>
         <p:nvSpPr>
-          <p:cNvPr id="19" name="">
+          <p:cNvPr id="19" name="Rectangle 18">
             <a:extLst xmlns:a="http://schemas.openxmlformats.org/drawingml/2006/main">
               <a:ext uri="{FF2B5EF4-FFF2-40B4-BE49-F238E27FC236}">
                 <a16:creationId xmlns:a16="http://schemas.microsoft.com/office/drawing/2014/main" id="{FE85F68E-E3DD-45BF-9CC4-10EE519124C0}"/>
@@ -19288,11 +19622,12 @@
         </p:spPr>
         <p:txBody>
           <a:bodyPr xmlns:a="http://schemas.openxmlformats.org/drawingml/2006/main">
-            <a:normAutofit fontScale="100000"/>
-          </a:bodyPr>
-          <a:lstStyle xmlns:a="http://schemas.openxmlformats.org/drawingml/2006/main"/>
-          <a:p xmlns:a="http://schemas.openxmlformats.org/drawingml/2006/main">
-            <a:pPr>
+            <a:normAutofit/>
+          </a:bodyPr>
+          <a:lstStyle xmlns:a="http://schemas.openxmlformats.org/drawingml/2006/main"/>
+          <a:p xmlns:a="http://schemas.openxmlformats.org/drawingml/2006/main">
+            <a:pPr>
+              <a:buNone/>
               <a:defRPr sz="1275" b="0">
                 <a:solidFill>
                   <a:srgbClr val="1D2B27"/>
@@ -19318,7 +19653,7 @@
       </p:sp>
       <p:sp>
         <p:nvSpPr>
-          <p:cNvPr id="20" name="">
+          <p:cNvPr id="20" name="Rectangle: Rounded Corners 19">
             <a:extLst xmlns:a="http://schemas.openxmlformats.org/drawingml/2006/main">
               <a:ext uri="{FF2B5EF4-FFF2-40B4-BE49-F238E27FC236}">
                 <a16:creationId xmlns:a16="http://schemas.microsoft.com/office/drawing/2014/main" id="{9FE2D4D5-A4D4-4C8F-B76D-CD2FD25D92F2}"/>
@@ -19350,7 +19685,7 @@
       </p:sp>
       <p:sp>
         <p:nvSpPr>
-          <p:cNvPr id="21" name="">
+          <p:cNvPr id="21" name="Rectangle 20">
             <a:extLst xmlns:a="http://schemas.openxmlformats.org/drawingml/2006/main">
               <a:ext uri="{FF2B5EF4-FFF2-40B4-BE49-F238E27FC236}">
                 <a16:creationId xmlns:a16="http://schemas.microsoft.com/office/drawing/2014/main" id="{83170A7A-760F-4F79-8166-00A1B2BDBC83}"/>
@@ -19382,6 +19717,7 @@
           <a:lstStyle xmlns:a="http://schemas.openxmlformats.org/drawingml/2006/main"/>
           <a:p xmlns:a="http://schemas.openxmlformats.org/drawingml/2006/main">
             <a:pPr>
+              <a:buNone/>
               <a:defRPr sz="1200" b="1">
                 <a:solidFill>
                   <a:srgbClr val="FFFFFF"/>
@@ -19436,7 +19772,7 @@
       </p:grpSpPr>
       <p:sp>
         <p:nvSpPr>
-          <p:cNvPr id="35" name="">
+          <p:cNvPr id="35" name="Rectangle 34">
             <a:extLst xmlns:a="http://schemas.openxmlformats.org/drawingml/2006/main">
               <a:ext uri="{FF2B5EF4-FFF2-40B4-BE49-F238E27FC236}">
                 <a16:creationId xmlns:a16="http://schemas.microsoft.com/office/drawing/2014/main" id="{F0FB97E7-B306-477B-B93F-6B9D3B9157ED}"/>
@@ -19466,7 +19802,7 @@
       </p:sp>
       <p:sp>
         <p:nvSpPr>
-          <p:cNvPr id="2" name="">
+          <p:cNvPr id="2" name="Rectangle 1">
             <a:extLst xmlns:a="http://schemas.openxmlformats.org/drawingml/2006/main">
               <a:ext uri="{FF2B5EF4-FFF2-40B4-BE49-F238E27FC236}">
                 <a16:creationId xmlns:a16="http://schemas.microsoft.com/office/drawing/2014/main" id="{70299F7A-D145-4216-BD64-906EA00062B4}"/>
@@ -19493,11 +19829,12 @@
         </p:spPr>
         <p:txBody>
           <a:bodyPr xmlns:a="http://schemas.openxmlformats.org/drawingml/2006/main">
-            <a:normAutofit fontScale="100000"/>
-          </a:bodyPr>
-          <a:lstStyle xmlns:a="http://schemas.openxmlformats.org/drawingml/2006/main"/>
-          <a:p xmlns:a="http://schemas.openxmlformats.org/drawingml/2006/main">
-            <a:pPr>
+            <a:normAutofit/>
+          </a:bodyPr>
+          <a:lstStyle xmlns:a="http://schemas.openxmlformats.org/drawingml/2006/main"/>
+          <a:p xmlns:a="http://schemas.openxmlformats.org/drawingml/2006/main">
+            <a:pPr>
+              <a:buNone/>
               <a:defRPr sz="1125" b="1">
                 <a:solidFill>
                   <a:srgbClr val="C64235"/>
@@ -19523,7 +19860,7 @@
       </p:sp>
       <p:sp>
         <p:nvSpPr>
-          <p:cNvPr id="3" name="">
+          <p:cNvPr id="3" name="Rectangle 2">
             <a:extLst xmlns:a="http://schemas.openxmlformats.org/drawingml/2006/main">
               <a:ext uri="{FF2B5EF4-FFF2-40B4-BE49-F238E27FC236}">
                 <a16:creationId xmlns:a16="http://schemas.microsoft.com/office/drawing/2014/main" id="{DD17BFC3-0A08-467E-8F2A-3FB036959FD8}"/>
@@ -19550,11 +19887,12 @@
         </p:spPr>
         <p:txBody>
           <a:bodyPr xmlns:a="http://schemas.openxmlformats.org/drawingml/2006/main">
-            <a:normAutofit fontScale="100000"/>
-          </a:bodyPr>
-          <a:lstStyle xmlns:a="http://schemas.openxmlformats.org/drawingml/2006/main"/>
-          <a:p xmlns:a="http://schemas.openxmlformats.org/drawingml/2006/main">
-            <a:pPr>
+            <a:normAutofit/>
+          </a:bodyPr>
+          <a:lstStyle xmlns:a="http://schemas.openxmlformats.org/drawingml/2006/main"/>
+          <a:p xmlns:a="http://schemas.openxmlformats.org/drawingml/2006/main">
+            <a:pPr>
+              <a:buNone/>
               <a:defRPr sz="2700" b="1">
                 <a:solidFill>
                   <a:srgbClr val="173B31"/>
@@ -19580,7 +19918,7 @@
       </p:sp>
       <p:sp>
         <p:nvSpPr>
-          <p:cNvPr id="4" name="">
+          <p:cNvPr id="4" name="Rectangle 3">
             <a:extLst xmlns:a="http://schemas.openxmlformats.org/drawingml/2006/main">
               <a:ext uri="{FF2B5EF4-FFF2-40B4-BE49-F238E27FC236}">
                 <a16:creationId xmlns:a16="http://schemas.microsoft.com/office/drawing/2014/main" id="{D48F6F71-D607-4A8E-A4A4-2CEF34061667}"/>
@@ -19607,11 +19945,12 @@
         </p:spPr>
         <p:txBody>
           <a:bodyPr xmlns:a="http://schemas.openxmlformats.org/drawingml/2006/main">
-            <a:normAutofit fontScale="100000"/>
-          </a:bodyPr>
-          <a:lstStyle xmlns:a="http://schemas.openxmlformats.org/drawingml/2006/main"/>
-          <a:p xmlns:a="http://schemas.openxmlformats.org/drawingml/2006/main">
-            <a:pPr>
+            <a:normAutofit/>
+          </a:bodyPr>
+          <a:lstStyle xmlns:a="http://schemas.openxmlformats.org/drawingml/2006/main"/>
+          <a:p xmlns:a="http://schemas.openxmlformats.org/drawingml/2006/main">
+            <a:pPr>
+              <a:buNone/>
               <a:defRPr sz="1275" b="0">
                 <a:solidFill>
                   <a:srgbClr val="66736D"/>
@@ -19637,7 +19976,7 @@
       </p:sp>
       <p:sp>
         <p:nvSpPr>
-          <p:cNvPr id="5" name="">
+          <p:cNvPr id="5" name="Rectangle 4">
             <a:extLst xmlns:a="http://schemas.openxmlformats.org/drawingml/2006/main">
               <a:ext uri="{FF2B5EF4-FFF2-40B4-BE49-F238E27FC236}">
                 <a16:creationId xmlns:a16="http://schemas.microsoft.com/office/drawing/2014/main" id="{9A2609B3-963D-455D-B0DE-C7B29A10A36F}"/>
@@ -19669,6 +20008,7 @@
           <a:lstStyle xmlns:a="http://schemas.openxmlformats.org/drawingml/2006/main"/>
           <a:p xmlns:a="http://schemas.openxmlformats.org/drawingml/2006/main">
             <a:pPr>
+              <a:buNone/>
               <a:defRPr sz="975" b="1">
                 <a:solidFill>
                   <a:srgbClr val="66736D"/>
@@ -19694,7 +20034,7 @@
       </p:sp>
       <p:sp>
         <p:nvSpPr>
-          <p:cNvPr id="6" name="">
+          <p:cNvPr id="6" name="Rectangle: Rounded Corners 5">
             <a:extLst xmlns:a="http://schemas.openxmlformats.org/drawingml/2006/main">
               <a:ext uri="{FF2B5EF4-FFF2-40B4-BE49-F238E27FC236}">
                 <a16:creationId xmlns:a16="http://schemas.microsoft.com/office/drawing/2014/main" id="{E36FA947-EC58-46AF-8E59-1E82085E943A}"/>
@@ -19726,7 +20066,7 @@
       </p:sp>
       <p:sp>
         <p:nvSpPr>
-          <p:cNvPr id="7" name="">
+          <p:cNvPr id="7" name="Rectangle 6">
             <a:extLst xmlns:a="http://schemas.openxmlformats.org/drawingml/2006/main">
               <a:ext uri="{FF2B5EF4-FFF2-40B4-BE49-F238E27FC236}">
                 <a16:creationId xmlns:a16="http://schemas.microsoft.com/office/drawing/2014/main" id="{19FD8CA5-E092-4151-9B77-3A7C0DCAA6E3}"/>
@@ -19758,6 +20098,7 @@
           <a:lstStyle xmlns:a="http://schemas.openxmlformats.org/drawingml/2006/main"/>
           <a:p xmlns:a="http://schemas.openxmlformats.org/drawingml/2006/main">
             <a:pPr>
+              <a:buNone/>
               <a:defRPr sz="1800" b="1">
                 <a:solidFill>
                   <a:srgbClr val="173B31"/>
@@ -19783,7 +20124,7 @@
       </p:sp>
       <p:sp>
         <p:nvSpPr>
-          <p:cNvPr id="8" name="">
+          <p:cNvPr id="8" name="Oval 7">
             <a:extLst xmlns:a="http://schemas.openxmlformats.org/drawingml/2006/main">
               <a:ext uri="{FF2B5EF4-FFF2-40B4-BE49-F238E27FC236}">
                 <a16:creationId xmlns:a16="http://schemas.microsoft.com/office/drawing/2014/main" id="{23FCA72E-105F-4AF9-BA74-55E85180AFF4}"/>
@@ -19813,7 +20154,7 @@
       </p:sp>
       <p:sp>
         <p:nvSpPr>
-          <p:cNvPr id="9" name="">
+          <p:cNvPr id="9" name="Rectangle 8">
             <a:extLst xmlns:a="http://schemas.openxmlformats.org/drawingml/2006/main">
               <a:ext uri="{FF2B5EF4-FFF2-40B4-BE49-F238E27FC236}">
                 <a16:creationId xmlns:a16="http://schemas.microsoft.com/office/drawing/2014/main" id="{CA5809AF-BE91-496E-906F-1536395622F2}"/>
@@ -19845,6 +20186,7 @@
           <a:lstStyle xmlns:a="http://schemas.openxmlformats.org/drawingml/2006/main"/>
           <a:p xmlns:a="http://schemas.openxmlformats.org/drawingml/2006/main">
             <a:pPr>
+              <a:buNone/>
               <a:defRPr sz="900" b="1">
                 <a:solidFill>
                   <a:srgbClr val="FFFFFF"/>
@@ -19870,7 +20212,7 @@
       </p:sp>
       <p:sp>
         <p:nvSpPr>
-          <p:cNvPr id="10" name="">
+          <p:cNvPr id="10" name="Rectangle 9">
             <a:extLst xmlns:a="http://schemas.openxmlformats.org/drawingml/2006/main">
               <a:ext uri="{FF2B5EF4-FFF2-40B4-BE49-F238E27FC236}">
                 <a16:creationId xmlns:a16="http://schemas.microsoft.com/office/drawing/2014/main" id="{DF72FF2B-15F0-4F53-BEB7-87FE1A94A513}"/>
@@ -19902,6 +20244,7 @@
           <a:lstStyle xmlns:a="http://schemas.openxmlformats.org/drawingml/2006/main"/>
           <a:p xmlns:a="http://schemas.openxmlformats.org/drawingml/2006/main">
             <a:pPr>
+              <a:buNone/>
               <a:defRPr sz="1350" b="0">
                 <a:solidFill>
                   <a:srgbClr val="1D2B27"/>
@@ -19927,7 +20270,7 @@
       </p:sp>
       <p:sp>
         <p:nvSpPr>
-          <p:cNvPr id="11" name="">
+          <p:cNvPr id="11" name="Oval 10">
             <a:extLst xmlns:a="http://schemas.openxmlformats.org/drawingml/2006/main">
               <a:ext uri="{FF2B5EF4-FFF2-40B4-BE49-F238E27FC236}">
                 <a16:creationId xmlns:a16="http://schemas.microsoft.com/office/drawing/2014/main" id="{B5A2E6DB-0F75-485D-821F-8190B0E73262}"/>
@@ -19957,7 +20300,7 @@
       </p:sp>
       <p:sp>
         <p:nvSpPr>
-          <p:cNvPr id="12" name="">
+          <p:cNvPr id="12" name="Rectangle 11">
             <a:extLst xmlns:a="http://schemas.openxmlformats.org/drawingml/2006/main">
               <a:ext uri="{FF2B5EF4-FFF2-40B4-BE49-F238E27FC236}">
                 <a16:creationId xmlns:a16="http://schemas.microsoft.com/office/drawing/2014/main" id="{BFA367B2-A420-463B-B8C9-E34CAD1E25E0}"/>
@@ -19989,6 +20332,7 @@
           <a:lstStyle xmlns:a="http://schemas.openxmlformats.org/drawingml/2006/main"/>
           <a:p xmlns:a="http://schemas.openxmlformats.org/drawingml/2006/main">
             <a:pPr>
+              <a:buNone/>
               <a:defRPr sz="900" b="1">
                 <a:solidFill>
                   <a:srgbClr val="FFFFFF"/>
@@ -20014,7 +20358,7 @@
       </p:sp>
       <p:sp>
         <p:nvSpPr>
-          <p:cNvPr id="13" name="">
+          <p:cNvPr id="13" name="Rectangle 12">
             <a:extLst xmlns:a="http://schemas.openxmlformats.org/drawingml/2006/main">
               <a:ext uri="{FF2B5EF4-FFF2-40B4-BE49-F238E27FC236}">
                 <a16:creationId xmlns:a16="http://schemas.microsoft.com/office/drawing/2014/main" id="{81BBEC59-A36D-4D4B-BDDB-60D52442B882}"/>
@@ -20046,6 +20390,7 @@
           <a:lstStyle xmlns:a="http://schemas.openxmlformats.org/drawingml/2006/main"/>
           <a:p xmlns:a="http://schemas.openxmlformats.org/drawingml/2006/main">
             <a:pPr>
+              <a:buNone/>
               <a:defRPr sz="1350" b="0">
                 <a:solidFill>
                   <a:srgbClr val="1D2B27"/>
@@ -20071,7 +20416,7 @@
       </p:sp>
       <p:sp>
         <p:nvSpPr>
-          <p:cNvPr id="14" name="">
+          <p:cNvPr id="14" name="Oval 13">
             <a:extLst xmlns:a="http://schemas.openxmlformats.org/drawingml/2006/main">
               <a:ext uri="{FF2B5EF4-FFF2-40B4-BE49-F238E27FC236}">
                 <a16:creationId xmlns:a16="http://schemas.microsoft.com/office/drawing/2014/main" id="{940A1378-2C30-4E05-9686-FA44374858BE}"/>
@@ -20101,7 +20446,7 @@
       </p:sp>
       <p:sp>
         <p:nvSpPr>
-          <p:cNvPr id="15" name="">
+          <p:cNvPr id="15" name="Rectangle 14">
             <a:extLst xmlns:a="http://schemas.openxmlformats.org/drawingml/2006/main">
               <a:ext uri="{FF2B5EF4-FFF2-40B4-BE49-F238E27FC236}">
                 <a16:creationId xmlns:a16="http://schemas.microsoft.com/office/drawing/2014/main" id="{C3887F28-5D82-48D6-A343-29C9EB3DF5BC}"/>
@@ -20133,6 +20478,7 @@
           <a:lstStyle xmlns:a="http://schemas.openxmlformats.org/drawingml/2006/main"/>
           <a:p xmlns:a="http://schemas.openxmlformats.org/drawingml/2006/main">
             <a:pPr>
+              <a:buNone/>
               <a:defRPr sz="900" b="1">
                 <a:solidFill>
                   <a:srgbClr val="FFFFFF"/>
@@ -20158,7 +20504,7 @@
       </p:sp>
       <p:sp>
         <p:nvSpPr>
-          <p:cNvPr id="16" name="">
+          <p:cNvPr id="16" name="Rectangle 15">
             <a:extLst xmlns:a="http://schemas.openxmlformats.org/drawingml/2006/main">
               <a:ext uri="{FF2B5EF4-FFF2-40B4-BE49-F238E27FC236}">
                 <a16:creationId xmlns:a16="http://schemas.microsoft.com/office/drawing/2014/main" id="{221A1702-A02C-4751-A434-B11B1EFC1FE8}"/>
@@ -20190,6 +20536,7 @@
           <a:lstStyle xmlns:a="http://schemas.openxmlformats.org/drawingml/2006/main"/>
           <a:p xmlns:a="http://schemas.openxmlformats.org/drawingml/2006/main">
             <a:pPr>
+              <a:buNone/>
               <a:defRPr sz="1350" b="0">
                 <a:solidFill>
                   <a:srgbClr val="1D2B27"/>
@@ -20215,7 +20562,7 @@
       </p:sp>
       <p:sp>
         <p:nvSpPr>
-          <p:cNvPr id="17" name="">
+          <p:cNvPr id="17" name="Oval 16">
             <a:extLst xmlns:a="http://schemas.openxmlformats.org/drawingml/2006/main">
               <a:ext uri="{FF2B5EF4-FFF2-40B4-BE49-F238E27FC236}">
                 <a16:creationId xmlns:a16="http://schemas.microsoft.com/office/drawing/2014/main" id="{C919B2CD-0AA2-4A37-BE09-81EF7C93CC6A}"/>
@@ -20245,7 +20592,7 @@
       </p:sp>
       <p:sp>
         <p:nvSpPr>
-          <p:cNvPr id="18" name="">
+          <p:cNvPr id="18" name="Rectangle 17">
             <a:extLst xmlns:a="http://schemas.openxmlformats.org/drawingml/2006/main">
               <a:ext uri="{FF2B5EF4-FFF2-40B4-BE49-F238E27FC236}">
                 <a16:creationId xmlns:a16="http://schemas.microsoft.com/office/drawing/2014/main" id="{17EE78DB-D91B-4A8B-9D2B-E8CD57AF2B3A}"/>
@@ -20277,6 +20624,7 @@
           <a:lstStyle xmlns:a="http://schemas.openxmlformats.org/drawingml/2006/main"/>
           <a:p xmlns:a="http://schemas.openxmlformats.org/drawingml/2006/main">
             <a:pPr>
+              <a:buNone/>
               <a:defRPr sz="900" b="1">
                 <a:solidFill>
                   <a:srgbClr val="FFFFFF"/>
@@ -20302,7 +20650,7 @@
       </p:sp>
       <p:sp>
         <p:nvSpPr>
-          <p:cNvPr id="19" name="">
+          <p:cNvPr id="19" name="Rectangle 18">
             <a:extLst xmlns:a="http://schemas.openxmlformats.org/drawingml/2006/main">
               <a:ext uri="{FF2B5EF4-FFF2-40B4-BE49-F238E27FC236}">
                 <a16:creationId xmlns:a16="http://schemas.microsoft.com/office/drawing/2014/main" id="{4920E914-30A7-49C3-BA46-E4413549515D}"/>
@@ -20334,6 +20682,7 @@
           <a:lstStyle xmlns:a="http://schemas.openxmlformats.org/drawingml/2006/main"/>
           <a:p xmlns:a="http://schemas.openxmlformats.org/drawingml/2006/main">
             <a:pPr>
+              <a:buNone/>
               <a:defRPr sz="1350" b="0">
                 <a:solidFill>
                   <a:srgbClr val="1D2B27"/>
@@ -20359,7 +20708,7 @@
       </p:sp>
       <p:sp>
         <p:nvSpPr>
-          <p:cNvPr id="20" name="">
+          <p:cNvPr id="20" name="Rectangle: Rounded Corners 19">
             <a:extLst xmlns:a="http://schemas.openxmlformats.org/drawingml/2006/main">
               <a:ext uri="{FF2B5EF4-FFF2-40B4-BE49-F238E27FC236}">
                 <a16:creationId xmlns:a16="http://schemas.microsoft.com/office/drawing/2014/main" id="{0CF410F0-A2C8-478B-AB69-1A5996B307B0}"/>
@@ -20391,7 +20740,7 @@
       </p:sp>
       <p:sp>
         <p:nvSpPr>
-          <p:cNvPr id="21" name="">
+          <p:cNvPr id="21" name="Rectangle 20">
             <a:extLst xmlns:a="http://schemas.openxmlformats.org/drawingml/2006/main">
               <a:ext uri="{FF2B5EF4-FFF2-40B4-BE49-F238E27FC236}">
                 <a16:creationId xmlns:a16="http://schemas.microsoft.com/office/drawing/2014/main" id="{5DD25E0B-DF81-4A28-9106-8BB3B99B10D0}"/>
@@ -20423,6 +20772,7 @@
           <a:lstStyle xmlns:a="http://schemas.openxmlformats.org/drawingml/2006/main"/>
           <a:p xmlns:a="http://schemas.openxmlformats.org/drawingml/2006/main">
             <a:pPr>
+              <a:buNone/>
               <a:defRPr sz="1800" b="1">
                 <a:solidFill>
                   <a:srgbClr val="173B31"/>
@@ -20448,7 +20798,7 @@
       </p:sp>
       <p:sp>
         <p:nvSpPr>
-          <p:cNvPr id="22" name="">
+          <p:cNvPr id="22" name="Oval 21">
             <a:extLst xmlns:a="http://schemas.openxmlformats.org/drawingml/2006/main">
               <a:ext uri="{FF2B5EF4-FFF2-40B4-BE49-F238E27FC236}">
                 <a16:creationId xmlns:a16="http://schemas.microsoft.com/office/drawing/2014/main" id="{A886B618-E918-4E7C-8395-2FD38D53EE02}"/>
@@ -20478,7 +20828,7 @@
       </p:sp>
       <p:sp>
         <p:nvSpPr>
-          <p:cNvPr id="23" name="">
+          <p:cNvPr id="23" name="Rectangle 22">
             <a:extLst xmlns:a="http://schemas.openxmlformats.org/drawingml/2006/main">
               <a:ext uri="{FF2B5EF4-FFF2-40B4-BE49-F238E27FC236}">
                 <a16:creationId xmlns:a16="http://schemas.microsoft.com/office/drawing/2014/main" id="{3A619CBC-52E3-4050-8F3A-6677812E9A45}"/>
@@ -20510,6 +20860,7 @@
           <a:lstStyle xmlns:a="http://schemas.openxmlformats.org/drawingml/2006/main"/>
           <a:p xmlns:a="http://schemas.openxmlformats.org/drawingml/2006/main">
             <a:pPr>
+              <a:buNone/>
               <a:defRPr sz="1050" b="1">
                 <a:solidFill>
                   <a:srgbClr val="FFFFFF"/>
@@ -20535,7 +20886,7 @@
       </p:sp>
       <p:sp>
         <p:nvSpPr>
-          <p:cNvPr id="24" name="">
+          <p:cNvPr id="24" name="Rectangle 23">
             <a:extLst xmlns:a="http://schemas.openxmlformats.org/drawingml/2006/main">
               <a:ext uri="{FF2B5EF4-FFF2-40B4-BE49-F238E27FC236}">
                 <a16:creationId xmlns:a16="http://schemas.microsoft.com/office/drawing/2014/main" id="{26EAA8E0-1300-43FC-A843-BEB0C848F46F}"/>
@@ -20567,6 +20918,7 @@
           <a:lstStyle xmlns:a="http://schemas.openxmlformats.org/drawingml/2006/main"/>
           <a:p xmlns:a="http://schemas.openxmlformats.org/drawingml/2006/main">
             <a:pPr>
+              <a:buNone/>
               <a:defRPr sz="1350" b="0">
                 <a:solidFill>
                   <a:srgbClr val="1D2B27"/>
@@ -20592,7 +20944,7 @@
       </p:sp>
       <p:sp>
         <p:nvSpPr>
-          <p:cNvPr id="25" name="">
+          <p:cNvPr id="25" name="Oval 24">
             <a:extLst xmlns:a="http://schemas.openxmlformats.org/drawingml/2006/main">
               <a:ext uri="{FF2B5EF4-FFF2-40B4-BE49-F238E27FC236}">
                 <a16:creationId xmlns:a16="http://schemas.microsoft.com/office/drawing/2014/main" id="{9805AE36-4B1B-4044-8964-B4A65B30A346}"/>
@@ -20622,7 +20974,7 @@
       </p:sp>
       <p:sp>
         <p:nvSpPr>
-          <p:cNvPr id="26" name="">
+          <p:cNvPr id="26" name="Rectangle 25">
             <a:extLst xmlns:a="http://schemas.openxmlformats.org/drawingml/2006/main">
               <a:ext uri="{FF2B5EF4-FFF2-40B4-BE49-F238E27FC236}">
                 <a16:creationId xmlns:a16="http://schemas.microsoft.com/office/drawing/2014/main" id="{6BD8D512-A6DD-4C04-B46B-E99C9EEB61D0}"/>
@@ -20654,6 +21006,7 @@
           <a:lstStyle xmlns:a="http://schemas.openxmlformats.org/drawingml/2006/main"/>
           <a:p xmlns:a="http://schemas.openxmlformats.org/drawingml/2006/main">
             <a:pPr>
+              <a:buNone/>
               <a:defRPr sz="1050" b="1">
                 <a:solidFill>
                   <a:srgbClr val="FFFFFF"/>
@@ -20679,7 +21032,7 @@
       </p:sp>
       <p:sp>
         <p:nvSpPr>
-          <p:cNvPr id="27" name="">
+          <p:cNvPr id="27" name="Rectangle 26">
             <a:extLst xmlns:a="http://schemas.openxmlformats.org/drawingml/2006/main">
               <a:ext uri="{FF2B5EF4-FFF2-40B4-BE49-F238E27FC236}">
                 <a16:creationId xmlns:a16="http://schemas.microsoft.com/office/drawing/2014/main" id="{72A3345A-1435-4B7D-B01C-F5BF213A22A8}"/>
@@ -20711,6 +21064,7 @@
           <a:lstStyle xmlns:a="http://schemas.openxmlformats.org/drawingml/2006/main"/>
           <a:p xmlns:a="http://schemas.openxmlformats.org/drawingml/2006/main">
             <a:pPr>
+              <a:buNone/>
               <a:defRPr sz="1350" b="0">
                 <a:solidFill>
                   <a:srgbClr val="1D2B27"/>
@@ -20736,7 +21090,7 @@
       </p:sp>
       <p:sp>
         <p:nvSpPr>
-          <p:cNvPr id="28" name="">
+          <p:cNvPr id="28" name="Oval 27">
             <a:extLst xmlns:a="http://schemas.openxmlformats.org/drawingml/2006/main">
               <a:ext uri="{FF2B5EF4-FFF2-40B4-BE49-F238E27FC236}">
                 <a16:creationId xmlns:a16="http://schemas.microsoft.com/office/drawing/2014/main" id="{8315ACC8-BBE8-4160-909B-D649CA06166F}"/>
@@ -20766,7 +21120,7 @@
       </p:sp>
       <p:sp>
         <p:nvSpPr>
-          <p:cNvPr id="29" name="">
+          <p:cNvPr id="29" name="Rectangle 28">
             <a:extLst xmlns:a="http://schemas.openxmlformats.org/drawingml/2006/main">
               <a:ext uri="{FF2B5EF4-FFF2-40B4-BE49-F238E27FC236}">
                 <a16:creationId xmlns:a16="http://schemas.microsoft.com/office/drawing/2014/main" id="{0BDA9EBE-8BCA-4433-931B-52D6D3CB1F60}"/>
@@ -20798,6 +21152,7 @@
           <a:lstStyle xmlns:a="http://schemas.openxmlformats.org/drawingml/2006/main"/>
           <a:p xmlns:a="http://schemas.openxmlformats.org/drawingml/2006/main">
             <a:pPr>
+              <a:buNone/>
               <a:defRPr sz="1050" b="1">
                 <a:solidFill>
                   <a:srgbClr val="FFFFFF"/>
@@ -20823,7 +21178,7 @@
       </p:sp>
       <p:sp>
         <p:nvSpPr>
-          <p:cNvPr id="30" name="">
+          <p:cNvPr id="30" name="Rectangle 29">
             <a:extLst xmlns:a="http://schemas.openxmlformats.org/drawingml/2006/main">
               <a:ext uri="{FF2B5EF4-FFF2-40B4-BE49-F238E27FC236}">
                 <a16:creationId xmlns:a16="http://schemas.microsoft.com/office/drawing/2014/main" id="{504350DA-946C-42D1-A628-E66EC7BAC713}"/>
@@ -20855,6 +21210,7 @@
           <a:lstStyle xmlns:a="http://schemas.openxmlformats.org/drawingml/2006/main"/>
           <a:p xmlns:a="http://schemas.openxmlformats.org/drawingml/2006/main">
             <a:pPr>
+              <a:buNone/>
               <a:defRPr sz="1350" b="0">
                 <a:solidFill>
                   <a:srgbClr val="1D2B27"/>
@@ -20880,7 +21236,7 @@
       </p:sp>
       <p:sp>
         <p:nvSpPr>
-          <p:cNvPr id="31" name="">
+          <p:cNvPr id="31" name="Oval 30">
             <a:extLst xmlns:a="http://schemas.openxmlformats.org/drawingml/2006/main">
               <a:ext uri="{FF2B5EF4-FFF2-40B4-BE49-F238E27FC236}">
                 <a16:creationId xmlns:a16="http://schemas.microsoft.com/office/drawing/2014/main" id="{EA8940F1-8828-4A98-845A-FD08163E71BD}"/>
@@ -20910,7 +21266,7 @@
       </p:sp>
       <p:sp>
         <p:nvSpPr>
-          <p:cNvPr id="32" name="">
+          <p:cNvPr id="32" name="Rectangle 31">
             <a:extLst xmlns:a="http://schemas.openxmlformats.org/drawingml/2006/main">
               <a:ext uri="{FF2B5EF4-FFF2-40B4-BE49-F238E27FC236}">
                 <a16:creationId xmlns:a16="http://schemas.microsoft.com/office/drawing/2014/main" id="{7063F39E-9C2A-4EFC-8EC4-9C8FC1A35FD7}"/>
@@ -20942,6 +21298,7 @@
           <a:lstStyle xmlns:a="http://schemas.openxmlformats.org/drawingml/2006/main"/>
           <a:p xmlns:a="http://schemas.openxmlformats.org/drawingml/2006/main">
             <a:pPr>
+              <a:buNone/>
               <a:defRPr sz="1050" b="1">
                 <a:solidFill>
                   <a:srgbClr val="FFFFFF"/>
@@ -20967,7 +21324,7 @@
       </p:sp>
       <p:sp>
         <p:nvSpPr>
-          <p:cNvPr id="33" name="">
+          <p:cNvPr id="33" name="Rectangle 32">
             <a:extLst xmlns:a="http://schemas.openxmlformats.org/drawingml/2006/main">
               <a:ext uri="{FF2B5EF4-FFF2-40B4-BE49-F238E27FC236}">
                 <a16:creationId xmlns:a16="http://schemas.microsoft.com/office/drawing/2014/main" id="{1A0D8F0F-E36B-481B-86D5-BB5140A15288}"/>
@@ -20999,6 +21356,7 @@
           <a:lstStyle xmlns:a="http://schemas.openxmlformats.org/drawingml/2006/main"/>
           <a:p xmlns:a="http://schemas.openxmlformats.org/drawingml/2006/main">
             <a:pPr>
+              <a:buNone/>
               <a:defRPr sz="1350" b="0">
                 <a:solidFill>
                   <a:srgbClr val="1D2B27"/>
@@ -21024,7 +21382,7 @@
       </p:sp>
       <p:sp>
         <p:nvSpPr>
-          <p:cNvPr id="34" name="">
+          <p:cNvPr id="34" name="Rectangle 33">
             <a:extLst xmlns:a="http://schemas.openxmlformats.org/drawingml/2006/main">
               <a:ext uri="{FF2B5EF4-FFF2-40B4-BE49-F238E27FC236}">
                 <a16:creationId xmlns:a16="http://schemas.microsoft.com/office/drawing/2014/main" id="{DE6E130A-5DFE-4516-A27C-94800556ED57}"/>
@@ -21056,6 +21414,7 @@
           <a:lstStyle xmlns:a="http://schemas.openxmlformats.org/drawingml/2006/main"/>
           <a:p xmlns:a="http://schemas.openxmlformats.org/drawingml/2006/main">
             <a:pPr>
+              <a:buNone/>
               <a:defRPr sz="1575" b="1">
                 <a:solidFill>
                   <a:srgbClr val="173B31"/>
